--- a/en/slides/24-Computer_Architecture-Superscalar_HPC_GPU_FPGA.pptx
+++ b/en/slides/24-Computer_Architecture-Superscalar_HPC_GPU_FPGA.pptx
@@ -126,47 +126,47 @@
   <p:extLst>
     <p:ext uri="{521415D9-36F7-43E2-AB2F-B90AF26B5E84}">
       <p14:sectionLst xmlns:p14="http://schemas.microsoft.com/office/powerpoint/2010/main">
-        <p14:section name="Opening" id="{793d3985-6526-f426-a793-07e53d82e271}">
+        <p14:section name="Opening" id="{1712e581-04fb-ea4c-a9f0-7b11fe67a0ee}">
           <p14:sldIdLst>
             <p14:sldId id="256"/>
             <p14:sldId id="257"/>
           </p14:sldIdLst>
         </p14:section>
-        <p14:section name="Warm-up on the machine" id="{c90de077-cba7-ba9b-e6b5-785acb08ec63}">
+        <p14:section name="Warm-up on the machine" id="{5c062e6a-87f7-208a-240f-d12f7f1b3754}">
           <p14:sldIdLst>
             <p14:sldId id="258"/>
             <p14:sldId id="259"/>
           </p14:sldIdLst>
         </p14:section>
-        <p14:section name="Superscalar processors" id="{16d93a86-9e95-e38f-342c-7e7d9fe41879}">
+        <p14:section name="Superscalar processors" id="{599ac376-3845-49d7-fa37-8659b22b8c80}">
           <p14:sldIdLst>
             <p14:sldId id="260"/>
             <p14:sldId id="261"/>
             <p14:sldId id="262"/>
             <p14:sldId id="263"/>
+            <p14:sldId id="264"/>
           </p14:sldIdLst>
         </p14:section>
-        <p14:section name="High-performance computing" id="{0997dde3-ba84-3e33-3831-d3ab6dcea7e5}">
+        <p14:section name="High-performance computing" id="{ad18e737-1754-82f8-ae4b-b24fa1bdf7a3}">
           <p14:sldIdLst>
-            <p14:sldId id="264"/>
             <p14:sldId id="265"/>
             <p14:sldId id="266"/>
             <p14:sldId id="267"/>
-          </p14:sldIdLst>
-        </p14:section>
-        <p14:section name="GPU accelerators" id="{539e3672-7183-e5b2-3472-cad75e8c9e79}">
-          <p14:sldIdLst>
             <p14:sldId id="268"/>
           </p14:sldIdLst>
         </p14:section>
-        <p14:section name="FPGA accelerators" id="{c6fe1e54-ffb5-2a42-18e0-d3c32632c9b6}">
+        <p14:section name="GPU accelerators" id="{8460b113-561d-eec8-ab4b-8d9a4fbe4ac0}">
           <p14:sldIdLst>
             <p14:sldId id="269"/>
+          </p14:sldIdLst>
+        </p14:section>
+        <p14:section name="FPGA accelerators" id="{d0a7cb64-cda5-1203-0e7c-17cb6d2ec55c}">
+          <p14:sldIdLst>
             <p14:sldId id="270"/>
             <p14:sldId id="271"/>
           </p14:sldIdLst>
         </p14:section>
-        <p14:section name="Back to the machine" id="{0f2033aa-2749-2b16-6357-b2f25c5156ab}">
+        <p14:section name="Back to the machine" id="{4177d8d2-8b09-109e-87ea-be5781deb2da}">
           <p14:sldIdLst>
             <p14:sldId id="272"/>
             <p14:sldId id="273"/>
@@ -667,8 +667,8 @@
           <a:p>
             <a:r>
               <a:rPr lang="en-US" dirty="0"/>
-              <a:t>Amdahl's law says how much parallelism can give. If a fraction p of the work can be done in parallel and the rest cannot, with n processors the speed-up is 1 divided by the serial part plus the parallel part divided by n. The serial part does not shrink however many processors are added. With p equal to 0.9 the speed-up can never exceed 10. The practical lesson: before buying processors, measure p.
-For the lecturer: Gene Amdahl, 1967. The same law holds for any improvement that applies to only a part of the work: a faster GPU does not help the part that runs on the CPU.</a:t>
+              <a:t>A supercomputer is not one enormous processor: it is thousands of ordinary computers, the nodes, working on the same problem. Each node has one or two processors with tens of cores, often several GPUs, and much memory. A very fast network joins the nodes, and a parallel file system serves them all. Speed is measured in floating-point operations per second on a standard problem, and the TOP500 list has ranked the fastest machines since 1993. The picture shows racks of nodes of the Research Computing Facilities of the University.
+For the lecturer: The benchmark is HPL, High-Performance Linpack.</a:t>
             </a:r>
             <a:endParaRPr lang="en-US" dirty="0"/>
           </a:p>
@@ -756,8 +756,8 @@
           <a:p>
             <a:r>
               <a:rPr lang="en-US" dirty="0"/>
-              <a:t>Two ways to share the work. With shared memory, several cores of the same node see the same memory, and the program runs as threads that read and write the same variables; it is easy to start, and the danger is two threads writing the same variable. With distributed memory each node has its own memory, and the program runs as processes that exchange messages, with the MPI standard; it scales to a million cores, at the programmer's expense. Real applications use both.
-For the lecturer: Real applications use both: MPI between the nodes, threads and GPUs inside each node. The weather and marine models of the Department work this way.</a:t>
+              <a:t>Amdahl's law says how much parallelism can give. If a fraction p of the work can be done in parallel and the rest cannot, with n processors the speed-up is 1 divided by the serial part plus the parallel part divided by n. The serial part does not shrink however many processors are added. With p equal to 0.9 the speed-up can never exceed 10. The practical lesson: before buying processors, measure p.
+For the lecturer: Gene Amdahl, 1967. The same law holds for any improvement that applies to only a part of the work: a faster GPU does not help the part that runs on the CPU.</a:t>
             </a:r>
             <a:endParaRPr lang="en-US" dirty="0"/>
           </a:p>
@@ -845,8 +845,8 @@
           <a:p>
             <a:r>
               <a:rPr lang="en-US" dirty="0"/>
-              <a:t>The limit is energy. An exascale machine draws about twenty megawatts, the consumption of a small town, and the electricity of its lifetime costs as much as the machine. So the figure that matters is operations per watt, which has its own ranking, the Green500. Specialised hardware leads it, because it does more with each joule. The same reason, at the other end of the scale, puts a small RISC-V core in your kit.
-For the lecturer: Frontier reached its exaflop at about 21 megawatts. Energy efficiency is the thread that ties a microcontroller to a supercomputer.</a:t>
+              <a:t>Two ways to share the work. With shared memory, several cores of the same node see the same memory, and the program runs as threads that read and write the same variables; it is easy to start, and the danger is two threads writing the same variable. With distributed memory each node has its own memory, and the program runs as processes that exchange messages, with the MPI standard; it scales to a million cores, at the programmer's expense. Real applications use both.
+For the lecturer: Real applications use both: MPI between the nodes, threads and GPUs inside each node. The weather and marine models of the Department work this way.</a:t>
             </a:r>
             <a:endParaRPr lang="en-US" dirty="0"/>
           </a:p>
@@ -934,8 +934,8 @@
           <a:p>
             <a:r>
               <a:rPr lang="en-US" dirty="0"/>
-              <a:t>Two ways of spending the same transistors. A CPU has a few large cores, each out of order, with predictors and big caches: it is built to finish one task as soon as possible, and is at ease with branches and irregular data. A GPU has thousands of small simple cores that execute the same code on different data: it is built to finish a great many tasks per second, and is at ease with regular arrays. Oxen and chickens: the answer depends on the field.
-For the lecturer: Lecture 20 told the story from the video card to GPGPU. Cray's oxen and chickens: the answer depends on the field. The GPU is not faster at any single thing; it does more things at once.</a:t>
+              <a:t>The limit is energy. An exascale machine draws about twenty megawatts, the consumption of a small town, and the electricity of its lifetime costs as much as the machine. So the figure that matters is operations per watt, which has its own ranking, the Green500. Specialised hardware leads it, because it does more with each joule. The same reason, at the other end of the scale, puts a small RISC-V core in your kit.
+For the lecturer: Frontier reached its exaflop at about 21 megawatts. Energy efficiency is the thread that ties a microcontroller to a supercomputer.</a:t>
             </a:r>
             <a:endParaRPr lang="en-US" dirty="0"/>
           </a:p>
@@ -1023,8 +1023,8 @@
           <a:p>
             <a:r>
               <a:rPr lang="en-US" dirty="0"/>
-              <a:t>An FPGA, field-programmable gate array, is a chip that becomes the circuit you describe. Inside there is a sea of small blocks: look-up tables, each able to be any function of a few inputs; a flip-flop beside each table; and wires with switches that can connect any block to any other. A configuration file, the bitstream, sets every table and every switch. Load another bitstream and the same chip is a different circuit. It does not execute a program: it is a circuit.
-For the lecturer: The Xilinx XC2064, 1985. An FPGA does not execute a program: it becomes a circuit. Nothing is fetched or decoded; all the gates work at the same time.</a:t>
+              <a:t>Two ways of spending the same transistors. A CPU has a few large cores, each out of order, with predictors and big caches: it is built to finish one task as soon as possible, and is at ease with branches and irregular data. A GPU has thousands of small simple cores that execute the same code on different data: it is built to finish a great many tasks per second, and is at ease with regular arrays. Oxen and chickens: the answer depends on the field.
+For the lecturer: Lecture 20 told the story from the video card to GPGPU. Cray's oxen and chickens: the answer depends on the field. The GPU is not faster at any single thing; it does more things at once.</a:t>
             </a:r>
             <a:endParaRPr lang="en-US" dirty="0"/>
           </a:p>
@@ -1112,8 +1112,9 @@
           <a:p>
             <a:r>
               <a:rPr lang="en-US" dirty="0"/>
-              <a:t>A look-up table is a truth table kept in memory. The inputs a and b are the address; the stored bits are the outputs. Read the three columns on the right: with the bits 0, 0, 0, 1 the table is an AND; with 0, 1, 1, 0 an XOR; with 1, 1, 0, 0 it is NOT a. Changing the stored bits changes the gate. It is the ROM that implements any function, from Lecture 11, in miniature.
-For the lecturer: Lecture 08 said that a truth table defines a function; Lecture 11 that a ROM addressed by the inputs implements any function. A LUT is that ROM, with four to six inputs, sixteen to sixty-four bits. The flip-flop next to it is that of Lecture 13. An FPGA is this course, repeated a hundred thousand times on one chip.</a:t>
+              <a:t>An FPGA, field-programmable gate array, is a chip that becomes the circuit you describe. Inside there is a sea of small blocks: look-up tables, each able to be any function of a few inputs; a flip-flop beside each table; and wires with switches that can connect any block to any other. A configuration file, the bitstream, sets every table and every switch. Load another bitstream and the same chip is a different circuit. It does not execute a program: it is a circuit.
+For the lecturer: The Xilinx XC2064, 1985. An FPGA does not execute a program: it becomes a circuit. Nothing is fetched or decoded; all the gates work at the same time.
+Pictures: Mojo v3 FPGA Development Board (9303578174).jpg, SparkFun Electronics, CC BY 2.0, Wikimedia Commons.</a:t>
             </a:r>
             <a:endParaRPr lang="en-US" dirty="0"/>
           </a:p>
@@ -1738,7 +1739,7 @@
             <a:r>
               <a:rPr lang="en-US" dirty="0"/>
               <a:t>The time a program takes is the product of three numbers: the instructions executed, the clock cycles each needs on average, and the duration of a cycle. Each factor can be attacked. Fewer instructions: better algorithms, richer instructions, vectors. Fewer cycles per instruction: pipelines and superscalar execution. A shorter cycle: faster transistors. And when one processor is not enough, more processors. Keep this equation in view: every machine of the lecture is a different answer to it.
-For the lecturer: The performance equation of Patterson and Hennessy. For the loop of the previous slide on the kit: 3 840 instructions, about 1 cycle each, 6.25 nanoseconds per cycle.</a:t>
+For the lecturer: The performance equation of Patterson and Hennessy. For the loop of the warm-up (code deck) on the kit: 3 840 instructions, about 1 cycle each, 6.25 nanoseconds per cycle.</a:t>
             </a:r>
             <a:endParaRPr lang="en-US" dirty="0"/>
           </a:p>
@@ -2182,8 +2183,8 @@
           <a:p>
             <a:r>
               <a:rPr lang="en-US" dirty="0"/>
-              <a:t>A distinction that organises the whole course. The architecture is the contract: the instructions, the registers, what each instruction does. The microarchitecture is one way of honouring the contract: stages, width, predictors, caches. The add you wrote for a microcontroller is the same add on a server core. Verm1 would run unchanged on any core of the previous slide. This is why an instruction set, once learned, is knowledge that lasts.
-For the lecturer: The distinction that organises the whole course: Lectures 02 to 22 taught the architecture; the kit is one small microarchitecture.</a:t>
+              <a:t>RISC-V processors of this kind exist. The first row is the core of your kit: in order, one instruction per cycle. The others are out-of-order cores: BOOM from Berkeley and XiangShan from the Chinese Academy of Sciences, both open source; the C910, the P550, Veyron, from companies. Because the instruction set is open, anyone may build such a core, and some are published as source code that you could read.
+For the lecturer: BOOM is the Berkeley Out-of-Order Machine. Because the instruction set is open, anyone may build such a core, and several are published as source code that a student can read: this has no precedent among commercial architectures. The list ages quickly: update it.</a:t>
             </a:r>
             <a:endParaRPr lang="en-US" dirty="0"/>
           </a:p>
@@ -2271,8 +2272,8 @@
           <a:p>
             <a:r>
               <a:rPr lang="en-US" dirty="0"/>
-              <a:t>A supercomputer is not one enormous processor: it is thousands of ordinary computers, the nodes, working on the same problem. Each node has one or two processors with tens of cores, often several GPUs, and much memory. A very fast network joins the nodes, and a parallel file system serves them all. Speed is measured in floating-point operations per second on a standard problem, and the TOP500 list has ranked the fastest machines since 1993. The picture is a small cluster with the same structure.
-For the lecturer: The benchmark is HPL, High-Performance Linpack. The picture is the teaching cluster shown in Lecture 03: the same structure, in small.</a:t>
+              <a:t>A distinction that organises the whole course. The architecture is the contract: the instructions, the registers, what each instruction does. The microarchitecture is one way of honouring the contract: stages, width, predictors, caches. The add you wrote for a microcontroller is the same add on a server core. Verm1 would run unchanged on any core of the previous slide. This is why an instruction set, once learned, is knowledge that lasts.
+For the lecturer: The distinction that organises the whole course: Lectures 02 to 22 taught the architecture; the kit is one small microarchitecture.</a:t>
             </a:r>
             <a:endParaRPr lang="en-US" dirty="0"/>
           </a:p>
@@ -3126,7 +3127,7 @@
                 <a:ea typeface="Cambria" pitchFamily="34" charset="-122"/>
                 <a:cs typeface="Cambria" pitchFamily="34" charset="-120"/>
               </a:rPr>
-              <a:t>Beyond One Core: Superscalar RISC-V, HPC, GPUs and FPGAs</a:t>
+              <a:t>Beyond One Core: Superscalar RISC‑V, HPC, GPUs and FPGAs</a:t>
             </a:r>
             <a:endParaRPr lang="en-US" sz="4800" dirty="0"/>
           </a:p>
@@ -3302,7 +3303,63 @@
       </p:sp>
       <p:sp>
         <p:nvSpPr>
-          <p:cNvPr id="12" name="Shape 10"/>
+          <p:cNvPr id="12" name="Text 10"/>
+          <p:cNvSpPr txBox="1"/>
+          <p:nvPr/>
+        </p:nvSpPr>
+        <p:spPr>
+          <a:xfrm>
+            <a:off x="4693615" y="566928"/>
+            <a:ext cx="6949440" cy="640080"/>
+          </a:xfrm>
+          <a:prstGeom prst="rect">
+            <a:avLst/>
+          </a:prstGeom>
+          <a:noFill/>
+          <a:ln/>
+        </p:spPr>
+        <p:txBody>
+          <a:bodyPr wrap="square" lIns="0" tIns="0" rIns="0" bIns="0" rtlCol="0" anchor="t"/>
+          <a:lstStyle/>
+          <a:p>
+            <a:pPr algn="r" indent="0" marL="0">
+              <a:buNone/>
+            </a:pPr>
+            <a:r>
+              <a:rPr lang="en-US" sz="1300" dirty="0">
+                <a:solidFill>
+                  <a:srgbClr val="CFE3EA"/>
+                </a:solidFill>
+                <a:latin typeface="Calibri" pitchFamily="34" charset="0"/>
+                <a:ea typeface="Calibri" pitchFamily="34" charset="-122"/>
+                <a:cs typeface="Calibri" pitchFamily="34" charset="-120"/>
+              </a:rPr>
+              <a:t>Lecture deck. The listings, the complete program and how to test it are in the code deck:</a:t>
+            </a:r>
+            <a:endParaRPr lang="en-US" sz="1300" dirty="0"/>
+          </a:p>
+          <a:p>
+            <a:pPr algn="r" indent="0" marL="0">
+              <a:buNone/>
+            </a:pPr>
+            <a:r>
+              <a:rPr lang="en-US" sz="1300" dirty="0">
+                <a:solidFill>
+                  <a:srgbClr val="CFE3EA"/>
+                </a:solidFill>
+                <a:latin typeface="Calibri" pitchFamily="34" charset="0"/>
+                <a:ea typeface="Calibri" pitchFamily="34" charset="-122"/>
+                <a:cs typeface="Calibri" pitchFamily="34" charset="-120"/>
+              </a:rPr>
+              <a:t>24-Computer_Architecture-Superscalar_HPC_GPU_FPGA-Code.pptx</a:t>
+            </a:r>
+            <a:endParaRPr lang="en-US" sz="1300" dirty="0"/>
+          </a:p>
+        </p:txBody>
+      </p:sp>
+      <p:sp>
+        <p:nvSpPr>
+          <p:cNvPr id="13" name="Shape 11"/>
           <p:cNvSpPr/>
           <p:nvPr/>
         </p:nvSpPr>
@@ -3329,7 +3386,7 @@
       </p:sp>
       <p:pic>
         <p:nvPicPr>
-          <p:cNvPr id="13" name="Image 0" descr="/Users/raffaelemontella/devel/riscv-prg32/computer-architecture-with-prg32/tools/assets/cluster_1.jpg">    </p:cNvPr>
+          <p:cNvPr id="14" name="Image 0" descr="/Users/raffaelemontella/devel/riscv-prg32/computer-architecture-with-prg32/tools/assets/rcf_cluster.jpg">    </p:cNvPr>
           <p:cNvPicPr>
             <a:picLocks noChangeAspect="1"/>
           </p:cNvPicPr>
@@ -3343,8 +3400,8 @@
         </p:blipFill>
         <p:spPr>
           <a:xfrm>
-            <a:off x="8915095" y="4251960"/>
-            <a:ext cx="2438400" cy="1828800"/>
+            <a:off x="8716975" y="4686243"/>
+            <a:ext cx="2834640" cy="960234"/>
           </a:xfrm>
           <a:prstGeom prst="rect">
             <a:avLst/>
@@ -3459,7 +3516,7 @@
                 <a:ea typeface="Cambria" pitchFamily="34" charset="-122"/>
                 <a:cs typeface="Cambria" pitchFamily="34" charset="-120"/>
               </a:rPr>
-              <a:t>Amdahl's law</a:t>
+              <a:t>What is a supercomputer?</a:t>
             </a:r>
             <a:endParaRPr lang="en-US" sz="3200" dirty="0"/>
           </a:p>
@@ -3473,112 +3530,7 @@
         </p:nvSpPr>
         <p:spPr>
           <a:xfrm>
-            <a:off x="548640" y="1417320"/>
-            <a:ext cx="11094415" cy="1596136"/>
-          </a:xfrm>
-          <a:prstGeom prst="roundRect">
-            <a:avLst>
-              <a:gd name="adj" fmla="val 4583"/>
-            </a:avLst>
-          </a:prstGeom>
-          <a:solidFill>
-            <a:srgbClr val="F6E7D2"/>
-          </a:solidFill>
-          <a:ln w="12700">
-            <a:solidFill>
-              <a:srgbClr val="F6E7D2"/>
-            </a:solidFill>
-            <a:prstDash val="solid"/>
-          </a:ln>
-        </p:spPr>
-      </p:sp>
-      <p:sp>
-        <p:nvSpPr>
-          <p:cNvPr id="4" name="Text 2"/>
-          <p:cNvSpPr txBox="1"/>
-          <p:nvPr/>
-        </p:nvSpPr>
-        <p:spPr>
-          <a:xfrm>
-            <a:off x="914400" y="1600200"/>
-            <a:ext cx="10362895" cy="411480"/>
-          </a:xfrm>
-          <a:prstGeom prst="rect">
-            <a:avLst/>
-          </a:prstGeom>
-          <a:noFill/>
-          <a:ln/>
-        </p:spPr>
-        <p:txBody>
-          <a:bodyPr wrap="square" lIns="0" tIns="0" rIns="0" bIns="0" rtlCol="0" anchor="ctr"/>
-          <a:lstStyle/>
-          <a:p>
-            <a:pPr indent="0" marL="0">
-              <a:buNone/>
-            </a:pPr>
-            <a:r>
-              <a:rPr lang="en-US" sz="1600" b="1" dirty="0">
-                <a:solidFill>
-                  <a:srgbClr val="C7791B"/>
-                </a:solidFill>
-                <a:latin typeface="Calibri" pitchFamily="34" charset="0"/>
-                <a:ea typeface="Calibri" pitchFamily="34" charset="-122"/>
-                <a:cs typeface="Calibri" pitchFamily="34" charset="-120"/>
-              </a:rPr>
-              <a:t>Speed-up with n processors</a:t>
-            </a:r>
-            <a:endParaRPr lang="en-US" sz="1600" dirty="0"/>
-          </a:p>
-        </p:txBody>
-      </p:sp>
-      <p:sp>
-        <p:nvSpPr>
-          <p:cNvPr id="5" name="Text 3"/>
-          <p:cNvSpPr txBox="1"/>
-          <p:nvPr/>
-        </p:nvSpPr>
-        <p:spPr>
-          <a:xfrm>
-            <a:off x="914400" y="2057400"/>
-            <a:ext cx="10362895" cy="773176"/>
-          </a:xfrm>
-          <a:prstGeom prst="rect">
-            <a:avLst/>
-          </a:prstGeom>
-          <a:noFill/>
-          <a:ln/>
-        </p:spPr>
-        <p:txBody>
-          <a:bodyPr wrap="square" lIns="0" tIns="0" rIns="0" bIns="0" rtlCol="0" anchor="ctr"/>
-          <a:lstStyle/>
-          <a:p>
-            <a:pPr indent="0" marL="0">
-              <a:buNone/>
-            </a:pPr>
-            <a:r>
-              <a:rPr lang="en-US" sz="2400" i="1" dirty="0">
-                <a:solidFill>
-                  <a:srgbClr val="1B2530"/>
-                </a:solidFill>
-                <a:latin typeface="Cambria" pitchFamily="34" charset="0"/>
-                <a:ea typeface="Cambria" pitchFamily="34" charset="-122"/>
-                <a:cs typeface="Cambria" pitchFamily="34" charset="-120"/>
-              </a:rPr>
-              <a:t>S = 1 / ((1 - p) + p / n), where p is the fraction of the work that can be done in parallel.</a:t>
-            </a:r>
-            <a:endParaRPr lang="en-US" sz="2400" dirty="0"/>
-          </a:p>
-        </p:txBody>
-      </p:sp>
-      <p:sp>
-        <p:nvSpPr>
-          <p:cNvPr id="6" name="Shape 4"/>
-          <p:cNvSpPr/>
-          <p:nvPr/>
-        </p:nvSpPr>
-        <p:spPr>
-          <a:xfrm>
-            <a:off x="548640" y="3487928"/>
+            <a:off x="548640" y="1515999"/>
             <a:ext cx="146304" cy="146304"/>
           </a:xfrm>
           <a:prstGeom prst="rect">
@@ -3597,14 +3549,14 @@
       </p:sp>
       <p:sp>
         <p:nvSpPr>
-          <p:cNvPr id="7" name="Text 5"/>
+          <p:cNvPr id="4" name="Text 2"/>
           <p:cNvSpPr txBox="1"/>
           <p:nvPr/>
         </p:nvSpPr>
         <p:spPr>
           <a:xfrm>
-            <a:off x="932688" y="3366008"/>
-            <a:ext cx="10710367" cy="743712"/>
+            <a:off x="932688" y="1417320"/>
+            <a:ext cx="6565392" cy="650748"/>
           </a:xfrm>
           <a:prstGeom prst="rect">
             <a:avLst/>
@@ -3623,7 +3575,7 @@
               <a:buNone/>
             </a:pPr>
             <a:r>
-              <a:rPr lang="en-US" sz="2400" dirty="0">
+              <a:rPr lang="en-US" sz="2100" dirty="0">
                 <a:solidFill>
                   <a:srgbClr val="1B2530"/>
                 </a:solidFill>
@@ -3631,21 +3583,21 @@
                 <a:ea typeface="Calibri" pitchFamily="34" charset="-122"/>
                 <a:cs typeface="Calibri" pitchFamily="34" charset="-120"/>
               </a:rPr>
-              <a:t>The serial fraction, 1 - p, does not shrink however many processors you add</a:t>
+              <a:t>Not one enormous processor: thousands of ordinary computers, the nodes, working on the same problem</a:t>
             </a:r>
-            <a:endParaRPr lang="en-US" sz="2400" dirty="0"/>
-          </a:p>
-        </p:txBody>
-      </p:sp>
-      <p:sp>
-        <p:nvSpPr>
-          <p:cNvPr id="8" name="Shape 6"/>
+            <a:endParaRPr lang="en-US" sz="2100" dirty="0"/>
+          </a:p>
+        </p:txBody>
+      </p:sp>
+      <p:sp>
+        <p:nvSpPr>
+          <p:cNvPr id="5" name="Shape 3"/>
           <p:cNvSpPr/>
           <p:nvPr/>
         </p:nvSpPr>
         <p:spPr>
           <a:xfrm>
-            <a:off x="548640" y="4688840"/>
+            <a:off x="548640" y="2305431"/>
             <a:ext cx="146304" cy="146304"/>
           </a:xfrm>
           <a:prstGeom prst="rect">
@@ -3664,14 +3616,14 @@
       </p:sp>
       <p:sp>
         <p:nvSpPr>
-          <p:cNvPr id="9" name="Text 7"/>
+          <p:cNvPr id="6" name="Text 4"/>
           <p:cNvSpPr txBox="1"/>
           <p:nvPr/>
         </p:nvSpPr>
         <p:spPr>
           <a:xfrm>
-            <a:off x="932688" y="4566920"/>
-            <a:ext cx="10710367" cy="743712"/>
+            <a:off x="932688" y="2206752"/>
+            <a:ext cx="6565392" cy="1271778"/>
           </a:xfrm>
           <a:prstGeom prst="rect">
             <a:avLst/>
@@ -3690,7 +3642,7 @@
               <a:buNone/>
             </a:pPr>
             <a:r>
-              <a:rPr lang="en-US" sz="2400" dirty="0">
+              <a:rPr lang="en-US" sz="2100" dirty="0">
                 <a:solidFill>
                   <a:srgbClr val="1B2530"/>
                 </a:solidFill>
@@ -3698,21 +3650,81 @@
                 <a:ea typeface="Calibri" pitchFamily="34" charset="-122"/>
                 <a:cs typeface="Calibri" pitchFamily="34" charset="-120"/>
               </a:rPr>
-              <a:t>With p = 0.9 the speed-up can never exceed 10, even with a million processors</a:t>
+              <a:t>Each node has</a:t>
             </a:r>
-            <a:endParaRPr lang="en-US" sz="2400" dirty="0"/>
-          </a:p>
-        </p:txBody>
-      </p:sp>
-      <p:sp>
-        <p:nvSpPr>
-          <p:cNvPr id="10" name="Shape 8"/>
+            <a:endParaRPr lang="en-US" sz="2100" dirty="0"/>
+          </a:p>
+          <a:p>
+            <a:pPr indent="0" marL="0">
+              <a:spcAft>
+                <a:spcPts val="200"/>
+              </a:spcAft>
+              <a:buNone/>
+            </a:pPr>
+            <a:r>
+              <a:rPr lang="en-US" sz="1800" dirty="0">
+                <a:solidFill>
+                  <a:srgbClr val="5B6B78"/>
+                </a:solidFill>
+                <a:latin typeface="Calibri" pitchFamily="34" charset="0"/>
+                <a:ea typeface="Calibri" pitchFamily="34" charset="-122"/>
+                <a:cs typeface="Calibri" pitchFamily="34" charset="-120"/>
+              </a:rPr>
+              <a:t>– one or two processors with tens of cores</a:t>
+            </a:r>
+            <a:endParaRPr lang="en-US" sz="2100" dirty="0"/>
+          </a:p>
+          <a:p>
+            <a:pPr indent="0" marL="0">
+              <a:spcAft>
+                <a:spcPts val="200"/>
+              </a:spcAft>
+              <a:buNone/>
+            </a:pPr>
+            <a:r>
+              <a:rPr lang="en-US" sz="1800" dirty="0">
+                <a:solidFill>
+                  <a:srgbClr val="5B6B78"/>
+                </a:solidFill>
+                <a:latin typeface="Calibri" pitchFamily="34" charset="0"/>
+                <a:ea typeface="Calibri" pitchFamily="34" charset="-122"/>
+                <a:cs typeface="Calibri" pitchFamily="34" charset="-120"/>
+              </a:rPr>
+              <a:t>– often several GPUs</a:t>
+            </a:r>
+            <a:endParaRPr lang="en-US" sz="2100" dirty="0"/>
+          </a:p>
+          <a:p>
+            <a:pPr indent="0" marL="0">
+              <a:spcAft>
+                <a:spcPts val="200"/>
+              </a:spcAft>
+              <a:buNone/>
+            </a:pPr>
+            <a:r>
+              <a:rPr lang="en-US" sz="1800" dirty="0">
+                <a:solidFill>
+                  <a:srgbClr val="5B6B78"/>
+                </a:solidFill>
+                <a:latin typeface="Calibri" pitchFamily="34" charset="0"/>
+                <a:ea typeface="Calibri" pitchFamily="34" charset="-122"/>
+                <a:cs typeface="Calibri" pitchFamily="34" charset="-120"/>
+              </a:rPr>
+              <a:t>– a great deal of memory</a:t>
+            </a:r>
+            <a:endParaRPr lang="en-US" sz="2100" dirty="0"/>
+          </a:p>
+        </p:txBody>
+      </p:sp>
+      <p:sp>
+        <p:nvSpPr>
+          <p:cNvPr id="7" name="Shape 5"/>
           <p:cNvSpPr/>
           <p:nvPr/>
         </p:nvSpPr>
         <p:spPr>
           <a:xfrm>
-            <a:off x="548640" y="5889752"/>
+            <a:off x="548640" y="3715893"/>
             <a:ext cx="146304" cy="146304"/>
           </a:xfrm>
           <a:prstGeom prst="rect">
@@ -3731,14 +3743,14 @@
       </p:sp>
       <p:sp>
         <p:nvSpPr>
-          <p:cNvPr id="11" name="Text 9"/>
+          <p:cNvPr id="8" name="Text 6"/>
           <p:cNvSpPr txBox="1"/>
           <p:nvPr/>
         </p:nvSpPr>
         <p:spPr>
           <a:xfrm>
-            <a:off x="932688" y="5767832"/>
-            <a:ext cx="10710367" cy="371856"/>
+            <a:off x="932688" y="3617214"/>
+            <a:ext cx="6565392" cy="650748"/>
           </a:xfrm>
           <a:prstGeom prst="rect">
             <a:avLst/>
@@ -3757,7 +3769,7 @@
               <a:buNone/>
             </a:pPr>
             <a:r>
-              <a:rPr lang="en-US" sz="2400" dirty="0">
+              <a:rPr lang="en-US" sz="2100" dirty="0">
                 <a:solidFill>
                   <a:srgbClr val="1B2530"/>
                 </a:solidFill>
@@ -3765,9 +3777,206 @@
                 <a:ea typeface="Calibri" pitchFamily="34" charset="-122"/>
                 <a:cs typeface="Calibri" pitchFamily="34" charset="-120"/>
               </a:rPr>
-              <a:t>Before buying processors, measure p</a:t>
+              <a:t>A very fast network joins the nodes, and a parallel file system serves them all</a:t>
             </a:r>
-            <a:endParaRPr lang="en-US" sz="2400" dirty="0"/>
+            <a:endParaRPr lang="en-US" sz="2100" dirty="0"/>
+          </a:p>
+        </p:txBody>
+      </p:sp>
+      <p:sp>
+        <p:nvSpPr>
+          <p:cNvPr id="9" name="Shape 7"/>
+          <p:cNvSpPr/>
+          <p:nvPr/>
+        </p:nvSpPr>
+        <p:spPr>
+          <a:xfrm>
+            <a:off x="548640" y="4505325"/>
+            <a:ext cx="146304" cy="146304"/>
+          </a:xfrm>
+          <a:prstGeom prst="rect">
+            <a:avLst/>
+          </a:prstGeom>
+          <a:solidFill>
+            <a:srgbClr val="C7791B"/>
+          </a:solidFill>
+          <a:ln w="12700">
+            <a:solidFill>
+              <a:srgbClr val="C7791B"/>
+            </a:solidFill>
+            <a:prstDash val="solid"/>
+          </a:ln>
+        </p:spPr>
+      </p:sp>
+      <p:sp>
+        <p:nvSpPr>
+          <p:cNvPr id="10" name="Text 8"/>
+          <p:cNvSpPr txBox="1"/>
+          <p:nvPr/>
+        </p:nvSpPr>
+        <p:spPr>
+          <a:xfrm>
+            <a:off x="932688" y="4406646"/>
+            <a:ext cx="6565392" cy="976122"/>
+          </a:xfrm>
+          <a:prstGeom prst="rect">
+            <a:avLst/>
+          </a:prstGeom>
+          <a:noFill/>
+          <a:ln/>
+        </p:spPr>
+        <p:txBody>
+          <a:bodyPr wrap="square" lIns="0" tIns="0" rIns="0" bIns="0" rtlCol="0" anchor="t"/>
+          <a:lstStyle/>
+          <a:p>
+            <a:pPr indent="0" marL="0">
+              <a:spcAft>
+                <a:spcPts val="200"/>
+              </a:spcAft>
+              <a:buNone/>
+            </a:pPr>
+            <a:r>
+              <a:rPr lang="en-US" sz="2100" dirty="0">
+                <a:solidFill>
+                  <a:srgbClr val="1B2530"/>
+                </a:solidFill>
+                <a:latin typeface="Calibri" pitchFamily="34" charset="0"/>
+                <a:ea typeface="Calibri" pitchFamily="34" charset="-122"/>
+                <a:cs typeface="Calibri" pitchFamily="34" charset="-120"/>
+              </a:rPr>
+              <a:t>Speed is measured in floating-point operations per second, FLOPS, on a standard problem: a huge system of linear equations</a:t>
+            </a:r>
+            <a:endParaRPr lang="en-US" sz="2100" dirty="0"/>
+          </a:p>
+        </p:txBody>
+      </p:sp>
+      <p:sp>
+        <p:nvSpPr>
+          <p:cNvPr id="11" name="Shape 9"/>
+          <p:cNvSpPr/>
+          <p:nvPr/>
+        </p:nvSpPr>
+        <p:spPr>
+          <a:xfrm>
+            <a:off x="548640" y="5620131"/>
+            <a:ext cx="146304" cy="146304"/>
+          </a:xfrm>
+          <a:prstGeom prst="rect">
+            <a:avLst/>
+          </a:prstGeom>
+          <a:solidFill>
+            <a:srgbClr val="0E7C86"/>
+          </a:solidFill>
+          <a:ln w="12700">
+            <a:solidFill>
+              <a:srgbClr val="0E7C86"/>
+            </a:solidFill>
+            <a:prstDash val="solid"/>
+          </a:ln>
+        </p:spPr>
+      </p:sp>
+      <p:sp>
+        <p:nvSpPr>
+          <p:cNvPr id="12" name="Text 10"/>
+          <p:cNvSpPr txBox="1"/>
+          <p:nvPr/>
+        </p:nvSpPr>
+        <p:spPr>
+          <a:xfrm>
+            <a:off x="932688" y="5521452"/>
+            <a:ext cx="6565392" cy="650748"/>
+          </a:xfrm>
+          <a:prstGeom prst="rect">
+            <a:avLst/>
+          </a:prstGeom>
+          <a:noFill/>
+          <a:ln/>
+        </p:spPr>
+        <p:txBody>
+          <a:bodyPr wrap="square" lIns="0" tIns="0" rIns="0" bIns="0" rtlCol="0" anchor="t"/>
+          <a:lstStyle/>
+          <a:p>
+            <a:pPr indent="0" marL="0">
+              <a:spcAft>
+                <a:spcPts val="200"/>
+              </a:spcAft>
+              <a:buNone/>
+            </a:pPr>
+            <a:r>
+              <a:rPr lang="en-US" sz="2100" dirty="0">
+                <a:solidFill>
+                  <a:srgbClr val="1B2530"/>
+                </a:solidFill>
+                <a:latin typeface="Calibri" pitchFamily="34" charset="0"/>
+                <a:ea typeface="Calibri" pitchFamily="34" charset="-122"/>
+                <a:cs typeface="Calibri" pitchFamily="34" charset="-120"/>
+              </a:rPr>
+              <a:t>The TOP500 list has ranked the fastest machines twice a year since 1993</a:t>
+            </a:r>
+            <a:endParaRPr lang="en-US" sz="2100" dirty="0"/>
+          </a:p>
+        </p:txBody>
+      </p:sp>
+      <p:pic>
+        <p:nvPicPr>
+          <p:cNvPr id="13" name="Image 0" descr="/Users/raffaelemontella/devel/riscv-prg32/computer-architecture-with-prg32/tools/assets/rcf_cluster.jpg">    </p:cNvPr>
+          <p:cNvPicPr>
+            <a:picLocks noChangeAspect="1"/>
+          </p:cNvPicPr>
+          <p:nvPr/>
+        </p:nvPicPr>
+        <p:blipFill>
+          <a:blip r:embed="rId1"/>
+          <a:stretch>
+            <a:fillRect/>
+          </a:stretch>
+        </p:blipFill>
+        <p:spPr>
+          <a:xfrm>
+            <a:off x="7863840" y="2926055"/>
+            <a:ext cx="3779215" cy="1280209"/>
+          </a:xfrm>
+          <a:prstGeom prst="rect">
+            <a:avLst/>
+          </a:prstGeom>
+        </p:spPr>
+      </p:pic>
+      <p:sp>
+        <p:nvSpPr>
+          <p:cNvPr id="14" name="Text 11"/>
+          <p:cNvSpPr txBox="1"/>
+          <p:nvPr/>
+        </p:nvSpPr>
+        <p:spPr>
+          <a:xfrm>
+            <a:off x="7863840" y="5788152"/>
+            <a:ext cx="3779215" cy="384048"/>
+          </a:xfrm>
+          <a:prstGeom prst="rect">
+            <a:avLst/>
+          </a:prstGeom>
+          <a:noFill/>
+          <a:ln/>
+        </p:spPr>
+        <p:txBody>
+          <a:bodyPr wrap="square" lIns="0" tIns="0" rIns="0" bIns="0" rtlCol="0" anchor="ctr"/>
+          <a:lstStyle/>
+          <a:p>
+            <a:pPr algn="ctr" indent="0" marL="0">
+              <a:buNone/>
+            </a:pPr>
+            <a:r>
+              <a:rPr lang="en-US" sz="1200" i="1" dirty="0">
+                <a:solidFill>
+                  <a:srgbClr val="5B6B78"/>
+                </a:solidFill>
+                <a:latin typeface="Calibri" pitchFamily="34" charset="0"/>
+                <a:ea typeface="Calibri" pitchFamily="34" charset="-122"/>
+                <a:cs typeface="Calibri" pitchFamily="34" charset="-120"/>
+              </a:rPr>
+              <a:t>Racks of nodes: the Research Computing Facilities of the University</a:t>
+            </a:r>
+            <a:endParaRPr lang="en-US" sz="1200" dirty="0"/>
           </a:p>
         </p:txBody>
       </p:sp>
@@ -3879,7 +4088,7 @@
                 <a:ea typeface="Cambria" pitchFamily="34" charset="-122"/>
                 <a:cs typeface="Cambria" pitchFamily="34" charset="-120"/>
               </a:rPr>
-              <a:t>Two ways to share the work</a:t>
+              <a:t>Amdahl's law</a:t>
             </a:r>
             <a:endParaRPr lang="en-US" sz="3200" dirty="0"/>
           </a:p>
@@ -3894,19 +4103,19 @@
         <p:spPr>
           <a:xfrm>
             <a:off x="548640" y="1417320"/>
-            <a:ext cx="5364328" cy="4754880"/>
+            <a:ext cx="11094415" cy="1596136"/>
           </a:xfrm>
           <a:prstGeom prst="roundRect">
             <a:avLst>
-              <a:gd name="adj" fmla="val 1538"/>
+              <a:gd name="adj" fmla="val 4583"/>
             </a:avLst>
           </a:prstGeom>
           <a:solidFill>
-            <a:srgbClr val="EEF2F4"/>
+            <a:srgbClr val="F6E7D2"/>
           </a:solidFill>
           <a:ln w="12700">
             <a:solidFill>
-              <a:srgbClr val="EEF2F4"/>
+              <a:srgbClr val="F6E7D2"/>
             </a:solidFill>
             <a:prstDash val="solid"/>
           </a:ln>
@@ -3920,42 +4129,34 @@
         </p:nvSpPr>
         <p:spPr>
           <a:xfrm>
-            <a:off x="822960" y="1645920"/>
-            <a:ext cx="4815688" cy="548640"/>
-          </a:xfrm>
-          <a:prstGeom prst="roundRect">
-            <a:avLst>
-              <a:gd name="adj" fmla="val 13333"/>
-            </a:avLst>
-          </a:prstGeom>
-          <a:solidFill>
-            <a:srgbClr val="0E7C86"/>
-          </a:solidFill>
-          <a:ln>
-            <a:solidFill>
-              <a:srgbClr val="0E7C86"/>
-            </a:solidFill>
-          </a:ln>
+            <a:off x="914400" y="1600200"/>
+            <a:ext cx="10362895" cy="411480"/>
+          </a:xfrm>
+          <a:prstGeom prst="rect">
+            <a:avLst/>
+          </a:prstGeom>
+          <a:noFill/>
+          <a:ln/>
         </p:spPr>
         <p:txBody>
           <a:bodyPr wrap="square" lIns="0" tIns="0" rIns="0" bIns="0" rtlCol="0" anchor="ctr"/>
           <a:lstStyle/>
           <a:p>
-            <a:pPr algn="ctr" indent="0" marL="0">
+            <a:pPr indent="0" marL="0">
               <a:buNone/>
             </a:pPr>
             <a:r>
-              <a:rPr lang="en-US" sz="1900" b="1" dirty="0">
+              <a:rPr lang="en-US" sz="1600" b="1" dirty="0">
                 <a:solidFill>
-                  <a:srgbClr val="FFFFFF"/>
+                  <a:srgbClr val="C7791B"/>
                 </a:solidFill>
                 <a:latin typeface="Calibri" pitchFamily="34" charset="0"/>
                 <a:ea typeface="Calibri" pitchFamily="34" charset="-122"/>
                 <a:cs typeface="Calibri" pitchFamily="34" charset="-120"/>
               </a:rPr>
-              <a:t>Shared memory</a:t>
+              <a:t>Speed-up with n processors</a:t>
             </a:r>
-            <a:endParaRPr lang="en-US" sz="1900" dirty="0"/>
+            <a:endParaRPr lang="en-US" sz="1600" dirty="0"/>
           </a:p>
         </p:txBody>
       </p:sp>
@@ -3967,8 +4168,8 @@
         </p:nvSpPr>
         <p:spPr>
           <a:xfrm>
-            <a:off x="868680" y="2423160"/>
-            <a:ext cx="4724248" cy="3566160"/>
+            <a:off x="914400" y="2057400"/>
+            <a:ext cx="10362895" cy="773176"/>
           </a:xfrm>
           <a:prstGeom prst="rect">
             <a:avLst/>
@@ -3977,18 +4178,81 @@
           <a:ln/>
         </p:spPr>
         <p:txBody>
+          <a:bodyPr wrap="square" lIns="0" tIns="0" rIns="0" bIns="0" rtlCol="0" anchor="ctr"/>
+          <a:lstStyle/>
+          <a:p>
+            <a:pPr indent="0" marL="0">
+              <a:buNone/>
+            </a:pPr>
+            <a:r>
+              <a:rPr lang="en-US" sz="2400" i="1" dirty="0">
+                <a:solidFill>
+                  <a:srgbClr val="1B2530"/>
+                </a:solidFill>
+                <a:latin typeface="Cambria" pitchFamily="34" charset="0"/>
+                <a:ea typeface="Cambria" pitchFamily="34" charset="-122"/>
+                <a:cs typeface="Cambria" pitchFamily="34" charset="-120"/>
+              </a:rPr>
+              <a:t>S = 1 / ((1 - p) + p / n), where p is the fraction of the work that can be done in parallel.</a:t>
+            </a:r>
+            <a:endParaRPr lang="en-US" sz="2400" dirty="0"/>
+          </a:p>
+        </p:txBody>
+      </p:sp>
+      <p:sp>
+        <p:nvSpPr>
+          <p:cNvPr id="6" name="Shape 4"/>
+          <p:cNvSpPr/>
+          <p:nvPr/>
+        </p:nvSpPr>
+        <p:spPr>
+          <a:xfrm>
+            <a:off x="548640" y="3487928"/>
+            <a:ext cx="146304" cy="146304"/>
+          </a:xfrm>
+          <a:prstGeom prst="rect">
+            <a:avLst/>
+          </a:prstGeom>
+          <a:solidFill>
+            <a:srgbClr val="0E7C86"/>
+          </a:solidFill>
+          <a:ln w="12700">
+            <a:solidFill>
+              <a:srgbClr val="0E7C86"/>
+            </a:solidFill>
+            <a:prstDash val="solid"/>
+          </a:ln>
+        </p:spPr>
+      </p:sp>
+      <p:sp>
+        <p:nvSpPr>
+          <p:cNvPr id="7" name="Text 5"/>
+          <p:cNvSpPr txBox="1"/>
+          <p:nvPr/>
+        </p:nvSpPr>
+        <p:spPr>
+          <a:xfrm>
+            <a:off x="932688" y="3366008"/>
+            <a:ext cx="10710367" cy="743712"/>
+          </a:xfrm>
+          <a:prstGeom prst="rect">
+            <a:avLst/>
+          </a:prstGeom>
+          <a:noFill/>
+          <a:ln/>
+        </p:spPr>
+        <p:txBody>
           <a:bodyPr wrap="square" lIns="0" tIns="0" rIns="0" bIns="0" rtlCol="0" anchor="t"/>
           <a:lstStyle/>
           <a:p>
-            <a:pPr marL="203200" indent="-203200">
+            <a:pPr indent="0" marL="0">
               <a:spcAft>
-                <a:spcPts val="800"/>
+                <a:spcPts val="200"/>
               </a:spcAft>
-              <a:buSzPct val="100000"/>
-              <a:buChar char="•"/>
+              <a:buNone/>
             </a:pPr>
             <a:r>
-              <a:rPr lang="en-US" sz="2100" dirty="0">
+              <a:rPr lang="en-US" sz="2400" dirty="0">
                 <a:solidFill>
                   <a:srgbClr val="1B2530"/>
                 </a:solidFill>
@@ -3996,20 +4260,66 @@
                 <a:ea typeface="Calibri" pitchFamily="34" charset="-122"/>
                 <a:cs typeface="Calibri" pitchFamily="34" charset="-120"/>
               </a:rPr>
-              <a:t>Several cores of one node see the same memory</a:t>
+              <a:t>The serial fraction, 1 - p, does not shrink however many processors you add</a:t>
             </a:r>
-            <a:endParaRPr lang="en-US" sz="2100" dirty="0"/>
-          </a:p>
-          <a:p>
-            <a:pPr marL="203200" indent="-203200">
+            <a:endParaRPr lang="en-US" sz="2400" dirty="0"/>
+          </a:p>
+        </p:txBody>
+      </p:sp>
+      <p:sp>
+        <p:nvSpPr>
+          <p:cNvPr id="8" name="Shape 6"/>
+          <p:cNvSpPr/>
+          <p:nvPr/>
+        </p:nvSpPr>
+        <p:spPr>
+          <a:xfrm>
+            <a:off x="548640" y="4688840"/>
+            <a:ext cx="146304" cy="146304"/>
+          </a:xfrm>
+          <a:prstGeom prst="rect">
+            <a:avLst/>
+          </a:prstGeom>
+          <a:solidFill>
+            <a:srgbClr val="C7791B"/>
+          </a:solidFill>
+          <a:ln w="12700">
+            <a:solidFill>
+              <a:srgbClr val="C7791B"/>
+            </a:solidFill>
+            <a:prstDash val="solid"/>
+          </a:ln>
+        </p:spPr>
+      </p:sp>
+      <p:sp>
+        <p:nvSpPr>
+          <p:cNvPr id="9" name="Text 7"/>
+          <p:cNvSpPr txBox="1"/>
+          <p:nvPr/>
+        </p:nvSpPr>
+        <p:spPr>
+          <a:xfrm>
+            <a:off x="932688" y="4566920"/>
+            <a:ext cx="10710367" cy="743712"/>
+          </a:xfrm>
+          <a:prstGeom prst="rect">
+            <a:avLst/>
+          </a:prstGeom>
+          <a:noFill/>
+          <a:ln/>
+        </p:spPr>
+        <p:txBody>
+          <a:bodyPr wrap="square" lIns="0" tIns="0" rIns="0" bIns="0" rtlCol="0" anchor="t"/>
+          <a:lstStyle/>
+          <a:p>
+            <a:pPr indent="0" marL="0">
               <a:spcAft>
-                <a:spcPts val="800"/>
+                <a:spcPts val="200"/>
               </a:spcAft>
-              <a:buSzPct val="100000"/>
-              <a:buChar char="•"/>
+              <a:buNone/>
             </a:pPr>
             <a:r>
-              <a:rPr lang="en-US" sz="2100" dirty="0">
+              <a:rPr lang="en-US" sz="2400" dirty="0">
                 <a:solidFill>
                   <a:srgbClr val="1B2530"/>
                 </a:solidFill>
@@ -4017,20 +4327,66 @@
                 <a:ea typeface="Calibri" pitchFamily="34" charset="-122"/>
                 <a:cs typeface="Calibri" pitchFamily="34" charset="-120"/>
               </a:rPr>
-              <a:t>The program runs as threads that read and write the same variables</a:t>
+              <a:t>With p = 0.9 the speed-up can never exceed 10, even with a million processors</a:t>
             </a:r>
-            <a:endParaRPr lang="en-US" sz="2100" dirty="0"/>
-          </a:p>
-          <a:p>
-            <a:pPr marL="203200" indent="-203200">
+            <a:endParaRPr lang="en-US" sz="2400" dirty="0"/>
+          </a:p>
+        </p:txBody>
+      </p:sp>
+      <p:sp>
+        <p:nvSpPr>
+          <p:cNvPr id="10" name="Shape 8"/>
+          <p:cNvSpPr/>
+          <p:nvPr/>
+        </p:nvSpPr>
+        <p:spPr>
+          <a:xfrm>
+            <a:off x="548640" y="5889752"/>
+            <a:ext cx="146304" cy="146304"/>
+          </a:xfrm>
+          <a:prstGeom prst="rect">
+            <a:avLst/>
+          </a:prstGeom>
+          <a:solidFill>
+            <a:srgbClr val="0E7C86"/>
+          </a:solidFill>
+          <a:ln w="12700">
+            <a:solidFill>
+              <a:srgbClr val="0E7C86"/>
+            </a:solidFill>
+            <a:prstDash val="solid"/>
+          </a:ln>
+        </p:spPr>
+      </p:sp>
+      <p:sp>
+        <p:nvSpPr>
+          <p:cNvPr id="11" name="Text 9"/>
+          <p:cNvSpPr txBox="1"/>
+          <p:nvPr/>
+        </p:nvSpPr>
+        <p:spPr>
+          <a:xfrm>
+            <a:off x="932688" y="5767832"/>
+            <a:ext cx="10710367" cy="371856"/>
+          </a:xfrm>
+          <a:prstGeom prst="rect">
+            <a:avLst/>
+          </a:prstGeom>
+          <a:noFill/>
+          <a:ln/>
+        </p:spPr>
+        <p:txBody>
+          <a:bodyPr wrap="square" lIns="0" tIns="0" rIns="0" bIns="0" rtlCol="0" anchor="t"/>
+          <a:lstStyle/>
+          <a:p>
+            <a:pPr indent="0" marL="0">
               <a:spcAft>
-                <a:spcPts val="800"/>
+                <a:spcPts val="200"/>
               </a:spcAft>
-              <a:buSzPct val="100000"/>
-              <a:buChar char="•"/>
+              <a:buNone/>
             </a:pPr>
             <a:r>
-              <a:rPr lang="en-US" sz="2100" dirty="0">
+              <a:rPr lang="en-US" sz="2400" dirty="0">
                 <a:solidFill>
                   <a:srgbClr val="1B2530"/>
                 </a:solidFill>
@@ -4038,210 +4394,9 @@
                 <a:ea typeface="Calibri" pitchFamily="34" charset="-122"/>
                 <a:cs typeface="Calibri" pitchFamily="34" charset="-120"/>
               </a:rPr>
-              <a:t>Easy to start: OpenMP adds one line above a loop</a:t>
+              <a:t>Before buying processors, measure p</a:t>
             </a:r>
-            <a:endParaRPr lang="en-US" sz="2100" dirty="0"/>
-          </a:p>
-          <a:p>
-            <a:pPr marL="203200" indent="-203200">
-              <a:spcAft>
-                <a:spcPts val="800"/>
-              </a:spcAft>
-              <a:buSzPct val="100000"/>
-              <a:buChar char="•"/>
-            </a:pPr>
-            <a:r>
-              <a:rPr lang="en-US" sz="2100" dirty="0">
-                <a:solidFill>
-                  <a:srgbClr val="1B2530"/>
-                </a:solidFill>
-                <a:latin typeface="Calibri" pitchFamily="34" charset="0"/>
-                <a:ea typeface="Calibri" pitchFamily="34" charset="-122"/>
-                <a:cs typeface="Calibri" pitchFamily="34" charset="-120"/>
-              </a:rPr>
-              <a:t>The danger: two threads writing the same variable</a:t>
-            </a:r>
-            <a:endParaRPr lang="en-US" sz="2100" dirty="0"/>
-          </a:p>
-        </p:txBody>
-      </p:sp>
-      <p:sp>
-        <p:nvSpPr>
-          <p:cNvPr id="6" name="Shape 4"/>
-          <p:cNvSpPr/>
-          <p:nvPr/>
-        </p:nvSpPr>
-        <p:spPr>
-          <a:xfrm>
-            <a:off x="6278728" y="1417320"/>
-            <a:ext cx="5364328" cy="4754880"/>
-          </a:xfrm>
-          <a:prstGeom prst="roundRect">
-            <a:avLst>
-              <a:gd name="adj" fmla="val 1538"/>
-            </a:avLst>
-          </a:prstGeom>
-          <a:solidFill>
-            <a:srgbClr val="EEF2F4"/>
-          </a:solidFill>
-          <a:ln w="12700">
-            <a:solidFill>
-              <a:srgbClr val="EEF2F4"/>
-            </a:solidFill>
-            <a:prstDash val="solid"/>
-          </a:ln>
-        </p:spPr>
-      </p:sp>
-      <p:sp>
-        <p:nvSpPr>
-          <p:cNvPr id="7" name="Text 5"/>
-          <p:cNvSpPr txBox="1"/>
-          <p:nvPr/>
-        </p:nvSpPr>
-        <p:spPr>
-          <a:xfrm>
-            <a:off x="6553048" y="1645920"/>
-            <a:ext cx="4815688" cy="548640"/>
-          </a:xfrm>
-          <a:prstGeom prst="roundRect">
-            <a:avLst>
-              <a:gd name="adj" fmla="val 13333"/>
-            </a:avLst>
-          </a:prstGeom>
-          <a:solidFill>
-            <a:srgbClr val="C7791B"/>
-          </a:solidFill>
-          <a:ln>
-            <a:solidFill>
-              <a:srgbClr val="C7791B"/>
-            </a:solidFill>
-          </a:ln>
-        </p:spPr>
-        <p:txBody>
-          <a:bodyPr wrap="square" lIns="0" tIns="0" rIns="0" bIns="0" rtlCol="0" anchor="ctr"/>
-          <a:lstStyle/>
-          <a:p>
-            <a:pPr algn="ctr" indent="0" marL="0">
-              <a:buNone/>
-            </a:pPr>
-            <a:r>
-              <a:rPr lang="en-US" sz="1900" b="1" dirty="0">
-                <a:solidFill>
-                  <a:srgbClr val="FFFFFF"/>
-                </a:solidFill>
-                <a:latin typeface="Calibri" pitchFamily="34" charset="0"/>
-                <a:ea typeface="Calibri" pitchFamily="34" charset="-122"/>
-                <a:cs typeface="Calibri" pitchFamily="34" charset="-120"/>
-              </a:rPr>
-              <a:t>Distributed memory</a:t>
-            </a:r>
-            <a:endParaRPr lang="en-US" sz="1900" dirty="0"/>
-          </a:p>
-        </p:txBody>
-      </p:sp>
-      <p:sp>
-        <p:nvSpPr>
-          <p:cNvPr id="8" name="Text 6"/>
-          <p:cNvSpPr txBox="1"/>
-          <p:nvPr/>
-        </p:nvSpPr>
-        <p:spPr>
-          <a:xfrm>
-            <a:off x="6598768" y="2423160"/>
-            <a:ext cx="4724248" cy="3566160"/>
-          </a:xfrm>
-          <a:prstGeom prst="rect">
-            <a:avLst/>
-          </a:prstGeom>
-          <a:noFill/>
-          <a:ln/>
-        </p:spPr>
-        <p:txBody>
-          <a:bodyPr wrap="square" lIns="0" tIns="0" rIns="0" bIns="0" rtlCol="0" anchor="t"/>
-          <a:lstStyle/>
-          <a:p>
-            <a:pPr marL="203200" indent="-203200">
-              <a:spcAft>
-                <a:spcPts val="800"/>
-              </a:spcAft>
-              <a:buSzPct val="100000"/>
-              <a:buChar char="•"/>
-            </a:pPr>
-            <a:r>
-              <a:rPr lang="en-US" sz="2100" dirty="0">
-                <a:solidFill>
-                  <a:srgbClr val="1B2530"/>
-                </a:solidFill>
-                <a:latin typeface="Calibri" pitchFamily="34" charset="0"/>
-                <a:ea typeface="Calibri" pitchFamily="34" charset="-122"/>
-                <a:cs typeface="Calibri" pitchFamily="34" charset="-120"/>
-              </a:rPr>
-              <a:t>Each node has its own memory; nothing is shared</a:t>
-            </a:r>
-            <a:endParaRPr lang="en-US" sz="2100" dirty="0"/>
-          </a:p>
-          <a:p>
-            <a:pPr marL="203200" indent="-203200">
-              <a:spcAft>
-                <a:spcPts val="800"/>
-              </a:spcAft>
-              <a:buSzPct val="100000"/>
-              <a:buChar char="•"/>
-            </a:pPr>
-            <a:r>
-              <a:rPr lang="en-US" sz="2100" dirty="0">
-                <a:solidFill>
-                  <a:srgbClr val="1B2530"/>
-                </a:solidFill>
-                <a:latin typeface="Calibri" pitchFamily="34" charset="0"/>
-                <a:ea typeface="Calibri" pitchFamily="34" charset="-122"/>
-                <a:cs typeface="Calibri" pitchFamily="34" charset="-120"/>
-              </a:rPr>
-              <a:t>The program runs as processes that send each other messages</a:t>
-            </a:r>
-            <a:endParaRPr lang="en-US" sz="2100" dirty="0"/>
-          </a:p>
-          <a:p>
-            <a:pPr marL="203200" indent="-203200">
-              <a:spcAft>
-                <a:spcPts val="800"/>
-              </a:spcAft>
-              <a:buSzPct val="100000"/>
-              <a:buChar char="•"/>
-            </a:pPr>
-            <a:r>
-              <a:rPr lang="en-US" sz="2100" dirty="0">
-                <a:solidFill>
-                  <a:srgbClr val="1B2530"/>
-                </a:solidFill>
-                <a:latin typeface="Calibri" pitchFamily="34" charset="0"/>
-                <a:ea typeface="Calibri" pitchFamily="34" charset="-122"/>
-                <a:cs typeface="Calibri" pitchFamily="34" charset="-120"/>
-              </a:rPr>
-              <a:t>MPI, the Message Passing Interface, is the standard</a:t>
-            </a:r>
-            <a:endParaRPr lang="en-US" sz="2100" dirty="0"/>
-          </a:p>
-          <a:p>
-            <a:pPr marL="203200" indent="-203200">
-              <a:spcAft>
-                <a:spcPts val="800"/>
-              </a:spcAft>
-              <a:buSzPct val="100000"/>
-              <a:buChar char="•"/>
-            </a:pPr>
-            <a:r>
-              <a:rPr lang="en-US" sz="2100" dirty="0">
-                <a:solidFill>
-                  <a:srgbClr val="1B2530"/>
-                </a:solidFill>
-                <a:latin typeface="Calibri" pitchFamily="34" charset="0"/>
-                <a:ea typeface="Calibri" pitchFamily="34" charset="-122"/>
-                <a:cs typeface="Calibri" pitchFamily="34" charset="-120"/>
-              </a:rPr>
-              <a:t>It scales to a million cores, and the programmer pays for it</a:t>
-            </a:r>
-            <a:endParaRPr lang="en-US" sz="2100" dirty="0"/>
+            <a:endParaRPr lang="en-US" sz="2400" dirty="0"/>
           </a:p>
         </p:txBody>
       </p:sp>
@@ -4353,7 +4508,7 @@
                 <a:ea typeface="Cambria" pitchFamily="34" charset="-122"/>
                 <a:cs typeface="Cambria" pitchFamily="34" charset="-120"/>
               </a:rPr>
-              <a:t>The limit is energy</a:t>
+              <a:t>Two ways to share the work</a:t>
             </a:r>
             <a:endParaRPr lang="en-US" sz="3200" dirty="0"/>
           </a:p>
@@ -4367,52 +4522,102 @@
         </p:nvSpPr>
         <p:spPr>
           <a:xfrm>
-            <a:off x="548640" y="1523746"/>
-            <a:ext cx="146304" cy="146304"/>
-          </a:xfrm>
-          <a:prstGeom prst="rect">
-            <a:avLst/>
+            <a:off x="548640" y="1417320"/>
+            <a:ext cx="5364328" cy="4754880"/>
+          </a:xfrm>
+          <a:prstGeom prst="roundRect">
+            <a:avLst>
+              <a:gd name="adj" fmla="val 1538"/>
+            </a:avLst>
+          </a:prstGeom>
+          <a:solidFill>
+            <a:srgbClr val="EEF2F4"/>
+          </a:solidFill>
+          <a:ln w="12700">
+            <a:solidFill>
+              <a:srgbClr val="EEF2F4"/>
+            </a:solidFill>
+            <a:prstDash val="solid"/>
+          </a:ln>
+        </p:spPr>
+      </p:sp>
+      <p:sp>
+        <p:nvSpPr>
+          <p:cNvPr id="4" name="Text 2"/>
+          <p:cNvSpPr txBox="1"/>
+          <p:nvPr/>
+        </p:nvSpPr>
+        <p:spPr>
+          <a:xfrm>
+            <a:off x="822960" y="1645920"/>
+            <a:ext cx="4815688" cy="548640"/>
+          </a:xfrm>
+          <a:prstGeom prst="roundRect">
+            <a:avLst>
+              <a:gd name="adj" fmla="val 13333"/>
+            </a:avLst>
           </a:prstGeom>
           <a:solidFill>
             <a:srgbClr val="0E7C86"/>
           </a:solidFill>
-          <a:ln w="12700">
+          <a:ln>
             <a:solidFill>
               <a:srgbClr val="0E7C86"/>
             </a:solidFill>
-            <a:prstDash val="solid"/>
           </a:ln>
         </p:spPr>
-      </p:sp>
-      <p:sp>
-        <p:nvSpPr>
-          <p:cNvPr id="4" name="Text 2"/>
-          <p:cNvSpPr txBox="1"/>
-          <p:nvPr/>
-        </p:nvSpPr>
-        <p:spPr>
-          <a:xfrm>
-            <a:off x="932688" y="1417320"/>
-            <a:ext cx="6565392" cy="681736"/>
-          </a:xfrm>
-          <a:prstGeom prst="rect">
-            <a:avLst/>
-          </a:prstGeom>
-          <a:noFill/>
-          <a:ln/>
-        </p:spPr>
-        <p:txBody>
-          <a:bodyPr wrap="square" lIns="0" tIns="0" rIns="0" bIns="0" rtlCol="0" anchor="t"/>
+        <p:txBody>
+          <a:bodyPr wrap="square" lIns="0" tIns="0" rIns="0" bIns="0" rtlCol="0" anchor="ctr"/>
           <a:lstStyle/>
           <a:p>
-            <a:pPr indent="0" marL="0">
-              <a:spcAft>
-                <a:spcPts val="200"/>
-              </a:spcAft>
+            <a:pPr algn="ctr" indent="0" marL="0">
               <a:buNone/>
             </a:pPr>
             <a:r>
-              <a:rPr lang="en-US" sz="2200" dirty="0">
+              <a:rPr lang="en-US" sz="1900" b="1" dirty="0">
+                <a:solidFill>
+                  <a:srgbClr val="FFFFFF"/>
+                </a:solidFill>
+                <a:latin typeface="Calibri" pitchFamily="34" charset="0"/>
+                <a:ea typeface="Calibri" pitchFamily="34" charset="-122"/>
+                <a:cs typeface="Calibri" pitchFamily="34" charset="-120"/>
+              </a:rPr>
+              <a:t>Shared memory</a:t>
+            </a:r>
+            <a:endParaRPr lang="en-US" sz="1900" dirty="0"/>
+          </a:p>
+        </p:txBody>
+      </p:sp>
+      <p:sp>
+        <p:nvSpPr>
+          <p:cNvPr id="5" name="Text 3"/>
+          <p:cNvSpPr txBox="1"/>
+          <p:nvPr/>
+        </p:nvSpPr>
+        <p:spPr>
+          <a:xfrm>
+            <a:off x="868680" y="2423160"/>
+            <a:ext cx="4724248" cy="3566160"/>
+          </a:xfrm>
+          <a:prstGeom prst="rect">
+            <a:avLst/>
+          </a:prstGeom>
+          <a:noFill/>
+          <a:ln/>
+        </p:spPr>
+        <p:txBody>
+          <a:bodyPr wrap="square" lIns="0" tIns="0" rIns="0" bIns="0" rtlCol="0" anchor="t"/>
+          <a:lstStyle/>
+          <a:p>
+            <a:pPr marL="203200" indent="-203200">
+              <a:spcAft>
+                <a:spcPts val="800"/>
+              </a:spcAft>
+              <a:buSzPct val="100000"/>
+              <a:buChar char="•"/>
+            </a:pPr>
+            <a:r>
+              <a:rPr lang="en-US" sz="2100" dirty="0">
                 <a:solidFill>
                   <a:srgbClr val="1B2530"/>
                 </a:solidFill>
@@ -4420,66 +4625,20 @@
                 <a:ea typeface="Calibri" pitchFamily="34" charset="-122"/>
                 <a:cs typeface="Calibri" pitchFamily="34" charset="-120"/>
               </a:rPr>
-              <a:t>An exascale machine draws about twenty megawatts: the consumption of a small town</a:t>
+              <a:t>Several cores of one node see the same memory</a:t>
             </a:r>
-            <a:endParaRPr lang="en-US" sz="2200" dirty="0"/>
-          </a:p>
-        </p:txBody>
-      </p:sp>
-      <p:sp>
-        <p:nvSpPr>
-          <p:cNvPr id="5" name="Shape 3"/>
-          <p:cNvSpPr/>
-          <p:nvPr/>
-        </p:nvSpPr>
-        <p:spPr>
-          <a:xfrm>
-            <a:off x="548640" y="2542032"/>
-            <a:ext cx="146304" cy="146304"/>
-          </a:xfrm>
-          <a:prstGeom prst="rect">
-            <a:avLst/>
-          </a:prstGeom>
-          <a:solidFill>
-            <a:srgbClr val="C7791B"/>
-          </a:solidFill>
-          <a:ln w="12700">
-            <a:solidFill>
-              <a:srgbClr val="C7791B"/>
-            </a:solidFill>
-            <a:prstDash val="solid"/>
-          </a:ln>
-        </p:spPr>
-      </p:sp>
-      <p:sp>
-        <p:nvSpPr>
-          <p:cNvPr id="6" name="Text 4"/>
-          <p:cNvSpPr txBox="1"/>
-          <p:nvPr/>
-        </p:nvSpPr>
-        <p:spPr>
-          <a:xfrm>
-            <a:off x="932688" y="2435606"/>
-            <a:ext cx="6565392" cy="681736"/>
-          </a:xfrm>
-          <a:prstGeom prst="rect">
-            <a:avLst/>
-          </a:prstGeom>
-          <a:noFill/>
-          <a:ln/>
-        </p:spPr>
-        <p:txBody>
-          <a:bodyPr wrap="square" lIns="0" tIns="0" rIns="0" bIns="0" rtlCol="0" anchor="t"/>
-          <a:lstStyle/>
-          <a:p>
-            <a:pPr indent="0" marL="0">
+            <a:endParaRPr lang="en-US" sz="2100" dirty="0"/>
+          </a:p>
+          <a:p>
+            <a:pPr marL="203200" indent="-203200">
               <a:spcAft>
-                <a:spcPts val="200"/>
+                <a:spcPts val="800"/>
               </a:spcAft>
-              <a:buNone/>
+              <a:buSzPct val="100000"/>
+              <a:buChar char="•"/>
             </a:pPr>
             <a:r>
-              <a:rPr lang="en-US" sz="2200" dirty="0">
+              <a:rPr lang="en-US" sz="2100" dirty="0">
                 <a:solidFill>
                   <a:srgbClr val="1B2530"/>
                 </a:solidFill>
@@ -4487,66 +4646,20 @@
                 <a:ea typeface="Calibri" pitchFamily="34" charset="-122"/>
                 <a:cs typeface="Calibri" pitchFamily="34" charset="-120"/>
               </a:rPr>
-              <a:t>The electricity of its lifetime costs as much as the machine</a:t>
+              <a:t>The program runs as threads that read and write the same variables</a:t>
             </a:r>
-            <a:endParaRPr lang="en-US" sz="2200" dirty="0"/>
-          </a:p>
-        </p:txBody>
-      </p:sp>
-      <p:sp>
-        <p:nvSpPr>
-          <p:cNvPr id="7" name="Shape 5"/>
-          <p:cNvSpPr/>
-          <p:nvPr/>
-        </p:nvSpPr>
-        <p:spPr>
-          <a:xfrm>
-            <a:off x="548640" y="3560318"/>
-            <a:ext cx="146304" cy="146304"/>
-          </a:xfrm>
-          <a:prstGeom prst="rect">
-            <a:avLst/>
-          </a:prstGeom>
-          <a:solidFill>
-            <a:srgbClr val="0E7C86"/>
-          </a:solidFill>
-          <a:ln w="12700">
-            <a:solidFill>
-              <a:srgbClr val="0E7C86"/>
-            </a:solidFill>
-            <a:prstDash val="solid"/>
-          </a:ln>
-        </p:spPr>
-      </p:sp>
-      <p:sp>
-        <p:nvSpPr>
-          <p:cNvPr id="8" name="Text 6"/>
-          <p:cNvSpPr txBox="1"/>
-          <p:nvPr/>
-        </p:nvSpPr>
-        <p:spPr>
-          <a:xfrm>
-            <a:off x="932688" y="3453892"/>
-            <a:ext cx="6565392" cy="681736"/>
-          </a:xfrm>
-          <a:prstGeom prst="rect">
-            <a:avLst/>
-          </a:prstGeom>
-          <a:noFill/>
-          <a:ln/>
-        </p:spPr>
-        <p:txBody>
-          <a:bodyPr wrap="square" lIns="0" tIns="0" rIns="0" bIns="0" rtlCol="0" anchor="t"/>
-          <a:lstStyle/>
-          <a:p>
-            <a:pPr indent="0" marL="0">
+            <a:endParaRPr lang="en-US" sz="2100" dirty="0"/>
+          </a:p>
+          <a:p>
+            <a:pPr marL="203200" indent="-203200">
               <a:spcAft>
-                <a:spcPts val="200"/>
+                <a:spcPts val="800"/>
               </a:spcAft>
-              <a:buNone/>
+              <a:buSzPct val="100000"/>
+              <a:buChar char="•"/>
             </a:pPr>
             <a:r>
-              <a:rPr lang="en-US" sz="2200" dirty="0">
+              <a:rPr lang="en-US" sz="2100" dirty="0">
                 <a:solidFill>
                   <a:srgbClr val="1B2530"/>
                 </a:solidFill>
@@ -4554,66 +4667,20 @@
                 <a:ea typeface="Calibri" pitchFamily="34" charset="-122"/>
                 <a:cs typeface="Calibri" pitchFamily="34" charset="-120"/>
               </a:rPr>
-              <a:t>So the figure that matters is operations per watt, and it has its own ranking: the Green500</a:t>
+              <a:t>Easy to start: OpenMP adds one line above a loop</a:t>
             </a:r>
-            <a:endParaRPr lang="en-US" sz="2200" dirty="0"/>
-          </a:p>
-        </p:txBody>
-      </p:sp>
-      <p:sp>
-        <p:nvSpPr>
-          <p:cNvPr id="9" name="Shape 7"/>
-          <p:cNvSpPr/>
-          <p:nvPr/>
-        </p:nvSpPr>
-        <p:spPr>
-          <a:xfrm>
-            <a:off x="548640" y="4578604"/>
-            <a:ext cx="146304" cy="146304"/>
-          </a:xfrm>
-          <a:prstGeom prst="rect">
-            <a:avLst/>
-          </a:prstGeom>
-          <a:solidFill>
-            <a:srgbClr val="C7791B"/>
-          </a:solidFill>
-          <a:ln w="12700">
-            <a:solidFill>
-              <a:srgbClr val="C7791B"/>
-            </a:solidFill>
-            <a:prstDash val="solid"/>
-          </a:ln>
-        </p:spPr>
-      </p:sp>
-      <p:sp>
-        <p:nvSpPr>
-          <p:cNvPr id="10" name="Text 8"/>
-          <p:cNvSpPr txBox="1"/>
-          <p:nvPr/>
-        </p:nvSpPr>
-        <p:spPr>
-          <a:xfrm>
-            <a:off x="932688" y="4472178"/>
-            <a:ext cx="6565392" cy="681736"/>
-          </a:xfrm>
-          <a:prstGeom prst="rect">
-            <a:avLst/>
-          </a:prstGeom>
-          <a:noFill/>
-          <a:ln/>
-        </p:spPr>
-        <p:txBody>
-          <a:bodyPr wrap="square" lIns="0" tIns="0" rIns="0" bIns="0" rtlCol="0" anchor="t"/>
-          <a:lstStyle/>
-          <a:p>
-            <a:pPr indent="0" marL="0">
+            <a:endParaRPr lang="en-US" sz="2100" dirty="0"/>
+          </a:p>
+          <a:p>
+            <a:pPr marL="203200" indent="-203200">
               <a:spcAft>
-                <a:spcPts val="200"/>
+                <a:spcPts val="800"/>
               </a:spcAft>
-              <a:buNone/>
+              <a:buSzPct val="100000"/>
+              <a:buChar char="•"/>
             </a:pPr>
             <a:r>
-              <a:rPr lang="en-US" sz="2200" dirty="0">
+              <a:rPr lang="en-US" sz="2100" dirty="0">
                 <a:solidFill>
                   <a:srgbClr val="1B2530"/>
                 </a:solidFill>
@@ -4621,32 +4688,34 @@
                 <a:ea typeface="Calibri" pitchFamily="34" charset="-122"/>
                 <a:cs typeface="Calibri" pitchFamily="34" charset="-120"/>
               </a:rPr>
-              <a:t>GPUs and other accelerators lead it: specialised hardware does more with each joule</a:t>
+              <a:t>The danger: two threads writing the same variable</a:t>
             </a:r>
-            <a:endParaRPr lang="en-US" sz="2200" dirty="0"/>
-          </a:p>
-        </p:txBody>
-      </p:sp>
-      <p:sp>
-        <p:nvSpPr>
-          <p:cNvPr id="11" name="Shape 9"/>
+            <a:endParaRPr lang="en-US" sz="2100" dirty="0"/>
+          </a:p>
+        </p:txBody>
+      </p:sp>
+      <p:sp>
+        <p:nvSpPr>
+          <p:cNvPr id="6" name="Shape 4"/>
           <p:cNvSpPr/>
           <p:nvPr/>
         </p:nvSpPr>
         <p:spPr>
           <a:xfrm>
-            <a:off x="548640" y="5596890"/>
-            <a:ext cx="146304" cy="146304"/>
-          </a:xfrm>
-          <a:prstGeom prst="rect">
-            <a:avLst/>
+            <a:off x="6278728" y="1417320"/>
+            <a:ext cx="5364328" cy="4754880"/>
+          </a:xfrm>
+          <a:prstGeom prst="roundRect">
+            <a:avLst>
+              <a:gd name="adj" fmla="val 1538"/>
+            </a:avLst>
           </a:prstGeom>
           <a:solidFill>
-            <a:srgbClr val="0E7C86"/>
+            <a:srgbClr val="EEF2F4"/>
           </a:solidFill>
           <a:ln w="12700">
             <a:solidFill>
-              <a:srgbClr val="0E7C86"/>
+              <a:srgbClr val="EEF2F4"/>
             </a:solidFill>
             <a:prstDash val="solid"/>
           </a:ln>
@@ -4654,33 +4723,81 @@
       </p:sp>
       <p:sp>
         <p:nvSpPr>
-          <p:cNvPr id="12" name="Text 10"/>
+          <p:cNvPr id="7" name="Text 5"/>
           <p:cNvSpPr txBox="1"/>
           <p:nvPr/>
         </p:nvSpPr>
         <p:spPr>
           <a:xfrm>
-            <a:off x="932688" y="5490464"/>
-            <a:ext cx="6565392" cy="681736"/>
-          </a:xfrm>
-          <a:prstGeom prst="rect">
-            <a:avLst/>
-          </a:prstGeom>
-          <a:noFill/>
-          <a:ln/>
-        </p:spPr>
-        <p:txBody>
-          <a:bodyPr wrap="square" lIns="0" tIns="0" rIns="0" bIns="0" rtlCol="0" anchor="t"/>
+            <a:off x="6553048" y="1645920"/>
+            <a:ext cx="4815688" cy="548640"/>
+          </a:xfrm>
+          <a:prstGeom prst="roundRect">
+            <a:avLst>
+              <a:gd name="adj" fmla="val 13333"/>
+            </a:avLst>
+          </a:prstGeom>
+          <a:solidFill>
+            <a:srgbClr val="C7791B"/>
+          </a:solidFill>
+          <a:ln>
+            <a:solidFill>
+              <a:srgbClr val="C7791B"/>
+            </a:solidFill>
+          </a:ln>
+        </p:spPr>
+        <p:txBody>
+          <a:bodyPr wrap="square" lIns="0" tIns="0" rIns="0" bIns="0" rtlCol="0" anchor="ctr"/>
           <a:lstStyle/>
           <a:p>
-            <a:pPr indent="0" marL="0">
-              <a:spcAft>
-                <a:spcPts val="200"/>
-              </a:spcAft>
+            <a:pPr algn="ctr" indent="0" marL="0">
               <a:buNone/>
             </a:pPr>
             <a:r>
-              <a:rPr lang="en-US" sz="2200" dirty="0">
+              <a:rPr lang="en-US" sz="1900" b="1" dirty="0">
+                <a:solidFill>
+                  <a:srgbClr val="FFFFFF"/>
+                </a:solidFill>
+                <a:latin typeface="Calibri" pitchFamily="34" charset="0"/>
+                <a:ea typeface="Calibri" pitchFamily="34" charset="-122"/>
+                <a:cs typeface="Calibri" pitchFamily="34" charset="-120"/>
+              </a:rPr>
+              <a:t>Distributed memory</a:t>
+            </a:r>
+            <a:endParaRPr lang="en-US" sz="1900" dirty="0"/>
+          </a:p>
+        </p:txBody>
+      </p:sp>
+      <p:sp>
+        <p:nvSpPr>
+          <p:cNvPr id="8" name="Text 6"/>
+          <p:cNvSpPr txBox="1"/>
+          <p:nvPr/>
+        </p:nvSpPr>
+        <p:spPr>
+          <a:xfrm>
+            <a:off x="6598768" y="2423160"/>
+            <a:ext cx="4724248" cy="3566160"/>
+          </a:xfrm>
+          <a:prstGeom prst="rect">
+            <a:avLst/>
+          </a:prstGeom>
+          <a:noFill/>
+          <a:ln/>
+        </p:spPr>
+        <p:txBody>
+          <a:bodyPr wrap="square" lIns="0" tIns="0" rIns="0" bIns="0" rtlCol="0" anchor="t"/>
+          <a:lstStyle/>
+          <a:p>
+            <a:pPr marL="203200" indent="-203200">
+              <a:spcAft>
+                <a:spcPts val="800"/>
+              </a:spcAft>
+              <a:buSzPct val="100000"/>
+              <a:buChar char="•"/>
+            </a:pPr>
+            <a:r>
+              <a:rPr lang="en-US" sz="2100" dirty="0">
                 <a:solidFill>
                   <a:srgbClr val="1B2530"/>
                 </a:solidFill>
@@ -4688,114 +4805,72 @@
                 <a:ea typeface="Calibri" pitchFamily="34" charset="-122"/>
                 <a:cs typeface="Calibri" pitchFamily="34" charset="-120"/>
               </a:rPr>
-              <a:t>The same reason puts a small RISC-V core in your kit: milliwatts</a:t>
+              <a:t>Each node has its own memory; nothing is shared</a:t>
             </a:r>
-            <a:endParaRPr lang="en-US" sz="2200" dirty="0"/>
-          </a:p>
-        </p:txBody>
-      </p:sp>
-      <p:sp>
-        <p:nvSpPr>
-          <p:cNvPr id="13" name="Shape 11"/>
-          <p:cNvSpPr/>
-          <p:nvPr/>
-        </p:nvSpPr>
-        <p:spPr>
-          <a:xfrm>
-            <a:off x="7863840" y="1417320"/>
-            <a:ext cx="3779215" cy="4754880"/>
-          </a:xfrm>
-          <a:prstGeom prst="roundRect">
-            <a:avLst>
-              <a:gd name="adj" fmla="val 1936"/>
-            </a:avLst>
-          </a:prstGeom>
-          <a:solidFill>
-            <a:srgbClr val="1B2530"/>
-          </a:solidFill>
-          <a:ln w="12700">
-            <a:solidFill>
-              <a:srgbClr val="1B2530"/>
-            </a:solidFill>
-            <a:prstDash val="solid"/>
-          </a:ln>
-        </p:spPr>
-      </p:sp>
-      <p:sp>
-        <p:nvSpPr>
-          <p:cNvPr id="14" name="Text 12"/>
-          <p:cNvSpPr txBox="1"/>
-          <p:nvPr/>
-        </p:nvSpPr>
-        <p:spPr>
-          <a:xfrm>
-            <a:off x="8046720" y="2148840"/>
-            <a:ext cx="3413455" cy="1828800"/>
-          </a:xfrm>
-          <a:prstGeom prst="rect">
-            <a:avLst/>
-          </a:prstGeom>
-          <a:noFill/>
-          <a:ln/>
-        </p:spPr>
-        <p:txBody>
-          <a:bodyPr wrap="square" lIns="0" tIns="0" rIns="0" bIns="0" rtlCol="0" anchor="ctr"/>
-          <a:lstStyle/>
-          <a:p>
-            <a:pPr algn="ctr" indent="0" marL="0">
-              <a:buNone/>
+            <a:endParaRPr lang="en-US" sz="2100" dirty="0"/>
+          </a:p>
+          <a:p>
+            <a:pPr marL="203200" indent="-203200">
+              <a:spcAft>
+                <a:spcPts val="800"/>
+              </a:spcAft>
+              <a:buSzPct val="100000"/>
+              <a:buChar char="•"/>
             </a:pPr>
             <a:r>
-              <a:rPr lang="en-US" sz="6000" b="1" dirty="0">
+              <a:rPr lang="en-US" sz="2100" dirty="0">
                 <a:solidFill>
-                  <a:srgbClr val="FFFFFF"/>
-                </a:solidFill>
-                <a:latin typeface="Cambria" pitchFamily="34" charset="0"/>
-                <a:ea typeface="Cambria" pitchFamily="34" charset="-122"/>
-                <a:cs typeface="Cambria" pitchFamily="34" charset="-120"/>
-              </a:rPr>
-              <a:t>~20 MW</a:t>
-            </a:r>
-            <a:endParaRPr lang="en-US" sz="6000" dirty="0"/>
-          </a:p>
-        </p:txBody>
-      </p:sp>
-      <p:sp>
-        <p:nvSpPr>
-          <p:cNvPr id="15" name="Text 13"/>
-          <p:cNvSpPr txBox="1"/>
-          <p:nvPr/>
-        </p:nvSpPr>
-        <p:spPr>
-          <a:xfrm>
-            <a:off x="8138160" y="4160520"/>
-            <a:ext cx="3230575" cy="1554480"/>
-          </a:xfrm>
-          <a:prstGeom prst="rect">
-            <a:avLst/>
-          </a:prstGeom>
-          <a:noFill/>
-          <a:ln/>
-        </p:spPr>
-        <p:txBody>
-          <a:bodyPr wrap="square" lIns="0" tIns="0" rIns="0" bIns="0" rtlCol="0" anchor="t"/>
-          <a:lstStyle/>
-          <a:p>
-            <a:pPr algn="ctr" indent="0" marL="0">
-              <a:buNone/>
-            </a:pPr>
-            <a:r>
-              <a:rPr lang="en-US" sz="1900" dirty="0">
-                <a:solidFill>
-                  <a:srgbClr val="CFE3EA"/>
+                  <a:srgbClr val="1B2530"/>
                 </a:solidFill>
                 <a:latin typeface="Calibri" pitchFamily="34" charset="0"/>
                 <a:ea typeface="Calibri" pitchFamily="34" charset="-122"/>
                 <a:cs typeface="Calibri" pitchFamily="34" charset="-120"/>
               </a:rPr>
-              <a:t>for 10^18 operations per second: about 50 billion operations per joule</a:t>
+              <a:t>The program runs as processes that send each other messages</a:t>
             </a:r>
-            <a:endParaRPr lang="en-US" sz="1900" dirty="0"/>
+            <a:endParaRPr lang="en-US" sz="2100" dirty="0"/>
+          </a:p>
+          <a:p>
+            <a:pPr marL="203200" indent="-203200">
+              <a:spcAft>
+                <a:spcPts val="800"/>
+              </a:spcAft>
+              <a:buSzPct val="100000"/>
+              <a:buChar char="•"/>
+            </a:pPr>
+            <a:r>
+              <a:rPr lang="en-US" sz="2100" dirty="0">
+                <a:solidFill>
+                  <a:srgbClr val="1B2530"/>
+                </a:solidFill>
+                <a:latin typeface="Calibri" pitchFamily="34" charset="0"/>
+                <a:ea typeface="Calibri" pitchFamily="34" charset="-122"/>
+                <a:cs typeface="Calibri" pitchFamily="34" charset="-120"/>
+              </a:rPr>
+              <a:t>MPI, the Message Passing Interface, is the standard</a:t>
+            </a:r>
+            <a:endParaRPr lang="en-US" sz="2100" dirty="0"/>
+          </a:p>
+          <a:p>
+            <a:pPr marL="203200" indent="-203200">
+              <a:spcAft>
+                <a:spcPts val="800"/>
+              </a:spcAft>
+              <a:buSzPct val="100000"/>
+              <a:buChar char="•"/>
+            </a:pPr>
+            <a:r>
+              <a:rPr lang="en-US" sz="2100" dirty="0">
+                <a:solidFill>
+                  <a:srgbClr val="1B2530"/>
+                </a:solidFill>
+                <a:latin typeface="Calibri" pitchFamily="34" charset="0"/>
+                <a:ea typeface="Calibri" pitchFamily="34" charset="-122"/>
+                <a:cs typeface="Calibri" pitchFamily="34" charset="-120"/>
+              </a:rPr>
+              <a:t>It scales to a million cores, and the programmer pays for it</a:t>
+            </a:r>
+            <a:endParaRPr lang="en-US" sz="2100" dirty="0"/>
           </a:p>
         </p:txBody>
       </p:sp>
@@ -4907,7 +4982,7 @@
                 <a:ea typeface="Cambria" pitchFamily="34" charset="-122"/>
                 <a:cs typeface="Cambria" pitchFamily="34" charset="-120"/>
               </a:rPr>
-              <a:t>Two ways to spend transistors</a:t>
+              <a:t>The limit is energy</a:t>
             </a:r>
             <a:endParaRPr lang="en-US" sz="3200" dirty="0"/>
           </a:p>
@@ -4921,20 +4996,18 @@
         </p:nvSpPr>
         <p:spPr>
           <a:xfrm>
-            <a:off x="548640" y="1417320"/>
-            <a:ext cx="5364328" cy="4754880"/>
-          </a:xfrm>
-          <a:prstGeom prst="roundRect">
-            <a:avLst>
-              <a:gd name="adj" fmla="val 1538"/>
-            </a:avLst>
+            <a:off x="548640" y="1523746"/>
+            <a:ext cx="146304" cy="146304"/>
+          </a:xfrm>
+          <a:prstGeom prst="rect">
+            <a:avLst/>
           </a:prstGeom>
           <a:solidFill>
-            <a:srgbClr val="EEF2F4"/>
+            <a:srgbClr val="0E7C86"/>
           </a:solidFill>
           <a:ln w="12700">
             <a:solidFill>
-              <a:srgbClr val="EEF2F4"/>
+              <a:srgbClr val="0E7C86"/>
             </a:solidFill>
             <a:prstDash val="solid"/>
           </a:ln>
@@ -4948,75 +5021,27 @@
         </p:nvSpPr>
         <p:spPr>
           <a:xfrm>
-            <a:off x="822960" y="1645920"/>
-            <a:ext cx="4815688" cy="548640"/>
-          </a:xfrm>
-          <a:prstGeom prst="roundRect">
-            <a:avLst>
-              <a:gd name="adj" fmla="val 13333"/>
-            </a:avLst>
-          </a:prstGeom>
-          <a:solidFill>
-            <a:srgbClr val="0E7C86"/>
-          </a:solidFill>
-          <a:ln>
-            <a:solidFill>
-              <a:srgbClr val="0E7C86"/>
-            </a:solidFill>
-          </a:ln>
-        </p:spPr>
-        <p:txBody>
-          <a:bodyPr wrap="square" lIns="0" tIns="0" rIns="0" bIns="0" rtlCol="0" anchor="ctr"/>
+            <a:off x="932688" y="1417320"/>
+            <a:ext cx="6565392" cy="681736"/>
+          </a:xfrm>
+          <a:prstGeom prst="rect">
+            <a:avLst/>
+          </a:prstGeom>
+          <a:noFill/>
+          <a:ln/>
+        </p:spPr>
+        <p:txBody>
+          <a:bodyPr wrap="square" lIns="0" tIns="0" rIns="0" bIns="0" rtlCol="0" anchor="t"/>
           <a:lstStyle/>
           <a:p>
-            <a:pPr algn="ctr" indent="0" marL="0">
+            <a:pPr indent="0" marL="0">
+              <a:spcAft>
+                <a:spcPts val="200"/>
+              </a:spcAft>
               <a:buNone/>
             </a:pPr>
             <a:r>
-              <a:rPr lang="en-US" sz="1900" b="1" dirty="0">
-                <a:solidFill>
-                  <a:srgbClr val="FFFFFF"/>
-                </a:solidFill>
-                <a:latin typeface="Calibri" pitchFamily="34" charset="0"/>
-                <a:ea typeface="Calibri" pitchFamily="34" charset="-122"/>
-                <a:cs typeface="Calibri" pitchFamily="34" charset="-120"/>
-              </a:rPr>
-              <a:t>A CPU</a:t>
-            </a:r>
-            <a:endParaRPr lang="en-US" sz="1900" dirty="0"/>
-          </a:p>
-        </p:txBody>
-      </p:sp>
-      <p:sp>
-        <p:nvSpPr>
-          <p:cNvPr id="5" name="Text 3"/>
-          <p:cNvSpPr txBox="1"/>
-          <p:nvPr/>
-        </p:nvSpPr>
-        <p:spPr>
-          <a:xfrm>
-            <a:off x="868680" y="2423160"/>
-            <a:ext cx="4724248" cy="3566160"/>
-          </a:xfrm>
-          <a:prstGeom prst="rect">
-            <a:avLst/>
-          </a:prstGeom>
-          <a:noFill/>
-          <a:ln/>
-        </p:spPr>
-        <p:txBody>
-          <a:bodyPr wrap="square" lIns="0" tIns="0" rIns="0" bIns="0" rtlCol="0" anchor="t"/>
-          <a:lstStyle/>
-          <a:p>
-            <a:pPr marL="203200" indent="-203200">
-              <a:spcAft>
-                <a:spcPts val="800"/>
-              </a:spcAft>
-              <a:buSzPct val="100000"/>
-              <a:buChar char="•"/>
-            </a:pPr>
-            <a:r>
-              <a:rPr lang="en-US" sz="2100" dirty="0">
+              <a:rPr lang="en-US" sz="2200" dirty="0">
                 <a:solidFill>
                   <a:srgbClr val="1B2530"/>
                 </a:solidFill>
@@ -5024,20 +5049,66 @@
                 <a:ea typeface="Calibri" pitchFamily="34" charset="-122"/>
                 <a:cs typeface="Calibri" pitchFamily="34" charset="-120"/>
               </a:rPr>
-              <a:t>A few large cores: tens</a:t>
+              <a:t>An exascale machine draws about twenty megawatts: the consumption of a small town</a:t>
             </a:r>
-            <a:endParaRPr lang="en-US" sz="2100" dirty="0"/>
-          </a:p>
-          <a:p>
-            <a:pPr marL="203200" indent="-203200">
+            <a:endParaRPr lang="en-US" sz="2200" dirty="0"/>
+          </a:p>
+        </p:txBody>
+      </p:sp>
+      <p:sp>
+        <p:nvSpPr>
+          <p:cNvPr id="5" name="Shape 3"/>
+          <p:cNvSpPr/>
+          <p:nvPr/>
+        </p:nvSpPr>
+        <p:spPr>
+          <a:xfrm>
+            <a:off x="548640" y="2542032"/>
+            <a:ext cx="146304" cy="146304"/>
+          </a:xfrm>
+          <a:prstGeom prst="rect">
+            <a:avLst/>
+          </a:prstGeom>
+          <a:solidFill>
+            <a:srgbClr val="C7791B"/>
+          </a:solidFill>
+          <a:ln w="12700">
+            <a:solidFill>
+              <a:srgbClr val="C7791B"/>
+            </a:solidFill>
+            <a:prstDash val="solid"/>
+          </a:ln>
+        </p:spPr>
+      </p:sp>
+      <p:sp>
+        <p:nvSpPr>
+          <p:cNvPr id="6" name="Text 4"/>
+          <p:cNvSpPr txBox="1"/>
+          <p:nvPr/>
+        </p:nvSpPr>
+        <p:spPr>
+          <a:xfrm>
+            <a:off x="932688" y="2435606"/>
+            <a:ext cx="6565392" cy="681736"/>
+          </a:xfrm>
+          <a:prstGeom prst="rect">
+            <a:avLst/>
+          </a:prstGeom>
+          <a:noFill/>
+          <a:ln/>
+        </p:spPr>
+        <p:txBody>
+          <a:bodyPr wrap="square" lIns="0" tIns="0" rIns="0" bIns="0" rtlCol="0" anchor="t"/>
+          <a:lstStyle/>
+          <a:p>
+            <a:pPr indent="0" marL="0">
               <a:spcAft>
-                <a:spcPts val="800"/>
+                <a:spcPts val="200"/>
               </a:spcAft>
-              <a:buSzPct val="100000"/>
-              <a:buChar char="•"/>
+              <a:buNone/>
             </a:pPr>
             <a:r>
-              <a:rPr lang="en-US" sz="2100" dirty="0">
+              <a:rPr lang="en-US" sz="2200" dirty="0">
                 <a:solidFill>
                   <a:srgbClr val="1B2530"/>
                 </a:solidFill>
@@ -5045,20 +5116,66 @@
                 <a:ea typeface="Calibri" pitchFamily="34" charset="-122"/>
                 <a:cs typeface="Calibri" pitchFamily="34" charset="-120"/>
               </a:rPr>
-              <a:t>Each one out of order, with predictors and big caches</a:t>
+              <a:t>The electricity of its lifetime costs as much as the machine</a:t>
             </a:r>
-            <a:endParaRPr lang="en-US" sz="2100" dirty="0"/>
-          </a:p>
-          <a:p>
-            <a:pPr marL="203200" indent="-203200">
+            <a:endParaRPr lang="en-US" sz="2200" dirty="0"/>
+          </a:p>
+        </p:txBody>
+      </p:sp>
+      <p:sp>
+        <p:nvSpPr>
+          <p:cNvPr id="7" name="Shape 5"/>
+          <p:cNvSpPr/>
+          <p:nvPr/>
+        </p:nvSpPr>
+        <p:spPr>
+          <a:xfrm>
+            <a:off x="548640" y="3560318"/>
+            <a:ext cx="146304" cy="146304"/>
+          </a:xfrm>
+          <a:prstGeom prst="rect">
+            <a:avLst/>
+          </a:prstGeom>
+          <a:solidFill>
+            <a:srgbClr val="0E7C86"/>
+          </a:solidFill>
+          <a:ln w="12700">
+            <a:solidFill>
+              <a:srgbClr val="0E7C86"/>
+            </a:solidFill>
+            <a:prstDash val="solid"/>
+          </a:ln>
+        </p:spPr>
+      </p:sp>
+      <p:sp>
+        <p:nvSpPr>
+          <p:cNvPr id="8" name="Text 6"/>
+          <p:cNvSpPr txBox="1"/>
+          <p:nvPr/>
+        </p:nvSpPr>
+        <p:spPr>
+          <a:xfrm>
+            <a:off x="932688" y="3453892"/>
+            <a:ext cx="6565392" cy="681736"/>
+          </a:xfrm>
+          <a:prstGeom prst="rect">
+            <a:avLst/>
+          </a:prstGeom>
+          <a:noFill/>
+          <a:ln/>
+        </p:spPr>
+        <p:txBody>
+          <a:bodyPr wrap="square" lIns="0" tIns="0" rIns="0" bIns="0" rtlCol="0" anchor="t"/>
+          <a:lstStyle/>
+          <a:p>
+            <a:pPr indent="0" marL="0">
               <a:spcAft>
-                <a:spcPts val="800"/>
+                <a:spcPts val="200"/>
               </a:spcAft>
-              <a:buSzPct val="100000"/>
-              <a:buChar char="•"/>
+              <a:buNone/>
             </a:pPr>
             <a:r>
-              <a:rPr lang="en-US" sz="2100" dirty="0">
+              <a:rPr lang="en-US" sz="2200" dirty="0">
                 <a:solidFill>
                   <a:srgbClr val="1B2530"/>
                 </a:solidFill>
@@ -5066,20 +5183,66 @@
                 <a:ea typeface="Calibri" pitchFamily="34" charset="-122"/>
                 <a:cs typeface="Calibri" pitchFamily="34" charset="-120"/>
               </a:rPr>
-              <a:t>Built to finish one task as soon as possible</a:t>
+              <a:t>So the figure that matters is operations per watt, and it has its own ranking: the Green500</a:t>
             </a:r>
-            <a:endParaRPr lang="en-US" sz="2100" dirty="0"/>
-          </a:p>
-          <a:p>
-            <a:pPr marL="203200" indent="-203200">
+            <a:endParaRPr lang="en-US" sz="2200" dirty="0"/>
+          </a:p>
+        </p:txBody>
+      </p:sp>
+      <p:sp>
+        <p:nvSpPr>
+          <p:cNvPr id="9" name="Shape 7"/>
+          <p:cNvSpPr/>
+          <p:nvPr/>
+        </p:nvSpPr>
+        <p:spPr>
+          <a:xfrm>
+            <a:off x="548640" y="4578604"/>
+            <a:ext cx="146304" cy="146304"/>
+          </a:xfrm>
+          <a:prstGeom prst="rect">
+            <a:avLst/>
+          </a:prstGeom>
+          <a:solidFill>
+            <a:srgbClr val="C7791B"/>
+          </a:solidFill>
+          <a:ln w="12700">
+            <a:solidFill>
+              <a:srgbClr val="C7791B"/>
+            </a:solidFill>
+            <a:prstDash val="solid"/>
+          </a:ln>
+        </p:spPr>
+      </p:sp>
+      <p:sp>
+        <p:nvSpPr>
+          <p:cNvPr id="10" name="Text 8"/>
+          <p:cNvSpPr txBox="1"/>
+          <p:nvPr/>
+        </p:nvSpPr>
+        <p:spPr>
+          <a:xfrm>
+            <a:off x="932688" y="4472178"/>
+            <a:ext cx="6565392" cy="681736"/>
+          </a:xfrm>
+          <a:prstGeom prst="rect">
+            <a:avLst/>
+          </a:prstGeom>
+          <a:noFill/>
+          <a:ln/>
+        </p:spPr>
+        <p:txBody>
+          <a:bodyPr wrap="square" lIns="0" tIns="0" rIns="0" bIns="0" rtlCol="0" anchor="t"/>
+          <a:lstStyle/>
+          <a:p>
+            <a:pPr indent="0" marL="0">
               <a:spcAft>
-                <a:spcPts val="800"/>
+                <a:spcPts val="200"/>
               </a:spcAft>
-              <a:buSzPct val="100000"/>
-              <a:buChar char="•"/>
+              <a:buNone/>
             </a:pPr>
             <a:r>
-              <a:rPr lang="en-US" sz="2100" dirty="0">
+              <a:rPr lang="en-US" sz="2200" dirty="0">
                 <a:solidFill>
                   <a:srgbClr val="1B2530"/>
                 </a:solidFill>
@@ -5087,34 +5250,32 @@
                 <a:ea typeface="Calibri" pitchFamily="34" charset="-122"/>
                 <a:cs typeface="Calibri" pitchFamily="34" charset="-120"/>
               </a:rPr>
-              <a:t>At ease with branches and irregular data</a:t>
+              <a:t>GPUs and other accelerators lead it: specialised hardware does more with each joule</a:t>
             </a:r>
-            <a:endParaRPr lang="en-US" sz="2100" dirty="0"/>
-          </a:p>
-        </p:txBody>
-      </p:sp>
-      <p:sp>
-        <p:nvSpPr>
-          <p:cNvPr id="6" name="Shape 4"/>
+            <a:endParaRPr lang="en-US" sz="2200" dirty="0"/>
+          </a:p>
+        </p:txBody>
+      </p:sp>
+      <p:sp>
+        <p:nvSpPr>
+          <p:cNvPr id="11" name="Shape 9"/>
           <p:cNvSpPr/>
           <p:nvPr/>
         </p:nvSpPr>
         <p:spPr>
           <a:xfrm>
-            <a:off x="6278728" y="1417320"/>
-            <a:ext cx="5364328" cy="4754880"/>
-          </a:xfrm>
-          <a:prstGeom prst="roundRect">
-            <a:avLst>
-              <a:gd name="adj" fmla="val 1538"/>
-            </a:avLst>
+            <a:off x="548640" y="5596890"/>
+            <a:ext cx="146304" cy="146304"/>
+          </a:xfrm>
+          <a:prstGeom prst="rect">
+            <a:avLst/>
           </a:prstGeom>
           <a:solidFill>
-            <a:srgbClr val="EEF2F4"/>
+            <a:srgbClr val="0E7C86"/>
           </a:solidFill>
           <a:ln w="12700">
             <a:solidFill>
-              <a:srgbClr val="EEF2F4"/>
+              <a:srgbClr val="0E7C86"/>
             </a:solidFill>
             <a:prstDash val="solid"/>
           </a:ln>
@@ -5122,81 +5283,33 @@
       </p:sp>
       <p:sp>
         <p:nvSpPr>
-          <p:cNvPr id="7" name="Text 5"/>
+          <p:cNvPr id="12" name="Text 10"/>
           <p:cNvSpPr txBox="1"/>
           <p:nvPr/>
         </p:nvSpPr>
         <p:spPr>
           <a:xfrm>
-            <a:off x="6553048" y="1645920"/>
-            <a:ext cx="4815688" cy="548640"/>
-          </a:xfrm>
-          <a:prstGeom prst="roundRect">
-            <a:avLst>
-              <a:gd name="adj" fmla="val 13333"/>
-            </a:avLst>
-          </a:prstGeom>
-          <a:solidFill>
-            <a:srgbClr val="C7791B"/>
-          </a:solidFill>
-          <a:ln>
-            <a:solidFill>
-              <a:srgbClr val="C7791B"/>
-            </a:solidFill>
-          </a:ln>
-        </p:spPr>
-        <p:txBody>
-          <a:bodyPr wrap="square" lIns="0" tIns="0" rIns="0" bIns="0" rtlCol="0" anchor="ctr"/>
+            <a:off x="932688" y="5490464"/>
+            <a:ext cx="6565392" cy="681736"/>
+          </a:xfrm>
+          <a:prstGeom prst="rect">
+            <a:avLst/>
+          </a:prstGeom>
+          <a:noFill/>
+          <a:ln/>
+        </p:spPr>
+        <p:txBody>
+          <a:bodyPr wrap="square" lIns="0" tIns="0" rIns="0" bIns="0" rtlCol="0" anchor="t"/>
           <a:lstStyle/>
           <a:p>
-            <a:pPr algn="ctr" indent="0" marL="0">
+            <a:pPr indent="0" marL="0">
+              <a:spcAft>
+                <a:spcPts val="200"/>
+              </a:spcAft>
               <a:buNone/>
             </a:pPr>
             <a:r>
-              <a:rPr lang="en-US" sz="1900" b="1" dirty="0">
-                <a:solidFill>
-                  <a:srgbClr val="FFFFFF"/>
-                </a:solidFill>
-                <a:latin typeface="Calibri" pitchFamily="34" charset="0"/>
-                <a:ea typeface="Calibri" pitchFamily="34" charset="-122"/>
-                <a:cs typeface="Calibri" pitchFamily="34" charset="-120"/>
-              </a:rPr>
-              <a:t>A GPU</a:t>
-            </a:r>
-            <a:endParaRPr lang="en-US" sz="1900" dirty="0"/>
-          </a:p>
-        </p:txBody>
-      </p:sp>
-      <p:sp>
-        <p:nvSpPr>
-          <p:cNvPr id="8" name="Text 6"/>
-          <p:cNvSpPr txBox="1"/>
-          <p:nvPr/>
-        </p:nvSpPr>
-        <p:spPr>
-          <a:xfrm>
-            <a:off x="6598768" y="2423160"/>
-            <a:ext cx="4724248" cy="3566160"/>
-          </a:xfrm>
-          <a:prstGeom prst="rect">
-            <a:avLst/>
-          </a:prstGeom>
-          <a:noFill/>
-          <a:ln/>
-        </p:spPr>
-        <p:txBody>
-          <a:bodyPr wrap="square" lIns="0" tIns="0" rIns="0" bIns="0" rtlCol="0" anchor="t"/>
-          <a:lstStyle/>
-          <a:p>
-            <a:pPr marL="203200" indent="-203200">
-              <a:spcAft>
-                <a:spcPts val="800"/>
-              </a:spcAft>
-              <a:buSzPct val="100000"/>
-              <a:buChar char="•"/>
-            </a:pPr>
-            <a:r>
-              <a:rPr lang="en-US" sz="2100" dirty="0">
+              <a:rPr lang="en-US" sz="2200" dirty="0">
                 <a:solidFill>
                   <a:srgbClr val="1B2530"/>
                 </a:solidFill>
@@ -5204,72 +5317,114 @@
                 <a:ea typeface="Calibri" pitchFamily="34" charset="-122"/>
                 <a:cs typeface="Calibri" pitchFamily="34" charset="-120"/>
               </a:rPr>
-              <a:t>Thousands of small, simple cores</a:t>
+              <a:t>The same reason puts a small RISC-V core in your kit: milliwatts</a:t>
             </a:r>
-            <a:endParaRPr lang="en-US" sz="2100" dirty="0"/>
-          </a:p>
-          <a:p>
-            <a:pPr marL="203200" indent="-203200">
-              <a:spcAft>
-                <a:spcPts val="800"/>
-              </a:spcAft>
-              <a:buSzPct val="100000"/>
-              <a:buChar char="•"/>
+            <a:endParaRPr lang="en-US" sz="2200" dirty="0"/>
+          </a:p>
+        </p:txBody>
+      </p:sp>
+      <p:sp>
+        <p:nvSpPr>
+          <p:cNvPr id="13" name="Shape 11"/>
+          <p:cNvSpPr/>
+          <p:nvPr/>
+        </p:nvSpPr>
+        <p:spPr>
+          <a:xfrm>
+            <a:off x="7863840" y="1417320"/>
+            <a:ext cx="3779215" cy="4754880"/>
+          </a:xfrm>
+          <a:prstGeom prst="roundRect">
+            <a:avLst>
+              <a:gd name="adj" fmla="val 1936"/>
+            </a:avLst>
+          </a:prstGeom>
+          <a:solidFill>
+            <a:srgbClr val="1B2530"/>
+          </a:solidFill>
+          <a:ln w="12700">
+            <a:solidFill>
+              <a:srgbClr val="1B2530"/>
+            </a:solidFill>
+            <a:prstDash val="solid"/>
+          </a:ln>
+        </p:spPr>
+      </p:sp>
+      <p:sp>
+        <p:nvSpPr>
+          <p:cNvPr id="14" name="Text 12"/>
+          <p:cNvSpPr txBox="1"/>
+          <p:nvPr/>
+        </p:nvSpPr>
+        <p:spPr>
+          <a:xfrm>
+            <a:off x="8046720" y="2148840"/>
+            <a:ext cx="3413455" cy="1828800"/>
+          </a:xfrm>
+          <a:prstGeom prst="rect">
+            <a:avLst/>
+          </a:prstGeom>
+          <a:noFill/>
+          <a:ln/>
+        </p:spPr>
+        <p:txBody>
+          <a:bodyPr wrap="square" lIns="0" tIns="0" rIns="0" bIns="0" rtlCol="0" anchor="ctr"/>
+          <a:lstStyle/>
+          <a:p>
+            <a:pPr algn="ctr" indent="0" marL="0">
+              <a:buNone/>
             </a:pPr>
             <a:r>
-              <a:rPr lang="en-US" sz="2100" dirty="0">
+              <a:rPr lang="en-US" sz="6000" b="1" dirty="0">
                 <a:solidFill>
-                  <a:srgbClr val="1B2530"/>
+                  <a:srgbClr val="FFFFFF"/>
+                </a:solidFill>
+                <a:latin typeface="Cambria" pitchFamily="34" charset="0"/>
+                <a:ea typeface="Cambria" pitchFamily="34" charset="-122"/>
+                <a:cs typeface="Cambria" pitchFamily="34" charset="-120"/>
+              </a:rPr>
+              <a:t>~20 MW</a:t>
+            </a:r>
+            <a:endParaRPr lang="en-US" sz="6000" dirty="0"/>
+          </a:p>
+        </p:txBody>
+      </p:sp>
+      <p:sp>
+        <p:nvSpPr>
+          <p:cNvPr id="15" name="Text 13"/>
+          <p:cNvSpPr txBox="1"/>
+          <p:nvPr/>
+        </p:nvSpPr>
+        <p:spPr>
+          <a:xfrm>
+            <a:off x="8138160" y="4160520"/>
+            <a:ext cx="3230575" cy="1554480"/>
+          </a:xfrm>
+          <a:prstGeom prst="rect">
+            <a:avLst/>
+          </a:prstGeom>
+          <a:noFill/>
+          <a:ln/>
+        </p:spPr>
+        <p:txBody>
+          <a:bodyPr wrap="square" lIns="0" tIns="0" rIns="0" bIns="0" rtlCol="0" anchor="t"/>
+          <a:lstStyle/>
+          <a:p>
+            <a:pPr algn="ctr" indent="0" marL="0">
+              <a:buNone/>
+            </a:pPr>
+            <a:r>
+              <a:rPr lang="en-US" sz="1900" dirty="0">
+                <a:solidFill>
+                  <a:srgbClr val="CFE3EA"/>
                 </a:solidFill>
                 <a:latin typeface="Calibri" pitchFamily="34" charset="0"/>
                 <a:ea typeface="Calibri" pitchFamily="34" charset="-122"/>
                 <a:cs typeface="Calibri" pitchFamily="34" charset="-120"/>
               </a:rPr>
-              <a:t>All executing the same code on different data</a:t>
+              <a:t>for 10^18 operations per second: about 50 billion operations per joule</a:t>
             </a:r>
-            <a:endParaRPr lang="en-US" sz="2100" dirty="0"/>
-          </a:p>
-          <a:p>
-            <a:pPr marL="203200" indent="-203200">
-              <a:spcAft>
-                <a:spcPts val="800"/>
-              </a:spcAft>
-              <a:buSzPct val="100000"/>
-              <a:buChar char="•"/>
-            </a:pPr>
-            <a:r>
-              <a:rPr lang="en-US" sz="2100" dirty="0">
-                <a:solidFill>
-                  <a:srgbClr val="1B2530"/>
-                </a:solidFill>
-                <a:latin typeface="Calibri" pitchFamily="34" charset="0"/>
-                <a:ea typeface="Calibri" pitchFamily="34" charset="-122"/>
-                <a:cs typeface="Calibri" pitchFamily="34" charset="-120"/>
-              </a:rPr>
-              <a:t>Built to finish a million tasks per second</a:t>
-            </a:r>
-            <a:endParaRPr lang="en-US" sz="2100" dirty="0"/>
-          </a:p>
-          <a:p>
-            <a:pPr marL="203200" indent="-203200">
-              <a:spcAft>
-                <a:spcPts val="800"/>
-              </a:spcAft>
-              <a:buSzPct val="100000"/>
-              <a:buChar char="•"/>
-            </a:pPr>
-            <a:r>
-              <a:rPr lang="en-US" sz="2100" dirty="0">
-                <a:solidFill>
-                  <a:srgbClr val="1B2530"/>
-                </a:solidFill>
-                <a:latin typeface="Calibri" pitchFamily="34" charset="0"/>
-                <a:ea typeface="Calibri" pitchFamily="34" charset="-122"/>
-                <a:cs typeface="Calibri" pitchFamily="34" charset="-120"/>
-              </a:rPr>
-              <a:t>At ease with regular arrays: pixels, matrices, grids</a:t>
-            </a:r>
-            <a:endParaRPr lang="en-US" sz="2100" dirty="0"/>
+            <a:endParaRPr lang="en-US" sz="1900" dirty="0"/>
           </a:p>
         </p:txBody>
       </p:sp>
@@ -5381,7 +5536,7 @@
                 <a:ea typeface="Cambria" pitchFamily="34" charset="-122"/>
                 <a:cs typeface="Cambria" pitchFamily="34" charset="-120"/>
               </a:rPr>
-              <a:t>A chip that becomes the circuit you describe</a:t>
+              <a:t>Two ways to spend transistors</a:t>
             </a:r>
             <a:endParaRPr lang="en-US" sz="3200" dirty="0"/>
           </a:p>
@@ -5395,33 +5550,82 @@
         </p:nvSpPr>
         <p:spPr>
           <a:xfrm>
-            <a:off x="548640" y="1515999"/>
-            <a:ext cx="146304" cy="146304"/>
-          </a:xfrm>
-          <a:prstGeom prst="rect">
-            <a:avLst/>
+            <a:off x="548640" y="1417320"/>
+            <a:ext cx="5364328" cy="4754880"/>
+          </a:xfrm>
+          <a:prstGeom prst="roundRect">
+            <a:avLst>
+              <a:gd name="adj" fmla="val 1538"/>
+            </a:avLst>
+          </a:prstGeom>
+          <a:solidFill>
+            <a:srgbClr val="EEF2F4"/>
+          </a:solidFill>
+          <a:ln w="12700">
+            <a:solidFill>
+              <a:srgbClr val="EEF2F4"/>
+            </a:solidFill>
+            <a:prstDash val="solid"/>
+          </a:ln>
+        </p:spPr>
+      </p:sp>
+      <p:sp>
+        <p:nvSpPr>
+          <p:cNvPr id="4" name="Text 2"/>
+          <p:cNvSpPr txBox="1"/>
+          <p:nvPr/>
+        </p:nvSpPr>
+        <p:spPr>
+          <a:xfrm>
+            <a:off x="822960" y="1645920"/>
+            <a:ext cx="4815688" cy="548640"/>
+          </a:xfrm>
+          <a:prstGeom prst="roundRect">
+            <a:avLst>
+              <a:gd name="adj" fmla="val 13333"/>
+            </a:avLst>
           </a:prstGeom>
           <a:solidFill>
             <a:srgbClr val="0E7C86"/>
           </a:solidFill>
-          <a:ln w="12700">
+          <a:ln>
             <a:solidFill>
               <a:srgbClr val="0E7C86"/>
             </a:solidFill>
-            <a:prstDash val="solid"/>
           </a:ln>
         </p:spPr>
-      </p:sp>
-      <p:sp>
-        <p:nvSpPr>
-          <p:cNvPr id="4" name="Text 2"/>
+        <p:txBody>
+          <a:bodyPr wrap="square" lIns="0" tIns="0" rIns="0" bIns="0" rtlCol="0" anchor="ctr"/>
+          <a:lstStyle/>
+          <a:p>
+            <a:pPr algn="ctr" indent="0" marL="0">
+              <a:buNone/>
+            </a:pPr>
+            <a:r>
+              <a:rPr lang="en-US" sz="1900" b="1" dirty="0">
+                <a:solidFill>
+                  <a:srgbClr val="FFFFFF"/>
+                </a:solidFill>
+                <a:latin typeface="Calibri" pitchFamily="34" charset="0"/>
+                <a:ea typeface="Calibri" pitchFamily="34" charset="-122"/>
+                <a:cs typeface="Calibri" pitchFamily="34" charset="-120"/>
+              </a:rPr>
+              <a:t>A CPU</a:t>
+            </a:r>
+            <a:endParaRPr lang="en-US" sz="1900" dirty="0"/>
+          </a:p>
+        </p:txBody>
+      </p:sp>
+      <p:sp>
+        <p:nvSpPr>
+          <p:cNvPr id="5" name="Text 3"/>
           <p:cNvSpPr txBox="1"/>
           <p:nvPr/>
         </p:nvSpPr>
         <p:spPr>
           <a:xfrm>
-            <a:off x="932688" y="1417320"/>
-            <a:ext cx="6565392" cy="325374"/>
+            <a:off x="868680" y="2423160"/>
+            <a:ext cx="4724248" cy="3566160"/>
           </a:xfrm>
           <a:prstGeom prst="rect">
             <a:avLst/>
@@ -5433,11 +5637,12 @@
           <a:bodyPr wrap="square" lIns="0" tIns="0" rIns="0" bIns="0" rtlCol="0" anchor="t"/>
           <a:lstStyle/>
           <a:p>
-            <a:pPr indent="0" marL="0">
+            <a:pPr marL="203200" indent="-203200">
               <a:spcAft>
-                <a:spcPts val="200"/>
+                <a:spcPts val="800"/>
               </a:spcAft>
-              <a:buNone/>
+              <a:buSzPct val="100000"/>
+              <a:buChar char="•"/>
             </a:pPr>
             <a:r>
               <a:rPr lang="en-US" sz="2100" dirty="0">
@@ -5448,63 +5653,17 @@
                 <a:ea typeface="Calibri" pitchFamily="34" charset="-122"/>
                 <a:cs typeface="Calibri" pitchFamily="34" charset="-120"/>
               </a:rPr>
-              <a:t>FPGA: field-programmable gate array</a:t>
+              <a:t>A few large cores: tens</a:t>
             </a:r>
             <a:endParaRPr lang="en-US" sz="2100" dirty="0"/>
           </a:p>
-        </p:txBody>
-      </p:sp>
-      <p:sp>
-        <p:nvSpPr>
-          <p:cNvPr id="5" name="Shape 3"/>
-          <p:cNvSpPr/>
-          <p:nvPr/>
-        </p:nvSpPr>
-        <p:spPr>
-          <a:xfrm>
-            <a:off x="548640" y="2003298"/>
-            <a:ext cx="146304" cy="146304"/>
-          </a:xfrm>
-          <a:prstGeom prst="rect">
-            <a:avLst/>
-          </a:prstGeom>
-          <a:solidFill>
-            <a:srgbClr val="C7791B"/>
-          </a:solidFill>
-          <a:ln w="12700">
-            <a:solidFill>
-              <a:srgbClr val="C7791B"/>
-            </a:solidFill>
-            <a:prstDash val="solid"/>
-          </a:ln>
-        </p:spPr>
-      </p:sp>
-      <p:sp>
-        <p:nvSpPr>
-          <p:cNvPr id="6" name="Text 4"/>
-          <p:cNvSpPr txBox="1"/>
-          <p:nvPr/>
-        </p:nvSpPr>
-        <p:spPr>
-          <a:xfrm>
-            <a:off x="932688" y="1904619"/>
-            <a:ext cx="6565392" cy="1829562"/>
-          </a:xfrm>
-          <a:prstGeom prst="rect">
-            <a:avLst/>
-          </a:prstGeom>
-          <a:noFill/>
-          <a:ln/>
-        </p:spPr>
-        <p:txBody>
-          <a:bodyPr wrap="square" lIns="0" tIns="0" rIns="0" bIns="0" rtlCol="0" anchor="t"/>
-          <a:lstStyle/>
-          <a:p>
-            <a:pPr indent="0" marL="0">
+          <a:p>
+            <a:pPr marL="203200" indent="-203200">
               <a:spcAft>
-                <a:spcPts val="200"/>
+                <a:spcPts val="800"/>
               </a:spcAft>
-              <a:buNone/>
+              <a:buSzPct val="100000"/>
+              <a:buChar char="•"/>
             </a:pPr>
             <a:r>
               <a:rPr lang="en-US" sz="2100" dirty="0">
@@ -5515,123 +5674,17 @@
                 <a:ea typeface="Calibri" pitchFamily="34" charset="-122"/>
                 <a:cs typeface="Calibri" pitchFamily="34" charset="-120"/>
               </a:rPr>
-              <a:t>Inside: a sea of small programmable blocks</a:t>
+              <a:t>Each one out of order, with predictors and big caches</a:t>
             </a:r>
             <a:endParaRPr lang="en-US" sz="2100" dirty="0"/>
           </a:p>
           <a:p>
-            <a:pPr indent="0" marL="0">
+            <a:pPr marL="203200" indent="-203200">
               <a:spcAft>
-                <a:spcPts val="200"/>
+                <a:spcPts val="800"/>
               </a:spcAft>
-              <a:buNone/>
-            </a:pPr>
-            <a:r>
-              <a:rPr lang="en-US" sz="1800" dirty="0">
-                <a:solidFill>
-                  <a:srgbClr val="5B6B78"/>
-                </a:solidFill>
-                <a:latin typeface="Calibri" pitchFamily="34" charset="0"/>
-                <a:ea typeface="Calibri" pitchFamily="34" charset="-122"/>
-                <a:cs typeface="Calibri" pitchFamily="34" charset="-120"/>
-              </a:rPr>
-              <a:t>– look-up tables, each able to be any function of a few inputs</a:t>
-            </a:r>
-            <a:endParaRPr lang="en-US" sz="2100" dirty="0"/>
-          </a:p>
-          <a:p>
-            <a:pPr indent="0" marL="0">
-              <a:spcAft>
-                <a:spcPts val="200"/>
-              </a:spcAft>
-              <a:buNone/>
-            </a:pPr>
-            <a:r>
-              <a:rPr lang="en-US" sz="1800" dirty="0">
-                <a:solidFill>
-                  <a:srgbClr val="5B6B78"/>
-                </a:solidFill>
-                <a:latin typeface="Calibri" pitchFamily="34" charset="0"/>
-                <a:ea typeface="Calibri" pitchFamily="34" charset="-122"/>
-                <a:cs typeface="Calibri" pitchFamily="34" charset="-120"/>
-              </a:rPr>
-              <a:t>– flip-flops, one beside each table</a:t>
-            </a:r>
-            <a:endParaRPr lang="en-US" sz="2100" dirty="0"/>
-          </a:p>
-          <a:p>
-            <a:pPr indent="0" marL="0">
-              <a:spcAft>
-                <a:spcPts val="200"/>
-              </a:spcAft>
-              <a:buNone/>
-            </a:pPr>
-            <a:r>
-              <a:rPr lang="en-US" sz="1800" dirty="0">
-                <a:solidFill>
-                  <a:srgbClr val="5B6B78"/>
-                </a:solidFill>
-                <a:latin typeface="Calibri" pitchFamily="34" charset="0"/>
-                <a:ea typeface="Calibri" pitchFamily="34" charset="-122"/>
-                <a:cs typeface="Calibri" pitchFamily="34" charset="-120"/>
-              </a:rPr>
-              <a:t>– wires and switches that can join any block to any other</a:t>
-            </a:r>
-            <a:endParaRPr lang="en-US" sz="2100" dirty="0"/>
-          </a:p>
-        </p:txBody>
-      </p:sp>
-      <p:sp>
-        <p:nvSpPr>
-          <p:cNvPr id="7" name="Shape 5"/>
-          <p:cNvSpPr/>
-          <p:nvPr/>
-        </p:nvSpPr>
-        <p:spPr>
-          <a:xfrm>
-            <a:off x="548640" y="3994785"/>
-            <a:ext cx="146304" cy="146304"/>
-          </a:xfrm>
-          <a:prstGeom prst="rect">
-            <a:avLst/>
-          </a:prstGeom>
-          <a:solidFill>
-            <a:srgbClr val="0E7C86"/>
-          </a:solidFill>
-          <a:ln w="12700">
-            <a:solidFill>
-              <a:srgbClr val="0E7C86"/>
-            </a:solidFill>
-            <a:prstDash val="solid"/>
-          </a:ln>
-        </p:spPr>
-      </p:sp>
-      <p:sp>
-        <p:nvSpPr>
-          <p:cNvPr id="8" name="Text 6"/>
-          <p:cNvSpPr txBox="1"/>
-          <p:nvPr/>
-        </p:nvSpPr>
-        <p:spPr>
-          <a:xfrm>
-            <a:off x="932688" y="3896106"/>
-            <a:ext cx="6565392" cy="650748"/>
-          </a:xfrm>
-          <a:prstGeom prst="rect">
-            <a:avLst/>
-          </a:prstGeom>
-          <a:noFill/>
-          <a:ln/>
-        </p:spPr>
-        <p:txBody>
-          <a:bodyPr wrap="square" lIns="0" tIns="0" rIns="0" bIns="0" rtlCol="0" anchor="t"/>
-          <a:lstStyle/>
-          <a:p>
-            <a:pPr indent="0" marL="0">
-              <a:spcAft>
-                <a:spcPts val="200"/>
-              </a:spcAft>
-              <a:buNone/>
+              <a:buSzPct val="100000"/>
+              <a:buChar char="•"/>
             </a:pPr>
             <a:r>
               <a:rPr lang="en-US" sz="2100" dirty="0">
@@ -5642,63 +5695,17 @@
                 <a:ea typeface="Calibri" pitchFamily="34" charset="-122"/>
                 <a:cs typeface="Calibri" pitchFamily="34" charset="-120"/>
               </a:rPr>
-              <a:t>A configuration file, the bitstream, sets every table and every switch</a:t>
+              <a:t>Built to finish one task as soon as possible</a:t>
             </a:r>
             <a:endParaRPr lang="en-US" sz="2100" dirty="0"/>
           </a:p>
-        </p:txBody>
-      </p:sp>
-      <p:sp>
-        <p:nvSpPr>
-          <p:cNvPr id="9" name="Shape 7"/>
-          <p:cNvSpPr/>
-          <p:nvPr/>
-        </p:nvSpPr>
-        <p:spPr>
-          <a:xfrm>
-            <a:off x="548640" y="4807458"/>
-            <a:ext cx="146304" cy="146304"/>
-          </a:xfrm>
-          <a:prstGeom prst="rect">
-            <a:avLst/>
-          </a:prstGeom>
-          <a:solidFill>
-            <a:srgbClr val="C7791B"/>
-          </a:solidFill>
-          <a:ln w="12700">
-            <a:solidFill>
-              <a:srgbClr val="C7791B"/>
-            </a:solidFill>
-            <a:prstDash val="solid"/>
-          </a:ln>
-        </p:spPr>
-      </p:sp>
-      <p:sp>
-        <p:nvSpPr>
-          <p:cNvPr id="10" name="Text 8"/>
-          <p:cNvSpPr txBox="1"/>
-          <p:nvPr/>
-        </p:nvSpPr>
-        <p:spPr>
-          <a:xfrm>
-            <a:off x="932688" y="4708779"/>
-            <a:ext cx="6565392" cy="650748"/>
-          </a:xfrm>
-          <a:prstGeom prst="rect">
-            <a:avLst/>
-          </a:prstGeom>
-          <a:noFill/>
-          <a:ln/>
-        </p:spPr>
-        <p:txBody>
-          <a:bodyPr wrap="square" lIns="0" tIns="0" rIns="0" bIns="0" rtlCol="0" anchor="t"/>
-          <a:lstStyle/>
-          <a:p>
-            <a:pPr indent="0" marL="0">
+          <a:p>
+            <a:pPr marL="203200" indent="-203200">
               <a:spcAft>
-                <a:spcPts val="200"/>
+                <a:spcPts val="800"/>
               </a:spcAft>
-              <a:buNone/>
+              <a:buSzPct val="100000"/>
+              <a:buChar char="•"/>
             </a:pPr>
             <a:r>
               <a:rPr lang="en-US" sz="2100" dirty="0">
@@ -5709,7 +5716,7 @@
                 <a:ea typeface="Calibri" pitchFamily="34" charset="-122"/>
                 <a:cs typeface="Calibri" pitchFamily="34" charset="-120"/>
               </a:rPr>
-              <a:t>Load another bitstream and the same chip is another circuit</a:t>
+              <a:t>At ease with branches and irregular data</a:t>
             </a:r>
             <a:endParaRPr lang="en-US" sz="2100" dirty="0"/>
           </a:p>
@@ -5717,24 +5724,26 @@
       </p:sp>
       <p:sp>
         <p:nvSpPr>
-          <p:cNvPr id="11" name="Shape 9"/>
+          <p:cNvPr id="6" name="Shape 4"/>
           <p:cNvSpPr/>
           <p:nvPr/>
         </p:nvSpPr>
         <p:spPr>
           <a:xfrm>
-            <a:off x="548640" y="5620131"/>
-            <a:ext cx="146304" cy="146304"/>
-          </a:xfrm>
-          <a:prstGeom prst="rect">
-            <a:avLst/>
+            <a:off x="6278728" y="1417320"/>
+            <a:ext cx="5364328" cy="4754880"/>
+          </a:xfrm>
+          <a:prstGeom prst="roundRect">
+            <a:avLst>
+              <a:gd name="adj" fmla="val 1538"/>
+            </a:avLst>
           </a:prstGeom>
           <a:solidFill>
-            <a:srgbClr val="0E7C86"/>
+            <a:srgbClr val="EEF2F4"/>
           </a:solidFill>
           <a:ln w="12700">
             <a:solidFill>
-              <a:srgbClr val="0E7C86"/>
+              <a:srgbClr val="EEF2F4"/>
             </a:solidFill>
             <a:prstDash val="solid"/>
           </a:ln>
@@ -5742,14 +5751,61 @@
       </p:sp>
       <p:sp>
         <p:nvSpPr>
-          <p:cNvPr id="12" name="Text 10"/>
+          <p:cNvPr id="7" name="Text 5"/>
           <p:cNvSpPr txBox="1"/>
           <p:nvPr/>
         </p:nvSpPr>
         <p:spPr>
           <a:xfrm>
-            <a:off x="932688" y="5521452"/>
-            <a:ext cx="6565392" cy="650748"/>
+            <a:off x="6553048" y="1645920"/>
+            <a:ext cx="4815688" cy="548640"/>
+          </a:xfrm>
+          <a:prstGeom prst="roundRect">
+            <a:avLst>
+              <a:gd name="adj" fmla="val 13333"/>
+            </a:avLst>
+          </a:prstGeom>
+          <a:solidFill>
+            <a:srgbClr val="C7791B"/>
+          </a:solidFill>
+          <a:ln>
+            <a:solidFill>
+              <a:srgbClr val="C7791B"/>
+            </a:solidFill>
+          </a:ln>
+        </p:spPr>
+        <p:txBody>
+          <a:bodyPr wrap="square" lIns="0" tIns="0" rIns="0" bIns="0" rtlCol="0" anchor="ctr"/>
+          <a:lstStyle/>
+          <a:p>
+            <a:pPr algn="ctr" indent="0" marL="0">
+              <a:buNone/>
+            </a:pPr>
+            <a:r>
+              <a:rPr lang="en-US" sz="1900" b="1" dirty="0">
+                <a:solidFill>
+                  <a:srgbClr val="FFFFFF"/>
+                </a:solidFill>
+                <a:latin typeface="Calibri" pitchFamily="34" charset="0"/>
+                <a:ea typeface="Calibri" pitchFamily="34" charset="-122"/>
+                <a:cs typeface="Calibri" pitchFamily="34" charset="-120"/>
+              </a:rPr>
+              <a:t>A GPU</a:t>
+            </a:r>
+            <a:endParaRPr lang="en-US" sz="1900" dirty="0"/>
+          </a:p>
+        </p:txBody>
+      </p:sp>
+      <p:sp>
+        <p:nvSpPr>
+          <p:cNvPr id="8" name="Text 6"/>
+          <p:cNvSpPr txBox="1"/>
+          <p:nvPr/>
+        </p:nvSpPr>
+        <p:spPr>
+          <a:xfrm>
+            <a:off x="6598768" y="2423160"/>
+            <a:ext cx="4724248" cy="3566160"/>
           </a:xfrm>
           <a:prstGeom prst="rect">
             <a:avLst/>
@@ -5761,11 +5817,12 @@
           <a:bodyPr wrap="square" lIns="0" tIns="0" rIns="0" bIns="0" rtlCol="0" anchor="t"/>
           <a:lstStyle/>
           <a:p>
-            <a:pPr indent="0" marL="0">
+            <a:pPr marL="203200" indent="-203200">
               <a:spcAft>
-                <a:spcPts val="200"/>
+                <a:spcPts val="800"/>
               </a:spcAft>
-              <a:buNone/>
+              <a:buSzPct val="100000"/>
+              <a:buChar char="•"/>
             </a:pPr>
             <a:r>
               <a:rPr lang="en-US" sz="2100" dirty="0">
@@ -5776,72 +5833,72 @@
                 <a:ea typeface="Calibri" pitchFamily="34" charset="-122"/>
                 <a:cs typeface="Calibri" pitchFamily="34" charset="-120"/>
               </a:rPr>
-              <a:t>First sold in 1985; today from a few euros to boards for data centres</a:t>
+              <a:t>Thousands of small, simple cores</a:t>
             </a:r>
             <a:endParaRPr lang="en-US" sz="2100" dirty="0"/>
           </a:p>
-        </p:txBody>
-      </p:sp>
-      <p:pic>
-        <p:nvPicPr>
-          <p:cNvPr id="13" name="Image 0" descr="/Users/raffaelemontella/devel/riscv-prg32/computer-architecture-with-prg32/tools/assets/pcb.jpg">    </p:cNvPr>
-          <p:cNvPicPr>
-            <a:picLocks noChangeAspect="1"/>
-          </p:cNvPicPr>
-          <p:nvPr/>
-        </p:nvPicPr>
-        <p:blipFill>
-          <a:blip r:embed="rId1"/>
-          <a:stretch>
-            <a:fillRect/>
-          </a:stretch>
-        </p:blipFill>
-        <p:spPr>
-          <a:xfrm>
-            <a:off x="7863840" y="2230837"/>
-            <a:ext cx="3779215" cy="2670645"/>
-          </a:xfrm>
-          <a:prstGeom prst="rect">
-            <a:avLst/>
-          </a:prstGeom>
-        </p:spPr>
-      </p:pic>
-      <p:sp>
-        <p:nvSpPr>
-          <p:cNvPr id="14" name="Text 11"/>
-          <p:cNvSpPr txBox="1"/>
-          <p:nvPr/>
-        </p:nvSpPr>
-        <p:spPr>
-          <a:xfrm>
-            <a:off x="7863840" y="5788152"/>
-            <a:ext cx="3779215" cy="384048"/>
-          </a:xfrm>
-          <a:prstGeom prst="rect">
-            <a:avLst/>
-          </a:prstGeom>
-          <a:noFill/>
-          <a:ln/>
-        </p:spPr>
-        <p:txBody>
-          <a:bodyPr wrap="square" lIns="0" tIns="0" rIns="0" bIns="0" rtlCol="0" anchor="ctr"/>
-          <a:lstStyle/>
-          <a:p>
-            <a:pPr algn="ctr" indent="0" marL="0">
-              <a:buNone/>
+          <a:p>
+            <a:pPr marL="203200" indent="-203200">
+              <a:spcAft>
+                <a:spcPts val="800"/>
+              </a:spcAft>
+              <a:buSzPct val="100000"/>
+              <a:buChar char="•"/>
             </a:pPr>
             <a:r>
-              <a:rPr lang="en-US" sz="1200" i="1" dirty="0">
+              <a:rPr lang="en-US" sz="2100" dirty="0">
                 <a:solidFill>
-                  <a:srgbClr val="5B6B78"/>
+                  <a:srgbClr val="1B2530"/>
                 </a:solidFill>
                 <a:latin typeface="Calibri" pitchFamily="34" charset="0"/>
                 <a:ea typeface="Calibri" pitchFamily="34" charset="-122"/>
                 <a:cs typeface="Calibri" pitchFamily="34" charset="-120"/>
               </a:rPr>
-              <a:t>Programmable logic sits on boards like any other chip</a:t>
+              <a:t>All executing the same code on different data</a:t>
             </a:r>
-            <a:endParaRPr lang="en-US" sz="1200" dirty="0"/>
+            <a:endParaRPr lang="en-US" sz="2100" dirty="0"/>
+          </a:p>
+          <a:p>
+            <a:pPr marL="203200" indent="-203200">
+              <a:spcAft>
+                <a:spcPts val="800"/>
+              </a:spcAft>
+              <a:buSzPct val="100000"/>
+              <a:buChar char="•"/>
+            </a:pPr>
+            <a:r>
+              <a:rPr lang="en-US" sz="2100" dirty="0">
+                <a:solidFill>
+                  <a:srgbClr val="1B2530"/>
+                </a:solidFill>
+                <a:latin typeface="Calibri" pitchFamily="34" charset="0"/>
+                <a:ea typeface="Calibri" pitchFamily="34" charset="-122"/>
+                <a:cs typeface="Calibri" pitchFamily="34" charset="-120"/>
+              </a:rPr>
+              <a:t>Built to finish a million tasks per second</a:t>
+            </a:r>
+            <a:endParaRPr lang="en-US" sz="2100" dirty="0"/>
+          </a:p>
+          <a:p>
+            <a:pPr marL="203200" indent="-203200">
+              <a:spcAft>
+                <a:spcPts val="800"/>
+              </a:spcAft>
+              <a:buSzPct val="100000"/>
+              <a:buChar char="•"/>
+            </a:pPr>
+            <a:r>
+              <a:rPr lang="en-US" sz="2100" dirty="0">
+                <a:solidFill>
+                  <a:srgbClr val="1B2530"/>
+                </a:solidFill>
+                <a:latin typeface="Calibri" pitchFamily="34" charset="0"/>
+                <a:ea typeface="Calibri" pitchFamily="34" charset="-122"/>
+                <a:cs typeface="Calibri" pitchFamily="34" charset="-120"/>
+              </a:rPr>
+              <a:t>At ease with regular arrays: pixels, matrices, grids</a:t>
+            </a:r>
+            <a:endParaRPr lang="en-US" sz="2100" dirty="0"/>
           </a:p>
         </p:txBody>
       </p:sp>
@@ -5953,1781 +6010,153 @@
                 <a:ea typeface="Cambria" pitchFamily="34" charset="-122"/>
                 <a:cs typeface="Cambria" pitchFamily="34" charset="-120"/>
               </a:rPr>
-              <a:t>A look-up table is a truth table in memory</a:t>
+              <a:t>A chip that becomes the circuit you describe</a:t>
             </a:r>
             <a:endParaRPr lang="en-US" sz="3200" dirty="0"/>
           </a:p>
         </p:txBody>
       </p:sp>
-      <p:graphicFrame>
-        <p:nvGraphicFramePr>
-          <p:cNvPr id="16" name="Table 0"/>
-          <p:cNvGraphicFramePr>
-            <a:graphicFrameLocks noGrp="1"/>
-          </p:cNvGraphicFramePr>
-          <p:nvPr>
-            <p:extLst>
-              <p:ext uri="{D42A27DB-BD31-4B8C-83A1-F6EECF244321}">
-                <p14:modId xmlns:p14="http://schemas.microsoft.com/office/powerpoint/2010/main" val="1579011935"/>
-              </p:ext>
-            </p:extLst>
-          </p:nvPr>
-        </p:nvGraphicFramePr>
-        <p:xfrm>
-          <a:off x="548640" y="1417320"/>
-          <a:ext cx="11094415" cy="914400"/>
-        </p:xfrm>
-        <a:graphic>
-          <a:graphicData uri="http://schemas.openxmlformats.org/drawingml/2006/table">
-            <a:tbl>
-              <a:tblPr/>
-              <a:tblGrid>
-                <a:gridCol w="1194783"/>
-                <a:gridCol w="1194783"/>
-                <a:gridCol w="2901616"/>
-                <a:gridCol w="2901616"/>
-                <a:gridCol w="2901616"/>
-              </a:tblGrid>
-              <a:tr h="0">
-                <a:tc>
-                  <a:txBody>
-                    <a:bodyPr/>
-                    <a:lstStyle/>
-                    <a:p>
-                      <a:pPr algn="l" indent="0" marL="0">
-                        <a:buNone/>
-                      </a:pPr>
-                      <a:r>
-                        <a:rPr lang="en-US" sz="2100" b="1" dirty="0">
-                          <a:solidFill>
-                            <a:srgbClr val="FFFFFF"/>
-                          </a:solidFill>
-                          <a:latin typeface="Calibri" pitchFamily="34" charset="0"/>
-                          <a:ea typeface="Calibri" pitchFamily="34" charset="-122"/>
-                          <a:cs typeface="Calibri" pitchFamily="34" charset="-120"/>
-                        </a:rPr>
-                        <a:t>a</a:t>
-                      </a:r>
-                      <a:endParaRPr lang="en-US" sz="2100" dirty="0">
-                        <a:latin typeface="Calibri" charset="0"/>
-                        <a:ea typeface="Calibri" charset="0"/>
-                        <a:cs typeface="Calibri" charset="0"/>
-                      </a:endParaRPr>
-                    </a:p>
-                  </a:txBody>
-                  <a:tcPr marL="101600" marR="101600" marT="50800" marB="50800" anchor="ctr">
-                    <a:lnL w="6350" cap="flat" cmpd="sng" algn="ctr">
-                      <a:solidFill>
-                        <a:srgbClr val="C9D2D8"/>
-                      </a:solidFill>
-                      <a:prstDash val="solid"/>
-                      <a:round/>
-                      <a:headEnd type="none" w="med" len="med"/>
-                      <a:tailEnd type="none" w="med" len="med"/>
-                    </a:lnL>
-                    <a:lnR w="6350" cap="flat" cmpd="sng" algn="ctr">
-                      <a:solidFill>
-                        <a:srgbClr val="C9D2D8"/>
-                      </a:solidFill>
-                      <a:prstDash val="solid"/>
-                      <a:round/>
-                      <a:headEnd type="none" w="med" len="med"/>
-                      <a:tailEnd type="none" w="med" len="med"/>
-                    </a:lnR>
-                    <a:lnT w="6350" cap="flat" cmpd="sng" algn="ctr">
-                      <a:solidFill>
-                        <a:srgbClr val="C9D2D8"/>
-                      </a:solidFill>
-                      <a:prstDash val="solid"/>
-                      <a:round/>
-                      <a:headEnd type="none" w="med" len="med"/>
-                      <a:tailEnd type="none" w="med" len="med"/>
-                    </a:lnT>
-                    <a:lnB w="6350" cap="flat" cmpd="sng" algn="ctr">
-                      <a:solidFill>
-                        <a:srgbClr val="C9D2D8"/>
-                      </a:solidFill>
-                      <a:prstDash val="solid"/>
-                      <a:round/>
-                      <a:headEnd type="none" w="med" len="med"/>
-                      <a:tailEnd type="none" w="med" len="med"/>
-                    </a:lnB>
-                    <a:solidFill>
-                      <a:srgbClr val="2E4A62"/>
-                    </a:solidFill>
-                  </a:tcPr>
-                </a:tc>
-                <a:tc>
-                  <a:txBody>
-                    <a:bodyPr/>
-                    <a:lstStyle/>
-                    <a:p>
-                      <a:pPr algn="l" indent="0" marL="0">
-                        <a:buNone/>
-                      </a:pPr>
-                      <a:r>
-                        <a:rPr lang="en-US" sz="2100" b="1" dirty="0">
-                          <a:solidFill>
-                            <a:srgbClr val="FFFFFF"/>
-                          </a:solidFill>
-                          <a:latin typeface="Calibri" pitchFamily="34" charset="0"/>
-                          <a:ea typeface="Calibri" pitchFamily="34" charset="-122"/>
-                          <a:cs typeface="Calibri" pitchFamily="34" charset="-120"/>
-                        </a:rPr>
-                        <a:t>b</a:t>
-                      </a:r>
-                      <a:endParaRPr lang="en-US" sz="2100" dirty="0">
-                        <a:latin typeface="Calibri" charset="0"/>
-                        <a:ea typeface="Calibri" charset="0"/>
-                        <a:cs typeface="Calibri" charset="0"/>
-                      </a:endParaRPr>
-                    </a:p>
-                  </a:txBody>
-                  <a:tcPr marL="101600" marR="101600" marT="50800" marB="50800" anchor="ctr">
-                    <a:lnL w="6350" cap="flat" cmpd="sng" algn="ctr">
-                      <a:solidFill>
-                        <a:srgbClr val="C9D2D8"/>
-                      </a:solidFill>
-                      <a:prstDash val="solid"/>
-                      <a:round/>
-                      <a:headEnd type="none" w="med" len="med"/>
-                      <a:tailEnd type="none" w="med" len="med"/>
-                    </a:lnL>
-                    <a:lnR w="6350" cap="flat" cmpd="sng" algn="ctr">
-                      <a:solidFill>
-                        <a:srgbClr val="C9D2D8"/>
-                      </a:solidFill>
-                      <a:prstDash val="solid"/>
-                      <a:round/>
-                      <a:headEnd type="none" w="med" len="med"/>
-                      <a:tailEnd type="none" w="med" len="med"/>
-                    </a:lnR>
-                    <a:lnT w="6350" cap="flat" cmpd="sng" algn="ctr">
-                      <a:solidFill>
-                        <a:srgbClr val="C9D2D8"/>
-                      </a:solidFill>
-                      <a:prstDash val="solid"/>
-                      <a:round/>
-                      <a:headEnd type="none" w="med" len="med"/>
-                      <a:tailEnd type="none" w="med" len="med"/>
-                    </a:lnT>
-                    <a:lnB w="6350" cap="flat" cmpd="sng" algn="ctr">
-                      <a:solidFill>
-                        <a:srgbClr val="C9D2D8"/>
-                      </a:solidFill>
-                      <a:prstDash val="solid"/>
-                      <a:round/>
-                      <a:headEnd type="none" w="med" len="med"/>
-                      <a:tailEnd type="none" w="med" len="med"/>
-                    </a:lnB>
-                    <a:solidFill>
-                      <a:srgbClr val="2E4A62"/>
-                    </a:solidFill>
-                  </a:tcPr>
-                </a:tc>
-                <a:tc>
-                  <a:txBody>
-                    <a:bodyPr/>
-                    <a:lstStyle/>
-                    <a:p>
-                      <a:pPr algn="l" indent="0" marL="0">
-                        <a:buNone/>
-                      </a:pPr>
-                      <a:r>
-                        <a:rPr lang="en-US" sz="2100" b="1" dirty="0">
-                          <a:solidFill>
-                            <a:srgbClr val="FFFFFF"/>
-                          </a:solidFill>
-                          <a:latin typeface="Calibri" pitchFamily="34" charset="0"/>
-                          <a:ea typeface="Calibri" pitchFamily="34" charset="-122"/>
-                          <a:cs typeface="Calibri" pitchFamily="34" charset="-120"/>
-                        </a:rPr>
-                        <a:t>stored for AND</a:t>
-                      </a:r>
-                      <a:endParaRPr lang="en-US" sz="2100" dirty="0">
-                        <a:latin typeface="Calibri" charset="0"/>
-                        <a:ea typeface="Calibri" charset="0"/>
-                        <a:cs typeface="Calibri" charset="0"/>
-                      </a:endParaRPr>
-                    </a:p>
-                  </a:txBody>
-                  <a:tcPr marL="101600" marR="101600" marT="50800" marB="50800" anchor="ctr">
-                    <a:lnL w="6350" cap="flat" cmpd="sng" algn="ctr">
-                      <a:solidFill>
-                        <a:srgbClr val="C9D2D8"/>
-                      </a:solidFill>
-                      <a:prstDash val="solid"/>
-                      <a:round/>
-                      <a:headEnd type="none" w="med" len="med"/>
-                      <a:tailEnd type="none" w="med" len="med"/>
-                    </a:lnL>
-                    <a:lnR w="6350" cap="flat" cmpd="sng" algn="ctr">
-                      <a:solidFill>
-                        <a:srgbClr val="C9D2D8"/>
-                      </a:solidFill>
-                      <a:prstDash val="solid"/>
-                      <a:round/>
-                      <a:headEnd type="none" w="med" len="med"/>
-                      <a:tailEnd type="none" w="med" len="med"/>
-                    </a:lnR>
-                    <a:lnT w="6350" cap="flat" cmpd="sng" algn="ctr">
-                      <a:solidFill>
-                        <a:srgbClr val="C9D2D8"/>
-                      </a:solidFill>
-                      <a:prstDash val="solid"/>
-                      <a:round/>
-                      <a:headEnd type="none" w="med" len="med"/>
-                      <a:tailEnd type="none" w="med" len="med"/>
-                    </a:lnT>
-                    <a:lnB w="6350" cap="flat" cmpd="sng" algn="ctr">
-                      <a:solidFill>
-                        <a:srgbClr val="C9D2D8"/>
-                      </a:solidFill>
-                      <a:prstDash val="solid"/>
-                      <a:round/>
-                      <a:headEnd type="none" w="med" len="med"/>
-                      <a:tailEnd type="none" w="med" len="med"/>
-                    </a:lnB>
-                    <a:solidFill>
-                      <a:srgbClr val="2E4A62"/>
-                    </a:solidFill>
-                  </a:tcPr>
-                </a:tc>
-                <a:tc>
-                  <a:txBody>
-                    <a:bodyPr/>
-                    <a:lstStyle/>
-                    <a:p>
-                      <a:pPr algn="l" indent="0" marL="0">
-                        <a:buNone/>
-                      </a:pPr>
-                      <a:r>
-                        <a:rPr lang="en-US" sz="2100" b="1" dirty="0">
-                          <a:solidFill>
-                            <a:srgbClr val="FFFFFF"/>
-                          </a:solidFill>
-                          <a:latin typeface="Calibri" pitchFamily="34" charset="0"/>
-                          <a:ea typeface="Calibri" pitchFamily="34" charset="-122"/>
-                          <a:cs typeface="Calibri" pitchFamily="34" charset="-120"/>
-                        </a:rPr>
-                        <a:t>stored for XOR</a:t>
-                      </a:r>
-                      <a:endParaRPr lang="en-US" sz="2100" dirty="0">
-                        <a:latin typeface="Calibri" charset="0"/>
-                        <a:ea typeface="Calibri" charset="0"/>
-                        <a:cs typeface="Calibri" charset="0"/>
-                      </a:endParaRPr>
-                    </a:p>
-                  </a:txBody>
-                  <a:tcPr marL="101600" marR="101600" marT="50800" marB="50800" anchor="ctr">
-                    <a:lnL w="6350" cap="flat" cmpd="sng" algn="ctr">
-                      <a:solidFill>
-                        <a:srgbClr val="C9D2D8"/>
-                      </a:solidFill>
-                      <a:prstDash val="solid"/>
-                      <a:round/>
-                      <a:headEnd type="none" w="med" len="med"/>
-                      <a:tailEnd type="none" w="med" len="med"/>
-                    </a:lnL>
-                    <a:lnR w="6350" cap="flat" cmpd="sng" algn="ctr">
-                      <a:solidFill>
-                        <a:srgbClr val="C9D2D8"/>
-                      </a:solidFill>
-                      <a:prstDash val="solid"/>
-                      <a:round/>
-                      <a:headEnd type="none" w="med" len="med"/>
-                      <a:tailEnd type="none" w="med" len="med"/>
-                    </a:lnR>
-                    <a:lnT w="6350" cap="flat" cmpd="sng" algn="ctr">
-                      <a:solidFill>
-                        <a:srgbClr val="C9D2D8"/>
-                      </a:solidFill>
-                      <a:prstDash val="solid"/>
-                      <a:round/>
-                      <a:headEnd type="none" w="med" len="med"/>
-                      <a:tailEnd type="none" w="med" len="med"/>
-                    </a:lnT>
-                    <a:lnB w="6350" cap="flat" cmpd="sng" algn="ctr">
-                      <a:solidFill>
-                        <a:srgbClr val="C9D2D8"/>
-                      </a:solidFill>
-                      <a:prstDash val="solid"/>
-                      <a:round/>
-                      <a:headEnd type="none" w="med" len="med"/>
-                      <a:tailEnd type="none" w="med" len="med"/>
-                    </a:lnB>
-                    <a:solidFill>
-                      <a:srgbClr val="2E4A62"/>
-                    </a:solidFill>
-                  </a:tcPr>
-                </a:tc>
-                <a:tc>
-                  <a:txBody>
-                    <a:bodyPr/>
-                    <a:lstStyle/>
-                    <a:p>
-                      <a:pPr algn="l" indent="0" marL="0">
-                        <a:buNone/>
-                      </a:pPr>
-                      <a:r>
-                        <a:rPr lang="en-US" sz="2100" b="1" dirty="0">
-                          <a:solidFill>
-                            <a:srgbClr val="FFFFFF"/>
-                          </a:solidFill>
-                          <a:latin typeface="Calibri" pitchFamily="34" charset="0"/>
-                          <a:ea typeface="Calibri" pitchFamily="34" charset="-122"/>
-                          <a:cs typeface="Calibri" pitchFamily="34" charset="-120"/>
-                        </a:rPr>
-                        <a:t>stored for NOT a</a:t>
-                      </a:r>
-                      <a:endParaRPr lang="en-US" sz="2100" dirty="0">
-                        <a:latin typeface="Calibri" charset="0"/>
-                        <a:ea typeface="Calibri" charset="0"/>
-                        <a:cs typeface="Calibri" charset="0"/>
-                      </a:endParaRPr>
-                    </a:p>
-                  </a:txBody>
-                  <a:tcPr marL="101600" marR="101600" marT="50800" marB="50800" anchor="ctr">
-                    <a:lnL w="6350" cap="flat" cmpd="sng" algn="ctr">
-                      <a:solidFill>
-                        <a:srgbClr val="C9D2D8"/>
-                      </a:solidFill>
-                      <a:prstDash val="solid"/>
-                      <a:round/>
-                      <a:headEnd type="none" w="med" len="med"/>
-                      <a:tailEnd type="none" w="med" len="med"/>
-                    </a:lnL>
-                    <a:lnR w="6350" cap="flat" cmpd="sng" algn="ctr">
-                      <a:solidFill>
-                        <a:srgbClr val="C9D2D8"/>
-                      </a:solidFill>
-                      <a:prstDash val="solid"/>
-                      <a:round/>
-                      <a:headEnd type="none" w="med" len="med"/>
-                      <a:tailEnd type="none" w="med" len="med"/>
-                    </a:lnR>
-                    <a:lnT w="6350" cap="flat" cmpd="sng" algn="ctr">
-                      <a:solidFill>
-                        <a:srgbClr val="C9D2D8"/>
-                      </a:solidFill>
-                      <a:prstDash val="solid"/>
-                      <a:round/>
-                      <a:headEnd type="none" w="med" len="med"/>
-                      <a:tailEnd type="none" w="med" len="med"/>
-                    </a:lnT>
-                    <a:lnB w="6350" cap="flat" cmpd="sng" algn="ctr">
-                      <a:solidFill>
-                        <a:srgbClr val="C9D2D8"/>
-                      </a:solidFill>
-                      <a:prstDash val="solid"/>
-                      <a:round/>
-                      <a:headEnd type="none" w="med" len="med"/>
-                      <a:tailEnd type="none" w="med" len="med"/>
-                    </a:lnB>
-                    <a:solidFill>
-                      <a:srgbClr val="2E4A62"/>
-                    </a:solidFill>
-                  </a:tcPr>
-                </a:tc>
-              </a:tr>
-              <a:tr h="0">
-                <a:tc>
-                  <a:txBody>
-                    <a:bodyPr/>
-                    <a:lstStyle/>
-                    <a:p>
-                      <a:pPr algn="l" indent="0" marL="0">
-                        <a:buNone/>
-                      </a:pPr>
-                      <a:r>
-                        <a:rPr lang="en-US" sz="2100" dirty="0">
-                          <a:solidFill>
-                            <a:srgbClr val="1B2530"/>
-                          </a:solidFill>
-                          <a:latin typeface="Courier New" pitchFamily="34" charset="0"/>
-                          <a:ea typeface="Courier New" pitchFamily="34" charset="-122"/>
-                          <a:cs typeface="Courier New" pitchFamily="34" charset="-120"/>
-                        </a:rPr>
-                        <a:t>0</a:t>
-                      </a:r>
-                      <a:endParaRPr lang="en-US" sz="2100" dirty="0">
-                        <a:latin typeface="Courier New" charset="0"/>
-                        <a:ea typeface="Courier New" charset="0"/>
-                        <a:cs typeface="Courier New" charset="0"/>
-                      </a:endParaRPr>
-                    </a:p>
-                  </a:txBody>
-                  <a:tcPr marL="101600" marR="101600" marT="50800" marB="50800" anchor="ctr">
-                    <a:lnL w="6350" cap="flat" cmpd="sng" algn="ctr">
-                      <a:solidFill>
-                        <a:srgbClr val="C9D2D8"/>
-                      </a:solidFill>
-                      <a:prstDash val="solid"/>
-                      <a:round/>
-                      <a:headEnd type="none" w="med" len="med"/>
-                      <a:tailEnd type="none" w="med" len="med"/>
-                    </a:lnL>
-                    <a:lnR w="6350" cap="flat" cmpd="sng" algn="ctr">
-                      <a:solidFill>
-                        <a:srgbClr val="C9D2D8"/>
-                      </a:solidFill>
-                      <a:prstDash val="solid"/>
-                      <a:round/>
-                      <a:headEnd type="none" w="med" len="med"/>
-                      <a:tailEnd type="none" w="med" len="med"/>
-                    </a:lnR>
-                    <a:lnT w="6350" cap="flat" cmpd="sng" algn="ctr">
-                      <a:solidFill>
-                        <a:srgbClr val="C9D2D8"/>
-                      </a:solidFill>
-                      <a:prstDash val="solid"/>
-                      <a:round/>
-                      <a:headEnd type="none" w="med" len="med"/>
-                      <a:tailEnd type="none" w="med" len="med"/>
-                    </a:lnT>
-                    <a:lnB w="6350" cap="flat" cmpd="sng" algn="ctr">
-                      <a:solidFill>
-                        <a:srgbClr val="C9D2D8"/>
-                      </a:solidFill>
-                      <a:prstDash val="solid"/>
-                      <a:round/>
-                      <a:headEnd type="none" w="med" len="med"/>
-                      <a:tailEnd type="none" w="med" len="med"/>
-                    </a:lnB>
-                    <a:solidFill>
-                      <a:srgbClr val="EEF2F4"/>
-                    </a:solidFill>
-                  </a:tcPr>
-                </a:tc>
-                <a:tc>
-                  <a:txBody>
-                    <a:bodyPr/>
-                    <a:lstStyle/>
-                    <a:p>
-                      <a:pPr algn="l" indent="0" marL="0">
-                        <a:buNone/>
-                      </a:pPr>
-                      <a:r>
-                        <a:rPr lang="en-US" sz="2100" dirty="0">
-                          <a:solidFill>
-                            <a:srgbClr val="1B2530"/>
-                          </a:solidFill>
-                          <a:latin typeface="Courier New" pitchFamily="34" charset="0"/>
-                          <a:ea typeface="Courier New" pitchFamily="34" charset="-122"/>
-                          <a:cs typeface="Courier New" pitchFamily="34" charset="-120"/>
-                        </a:rPr>
-                        <a:t>0</a:t>
-                      </a:r>
-                      <a:endParaRPr lang="en-US" sz="2100" dirty="0">
-                        <a:latin typeface="Courier New" charset="0"/>
-                        <a:ea typeface="Courier New" charset="0"/>
-                        <a:cs typeface="Courier New" charset="0"/>
-                      </a:endParaRPr>
-                    </a:p>
-                  </a:txBody>
-                  <a:tcPr marL="101600" marR="101600" marT="50800" marB="50800" anchor="ctr">
-                    <a:lnL w="6350" cap="flat" cmpd="sng" algn="ctr">
-                      <a:solidFill>
-                        <a:srgbClr val="C9D2D8"/>
-                      </a:solidFill>
-                      <a:prstDash val="solid"/>
-                      <a:round/>
-                      <a:headEnd type="none" w="med" len="med"/>
-                      <a:tailEnd type="none" w="med" len="med"/>
-                    </a:lnL>
-                    <a:lnR w="6350" cap="flat" cmpd="sng" algn="ctr">
-                      <a:solidFill>
-                        <a:srgbClr val="C9D2D8"/>
-                      </a:solidFill>
-                      <a:prstDash val="solid"/>
-                      <a:round/>
-                      <a:headEnd type="none" w="med" len="med"/>
-                      <a:tailEnd type="none" w="med" len="med"/>
-                    </a:lnR>
-                    <a:lnT w="6350" cap="flat" cmpd="sng" algn="ctr">
-                      <a:solidFill>
-                        <a:srgbClr val="C9D2D8"/>
-                      </a:solidFill>
-                      <a:prstDash val="solid"/>
-                      <a:round/>
-                      <a:headEnd type="none" w="med" len="med"/>
-                      <a:tailEnd type="none" w="med" len="med"/>
-                    </a:lnT>
-                    <a:lnB w="6350" cap="flat" cmpd="sng" algn="ctr">
-                      <a:solidFill>
-                        <a:srgbClr val="C9D2D8"/>
-                      </a:solidFill>
-                      <a:prstDash val="solid"/>
-                      <a:round/>
-                      <a:headEnd type="none" w="med" len="med"/>
-                      <a:tailEnd type="none" w="med" len="med"/>
-                    </a:lnB>
-                    <a:solidFill>
-                      <a:srgbClr val="EEF2F4"/>
-                    </a:solidFill>
-                  </a:tcPr>
-                </a:tc>
-                <a:tc>
-                  <a:txBody>
-                    <a:bodyPr/>
-                    <a:lstStyle/>
-                    <a:p>
-                      <a:pPr algn="l" indent="0" marL="0">
-                        <a:buNone/>
-                      </a:pPr>
-                      <a:r>
-                        <a:rPr lang="en-US" sz="2100" dirty="0">
-                          <a:solidFill>
-                            <a:srgbClr val="1B2530"/>
-                          </a:solidFill>
-                          <a:latin typeface="Courier New" pitchFamily="34" charset="0"/>
-                          <a:ea typeface="Courier New" pitchFamily="34" charset="-122"/>
-                          <a:cs typeface="Courier New" pitchFamily="34" charset="-120"/>
-                        </a:rPr>
-                        <a:t>0</a:t>
-                      </a:r>
-                      <a:endParaRPr lang="en-US" sz="2100" dirty="0">
-                        <a:latin typeface="Courier New" charset="0"/>
-                        <a:ea typeface="Courier New" charset="0"/>
-                        <a:cs typeface="Courier New" charset="0"/>
-                      </a:endParaRPr>
-                    </a:p>
-                  </a:txBody>
-                  <a:tcPr marL="101600" marR="101600" marT="50800" marB="50800" anchor="ctr">
-                    <a:lnL w="6350" cap="flat" cmpd="sng" algn="ctr">
-                      <a:solidFill>
-                        <a:srgbClr val="C9D2D8"/>
-                      </a:solidFill>
-                      <a:prstDash val="solid"/>
-                      <a:round/>
-                      <a:headEnd type="none" w="med" len="med"/>
-                      <a:tailEnd type="none" w="med" len="med"/>
-                    </a:lnL>
-                    <a:lnR w="6350" cap="flat" cmpd="sng" algn="ctr">
-                      <a:solidFill>
-                        <a:srgbClr val="C9D2D8"/>
-                      </a:solidFill>
-                      <a:prstDash val="solid"/>
-                      <a:round/>
-                      <a:headEnd type="none" w="med" len="med"/>
-                      <a:tailEnd type="none" w="med" len="med"/>
-                    </a:lnR>
-                    <a:lnT w="6350" cap="flat" cmpd="sng" algn="ctr">
-                      <a:solidFill>
-                        <a:srgbClr val="C9D2D8"/>
-                      </a:solidFill>
-                      <a:prstDash val="solid"/>
-                      <a:round/>
-                      <a:headEnd type="none" w="med" len="med"/>
-                      <a:tailEnd type="none" w="med" len="med"/>
-                    </a:lnT>
-                    <a:lnB w="6350" cap="flat" cmpd="sng" algn="ctr">
-                      <a:solidFill>
-                        <a:srgbClr val="C9D2D8"/>
-                      </a:solidFill>
-                      <a:prstDash val="solid"/>
-                      <a:round/>
-                      <a:headEnd type="none" w="med" len="med"/>
-                      <a:tailEnd type="none" w="med" len="med"/>
-                    </a:lnB>
-                    <a:solidFill>
-                      <a:srgbClr val="EEF2F4"/>
-                    </a:solidFill>
-                  </a:tcPr>
-                </a:tc>
-                <a:tc>
-                  <a:txBody>
-                    <a:bodyPr/>
-                    <a:lstStyle/>
-                    <a:p>
-                      <a:pPr algn="l" indent="0" marL="0">
-                        <a:buNone/>
-                      </a:pPr>
-                      <a:r>
-                        <a:rPr lang="en-US" sz="2100" dirty="0">
-                          <a:solidFill>
-                            <a:srgbClr val="1B2530"/>
-                          </a:solidFill>
-                          <a:latin typeface="Courier New" pitchFamily="34" charset="0"/>
-                          <a:ea typeface="Courier New" pitchFamily="34" charset="-122"/>
-                          <a:cs typeface="Courier New" pitchFamily="34" charset="-120"/>
-                        </a:rPr>
-                        <a:t>0</a:t>
-                      </a:r>
-                      <a:endParaRPr lang="en-US" sz="2100" dirty="0">
-                        <a:latin typeface="Courier New" charset="0"/>
-                        <a:ea typeface="Courier New" charset="0"/>
-                        <a:cs typeface="Courier New" charset="0"/>
-                      </a:endParaRPr>
-                    </a:p>
-                  </a:txBody>
-                  <a:tcPr marL="101600" marR="101600" marT="50800" marB="50800" anchor="ctr">
-                    <a:lnL w="6350" cap="flat" cmpd="sng" algn="ctr">
-                      <a:solidFill>
-                        <a:srgbClr val="C9D2D8"/>
-                      </a:solidFill>
-                      <a:prstDash val="solid"/>
-                      <a:round/>
-                      <a:headEnd type="none" w="med" len="med"/>
-                      <a:tailEnd type="none" w="med" len="med"/>
-                    </a:lnL>
-                    <a:lnR w="6350" cap="flat" cmpd="sng" algn="ctr">
-                      <a:solidFill>
-                        <a:srgbClr val="C9D2D8"/>
-                      </a:solidFill>
-                      <a:prstDash val="solid"/>
-                      <a:round/>
-                      <a:headEnd type="none" w="med" len="med"/>
-                      <a:tailEnd type="none" w="med" len="med"/>
-                    </a:lnR>
-                    <a:lnT w="6350" cap="flat" cmpd="sng" algn="ctr">
-                      <a:solidFill>
-                        <a:srgbClr val="C9D2D8"/>
-                      </a:solidFill>
-                      <a:prstDash val="solid"/>
-                      <a:round/>
-                      <a:headEnd type="none" w="med" len="med"/>
-                      <a:tailEnd type="none" w="med" len="med"/>
-                    </a:lnT>
-                    <a:lnB w="6350" cap="flat" cmpd="sng" algn="ctr">
-                      <a:solidFill>
-                        <a:srgbClr val="C9D2D8"/>
-                      </a:solidFill>
-                      <a:prstDash val="solid"/>
-                      <a:round/>
-                      <a:headEnd type="none" w="med" len="med"/>
-                      <a:tailEnd type="none" w="med" len="med"/>
-                    </a:lnB>
-                    <a:solidFill>
-                      <a:srgbClr val="EEF2F4"/>
-                    </a:solidFill>
-                  </a:tcPr>
-                </a:tc>
-                <a:tc>
-                  <a:txBody>
-                    <a:bodyPr/>
-                    <a:lstStyle/>
-                    <a:p>
-                      <a:pPr algn="l" indent="0" marL="0">
-                        <a:buNone/>
-                      </a:pPr>
-                      <a:r>
-                        <a:rPr lang="en-US" sz="2100" dirty="0">
-                          <a:solidFill>
-                            <a:srgbClr val="1B2530"/>
-                          </a:solidFill>
-                          <a:latin typeface="Courier New" pitchFamily="34" charset="0"/>
-                          <a:ea typeface="Courier New" pitchFamily="34" charset="-122"/>
-                          <a:cs typeface="Courier New" pitchFamily="34" charset="-120"/>
-                        </a:rPr>
-                        <a:t>1</a:t>
-                      </a:r>
-                      <a:endParaRPr lang="en-US" sz="2100" dirty="0">
-                        <a:latin typeface="Courier New" charset="0"/>
-                        <a:ea typeface="Courier New" charset="0"/>
-                        <a:cs typeface="Courier New" charset="0"/>
-                      </a:endParaRPr>
-                    </a:p>
-                  </a:txBody>
-                  <a:tcPr marL="101600" marR="101600" marT="50800" marB="50800" anchor="ctr">
-                    <a:lnL w="6350" cap="flat" cmpd="sng" algn="ctr">
-                      <a:solidFill>
-                        <a:srgbClr val="C9D2D8"/>
-                      </a:solidFill>
-                      <a:prstDash val="solid"/>
-                      <a:round/>
-                      <a:headEnd type="none" w="med" len="med"/>
-                      <a:tailEnd type="none" w="med" len="med"/>
-                    </a:lnL>
-                    <a:lnR w="6350" cap="flat" cmpd="sng" algn="ctr">
-                      <a:solidFill>
-                        <a:srgbClr val="C9D2D8"/>
-                      </a:solidFill>
-                      <a:prstDash val="solid"/>
-                      <a:round/>
-                      <a:headEnd type="none" w="med" len="med"/>
-                      <a:tailEnd type="none" w="med" len="med"/>
-                    </a:lnR>
-                    <a:lnT w="6350" cap="flat" cmpd="sng" algn="ctr">
-                      <a:solidFill>
-                        <a:srgbClr val="C9D2D8"/>
-                      </a:solidFill>
-                      <a:prstDash val="solid"/>
-                      <a:round/>
-                      <a:headEnd type="none" w="med" len="med"/>
-                      <a:tailEnd type="none" w="med" len="med"/>
-                    </a:lnT>
-                    <a:lnB w="6350" cap="flat" cmpd="sng" algn="ctr">
-                      <a:solidFill>
-                        <a:srgbClr val="C9D2D8"/>
-                      </a:solidFill>
-                      <a:prstDash val="solid"/>
-                      <a:round/>
-                      <a:headEnd type="none" w="med" len="med"/>
-                      <a:tailEnd type="none" w="med" len="med"/>
-                    </a:lnB>
-                    <a:solidFill>
-                      <a:srgbClr val="EEF2F4"/>
-                    </a:solidFill>
-                  </a:tcPr>
-                </a:tc>
-              </a:tr>
-              <a:tr h="0">
-                <a:tc>
-                  <a:txBody>
-                    <a:bodyPr/>
-                    <a:lstStyle/>
-                    <a:p>
-                      <a:pPr algn="l" indent="0" marL="0">
-                        <a:buNone/>
-                      </a:pPr>
-                      <a:r>
-                        <a:rPr lang="en-US" sz="2100" dirty="0">
-                          <a:solidFill>
-                            <a:srgbClr val="1B2530"/>
-                          </a:solidFill>
-                          <a:latin typeface="Courier New" pitchFamily="34" charset="0"/>
-                          <a:ea typeface="Courier New" pitchFamily="34" charset="-122"/>
-                          <a:cs typeface="Courier New" pitchFamily="34" charset="-120"/>
-                        </a:rPr>
-                        <a:t>0</a:t>
-                      </a:r>
-                      <a:endParaRPr lang="en-US" sz="2100" dirty="0">
-                        <a:latin typeface="Courier New" charset="0"/>
-                        <a:ea typeface="Courier New" charset="0"/>
-                        <a:cs typeface="Courier New" charset="0"/>
-                      </a:endParaRPr>
-                    </a:p>
-                  </a:txBody>
-                  <a:tcPr marL="101600" marR="101600" marT="50800" marB="50800" anchor="ctr">
-                    <a:lnL w="6350" cap="flat" cmpd="sng" algn="ctr">
-                      <a:solidFill>
-                        <a:srgbClr val="C9D2D8"/>
-                      </a:solidFill>
-                      <a:prstDash val="solid"/>
-                      <a:round/>
-                      <a:headEnd type="none" w="med" len="med"/>
-                      <a:tailEnd type="none" w="med" len="med"/>
-                    </a:lnL>
-                    <a:lnR w="6350" cap="flat" cmpd="sng" algn="ctr">
-                      <a:solidFill>
-                        <a:srgbClr val="C9D2D8"/>
-                      </a:solidFill>
-                      <a:prstDash val="solid"/>
-                      <a:round/>
-                      <a:headEnd type="none" w="med" len="med"/>
-                      <a:tailEnd type="none" w="med" len="med"/>
-                    </a:lnR>
-                    <a:lnT w="6350" cap="flat" cmpd="sng" algn="ctr">
-                      <a:solidFill>
-                        <a:srgbClr val="C9D2D8"/>
-                      </a:solidFill>
-                      <a:prstDash val="solid"/>
-                      <a:round/>
-                      <a:headEnd type="none" w="med" len="med"/>
-                      <a:tailEnd type="none" w="med" len="med"/>
-                    </a:lnT>
-                    <a:lnB w="6350" cap="flat" cmpd="sng" algn="ctr">
-                      <a:solidFill>
-                        <a:srgbClr val="C9D2D8"/>
-                      </a:solidFill>
-                      <a:prstDash val="solid"/>
-                      <a:round/>
-                      <a:headEnd type="none" w="med" len="med"/>
-                      <a:tailEnd type="none" w="med" len="med"/>
-                    </a:lnB>
-                    <a:solidFill>
-                      <a:srgbClr val="FFFFFF"/>
-                    </a:solidFill>
-                  </a:tcPr>
-                </a:tc>
-                <a:tc>
-                  <a:txBody>
-                    <a:bodyPr/>
-                    <a:lstStyle/>
-                    <a:p>
-                      <a:pPr algn="l" indent="0" marL="0">
-                        <a:buNone/>
-                      </a:pPr>
-                      <a:r>
-                        <a:rPr lang="en-US" sz="2100" dirty="0">
-                          <a:solidFill>
-                            <a:srgbClr val="1B2530"/>
-                          </a:solidFill>
-                          <a:latin typeface="Courier New" pitchFamily="34" charset="0"/>
-                          <a:ea typeface="Courier New" pitchFamily="34" charset="-122"/>
-                          <a:cs typeface="Courier New" pitchFamily="34" charset="-120"/>
-                        </a:rPr>
-                        <a:t>1</a:t>
-                      </a:r>
-                      <a:endParaRPr lang="en-US" sz="2100" dirty="0">
-                        <a:latin typeface="Courier New" charset="0"/>
-                        <a:ea typeface="Courier New" charset="0"/>
-                        <a:cs typeface="Courier New" charset="0"/>
-                      </a:endParaRPr>
-                    </a:p>
-                  </a:txBody>
-                  <a:tcPr marL="101600" marR="101600" marT="50800" marB="50800" anchor="ctr">
-                    <a:lnL w="6350" cap="flat" cmpd="sng" algn="ctr">
-                      <a:solidFill>
-                        <a:srgbClr val="C9D2D8"/>
-                      </a:solidFill>
-                      <a:prstDash val="solid"/>
-                      <a:round/>
-                      <a:headEnd type="none" w="med" len="med"/>
-                      <a:tailEnd type="none" w="med" len="med"/>
-                    </a:lnL>
-                    <a:lnR w="6350" cap="flat" cmpd="sng" algn="ctr">
-                      <a:solidFill>
-                        <a:srgbClr val="C9D2D8"/>
-                      </a:solidFill>
-                      <a:prstDash val="solid"/>
-                      <a:round/>
-                      <a:headEnd type="none" w="med" len="med"/>
-                      <a:tailEnd type="none" w="med" len="med"/>
-                    </a:lnR>
-                    <a:lnT w="6350" cap="flat" cmpd="sng" algn="ctr">
-                      <a:solidFill>
-                        <a:srgbClr val="C9D2D8"/>
-                      </a:solidFill>
-                      <a:prstDash val="solid"/>
-                      <a:round/>
-                      <a:headEnd type="none" w="med" len="med"/>
-                      <a:tailEnd type="none" w="med" len="med"/>
-                    </a:lnT>
-                    <a:lnB w="6350" cap="flat" cmpd="sng" algn="ctr">
-                      <a:solidFill>
-                        <a:srgbClr val="C9D2D8"/>
-                      </a:solidFill>
-                      <a:prstDash val="solid"/>
-                      <a:round/>
-                      <a:headEnd type="none" w="med" len="med"/>
-                      <a:tailEnd type="none" w="med" len="med"/>
-                    </a:lnB>
-                    <a:solidFill>
-                      <a:srgbClr val="FFFFFF"/>
-                    </a:solidFill>
-                  </a:tcPr>
-                </a:tc>
-                <a:tc>
-                  <a:txBody>
-                    <a:bodyPr/>
-                    <a:lstStyle/>
-                    <a:p>
-                      <a:pPr algn="l" indent="0" marL="0">
-                        <a:buNone/>
-                      </a:pPr>
-                      <a:r>
-                        <a:rPr lang="en-US" sz="2100" dirty="0">
-                          <a:solidFill>
-                            <a:srgbClr val="1B2530"/>
-                          </a:solidFill>
-                          <a:latin typeface="Courier New" pitchFamily="34" charset="0"/>
-                          <a:ea typeface="Courier New" pitchFamily="34" charset="-122"/>
-                          <a:cs typeface="Courier New" pitchFamily="34" charset="-120"/>
-                        </a:rPr>
-                        <a:t>0</a:t>
-                      </a:r>
-                      <a:endParaRPr lang="en-US" sz="2100" dirty="0">
-                        <a:latin typeface="Courier New" charset="0"/>
-                        <a:ea typeface="Courier New" charset="0"/>
-                        <a:cs typeface="Courier New" charset="0"/>
-                      </a:endParaRPr>
-                    </a:p>
-                  </a:txBody>
-                  <a:tcPr marL="101600" marR="101600" marT="50800" marB="50800" anchor="ctr">
-                    <a:lnL w="6350" cap="flat" cmpd="sng" algn="ctr">
-                      <a:solidFill>
-                        <a:srgbClr val="C9D2D8"/>
-                      </a:solidFill>
-                      <a:prstDash val="solid"/>
-                      <a:round/>
-                      <a:headEnd type="none" w="med" len="med"/>
-                      <a:tailEnd type="none" w="med" len="med"/>
-                    </a:lnL>
-                    <a:lnR w="6350" cap="flat" cmpd="sng" algn="ctr">
-                      <a:solidFill>
-                        <a:srgbClr val="C9D2D8"/>
-                      </a:solidFill>
-                      <a:prstDash val="solid"/>
-                      <a:round/>
-                      <a:headEnd type="none" w="med" len="med"/>
-                      <a:tailEnd type="none" w="med" len="med"/>
-                    </a:lnR>
-                    <a:lnT w="6350" cap="flat" cmpd="sng" algn="ctr">
-                      <a:solidFill>
-                        <a:srgbClr val="C9D2D8"/>
-                      </a:solidFill>
-                      <a:prstDash val="solid"/>
-                      <a:round/>
-                      <a:headEnd type="none" w="med" len="med"/>
-                      <a:tailEnd type="none" w="med" len="med"/>
-                    </a:lnT>
-                    <a:lnB w="6350" cap="flat" cmpd="sng" algn="ctr">
-                      <a:solidFill>
-                        <a:srgbClr val="C9D2D8"/>
-                      </a:solidFill>
-                      <a:prstDash val="solid"/>
-                      <a:round/>
-                      <a:headEnd type="none" w="med" len="med"/>
-                      <a:tailEnd type="none" w="med" len="med"/>
-                    </a:lnB>
-                    <a:solidFill>
-                      <a:srgbClr val="FFFFFF"/>
-                    </a:solidFill>
-                  </a:tcPr>
-                </a:tc>
-                <a:tc>
-                  <a:txBody>
-                    <a:bodyPr/>
-                    <a:lstStyle/>
-                    <a:p>
-                      <a:pPr algn="l" indent="0" marL="0">
-                        <a:buNone/>
-                      </a:pPr>
-                      <a:r>
-                        <a:rPr lang="en-US" sz="2100" dirty="0">
-                          <a:solidFill>
-                            <a:srgbClr val="1B2530"/>
-                          </a:solidFill>
-                          <a:latin typeface="Courier New" pitchFamily="34" charset="0"/>
-                          <a:ea typeface="Courier New" pitchFamily="34" charset="-122"/>
-                          <a:cs typeface="Courier New" pitchFamily="34" charset="-120"/>
-                        </a:rPr>
-                        <a:t>1</a:t>
-                      </a:r>
-                      <a:endParaRPr lang="en-US" sz="2100" dirty="0">
-                        <a:latin typeface="Courier New" charset="0"/>
-                        <a:ea typeface="Courier New" charset="0"/>
-                        <a:cs typeface="Courier New" charset="0"/>
-                      </a:endParaRPr>
-                    </a:p>
-                  </a:txBody>
-                  <a:tcPr marL="101600" marR="101600" marT="50800" marB="50800" anchor="ctr">
-                    <a:lnL w="6350" cap="flat" cmpd="sng" algn="ctr">
-                      <a:solidFill>
-                        <a:srgbClr val="C9D2D8"/>
-                      </a:solidFill>
-                      <a:prstDash val="solid"/>
-                      <a:round/>
-                      <a:headEnd type="none" w="med" len="med"/>
-                      <a:tailEnd type="none" w="med" len="med"/>
-                    </a:lnL>
-                    <a:lnR w="6350" cap="flat" cmpd="sng" algn="ctr">
-                      <a:solidFill>
-                        <a:srgbClr val="C9D2D8"/>
-                      </a:solidFill>
-                      <a:prstDash val="solid"/>
-                      <a:round/>
-                      <a:headEnd type="none" w="med" len="med"/>
-                      <a:tailEnd type="none" w="med" len="med"/>
-                    </a:lnR>
-                    <a:lnT w="6350" cap="flat" cmpd="sng" algn="ctr">
-                      <a:solidFill>
-                        <a:srgbClr val="C9D2D8"/>
-                      </a:solidFill>
-                      <a:prstDash val="solid"/>
-                      <a:round/>
-                      <a:headEnd type="none" w="med" len="med"/>
-                      <a:tailEnd type="none" w="med" len="med"/>
-                    </a:lnT>
-                    <a:lnB w="6350" cap="flat" cmpd="sng" algn="ctr">
-                      <a:solidFill>
-                        <a:srgbClr val="C9D2D8"/>
-                      </a:solidFill>
-                      <a:prstDash val="solid"/>
-                      <a:round/>
-                      <a:headEnd type="none" w="med" len="med"/>
-                      <a:tailEnd type="none" w="med" len="med"/>
-                    </a:lnB>
-                    <a:solidFill>
-                      <a:srgbClr val="FFFFFF"/>
-                    </a:solidFill>
-                  </a:tcPr>
-                </a:tc>
-                <a:tc>
-                  <a:txBody>
-                    <a:bodyPr/>
-                    <a:lstStyle/>
-                    <a:p>
-                      <a:pPr algn="l" indent="0" marL="0">
-                        <a:buNone/>
-                      </a:pPr>
-                      <a:r>
-                        <a:rPr lang="en-US" sz="2100" dirty="0">
-                          <a:solidFill>
-                            <a:srgbClr val="1B2530"/>
-                          </a:solidFill>
-                          <a:latin typeface="Courier New" pitchFamily="34" charset="0"/>
-                          <a:ea typeface="Courier New" pitchFamily="34" charset="-122"/>
-                          <a:cs typeface="Courier New" pitchFamily="34" charset="-120"/>
-                        </a:rPr>
-                        <a:t>1</a:t>
-                      </a:r>
-                      <a:endParaRPr lang="en-US" sz="2100" dirty="0">
-                        <a:latin typeface="Courier New" charset="0"/>
-                        <a:ea typeface="Courier New" charset="0"/>
-                        <a:cs typeface="Courier New" charset="0"/>
-                      </a:endParaRPr>
-                    </a:p>
-                  </a:txBody>
-                  <a:tcPr marL="101600" marR="101600" marT="50800" marB="50800" anchor="ctr">
-                    <a:lnL w="6350" cap="flat" cmpd="sng" algn="ctr">
-                      <a:solidFill>
-                        <a:srgbClr val="C9D2D8"/>
-                      </a:solidFill>
-                      <a:prstDash val="solid"/>
-                      <a:round/>
-                      <a:headEnd type="none" w="med" len="med"/>
-                      <a:tailEnd type="none" w="med" len="med"/>
-                    </a:lnL>
-                    <a:lnR w="6350" cap="flat" cmpd="sng" algn="ctr">
-                      <a:solidFill>
-                        <a:srgbClr val="C9D2D8"/>
-                      </a:solidFill>
-                      <a:prstDash val="solid"/>
-                      <a:round/>
-                      <a:headEnd type="none" w="med" len="med"/>
-                      <a:tailEnd type="none" w="med" len="med"/>
-                    </a:lnR>
-                    <a:lnT w="6350" cap="flat" cmpd="sng" algn="ctr">
-                      <a:solidFill>
-                        <a:srgbClr val="C9D2D8"/>
-                      </a:solidFill>
-                      <a:prstDash val="solid"/>
-                      <a:round/>
-                      <a:headEnd type="none" w="med" len="med"/>
-                      <a:tailEnd type="none" w="med" len="med"/>
-                    </a:lnT>
-                    <a:lnB w="6350" cap="flat" cmpd="sng" algn="ctr">
-                      <a:solidFill>
-                        <a:srgbClr val="C9D2D8"/>
-                      </a:solidFill>
-                      <a:prstDash val="solid"/>
-                      <a:round/>
-                      <a:headEnd type="none" w="med" len="med"/>
-                      <a:tailEnd type="none" w="med" len="med"/>
-                    </a:lnB>
-                    <a:solidFill>
-                      <a:srgbClr val="FFFFFF"/>
-                    </a:solidFill>
-                  </a:tcPr>
-                </a:tc>
-              </a:tr>
-              <a:tr h="0">
-                <a:tc>
-                  <a:txBody>
-                    <a:bodyPr/>
-                    <a:lstStyle/>
-                    <a:p>
-                      <a:pPr algn="l" indent="0" marL="0">
-                        <a:buNone/>
-                      </a:pPr>
-                      <a:r>
-                        <a:rPr lang="en-US" sz="2100" dirty="0">
-                          <a:solidFill>
-                            <a:srgbClr val="1B2530"/>
-                          </a:solidFill>
-                          <a:latin typeface="Courier New" pitchFamily="34" charset="0"/>
-                          <a:ea typeface="Courier New" pitchFamily="34" charset="-122"/>
-                          <a:cs typeface="Courier New" pitchFamily="34" charset="-120"/>
-                        </a:rPr>
-                        <a:t>1</a:t>
-                      </a:r>
-                      <a:endParaRPr lang="en-US" sz="2100" dirty="0">
-                        <a:latin typeface="Courier New" charset="0"/>
-                        <a:ea typeface="Courier New" charset="0"/>
-                        <a:cs typeface="Courier New" charset="0"/>
-                      </a:endParaRPr>
-                    </a:p>
-                  </a:txBody>
-                  <a:tcPr marL="101600" marR="101600" marT="50800" marB="50800" anchor="ctr">
-                    <a:lnL w="6350" cap="flat" cmpd="sng" algn="ctr">
-                      <a:solidFill>
-                        <a:srgbClr val="C9D2D8"/>
-                      </a:solidFill>
-                      <a:prstDash val="solid"/>
-                      <a:round/>
-                      <a:headEnd type="none" w="med" len="med"/>
-                      <a:tailEnd type="none" w="med" len="med"/>
-                    </a:lnL>
-                    <a:lnR w="6350" cap="flat" cmpd="sng" algn="ctr">
-                      <a:solidFill>
-                        <a:srgbClr val="C9D2D8"/>
-                      </a:solidFill>
-                      <a:prstDash val="solid"/>
-                      <a:round/>
-                      <a:headEnd type="none" w="med" len="med"/>
-                      <a:tailEnd type="none" w="med" len="med"/>
-                    </a:lnR>
-                    <a:lnT w="6350" cap="flat" cmpd="sng" algn="ctr">
-                      <a:solidFill>
-                        <a:srgbClr val="C9D2D8"/>
-                      </a:solidFill>
-                      <a:prstDash val="solid"/>
-                      <a:round/>
-                      <a:headEnd type="none" w="med" len="med"/>
-                      <a:tailEnd type="none" w="med" len="med"/>
-                    </a:lnT>
-                    <a:lnB w="6350" cap="flat" cmpd="sng" algn="ctr">
-                      <a:solidFill>
-                        <a:srgbClr val="C9D2D8"/>
-                      </a:solidFill>
-                      <a:prstDash val="solid"/>
-                      <a:round/>
-                      <a:headEnd type="none" w="med" len="med"/>
-                      <a:tailEnd type="none" w="med" len="med"/>
-                    </a:lnB>
-                    <a:solidFill>
-                      <a:srgbClr val="EEF2F4"/>
-                    </a:solidFill>
-                  </a:tcPr>
-                </a:tc>
-                <a:tc>
-                  <a:txBody>
-                    <a:bodyPr/>
-                    <a:lstStyle/>
-                    <a:p>
-                      <a:pPr algn="l" indent="0" marL="0">
-                        <a:buNone/>
-                      </a:pPr>
-                      <a:r>
-                        <a:rPr lang="en-US" sz="2100" dirty="0">
-                          <a:solidFill>
-                            <a:srgbClr val="1B2530"/>
-                          </a:solidFill>
-                          <a:latin typeface="Courier New" pitchFamily="34" charset="0"/>
-                          <a:ea typeface="Courier New" pitchFamily="34" charset="-122"/>
-                          <a:cs typeface="Courier New" pitchFamily="34" charset="-120"/>
-                        </a:rPr>
-                        <a:t>0</a:t>
-                      </a:r>
-                      <a:endParaRPr lang="en-US" sz="2100" dirty="0">
-                        <a:latin typeface="Courier New" charset="0"/>
-                        <a:ea typeface="Courier New" charset="0"/>
-                        <a:cs typeface="Courier New" charset="0"/>
-                      </a:endParaRPr>
-                    </a:p>
-                  </a:txBody>
-                  <a:tcPr marL="101600" marR="101600" marT="50800" marB="50800" anchor="ctr">
-                    <a:lnL w="6350" cap="flat" cmpd="sng" algn="ctr">
-                      <a:solidFill>
-                        <a:srgbClr val="C9D2D8"/>
-                      </a:solidFill>
-                      <a:prstDash val="solid"/>
-                      <a:round/>
-                      <a:headEnd type="none" w="med" len="med"/>
-                      <a:tailEnd type="none" w="med" len="med"/>
-                    </a:lnL>
-                    <a:lnR w="6350" cap="flat" cmpd="sng" algn="ctr">
-                      <a:solidFill>
-                        <a:srgbClr val="C9D2D8"/>
-                      </a:solidFill>
-                      <a:prstDash val="solid"/>
-                      <a:round/>
-                      <a:headEnd type="none" w="med" len="med"/>
-                      <a:tailEnd type="none" w="med" len="med"/>
-                    </a:lnR>
-                    <a:lnT w="6350" cap="flat" cmpd="sng" algn="ctr">
-                      <a:solidFill>
-                        <a:srgbClr val="C9D2D8"/>
-                      </a:solidFill>
-                      <a:prstDash val="solid"/>
-                      <a:round/>
-                      <a:headEnd type="none" w="med" len="med"/>
-                      <a:tailEnd type="none" w="med" len="med"/>
-                    </a:lnT>
-                    <a:lnB w="6350" cap="flat" cmpd="sng" algn="ctr">
-                      <a:solidFill>
-                        <a:srgbClr val="C9D2D8"/>
-                      </a:solidFill>
-                      <a:prstDash val="solid"/>
-                      <a:round/>
-                      <a:headEnd type="none" w="med" len="med"/>
-                      <a:tailEnd type="none" w="med" len="med"/>
-                    </a:lnB>
-                    <a:solidFill>
-                      <a:srgbClr val="EEF2F4"/>
-                    </a:solidFill>
-                  </a:tcPr>
-                </a:tc>
-                <a:tc>
-                  <a:txBody>
-                    <a:bodyPr/>
-                    <a:lstStyle/>
-                    <a:p>
-                      <a:pPr algn="l" indent="0" marL="0">
-                        <a:buNone/>
-                      </a:pPr>
-                      <a:r>
-                        <a:rPr lang="en-US" sz="2100" dirty="0">
-                          <a:solidFill>
-                            <a:srgbClr val="1B2530"/>
-                          </a:solidFill>
-                          <a:latin typeface="Courier New" pitchFamily="34" charset="0"/>
-                          <a:ea typeface="Courier New" pitchFamily="34" charset="-122"/>
-                          <a:cs typeface="Courier New" pitchFamily="34" charset="-120"/>
-                        </a:rPr>
-                        <a:t>0</a:t>
-                      </a:r>
-                      <a:endParaRPr lang="en-US" sz="2100" dirty="0">
-                        <a:latin typeface="Courier New" charset="0"/>
-                        <a:ea typeface="Courier New" charset="0"/>
-                        <a:cs typeface="Courier New" charset="0"/>
-                      </a:endParaRPr>
-                    </a:p>
-                  </a:txBody>
-                  <a:tcPr marL="101600" marR="101600" marT="50800" marB="50800" anchor="ctr">
-                    <a:lnL w="6350" cap="flat" cmpd="sng" algn="ctr">
-                      <a:solidFill>
-                        <a:srgbClr val="C9D2D8"/>
-                      </a:solidFill>
-                      <a:prstDash val="solid"/>
-                      <a:round/>
-                      <a:headEnd type="none" w="med" len="med"/>
-                      <a:tailEnd type="none" w="med" len="med"/>
-                    </a:lnL>
-                    <a:lnR w="6350" cap="flat" cmpd="sng" algn="ctr">
-                      <a:solidFill>
-                        <a:srgbClr val="C9D2D8"/>
-                      </a:solidFill>
-                      <a:prstDash val="solid"/>
-                      <a:round/>
-                      <a:headEnd type="none" w="med" len="med"/>
-                      <a:tailEnd type="none" w="med" len="med"/>
-                    </a:lnR>
-                    <a:lnT w="6350" cap="flat" cmpd="sng" algn="ctr">
-                      <a:solidFill>
-                        <a:srgbClr val="C9D2D8"/>
-                      </a:solidFill>
-                      <a:prstDash val="solid"/>
-                      <a:round/>
-                      <a:headEnd type="none" w="med" len="med"/>
-                      <a:tailEnd type="none" w="med" len="med"/>
-                    </a:lnT>
-                    <a:lnB w="6350" cap="flat" cmpd="sng" algn="ctr">
-                      <a:solidFill>
-                        <a:srgbClr val="C9D2D8"/>
-                      </a:solidFill>
-                      <a:prstDash val="solid"/>
-                      <a:round/>
-                      <a:headEnd type="none" w="med" len="med"/>
-                      <a:tailEnd type="none" w="med" len="med"/>
-                    </a:lnB>
-                    <a:solidFill>
-                      <a:srgbClr val="EEF2F4"/>
-                    </a:solidFill>
-                  </a:tcPr>
-                </a:tc>
-                <a:tc>
-                  <a:txBody>
-                    <a:bodyPr/>
-                    <a:lstStyle/>
-                    <a:p>
-                      <a:pPr algn="l" indent="0" marL="0">
-                        <a:buNone/>
-                      </a:pPr>
-                      <a:r>
-                        <a:rPr lang="en-US" sz="2100" dirty="0">
-                          <a:solidFill>
-                            <a:srgbClr val="1B2530"/>
-                          </a:solidFill>
-                          <a:latin typeface="Courier New" pitchFamily="34" charset="0"/>
-                          <a:ea typeface="Courier New" pitchFamily="34" charset="-122"/>
-                          <a:cs typeface="Courier New" pitchFamily="34" charset="-120"/>
-                        </a:rPr>
-                        <a:t>1</a:t>
-                      </a:r>
-                      <a:endParaRPr lang="en-US" sz="2100" dirty="0">
-                        <a:latin typeface="Courier New" charset="0"/>
-                        <a:ea typeface="Courier New" charset="0"/>
-                        <a:cs typeface="Courier New" charset="0"/>
-                      </a:endParaRPr>
-                    </a:p>
-                  </a:txBody>
-                  <a:tcPr marL="101600" marR="101600" marT="50800" marB="50800" anchor="ctr">
-                    <a:lnL w="6350" cap="flat" cmpd="sng" algn="ctr">
-                      <a:solidFill>
-                        <a:srgbClr val="C9D2D8"/>
-                      </a:solidFill>
-                      <a:prstDash val="solid"/>
-                      <a:round/>
-                      <a:headEnd type="none" w="med" len="med"/>
-                      <a:tailEnd type="none" w="med" len="med"/>
-                    </a:lnL>
-                    <a:lnR w="6350" cap="flat" cmpd="sng" algn="ctr">
-                      <a:solidFill>
-                        <a:srgbClr val="C9D2D8"/>
-                      </a:solidFill>
-                      <a:prstDash val="solid"/>
-                      <a:round/>
-                      <a:headEnd type="none" w="med" len="med"/>
-                      <a:tailEnd type="none" w="med" len="med"/>
-                    </a:lnR>
-                    <a:lnT w="6350" cap="flat" cmpd="sng" algn="ctr">
-                      <a:solidFill>
-                        <a:srgbClr val="C9D2D8"/>
-                      </a:solidFill>
-                      <a:prstDash val="solid"/>
-                      <a:round/>
-                      <a:headEnd type="none" w="med" len="med"/>
-                      <a:tailEnd type="none" w="med" len="med"/>
-                    </a:lnT>
-                    <a:lnB w="6350" cap="flat" cmpd="sng" algn="ctr">
-                      <a:solidFill>
-                        <a:srgbClr val="C9D2D8"/>
-                      </a:solidFill>
-                      <a:prstDash val="solid"/>
-                      <a:round/>
-                      <a:headEnd type="none" w="med" len="med"/>
-                      <a:tailEnd type="none" w="med" len="med"/>
-                    </a:lnB>
-                    <a:solidFill>
-                      <a:srgbClr val="EEF2F4"/>
-                    </a:solidFill>
-                  </a:tcPr>
-                </a:tc>
-                <a:tc>
-                  <a:txBody>
-                    <a:bodyPr/>
-                    <a:lstStyle/>
-                    <a:p>
-                      <a:pPr algn="l" indent="0" marL="0">
-                        <a:buNone/>
-                      </a:pPr>
-                      <a:r>
-                        <a:rPr lang="en-US" sz="2100" dirty="0">
-                          <a:solidFill>
-                            <a:srgbClr val="1B2530"/>
-                          </a:solidFill>
-                          <a:latin typeface="Courier New" pitchFamily="34" charset="0"/>
-                          <a:ea typeface="Courier New" pitchFamily="34" charset="-122"/>
-                          <a:cs typeface="Courier New" pitchFamily="34" charset="-120"/>
-                        </a:rPr>
-                        <a:t>0</a:t>
-                      </a:r>
-                      <a:endParaRPr lang="en-US" sz="2100" dirty="0">
-                        <a:latin typeface="Courier New" charset="0"/>
-                        <a:ea typeface="Courier New" charset="0"/>
-                        <a:cs typeface="Courier New" charset="0"/>
-                      </a:endParaRPr>
-                    </a:p>
-                  </a:txBody>
-                  <a:tcPr marL="101600" marR="101600" marT="50800" marB="50800" anchor="ctr">
-                    <a:lnL w="6350" cap="flat" cmpd="sng" algn="ctr">
-                      <a:solidFill>
-                        <a:srgbClr val="C9D2D8"/>
-                      </a:solidFill>
-                      <a:prstDash val="solid"/>
-                      <a:round/>
-                      <a:headEnd type="none" w="med" len="med"/>
-                      <a:tailEnd type="none" w="med" len="med"/>
-                    </a:lnL>
-                    <a:lnR w="6350" cap="flat" cmpd="sng" algn="ctr">
-                      <a:solidFill>
-                        <a:srgbClr val="C9D2D8"/>
-                      </a:solidFill>
-                      <a:prstDash val="solid"/>
-                      <a:round/>
-                      <a:headEnd type="none" w="med" len="med"/>
-                      <a:tailEnd type="none" w="med" len="med"/>
-                    </a:lnR>
-                    <a:lnT w="6350" cap="flat" cmpd="sng" algn="ctr">
-                      <a:solidFill>
-                        <a:srgbClr val="C9D2D8"/>
-                      </a:solidFill>
-                      <a:prstDash val="solid"/>
-                      <a:round/>
-                      <a:headEnd type="none" w="med" len="med"/>
-                      <a:tailEnd type="none" w="med" len="med"/>
-                    </a:lnT>
-                    <a:lnB w="6350" cap="flat" cmpd="sng" algn="ctr">
-                      <a:solidFill>
-                        <a:srgbClr val="C9D2D8"/>
-                      </a:solidFill>
-                      <a:prstDash val="solid"/>
-                      <a:round/>
-                      <a:headEnd type="none" w="med" len="med"/>
-                      <a:tailEnd type="none" w="med" len="med"/>
-                    </a:lnB>
-                    <a:solidFill>
-                      <a:srgbClr val="EEF2F4"/>
-                    </a:solidFill>
-                  </a:tcPr>
-                </a:tc>
-              </a:tr>
-              <a:tr h="0">
-                <a:tc>
-                  <a:txBody>
-                    <a:bodyPr/>
-                    <a:lstStyle/>
-                    <a:p>
-                      <a:pPr algn="l" indent="0" marL="0">
-                        <a:buNone/>
-                      </a:pPr>
-                      <a:r>
-                        <a:rPr lang="en-US" sz="2100" dirty="0">
-                          <a:solidFill>
-                            <a:srgbClr val="1B2530"/>
-                          </a:solidFill>
-                          <a:latin typeface="Courier New" pitchFamily="34" charset="0"/>
-                          <a:ea typeface="Courier New" pitchFamily="34" charset="-122"/>
-                          <a:cs typeface="Courier New" pitchFamily="34" charset="-120"/>
-                        </a:rPr>
-                        <a:t>1</a:t>
-                      </a:r>
-                      <a:endParaRPr lang="en-US" sz="2100" dirty="0">
-                        <a:latin typeface="Courier New" charset="0"/>
-                        <a:ea typeface="Courier New" charset="0"/>
-                        <a:cs typeface="Courier New" charset="0"/>
-                      </a:endParaRPr>
-                    </a:p>
-                  </a:txBody>
-                  <a:tcPr marL="101600" marR="101600" marT="50800" marB="50800" anchor="ctr">
-                    <a:lnL w="6350" cap="flat" cmpd="sng" algn="ctr">
-                      <a:solidFill>
-                        <a:srgbClr val="C9D2D8"/>
-                      </a:solidFill>
-                      <a:prstDash val="solid"/>
-                      <a:round/>
-                      <a:headEnd type="none" w="med" len="med"/>
-                      <a:tailEnd type="none" w="med" len="med"/>
-                    </a:lnL>
-                    <a:lnR w="6350" cap="flat" cmpd="sng" algn="ctr">
-                      <a:solidFill>
-                        <a:srgbClr val="C9D2D8"/>
-                      </a:solidFill>
-                      <a:prstDash val="solid"/>
-                      <a:round/>
-                      <a:headEnd type="none" w="med" len="med"/>
-                      <a:tailEnd type="none" w="med" len="med"/>
-                    </a:lnR>
-                    <a:lnT w="6350" cap="flat" cmpd="sng" algn="ctr">
-                      <a:solidFill>
-                        <a:srgbClr val="C9D2D8"/>
-                      </a:solidFill>
-                      <a:prstDash val="solid"/>
-                      <a:round/>
-                      <a:headEnd type="none" w="med" len="med"/>
-                      <a:tailEnd type="none" w="med" len="med"/>
-                    </a:lnT>
-                    <a:lnB w="6350" cap="flat" cmpd="sng" algn="ctr">
-                      <a:solidFill>
-                        <a:srgbClr val="C9D2D8"/>
-                      </a:solidFill>
-                      <a:prstDash val="solid"/>
-                      <a:round/>
-                      <a:headEnd type="none" w="med" len="med"/>
-                      <a:tailEnd type="none" w="med" len="med"/>
-                    </a:lnB>
-                    <a:solidFill>
-                      <a:srgbClr val="FFFFFF"/>
-                    </a:solidFill>
-                  </a:tcPr>
-                </a:tc>
-                <a:tc>
-                  <a:txBody>
-                    <a:bodyPr/>
-                    <a:lstStyle/>
-                    <a:p>
-                      <a:pPr algn="l" indent="0" marL="0">
-                        <a:buNone/>
-                      </a:pPr>
-                      <a:r>
-                        <a:rPr lang="en-US" sz="2100" dirty="0">
-                          <a:solidFill>
-                            <a:srgbClr val="1B2530"/>
-                          </a:solidFill>
-                          <a:latin typeface="Courier New" pitchFamily="34" charset="0"/>
-                          <a:ea typeface="Courier New" pitchFamily="34" charset="-122"/>
-                          <a:cs typeface="Courier New" pitchFamily="34" charset="-120"/>
-                        </a:rPr>
-                        <a:t>1</a:t>
-                      </a:r>
-                      <a:endParaRPr lang="en-US" sz="2100" dirty="0">
-                        <a:latin typeface="Courier New" charset="0"/>
-                        <a:ea typeface="Courier New" charset="0"/>
-                        <a:cs typeface="Courier New" charset="0"/>
-                      </a:endParaRPr>
-                    </a:p>
-                  </a:txBody>
-                  <a:tcPr marL="101600" marR="101600" marT="50800" marB="50800" anchor="ctr">
-                    <a:lnL w="6350" cap="flat" cmpd="sng" algn="ctr">
-                      <a:solidFill>
-                        <a:srgbClr val="C9D2D8"/>
-                      </a:solidFill>
-                      <a:prstDash val="solid"/>
-                      <a:round/>
-                      <a:headEnd type="none" w="med" len="med"/>
-                      <a:tailEnd type="none" w="med" len="med"/>
-                    </a:lnL>
-                    <a:lnR w="6350" cap="flat" cmpd="sng" algn="ctr">
-                      <a:solidFill>
-                        <a:srgbClr val="C9D2D8"/>
-                      </a:solidFill>
-                      <a:prstDash val="solid"/>
-                      <a:round/>
-                      <a:headEnd type="none" w="med" len="med"/>
-                      <a:tailEnd type="none" w="med" len="med"/>
-                    </a:lnR>
-                    <a:lnT w="6350" cap="flat" cmpd="sng" algn="ctr">
-                      <a:solidFill>
-                        <a:srgbClr val="C9D2D8"/>
-                      </a:solidFill>
-                      <a:prstDash val="solid"/>
-                      <a:round/>
-                      <a:headEnd type="none" w="med" len="med"/>
-                      <a:tailEnd type="none" w="med" len="med"/>
-                    </a:lnT>
-                    <a:lnB w="6350" cap="flat" cmpd="sng" algn="ctr">
-                      <a:solidFill>
-                        <a:srgbClr val="C9D2D8"/>
-                      </a:solidFill>
-                      <a:prstDash val="solid"/>
-                      <a:round/>
-                      <a:headEnd type="none" w="med" len="med"/>
-                      <a:tailEnd type="none" w="med" len="med"/>
-                    </a:lnB>
-                    <a:solidFill>
-                      <a:srgbClr val="FFFFFF"/>
-                    </a:solidFill>
-                  </a:tcPr>
-                </a:tc>
-                <a:tc>
-                  <a:txBody>
-                    <a:bodyPr/>
-                    <a:lstStyle/>
-                    <a:p>
-                      <a:pPr algn="l" indent="0" marL="0">
-                        <a:buNone/>
-                      </a:pPr>
-                      <a:r>
-                        <a:rPr lang="en-US" sz="2100" dirty="0">
-                          <a:solidFill>
-                            <a:srgbClr val="1B2530"/>
-                          </a:solidFill>
-                          <a:latin typeface="Courier New" pitchFamily="34" charset="0"/>
-                          <a:ea typeface="Courier New" pitchFamily="34" charset="-122"/>
-                          <a:cs typeface="Courier New" pitchFamily="34" charset="-120"/>
-                        </a:rPr>
-                        <a:t>1</a:t>
-                      </a:r>
-                      <a:endParaRPr lang="en-US" sz="2100" dirty="0">
-                        <a:latin typeface="Courier New" charset="0"/>
-                        <a:ea typeface="Courier New" charset="0"/>
-                        <a:cs typeface="Courier New" charset="0"/>
-                      </a:endParaRPr>
-                    </a:p>
-                  </a:txBody>
-                  <a:tcPr marL="101600" marR="101600" marT="50800" marB="50800" anchor="ctr">
-                    <a:lnL w="6350" cap="flat" cmpd="sng" algn="ctr">
-                      <a:solidFill>
-                        <a:srgbClr val="C9D2D8"/>
-                      </a:solidFill>
-                      <a:prstDash val="solid"/>
-                      <a:round/>
-                      <a:headEnd type="none" w="med" len="med"/>
-                      <a:tailEnd type="none" w="med" len="med"/>
-                    </a:lnL>
-                    <a:lnR w="6350" cap="flat" cmpd="sng" algn="ctr">
-                      <a:solidFill>
-                        <a:srgbClr val="C9D2D8"/>
-                      </a:solidFill>
-                      <a:prstDash val="solid"/>
-                      <a:round/>
-                      <a:headEnd type="none" w="med" len="med"/>
-                      <a:tailEnd type="none" w="med" len="med"/>
-                    </a:lnR>
-                    <a:lnT w="6350" cap="flat" cmpd="sng" algn="ctr">
-                      <a:solidFill>
-                        <a:srgbClr val="C9D2D8"/>
-                      </a:solidFill>
-                      <a:prstDash val="solid"/>
-                      <a:round/>
-                      <a:headEnd type="none" w="med" len="med"/>
-                      <a:tailEnd type="none" w="med" len="med"/>
-                    </a:lnT>
-                    <a:lnB w="6350" cap="flat" cmpd="sng" algn="ctr">
-                      <a:solidFill>
-                        <a:srgbClr val="C9D2D8"/>
-                      </a:solidFill>
-                      <a:prstDash val="solid"/>
-                      <a:round/>
-                      <a:headEnd type="none" w="med" len="med"/>
-                      <a:tailEnd type="none" w="med" len="med"/>
-                    </a:lnB>
-                    <a:solidFill>
-                      <a:srgbClr val="FFFFFF"/>
-                    </a:solidFill>
-                  </a:tcPr>
-                </a:tc>
-                <a:tc>
-                  <a:txBody>
-                    <a:bodyPr/>
-                    <a:lstStyle/>
-                    <a:p>
-                      <a:pPr algn="l" indent="0" marL="0">
-                        <a:buNone/>
-                      </a:pPr>
-                      <a:r>
-                        <a:rPr lang="en-US" sz="2100" dirty="0">
-                          <a:solidFill>
-                            <a:srgbClr val="1B2530"/>
-                          </a:solidFill>
-                          <a:latin typeface="Courier New" pitchFamily="34" charset="0"/>
-                          <a:ea typeface="Courier New" pitchFamily="34" charset="-122"/>
-                          <a:cs typeface="Courier New" pitchFamily="34" charset="-120"/>
-                        </a:rPr>
-                        <a:t>0</a:t>
-                      </a:r>
-                      <a:endParaRPr lang="en-US" sz="2100" dirty="0">
-                        <a:latin typeface="Courier New" charset="0"/>
-                        <a:ea typeface="Courier New" charset="0"/>
-                        <a:cs typeface="Courier New" charset="0"/>
-                      </a:endParaRPr>
-                    </a:p>
-                  </a:txBody>
-                  <a:tcPr marL="101600" marR="101600" marT="50800" marB="50800" anchor="ctr">
-                    <a:lnL w="6350" cap="flat" cmpd="sng" algn="ctr">
-                      <a:solidFill>
-                        <a:srgbClr val="C9D2D8"/>
-                      </a:solidFill>
-                      <a:prstDash val="solid"/>
-                      <a:round/>
-                      <a:headEnd type="none" w="med" len="med"/>
-                      <a:tailEnd type="none" w="med" len="med"/>
-                    </a:lnL>
-                    <a:lnR w="6350" cap="flat" cmpd="sng" algn="ctr">
-                      <a:solidFill>
-                        <a:srgbClr val="C9D2D8"/>
-                      </a:solidFill>
-                      <a:prstDash val="solid"/>
-                      <a:round/>
-                      <a:headEnd type="none" w="med" len="med"/>
-                      <a:tailEnd type="none" w="med" len="med"/>
-                    </a:lnR>
-                    <a:lnT w="6350" cap="flat" cmpd="sng" algn="ctr">
-                      <a:solidFill>
-                        <a:srgbClr val="C9D2D8"/>
-                      </a:solidFill>
-                      <a:prstDash val="solid"/>
-                      <a:round/>
-                      <a:headEnd type="none" w="med" len="med"/>
-                      <a:tailEnd type="none" w="med" len="med"/>
-                    </a:lnT>
-                    <a:lnB w="6350" cap="flat" cmpd="sng" algn="ctr">
-                      <a:solidFill>
-                        <a:srgbClr val="C9D2D8"/>
-                      </a:solidFill>
-                      <a:prstDash val="solid"/>
-                      <a:round/>
-                      <a:headEnd type="none" w="med" len="med"/>
-                      <a:tailEnd type="none" w="med" len="med"/>
-                    </a:lnB>
-                    <a:solidFill>
-                      <a:srgbClr val="FFFFFF"/>
-                    </a:solidFill>
-                  </a:tcPr>
-                </a:tc>
-                <a:tc>
-                  <a:txBody>
-                    <a:bodyPr/>
-                    <a:lstStyle/>
-                    <a:p>
-                      <a:pPr algn="l" indent="0" marL="0">
-                        <a:buNone/>
-                      </a:pPr>
-                      <a:r>
-                        <a:rPr lang="en-US" sz="2100" dirty="0">
-                          <a:solidFill>
-                            <a:srgbClr val="1B2530"/>
-                          </a:solidFill>
-                          <a:latin typeface="Courier New" pitchFamily="34" charset="0"/>
-                          <a:ea typeface="Courier New" pitchFamily="34" charset="-122"/>
-                          <a:cs typeface="Courier New" pitchFamily="34" charset="-120"/>
-                        </a:rPr>
-                        <a:t>0</a:t>
-                      </a:r>
-                      <a:endParaRPr lang="en-US" sz="2100" dirty="0">
-                        <a:latin typeface="Courier New" charset="0"/>
-                        <a:ea typeface="Courier New" charset="0"/>
-                        <a:cs typeface="Courier New" charset="0"/>
-                      </a:endParaRPr>
-                    </a:p>
-                  </a:txBody>
-                  <a:tcPr marL="101600" marR="101600" marT="50800" marB="50800" anchor="ctr">
-                    <a:lnL w="6350" cap="flat" cmpd="sng" algn="ctr">
-                      <a:solidFill>
-                        <a:srgbClr val="C9D2D8"/>
-                      </a:solidFill>
-                      <a:prstDash val="solid"/>
-                      <a:round/>
-                      <a:headEnd type="none" w="med" len="med"/>
-                      <a:tailEnd type="none" w="med" len="med"/>
-                    </a:lnL>
-                    <a:lnR w="6350" cap="flat" cmpd="sng" algn="ctr">
-                      <a:solidFill>
-                        <a:srgbClr val="C9D2D8"/>
-                      </a:solidFill>
-                      <a:prstDash val="solid"/>
-                      <a:round/>
-                      <a:headEnd type="none" w="med" len="med"/>
-                      <a:tailEnd type="none" w="med" len="med"/>
-                    </a:lnR>
-                    <a:lnT w="6350" cap="flat" cmpd="sng" algn="ctr">
-                      <a:solidFill>
-                        <a:srgbClr val="C9D2D8"/>
-                      </a:solidFill>
-                      <a:prstDash val="solid"/>
-                      <a:round/>
-                      <a:headEnd type="none" w="med" len="med"/>
-                      <a:tailEnd type="none" w="med" len="med"/>
-                    </a:lnT>
-                    <a:lnB w="6350" cap="flat" cmpd="sng" algn="ctr">
-                      <a:solidFill>
-                        <a:srgbClr val="C9D2D8"/>
-                      </a:solidFill>
-                      <a:prstDash val="solid"/>
-                      <a:round/>
-                      <a:headEnd type="none" w="med" len="med"/>
-                      <a:tailEnd type="none" w="med" len="med"/>
-                    </a:lnB>
-                    <a:solidFill>
-                      <a:srgbClr val="FFFFFF"/>
-                    </a:solidFill>
-                  </a:tcPr>
-                </a:tc>
-              </a:tr>
-            </a:tbl>
-          </a:graphicData>
-        </a:graphic>
-      </p:graphicFrame>
-      <p:sp>
-        <p:nvSpPr>
-          <p:cNvPr id="4" name="Text 1"/>
-          <p:cNvSpPr txBox="1"/>
-          <p:nvPr/>
-        </p:nvSpPr>
-        <p:spPr>
-          <a:xfrm>
-            <a:off x="548640" y="5760720"/>
-            <a:ext cx="11094415" cy="411480"/>
+      <p:sp>
+        <p:nvSpPr>
+          <p:cNvPr id="3" name="Shape 1"/>
+          <p:cNvSpPr/>
+          <p:nvPr/>
+        </p:nvSpPr>
+        <p:spPr>
+          <a:xfrm>
+            <a:off x="548640" y="1515999"/>
+            <a:ext cx="146304" cy="146304"/>
           </a:xfrm>
           <a:prstGeom prst="rect">
             <a:avLst/>
           </a:prstGeom>
+          <a:solidFill>
+            <a:srgbClr val="0E7C86"/>
+          </a:solidFill>
+          <a:ln w="12700">
+            <a:solidFill>
+              <a:srgbClr val="0E7C86"/>
+            </a:solidFill>
+            <a:prstDash val="solid"/>
+          </a:ln>
+        </p:spPr>
+      </p:sp>
+      <p:sp>
+        <p:nvSpPr>
+          <p:cNvPr id="4" name="Text 2"/>
+          <p:cNvSpPr txBox="1"/>
+          <p:nvPr/>
+        </p:nvSpPr>
+        <p:spPr>
+          <a:xfrm>
+            <a:off x="932688" y="1417320"/>
+            <a:ext cx="6565392" cy="325374"/>
+          </a:xfrm>
+          <a:prstGeom prst="rect">
+            <a:avLst/>
+          </a:prstGeom>
           <a:noFill/>
           <a:ln/>
         </p:spPr>
         <p:txBody>
-          <a:bodyPr wrap="square" lIns="0" tIns="0" rIns="0" bIns="0" rtlCol="0" anchor="ctr"/>
+          <a:bodyPr wrap="square" lIns="0" tIns="0" rIns="0" bIns="0" rtlCol="0" anchor="t"/>
           <a:lstStyle/>
           <a:p>
             <a:pPr indent="0" marL="0">
+              <a:spcAft>
+                <a:spcPts val="200"/>
+              </a:spcAft>
               <a:buNone/>
             </a:pPr>
             <a:r>
-              <a:rPr lang="en-US" sz="1500" i="1" dirty="0">
+              <a:rPr lang="en-US" sz="2100" dirty="0">
+                <a:solidFill>
+                  <a:srgbClr val="1B2530"/>
+                </a:solidFill>
+                <a:latin typeface="Calibri" pitchFamily="34" charset="0"/>
+                <a:ea typeface="Calibri" pitchFamily="34" charset="-122"/>
+                <a:cs typeface="Calibri" pitchFamily="34" charset="-120"/>
+              </a:rPr>
+              <a:t>FPGA: field-programmable gate array</a:t>
+            </a:r>
+            <a:endParaRPr lang="en-US" sz="2100" dirty="0"/>
+          </a:p>
+        </p:txBody>
+      </p:sp>
+      <p:sp>
+        <p:nvSpPr>
+          <p:cNvPr id="5" name="Shape 3"/>
+          <p:cNvSpPr/>
+          <p:nvPr/>
+        </p:nvSpPr>
+        <p:spPr>
+          <a:xfrm>
+            <a:off x="548640" y="2003298"/>
+            <a:ext cx="146304" cy="146304"/>
+          </a:xfrm>
+          <a:prstGeom prst="rect">
+            <a:avLst/>
+          </a:prstGeom>
+          <a:solidFill>
+            <a:srgbClr val="C7791B"/>
+          </a:solidFill>
+          <a:ln w="12700">
+            <a:solidFill>
+              <a:srgbClr val="C7791B"/>
+            </a:solidFill>
+            <a:prstDash val="solid"/>
+          </a:ln>
+        </p:spPr>
+      </p:sp>
+      <p:sp>
+        <p:nvSpPr>
+          <p:cNvPr id="6" name="Text 4"/>
+          <p:cNvSpPr txBox="1"/>
+          <p:nvPr/>
+        </p:nvSpPr>
+        <p:spPr>
+          <a:xfrm>
+            <a:off x="932688" y="1904619"/>
+            <a:ext cx="6565392" cy="1829562"/>
+          </a:xfrm>
+          <a:prstGeom prst="rect">
+            <a:avLst/>
+          </a:prstGeom>
+          <a:noFill/>
+          <a:ln/>
+        </p:spPr>
+        <p:txBody>
+          <a:bodyPr wrap="square" lIns="0" tIns="0" rIns="0" bIns="0" rtlCol="0" anchor="t"/>
+          <a:lstStyle/>
+          <a:p>
+            <a:pPr indent="0" marL="0">
+              <a:spcAft>
+                <a:spcPts val="200"/>
+              </a:spcAft>
+              <a:buNone/>
+            </a:pPr>
+            <a:r>
+              <a:rPr lang="en-US" sz="2100" dirty="0">
+                <a:solidFill>
+                  <a:srgbClr val="1B2530"/>
+                </a:solidFill>
+                <a:latin typeface="Calibri" pitchFamily="34" charset="0"/>
+                <a:ea typeface="Calibri" pitchFamily="34" charset="-122"/>
+                <a:cs typeface="Calibri" pitchFamily="34" charset="-120"/>
+              </a:rPr>
+              <a:t>Inside: a sea of small programmable blocks</a:t>
+            </a:r>
+            <a:endParaRPr lang="en-US" sz="2100" dirty="0"/>
+          </a:p>
+          <a:p>
+            <a:pPr indent="0" marL="0">
+              <a:spcAft>
+                <a:spcPts val="200"/>
+              </a:spcAft>
+              <a:buNone/>
+            </a:pPr>
+            <a:r>
+              <a:rPr lang="en-US" sz="1800" dirty="0">
                 <a:solidFill>
                   <a:srgbClr val="5B6B78"/>
                 </a:solidFill>
@@ -7735,9 +6164,313 @@
                 <a:ea typeface="Calibri" pitchFamily="34" charset="-122"/>
                 <a:cs typeface="Calibri" pitchFamily="34" charset="-120"/>
               </a:rPr>
-              <a:t>The inputs are the address; four stored bits choose the function. Changing the bits changes the gate.</a:t>
+              <a:t>– look-up tables, each able to be any function of a few inputs</a:t>
             </a:r>
-            <a:endParaRPr lang="en-US" sz="1500" dirty="0"/>
+            <a:endParaRPr lang="en-US" sz="2100" dirty="0"/>
+          </a:p>
+          <a:p>
+            <a:pPr indent="0" marL="0">
+              <a:spcAft>
+                <a:spcPts val="200"/>
+              </a:spcAft>
+              <a:buNone/>
+            </a:pPr>
+            <a:r>
+              <a:rPr lang="en-US" sz="1800" dirty="0">
+                <a:solidFill>
+                  <a:srgbClr val="5B6B78"/>
+                </a:solidFill>
+                <a:latin typeface="Calibri" pitchFamily="34" charset="0"/>
+                <a:ea typeface="Calibri" pitchFamily="34" charset="-122"/>
+                <a:cs typeface="Calibri" pitchFamily="34" charset="-120"/>
+              </a:rPr>
+              <a:t>– flip-flops, one beside each table</a:t>
+            </a:r>
+            <a:endParaRPr lang="en-US" sz="2100" dirty="0"/>
+          </a:p>
+          <a:p>
+            <a:pPr indent="0" marL="0">
+              <a:spcAft>
+                <a:spcPts val="200"/>
+              </a:spcAft>
+              <a:buNone/>
+            </a:pPr>
+            <a:r>
+              <a:rPr lang="en-US" sz="1800" dirty="0">
+                <a:solidFill>
+                  <a:srgbClr val="5B6B78"/>
+                </a:solidFill>
+                <a:latin typeface="Calibri" pitchFamily="34" charset="0"/>
+                <a:ea typeface="Calibri" pitchFamily="34" charset="-122"/>
+                <a:cs typeface="Calibri" pitchFamily="34" charset="-120"/>
+              </a:rPr>
+              <a:t>– wires and switches that can join any block to any other</a:t>
+            </a:r>
+            <a:endParaRPr lang="en-US" sz="2100" dirty="0"/>
+          </a:p>
+        </p:txBody>
+      </p:sp>
+      <p:sp>
+        <p:nvSpPr>
+          <p:cNvPr id="7" name="Shape 5"/>
+          <p:cNvSpPr/>
+          <p:nvPr/>
+        </p:nvSpPr>
+        <p:spPr>
+          <a:xfrm>
+            <a:off x="548640" y="3994785"/>
+            <a:ext cx="146304" cy="146304"/>
+          </a:xfrm>
+          <a:prstGeom prst="rect">
+            <a:avLst/>
+          </a:prstGeom>
+          <a:solidFill>
+            <a:srgbClr val="0E7C86"/>
+          </a:solidFill>
+          <a:ln w="12700">
+            <a:solidFill>
+              <a:srgbClr val="0E7C86"/>
+            </a:solidFill>
+            <a:prstDash val="solid"/>
+          </a:ln>
+        </p:spPr>
+      </p:sp>
+      <p:sp>
+        <p:nvSpPr>
+          <p:cNvPr id="8" name="Text 6"/>
+          <p:cNvSpPr txBox="1"/>
+          <p:nvPr/>
+        </p:nvSpPr>
+        <p:spPr>
+          <a:xfrm>
+            <a:off x="932688" y="3896106"/>
+            <a:ext cx="6565392" cy="650748"/>
+          </a:xfrm>
+          <a:prstGeom prst="rect">
+            <a:avLst/>
+          </a:prstGeom>
+          <a:noFill/>
+          <a:ln/>
+        </p:spPr>
+        <p:txBody>
+          <a:bodyPr wrap="square" lIns="0" tIns="0" rIns="0" bIns="0" rtlCol="0" anchor="t"/>
+          <a:lstStyle/>
+          <a:p>
+            <a:pPr indent="0" marL="0">
+              <a:spcAft>
+                <a:spcPts val="200"/>
+              </a:spcAft>
+              <a:buNone/>
+            </a:pPr>
+            <a:r>
+              <a:rPr lang="en-US" sz="2100" dirty="0">
+                <a:solidFill>
+                  <a:srgbClr val="1B2530"/>
+                </a:solidFill>
+                <a:latin typeface="Calibri" pitchFamily="34" charset="0"/>
+                <a:ea typeface="Calibri" pitchFamily="34" charset="-122"/>
+                <a:cs typeface="Calibri" pitchFamily="34" charset="-120"/>
+              </a:rPr>
+              <a:t>A configuration file, the bitstream, sets every table and every switch</a:t>
+            </a:r>
+            <a:endParaRPr lang="en-US" sz="2100" dirty="0"/>
+          </a:p>
+        </p:txBody>
+      </p:sp>
+      <p:sp>
+        <p:nvSpPr>
+          <p:cNvPr id="9" name="Shape 7"/>
+          <p:cNvSpPr/>
+          <p:nvPr/>
+        </p:nvSpPr>
+        <p:spPr>
+          <a:xfrm>
+            <a:off x="548640" y="4807458"/>
+            <a:ext cx="146304" cy="146304"/>
+          </a:xfrm>
+          <a:prstGeom prst="rect">
+            <a:avLst/>
+          </a:prstGeom>
+          <a:solidFill>
+            <a:srgbClr val="C7791B"/>
+          </a:solidFill>
+          <a:ln w="12700">
+            <a:solidFill>
+              <a:srgbClr val="C7791B"/>
+            </a:solidFill>
+            <a:prstDash val="solid"/>
+          </a:ln>
+        </p:spPr>
+      </p:sp>
+      <p:sp>
+        <p:nvSpPr>
+          <p:cNvPr id="10" name="Text 8"/>
+          <p:cNvSpPr txBox="1"/>
+          <p:nvPr/>
+        </p:nvSpPr>
+        <p:spPr>
+          <a:xfrm>
+            <a:off x="932688" y="4708779"/>
+            <a:ext cx="6565392" cy="650748"/>
+          </a:xfrm>
+          <a:prstGeom prst="rect">
+            <a:avLst/>
+          </a:prstGeom>
+          <a:noFill/>
+          <a:ln/>
+        </p:spPr>
+        <p:txBody>
+          <a:bodyPr wrap="square" lIns="0" tIns="0" rIns="0" bIns="0" rtlCol="0" anchor="t"/>
+          <a:lstStyle/>
+          <a:p>
+            <a:pPr indent="0" marL="0">
+              <a:spcAft>
+                <a:spcPts val="200"/>
+              </a:spcAft>
+              <a:buNone/>
+            </a:pPr>
+            <a:r>
+              <a:rPr lang="en-US" sz="2100" dirty="0">
+                <a:solidFill>
+                  <a:srgbClr val="1B2530"/>
+                </a:solidFill>
+                <a:latin typeface="Calibri" pitchFamily="34" charset="0"/>
+                <a:ea typeface="Calibri" pitchFamily="34" charset="-122"/>
+                <a:cs typeface="Calibri" pitchFamily="34" charset="-120"/>
+              </a:rPr>
+              <a:t>Load another bitstream and the same chip is another circuit</a:t>
+            </a:r>
+            <a:endParaRPr lang="en-US" sz="2100" dirty="0"/>
+          </a:p>
+        </p:txBody>
+      </p:sp>
+      <p:sp>
+        <p:nvSpPr>
+          <p:cNvPr id="11" name="Shape 9"/>
+          <p:cNvSpPr/>
+          <p:nvPr/>
+        </p:nvSpPr>
+        <p:spPr>
+          <a:xfrm>
+            <a:off x="548640" y="5620131"/>
+            <a:ext cx="146304" cy="146304"/>
+          </a:xfrm>
+          <a:prstGeom prst="rect">
+            <a:avLst/>
+          </a:prstGeom>
+          <a:solidFill>
+            <a:srgbClr val="0E7C86"/>
+          </a:solidFill>
+          <a:ln w="12700">
+            <a:solidFill>
+              <a:srgbClr val="0E7C86"/>
+            </a:solidFill>
+            <a:prstDash val="solid"/>
+          </a:ln>
+        </p:spPr>
+      </p:sp>
+      <p:sp>
+        <p:nvSpPr>
+          <p:cNvPr id="12" name="Text 10"/>
+          <p:cNvSpPr txBox="1"/>
+          <p:nvPr/>
+        </p:nvSpPr>
+        <p:spPr>
+          <a:xfrm>
+            <a:off x="932688" y="5521452"/>
+            <a:ext cx="6565392" cy="650748"/>
+          </a:xfrm>
+          <a:prstGeom prst="rect">
+            <a:avLst/>
+          </a:prstGeom>
+          <a:noFill/>
+          <a:ln/>
+        </p:spPr>
+        <p:txBody>
+          <a:bodyPr wrap="square" lIns="0" tIns="0" rIns="0" bIns="0" rtlCol="0" anchor="t"/>
+          <a:lstStyle/>
+          <a:p>
+            <a:pPr indent="0" marL="0">
+              <a:spcAft>
+                <a:spcPts val="200"/>
+              </a:spcAft>
+              <a:buNone/>
+            </a:pPr>
+            <a:r>
+              <a:rPr lang="en-US" sz="2100" dirty="0">
+                <a:solidFill>
+                  <a:srgbClr val="1B2530"/>
+                </a:solidFill>
+                <a:latin typeface="Calibri" pitchFamily="34" charset="0"/>
+                <a:ea typeface="Calibri" pitchFamily="34" charset="-122"/>
+                <a:cs typeface="Calibri" pitchFamily="34" charset="-120"/>
+              </a:rPr>
+              <a:t>First sold in 1985; today from a few euros to boards for data centres</a:t>
+            </a:r>
+            <a:endParaRPr lang="en-US" sz="2100" dirty="0"/>
+          </a:p>
+        </p:txBody>
+      </p:sp>
+      <p:pic>
+        <p:nvPicPr>
+          <p:cNvPr id="13" name="Image 0" descr="/Users/raffaelemontella/devel/riscv-prg32/computer-architecture-with-prg32/tools/assets/fpga_board.jpg">    </p:cNvPr>
+          <p:cNvPicPr>
+            <a:picLocks noChangeAspect="1"/>
+          </p:cNvPicPr>
+          <p:nvPr/>
+        </p:nvPicPr>
+        <p:blipFill>
+          <a:blip r:embed="rId1"/>
+          <a:stretch>
+            <a:fillRect/>
+          </a:stretch>
+        </p:blipFill>
+        <p:spPr>
+          <a:xfrm>
+            <a:off x="7863840" y="1676552"/>
+            <a:ext cx="3779215" cy="3779215"/>
+          </a:xfrm>
+          <a:prstGeom prst="rect">
+            <a:avLst/>
+          </a:prstGeom>
+        </p:spPr>
+      </p:pic>
+      <p:sp>
+        <p:nvSpPr>
+          <p:cNvPr id="14" name="Text 11"/>
+          <p:cNvSpPr txBox="1"/>
+          <p:nvPr/>
+        </p:nvSpPr>
+        <p:spPr>
+          <a:xfrm>
+            <a:off x="7863840" y="5788152"/>
+            <a:ext cx="3779215" cy="384048"/>
+          </a:xfrm>
+          <a:prstGeom prst="rect">
+            <a:avLst/>
+          </a:prstGeom>
+          <a:noFill/>
+          <a:ln/>
+        </p:spPr>
+        <p:txBody>
+          <a:bodyPr wrap="square" lIns="0" tIns="0" rIns="0" bIns="0" rtlCol="0" anchor="ctr"/>
+          <a:lstStyle/>
+          <a:p>
+            <a:pPr algn="ctr" indent="0" marL="0">
+              <a:buNone/>
+            </a:pPr>
+            <a:r>
+              <a:rPr lang="en-US" sz="1200" i="1" dirty="0">
+                <a:solidFill>
+                  <a:srgbClr val="5B6B78"/>
+                </a:solidFill>
+                <a:latin typeface="Calibri" pitchFamily="34" charset="0"/>
+                <a:ea typeface="Calibri" pitchFamily="34" charset="-122"/>
+                <a:cs typeface="Calibri" pitchFamily="34" charset="-120"/>
+              </a:rPr>
+              <a:t>An FPGA development board: the large chip is the FPGA</a:t>
+            </a:r>
+            <a:endParaRPr lang="en-US" sz="1200" dirty="0"/>
           </a:p>
         </p:txBody>
       </p:sp>
@@ -15670,7 +14403,7 @@
         </p:nvSpPr>
         <p:spPr>
           <a:xfrm>
-            <a:off x="548640" y="1492758"/>
+            <a:off x="548640" y="1523746"/>
             <a:ext cx="146304" cy="146304"/>
           </a:xfrm>
           <a:prstGeom prst="rect">
@@ -15696,7 +14429,7 @@
         <p:spPr>
           <a:xfrm>
             <a:off x="932688" y="1417320"/>
-            <a:ext cx="6565392" cy="557784"/>
+            <a:ext cx="10710367" cy="681736"/>
           </a:xfrm>
           <a:prstGeom prst="rect">
             <a:avLst/>
@@ -15715,7 +14448,7 @@
               <a:buNone/>
             </a:pPr>
             <a:r>
-              <a:rPr lang="en-US" sz="1800" dirty="0">
+              <a:rPr lang="en-US" sz="2200" dirty="0">
                 <a:solidFill>
                   <a:srgbClr val="1B2530"/>
                 </a:solidFill>
@@ -15725,7 +14458,7 @@
               </a:rPr>
               <a:t>One equation, three factors: every fast machine attacks one of them, or multiplies processors</a:t>
             </a:r>
-            <a:endParaRPr lang="en-US" sz="1800" dirty="0"/>
+            <a:endParaRPr lang="en-US" sz="2200" dirty="0"/>
           </a:p>
         </p:txBody>
       </p:sp>
@@ -15737,7 +14470,7 @@
         </p:nvSpPr>
         <p:spPr>
           <a:xfrm>
-            <a:off x="548640" y="2224088"/>
+            <a:off x="548640" y="2390648"/>
             <a:ext cx="146304" cy="146304"/>
           </a:xfrm>
           <a:prstGeom prst="rect">
@@ -15762,8 +14495,8 @@
         </p:nvSpPr>
         <p:spPr>
           <a:xfrm>
-            <a:off x="932688" y="2148650"/>
-            <a:ext cx="6565392" cy="557784"/>
+            <a:off x="932688" y="2284222"/>
+            <a:ext cx="10710367" cy="681736"/>
           </a:xfrm>
           <a:prstGeom prst="rect">
             <a:avLst/>
@@ -15782,7 +14515,7 @@
               <a:buNone/>
             </a:pPr>
             <a:r>
-              <a:rPr lang="en-US" sz="1800" dirty="0">
+              <a:rPr lang="en-US" sz="2200" dirty="0">
                 <a:solidFill>
                   <a:srgbClr val="1B2530"/>
                 </a:solidFill>
@@ -15792,7 +14525,7 @@
               </a:rPr>
               <a:t>Superscalar, out-of-order cores keep the contract of the instruction set and execute many instructions at once</a:t>
             </a:r>
-            <a:endParaRPr lang="en-US" sz="1800" dirty="0"/>
+            <a:endParaRPr lang="en-US" sz="2200" dirty="0"/>
           </a:p>
         </p:txBody>
       </p:sp>
@@ -15804,7 +14537,7 @@
         </p:nvSpPr>
         <p:spPr>
           <a:xfrm>
-            <a:off x="548640" y="2955417"/>
+            <a:off x="548640" y="3257550"/>
             <a:ext cx="146304" cy="146304"/>
           </a:xfrm>
           <a:prstGeom prst="rect">
@@ -15829,8 +14562,8 @@
         </p:nvSpPr>
         <p:spPr>
           <a:xfrm>
-            <a:off x="932688" y="2879979"/>
-            <a:ext cx="6565392" cy="836676"/>
+            <a:off x="932688" y="3151124"/>
+            <a:ext cx="10710367" cy="681736"/>
           </a:xfrm>
           <a:prstGeom prst="rect">
             <a:avLst/>
@@ -15849,7 +14582,7 @@
               <a:buNone/>
             </a:pPr>
             <a:r>
-              <a:rPr lang="en-US" sz="1800" dirty="0">
+              <a:rPr lang="en-US" sz="2200" dirty="0">
                 <a:solidFill>
                   <a:srgbClr val="1B2530"/>
                 </a:solidFill>
@@ -15859,7 +14592,7 @@
               </a:rPr>
               <a:t>Vectors, GPUs and clusters exploit data that can be processed independently; Amdahl's law says how far that goes</a:t>
             </a:r>
-            <a:endParaRPr lang="en-US" sz="1800" dirty="0"/>
+            <a:endParaRPr lang="en-US" sz="2200" dirty="0"/>
           </a:p>
         </p:txBody>
       </p:sp>
@@ -15871,7 +14604,7 @@
         </p:nvSpPr>
         <p:spPr>
           <a:xfrm>
-            <a:off x="548640" y="3965639"/>
+            <a:off x="548640" y="4124452"/>
             <a:ext cx="146304" cy="146304"/>
           </a:xfrm>
           <a:prstGeom prst="rect">
@@ -15896,8 +14629,8 @@
         </p:nvSpPr>
         <p:spPr>
           <a:xfrm>
-            <a:off x="932688" y="3890201"/>
-            <a:ext cx="6565392" cy="557784"/>
+            <a:off x="932688" y="4018026"/>
+            <a:ext cx="10710367" cy="340868"/>
           </a:xfrm>
           <a:prstGeom prst="rect">
             <a:avLst/>
@@ -15916,7 +14649,7 @@
               <a:buNone/>
             </a:pPr>
             <a:r>
-              <a:rPr lang="en-US" sz="1800" dirty="0">
+              <a:rPr lang="en-US" sz="2200" dirty="0">
                 <a:solidFill>
                   <a:srgbClr val="1B2530"/>
                 </a:solidFill>
@@ -15926,7 +14659,7 @@
               </a:rPr>
               <a:t>FPGAs turn a description into a circuit: the logic of this course, at scale</a:t>
             </a:r>
-            <a:endParaRPr lang="en-US" sz="1800" dirty="0"/>
+            <a:endParaRPr lang="en-US" sz="2200" dirty="0"/>
           </a:p>
         </p:txBody>
       </p:sp>
@@ -15938,7 +14671,7 @@
         </p:nvSpPr>
         <p:spPr>
           <a:xfrm>
-            <a:off x="548640" y="4696968"/>
+            <a:off x="548640" y="4650486"/>
             <a:ext cx="146304" cy="146304"/>
           </a:xfrm>
           <a:prstGeom prst="rect">
@@ -15963,8 +14696,8 @@
         </p:nvSpPr>
         <p:spPr>
           <a:xfrm>
-            <a:off x="932688" y="4621530"/>
-            <a:ext cx="6565392" cy="1550670"/>
+            <a:off x="932688" y="4544060"/>
+            <a:ext cx="10710367" cy="1628140"/>
           </a:xfrm>
           <a:prstGeom prst="rect">
             <a:avLst/>
@@ -15983,7 +14716,7 @@
               <a:buNone/>
             </a:pPr>
             <a:r>
-              <a:rPr lang="en-US" sz="1800" dirty="0">
+              <a:rPr lang="en-US" sz="2200" dirty="0">
                 <a:solidFill>
                   <a:srgbClr val="1B2530"/>
                 </a:solidFill>
@@ -15993,7 +14726,7 @@
               </a:rPr>
               <a:t>Reading</a:t>
             </a:r>
-            <a:endParaRPr lang="en-US" sz="1800" dirty="0"/>
+            <a:endParaRPr lang="en-US" sz="2200" dirty="0"/>
           </a:p>
           <a:p>
             <a:pPr indent="0" marL="0">
@@ -16003,7 +14736,7 @@
               <a:buNone/>
             </a:pPr>
             <a:r>
-              <a:rPr lang="en-US" sz="1500" dirty="0">
+              <a:rPr lang="en-US" sz="1900" dirty="0">
                 <a:solidFill>
                   <a:srgbClr val="5B6B78"/>
                 </a:solidFill>
@@ -16013,7 +14746,7 @@
               </a:rPr>
               <a:t>– Patterson, Hennessy: Computer Organization and Design, RISC-V Edition, chapters 4 and 6</a:t>
             </a:r>
-            <a:endParaRPr lang="en-US" sz="1800" dirty="0"/>
+            <a:endParaRPr lang="en-US" sz="2200" dirty="0"/>
           </a:p>
           <a:p>
             <a:pPr indent="0" marL="0">
@@ -16023,7 +14756,7 @@
               <a:buNone/>
             </a:pPr>
             <a:r>
-              <a:rPr lang="en-US" sz="1500" dirty="0">
+              <a:rPr lang="en-US" sz="1900" dirty="0">
                 <a:solidFill>
                   <a:srgbClr val="5B6B78"/>
                 </a:solidFill>
@@ -16033,7 +14766,7 @@
               </a:rPr>
               <a:t>– Hennessy, Patterson: Computer Architecture, A Quantitative Approach</a:t>
             </a:r>
-            <a:endParaRPr lang="en-US" sz="1800" dirty="0"/>
+            <a:endParaRPr lang="en-US" sz="2200" dirty="0"/>
           </a:p>
           <a:p>
             <a:pPr indent="0" marL="0">
@@ -16043,7 +14776,7 @@
               <a:buNone/>
             </a:pPr>
             <a:r>
-              <a:rPr lang="en-US" sz="1500" dirty="0">
+              <a:rPr lang="en-US" sz="1900" dirty="0">
                 <a:solidFill>
                   <a:srgbClr val="5B6B78"/>
                 </a:solidFill>
@@ -16053,70 +14786,7 @@
               </a:rPr>
               <a:t>– top500.org; the RISC-V vector specification at riscv.org</a:t>
             </a:r>
-            <a:endParaRPr lang="en-US" sz="1800" dirty="0"/>
-          </a:p>
-        </p:txBody>
-      </p:sp>
-      <p:pic>
-        <p:nvPicPr>
-          <p:cNvPr id="13" name="Image 0" descr="/Users/raffaelemontella/devel/riscv-prg32/computer-architecture-with-prg32/tools/assets/book_patterson.jpg">    </p:cNvPr>
-          <p:cNvPicPr>
-            <a:picLocks noChangeAspect="1"/>
-          </p:cNvPicPr>
-          <p:nvPr/>
-        </p:nvPicPr>
-        <p:blipFill>
-          <a:blip r:embed="rId1"/>
-          <a:stretch>
-            <a:fillRect/>
-          </a:stretch>
-        </p:blipFill>
-        <p:spPr>
-          <a:xfrm>
-            <a:off x="8192838" y="1417320"/>
-            <a:ext cx="3121220" cy="4297680"/>
-          </a:xfrm>
-          <a:prstGeom prst="rect">
-            <a:avLst/>
-          </a:prstGeom>
-        </p:spPr>
-      </p:pic>
-      <p:sp>
-        <p:nvSpPr>
-          <p:cNvPr id="14" name="Text 11"/>
-          <p:cNvSpPr txBox="1"/>
-          <p:nvPr/>
-        </p:nvSpPr>
-        <p:spPr>
-          <a:xfrm>
-            <a:off x="7863840" y="5788152"/>
-            <a:ext cx="3779215" cy="384048"/>
-          </a:xfrm>
-          <a:prstGeom prst="rect">
-            <a:avLst/>
-          </a:prstGeom>
-          <a:noFill/>
-          <a:ln/>
-        </p:spPr>
-        <p:txBody>
-          <a:bodyPr wrap="square" lIns="0" tIns="0" rIns="0" bIns="0" rtlCol="0" anchor="ctr"/>
-          <a:lstStyle/>
-          <a:p>
-            <a:pPr algn="ctr" indent="0" marL="0">
-              <a:buNone/>
-            </a:pPr>
-            <a:r>
-              <a:rPr lang="en-US" sz="1200" i="1" dirty="0">
-                <a:solidFill>
-                  <a:srgbClr val="5B6B78"/>
-                </a:solidFill>
-                <a:latin typeface="Calibri" pitchFamily="34" charset="0"/>
-                <a:ea typeface="Calibri" pitchFamily="34" charset="-122"/>
-                <a:cs typeface="Calibri" pitchFamily="34" charset="-120"/>
-              </a:rPr>
-              <a:t>Patterson, Hennessy: RISC-V edition</a:t>
-            </a:r>
-            <a:endParaRPr lang="en-US" sz="1200" dirty="0"/>
+            <a:endParaRPr lang="en-US" sz="2200" dirty="0"/>
           </a:p>
         </p:txBody>
       </p:sp>
@@ -20196,318 +18866,1485 @@
                 <a:ea typeface="Cambria" pitchFamily="34" charset="-122"/>
                 <a:cs typeface="Cambria" pitchFamily="34" charset="-120"/>
               </a:rPr>
-              <a:t>One architecture, many microarchitectures</a:t>
+              <a:t>RISC-V goes superscalar</a:t>
             </a:r>
             <a:endParaRPr lang="en-US" sz="3200" dirty="0"/>
           </a:p>
         </p:txBody>
       </p:sp>
-      <p:sp>
-        <p:nvSpPr>
-          <p:cNvPr id="3" name="Shape 1"/>
-          <p:cNvSpPr/>
-          <p:nvPr/>
-        </p:nvSpPr>
-        <p:spPr>
-          <a:xfrm>
-            <a:off x="548640" y="1417320"/>
-            <a:ext cx="11094415" cy="1937004"/>
-          </a:xfrm>
-          <a:prstGeom prst="roundRect">
-            <a:avLst>
-              <a:gd name="adj" fmla="val 3777"/>
-            </a:avLst>
-          </a:prstGeom>
-          <a:solidFill>
-            <a:srgbClr val="F6E7D2"/>
-          </a:solidFill>
-          <a:ln w="12700">
-            <a:solidFill>
-              <a:srgbClr val="F6E7D2"/>
-            </a:solidFill>
-            <a:prstDash val="solid"/>
-          </a:ln>
-        </p:spPr>
-      </p:sp>
-      <p:sp>
-        <p:nvSpPr>
-          <p:cNvPr id="4" name="Text 2"/>
-          <p:cNvSpPr txBox="1"/>
-          <p:nvPr/>
-        </p:nvSpPr>
-        <p:spPr>
-          <a:xfrm>
-            <a:off x="914400" y="1600200"/>
-            <a:ext cx="10362895" cy="411480"/>
-          </a:xfrm>
-          <a:prstGeom prst="rect">
-            <a:avLst/>
-          </a:prstGeom>
-          <a:noFill/>
-          <a:ln/>
-        </p:spPr>
-        <p:txBody>
-          <a:bodyPr wrap="square" lIns="0" tIns="0" rIns="0" bIns="0" rtlCol="0" anchor="ctr"/>
-          <a:lstStyle/>
-          <a:p>
-            <a:pPr indent="0" marL="0">
-              <a:buNone/>
-            </a:pPr>
-            <a:r>
-              <a:rPr lang="en-US" sz="1600" b="1" dirty="0">
-                <a:solidFill>
-                  <a:srgbClr val="C7791B"/>
-                </a:solidFill>
-                <a:latin typeface="Calibri" pitchFamily="34" charset="0"/>
-                <a:ea typeface="Calibri" pitchFamily="34" charset="-122"/>
-                <a:cs typeface="Calibri" pitchFamily="34" charset="-120"/>
-              </a:rPr>
-              <a:t>Architecture and microarchitecture</a:t>
-            </a:r>
-            <a:endParaRPr lang="en-US" sz="1600" dirty="0"/>
-          </a:p>
-        </p:txBody>
-      </p:sp>
-      <p:sp>
-        <p:nvSpPr>
-          <p:cNvPr id="5" name="Text 3"/>
-          <p:cNvSpPr txBox="1"/>
-          <p:nvPr/>
-        </p:nvSpPr>
-        <p:spPr>
-          <a:xfrm>
-            <a:off x="914400" y="2057400"/>
-            <a:ext cx="10362895" cy="1114044"/>
-          </a:xfrm>
-          <a:prstGeom prst="rect">
-            <a:avLst/>
-          </a:prstGeom>
-          <a:noFill/>
-          <a:ln/>
-        </p:spPr>
-        <p:txBody>
-          <a:bodyPr wrap="square" lIns="0" tIns="0" rIns="0" bIns="0" rtlCol="0" anchor="ctr"/>
-          <a:lstStyle/>
-          <a:p>
-            <a:pPr indent="0" marL="0">
-              <a:buNone/>
-            </a:pPr>
-            <a:r>
-              <a:rPr lang="en-US" sz="2300" i="1" dirty="0">
-                <a:solidFill>
-                  <a:srgbClr val="1B2530"/>
-                </a:solidFill>
-                <a:latin typeface="Cambria" pitchFamily="34" charset="0"/>
-                <a:ea typeface="Cambria" pitchFamily="34" charset="-122"/>
-                <a:cs typeface="Cambria" pitchFamily="34" charset="-120"/>
-              </a:rPr>
-              <a:t>The architecture is the contract: instructions, registers, what each instruction does. The microarchitecture is one way to honour it: stages, width, predictors, caches.</a:t>
-            </a:r>
-            <a:endParaRPr lang="en-US" sz="2300" dirty="0"/>
-          </a:p>
-        </p:txBody>
-      </p:sp>
-      <p:sp>
-        <p:nvSpPr>
-          <p:cNvPr id="6" name="Shape 4"/>
-          <p:cNvSpPr/>
-          <p:nvPr/>
-        </p:nvSpPr>
-        <p:spPr>
-          <a:xfrm>
-            <a:off x="548640" y="3796284"/>
-            <a:ext cx="146304" cy="146304"/>
-          </a:xfrm>
-          <a:prstGeom prst="rect">
-            <a:avLst/>
-          </a:prstGeom>
-          <a:solidFill>
-            <a:srgbClr val="0E7C86"/>
-          </a:solidFill>
-          <a:ln w="12700">
-            <a:solidFill>
-              <a:srgbClr val="0E7C86"/>
-            </a:solidFill>
-            <a:prstDash val="solid"/>
-          </a:ln>
-        </p:spPr>
-      </p:sp>
-      <p:sp>
-        <p:nvSpPr>
-          <p:cNvPr id="7" name="Text 5"/>
-          <p:cNvSpPr txBox="1"/>
-          <p:nvPr/>
-        </p:nvSpPr>
-        <p:spPr>
-          <a:xfrm>
-            <a:off x="932688" y="3674364"/>
-            <a:ext cx="10710367" cy="743712"/>
-          </a:xfrm>
-          <a:prstGeom prst="rect">
-            <a:avLst/>
-          </a:prstGeom>
-          <a:noFill/>
-          <a:ln/>
-        </p:spPr>
-        <p:txBody>
-          <a:bodyPr wrap="square" lIns="0" tIns="0" rIns="0" bIns="0" rtlCol="0" anchor="t"/>
-          <a:lstStyle/>
-          <a:p>
-            <a:pPr indent="0" marL="0">
-              <a:spcAft>
-                <a:spcPts val="200"/>
-              </a:spcAft>
-              <a:buNone/>
-            </a:pPr>
-            <a:r>
-              <a:rPr lang="en-US" sz="2400" dirty="0">
-                <a:solidFill>
-                  <a:srgbClr val="1B2530"/>
-                </a:solidFill>
-                <a:latin typeface="Calibri" pitchFamily="34" charset="0"/>
-                <a:ea typeface="Calibri" pitchFamily="34" charset="-122"/>
-                <a:cs typeface="Calibri" pitchFamily="34" charset="-120"/>
-              </a:rPr>
-              <a:t>The add you wrote for a 160 MHz microcontroller is the add of a server core</a:t>
-            </a:r>
-            <a:endParaRPr lang="en-US" sz="2400" dirty="0"/>
-          </a:p>
-        </p:txBody>
-      </p:sp>
-      <p:sp>
-        <p:nvSpPr>
-          <p:cNvPr id="8" name="Shape 6"/>
-          <p:cNvSpPr/>
-          <p:nvPr/>
-        </p:nvSpPr>
-        <p:spPr>
-          <a:xfrm>
-            <a:off x="548640" y="4859274"/>
-            <a:ext cx="146304" cy="146304"/>
-          </a:xfrm>
-          <a:prstGeom prst="rect">
-            <a:avLst/>
-          </a:prstGeom>
-          <a:solidFill>
-            <a:srgbClr val="C7791B"/>
-          </a:solidFill>
-          <a:ln w="12700">
-            <a:solidFill>
-              <a:srgbClr val="C7791B"/>
-            </a:solidFill>
-            <a:prstDash val="solid"/>
-          </a:ln>
-        </p:spPr>
-      </p:sp>
-      <p:sp>
-        <p:nvSpPr>
-          <p:cNvPr id="9" name="Text 7"/>
-          <p:cNvSpPr txBox="1"/>
-          <p:nvPr/>
-        </p:nvSpPr>
-        <p:spPr>
-          <a:xfrm>
-            <a:off x="932688" y="4737354"/>
-            <a:ext cx="10710367" cy="743712"/>
-          </a:xfrm>
-          <a:prstGeom prst="rect">
-            <a:avLst/>
-          </a:prstGeom>
-          <a:noFill/>
-          <a:ln/>
-        </p:spPr>
-        <p:txBody>
-          <a:bodyPr wrap="square" lIns="0" tIns="0" rIns="0" bIns="0" rtlCol="0" anchor="t"/>
-          <a:lstStyle/>
-          <a:p>
-            <a:pPr indent="0" marL="0">
-              <a:spcAft>
-                <a:spcPts val="200"/>
-              </a:spcAft>
-              <a:buNone/>
-            </a:pPr>
-            <a:r>
-              <a:rPr lang="en-US" sz="2400" dirty="0">
-                <a:solidFill>
-                  <a:srgbClr val="1B2530"/>
-                </a:solidFill>
-                <a:latin typeface="Calibri" pitchFamily="34" charset="0"/>
-                <a:ea typeface="Calibri" pitchFamily="34" charset="-122"/>
-                <a:cs typeface="Calibri" pitchFamily="34" charset="-120"/>
-              </a:rPr>
-              <a:t>Verm1 would run unchanged on any of the cores of the previous slide, given a screen</a:t>
-            </a:r>
-            <a:endParaRPr lang="en-US" sz="2400" dirty="0"/>
-          </a:p>
-        </p:txBody>
-      </p:sp>
-      <p:sp>
-        <p:nvSpPr>
-          <p:cNvPr id="10" name="Shape 8"/>
-          <p:cNvSpPr/>
-          <p:nvPr/>
-        </p:nvSpPr>
-        <p:spPr>
-          <a:xfrm>
-            <a:off x="548640" y="5922264"/>
-            <a:ext cx="146304" cy="146304"/>
-          </a:xfrm>
-          <a:prstGeom prst="rect">
-            <a:avLst/>
-          </a:prstGeom>
-          <a:solidFill>
-            <a:srgbClr val="0E7C86"/>
-          </a:solidFill>
-          <a:ln w="12700">
-            <a:solidFill>
-              <a:srgbClr val="0E7C86"/>
-            </a:solidFill>
-            <a:prstDash val="solid"/>
-          </a:ln>
-        </p:spPr>
-      </p:sp>
-      <p:sp>
-        <p:nvSpPr>
-          <p:cNvPr id="11" name="Text 9"/>
-          <p:cNvSpPr txBox="1"/>
-          <p:nvPr/>
-        </p:nvSpPr>
-        <p:spPr>
-          <a:xfrm>
-            <a:off x="932688" y="5800344"/>
-            <a:ext cx="10710367" cy="371856"/>
-          </a:xfrm>
-          <a:prstGeom prst="rect">
-            <a:avLst/>
-          </a:prstGeom>
-          <a:noFill/>
-          <a:ln/>
-        </p:spPr>
-        <p:txBody>
-          <a:bodyPr wrap="square" lIns="0" tIns="0" rIns="0" bIns="0" rtlCol="0" anchor="t"/>
-          <a:lstStyle/>
-          <a:p>
-            <a:pPr indent="0" marL="0">
-              <a:spcAft>
-                <a:spcPts val="200"/>
-              </a:spcAft>
-              <a:buNone/>
-            </a:pPr>
-            <a:r>
-              <a:rPr lang="en-US" sz="2400" dirty="0">
-                <a:solidFill>
-                  <a:srgbClr val="1B2530"/>
-                </a:solidFill>
-                <a:latin typeface="Calibri" pitchFamily="34" charset="0"/>
-                <a:ea typeface="Calibri" pitchFamily="34" charset="-122"/>
-                <a:cs typeface="Calibri" pitchFamily="34" charset="-120"/>
-              </a:rPr>
-              <a:t>This is why an instruction set learned once is knowledge that lasts</a:t>
-            </a:r>
-            <a:endParaRPr lang="en-US" sz="2400" dirty="0"/>
-          </a:p>
-        </p:txBody>
-      </p:sp>
+      <p:graphicFrame>
+        <p:nvGraphicFramePr>
+          <p:cNvPr id="9" name="Table 0"/>
+          <p:cNvGraphicFramePr>
+            <a:graphicFrameLocks noGrp="1"/>
+          </p:cNvGraphicFramePr>
+          <p:nvPr>
+            <p:extLst>
+              <p:ext uri="{D42A27DB-BD31-4B8C-83A1-F6EECF244321}">
+                <p14:modId xmlns:p14="http://schemas.microsoft.com/office/powerpoint/2010/main" val="1579011935"/>
+              </p:ext>
+            </p:extLst>
+          </p:nvPr>
+        </p:nvGraphicFramePr>
+        <p:xfrm>
+          <a:off x="548640" y="1417320"/>
+          <a:ext cx="11094415" cy="914400"/>
+        </p:xfrm>
+        <a:graphic>
+          <a:graphicData uri="http://schemas.openxmlformats.org/drawingml/2006/table">
+            <a:tbl>
+              <a:tblPr/>
+              <a:tblGrid>
+                <a:gridCol w="2694358"/>
+                <a:gridCol w="3328325"/>
+                <a:gridCol w="5071733"/>
+              </a:tblGrid>
+              <a:tr h="0">
+                <a:tc>
+                  <a:txBody>
+                    <a:bodyPr/>
+                    <a:lstStyle/>
+                    <a:p>
+                      <a:pPr algn="l" indent="0" marL="0">
+                        <a:buNone/>
+                      </a:pPr>
+                      <a:r>
+                        <a:rPr lang="en-US" sz="2000" b="1" dirty="0">
+                          <a:solidFill>
+                            <a:srgbClr val="FFFFFF"/>
+                          </a:solidFill>
+                          <a:latin typeface="Calibri" pitchFamily="34" charset="0"/>
+                          <a:ea typeface="Calibri" pitchFamily="34" charset="-122"/>
+                          <a:cs typeface="Calibri" pitchFamily="34" charset="-120"/>
+                        </a:rPr>
+                        <a:t>Core</a:t>
+                      </a:r>
+                      <a:endParaRPr lang="en-US" sz="2000" dirty="0">
+                        <a:latin typeface="Calibri" charset="0"/>
+                        <a:ea typeface="Calibri" charset="0"/>
+                        <a:cs typeface="Calibri" charset="0"/>
+                      </a:endParaRPr>
+                    </a:p>
+                  </a:txBody>
+                  <a:tcPr marL="101600" marR="101600" marT="50800" marB="50800" anchor="ctr">
+                    <a:lnL w="6350" cap="flat" cmpd="sng" algn="ctr">
+                      <a:solidFill>
+                        <a:srgbClr val="C9D2D8"/>
+                      </a:solidFill>
+                      <a:prstDash val="solid"/>
+                      <a:round/>
+                      <a:headEnd type="none" w="med" len="med"/>
+                      <a:tailEnd type="none" w="med" len="med"/>
+                    </a:lnL>
+                    <a:lnR w="6350" cap="flat" cmpd="sng" algn="ctr">
+                      <a:solidFill>
+                        <a:srgbClr val="C9D2D8"/>
+                      </a:solidFill>
+                      <a:prstDash val="solid"/>
+                      <a:round/>
+                      <a:headEnd type="none" w="med" len="med"/>
+                      <a:tailEnd type="none" w="med" len="med"/>
+                    </a:lnR>
+                    <a:lnT w="6350" cap="flat" cmpd="sng" algn="ctr">
+                      <a:solidFill>
+                        <a:srgbClr val="C9D2D8"/>
+                      </a:solidFill>
+                      <a:prstDash val="solid"/>
+                      <a:round/>
+                      <a:headEnd type="none" w="med" len="med"/>
+                      <a:tailEnd type="none" w="med" len="med"/>
+                    </a:lnT>
+                    <a:lnB w="6350" cap="flat" cmpd="sng" algn="ctr">
+                      <a:solidFill>
+                        <a:srgbClr val="C9D2D8"/>
+                      </a:solidFill>
+                      <a:prstDash val="solid"/>
+                      <a:round/>
+                      <a:headEnd type="none" w="med" len="med"/>
+                      <a:tailEnd type="none" w="med" len="med"/>
+                    </a:lnB>
+                    <a:solidFill>
+                      <a:srgbClr val="2E4A62"/>
+                    </a:solidFill>
+                  </a:tcPr>
+                </a:tc>
+                <a:tc>
+                  <a:txBody>
+                    <a:bodyPr/>
+                    <a:lstStyle/>
+                    <a:p>
+                      <a:pPr algn="l" indent="0" marL="0">
+                        <a:buNone/>
+                      </a:pPr>
+                      <a:r>
+                        <a:rPr lang="en-US" sz="2000" b="1" dirty="0">
+                          <a:solidFill>
+                            <a:srgbClr val="FFFFFF"/>
+                          </a:solidFill>
+                          <a:latin typeface="Calibri" pitchFamily="34" charset="0"/>
+                          <a:ea typeface="Calibri" pitchFamily="34" charset="-122"/>
+                          <a:cs typeface="Calibri" pitchFamily="34" charset="-120"/>
+                        </a:rPr>
+                        <a:t>From</a:t>
+                      </a:r>
+                      <a:endParaRPr lang="en-US" sz="2000" dirty="0">
+                        <a:latin typeface="Calibri" charset="0"/>
+                        <a:ea typeface="Calibri" charset="0"/>
+                        <a:cs typeface="Calibri" charset="0"/>
+                      </a:endParaRPr>
+                    </a:p>
+                  </a:txBody>
+                  <a:tcPr marL="101600" marR="101600" marT="50800" marB="50800" anchor="ctr">
+                    <a:lnL w="6350" cap="flat" cmpd="sng" algn="ctr">
+                      <a:solidFill>
+                        <a:srgbClr val="C9D2D8"/>
+                      </a:solidFill>
+                      <a:prstDash val="solid"/>
+                      <a:round/>
+                      <a:headEnd type="none" w="med" len="med"/>
+                      <a:tailEnd type="none" w="med" len="med"/>
+                    </a:lnL>
+                    <a:lnR w="6350" cap="flat" cmpd="sng" algn="ctr">
+                      <a:solidFill>
+                        <a:srgbClr val="C9D2D8"/>
+                      </a:solidFill>
+                      <a:prstDash val="solid"/>
+                      <a:round/>
+                      <a:headEnd type="none" w="med" len="med"/>
+                      <a:tailEnd type="none" w="med" len="med"/>
+                    </a:lnR>
+                    <a:lnT w="6350" cap="flat" cmpd="sng" algn="ctr">
+                      <a:solidFill>
+                        <a:srgbClr val="C9D2D8"/>
+                      </a:solidFill>
+                      <a:prstDash val="solid"/>
+                      <a:round/>
+                      <a:headEnd type="none" w="med" len="med"/>
+                      <a:tailEnd type="none" w="med" len="med"/>
+                    </a:lnT>
+                    <a:lnB w="6350" cap="flat" cmpd="sng" algn="ctr">
+                      <a:solidFill>
+                        <a:srgbClr val="C9D2D8"/>
+                      </a:solidFill>
+                      <a:prstDash val="solid"/>
+                      <a:round/>
+                      <a:headEnd type="none" w="med" len="med"/>
+                      <a:tailEnd type="none" w="med" len="med"/>
+                    </a:lnB>
+                    <a:solidFill>
+                      <a:srgbClr val="2E4A62"/>
+                    </a:solidFill>
+                  </a:tcPr>
+                </a:tc>
+                <a:tc>
+                  <a:txBody>
+                    <a:bodyPr/>
+                    <a:lstStyle/>
+                    <a:p>
+                      <a:pPr algn="l" indent="0" marL="0">
+                        <a:buNone/>
+                      </a:pPr>
+                      <a:r>
+                        <a:rPr lang="en-US" sz="2000" b="1" dirty="0">
+                          <a:solidFill>
+                            <a:srgbClr val="FFFFFF"/>
+                          </a:solidFill>
+                          <a:latin typeface="Calibri" pitchFamily="34" charset="0"/>
+                          <a:ea typeface="Calibri" pitchFamily="34" charset="-122"/>
+                          <a:cs typeface="Calibri" pitchFamily="34" charset="-120"/>
+                        </a:rPr>
+                        <a:t>Kind</a:t>
+                      </a:r>
+                      <a:endParaRPr lang="en-US" sz="2000" dirty="0">
+                        <a:latin typeface="Calibri" charset="0"/>
+                        <a:ea typeface="Calibri" charset="0"/>
+                        <a:cs typeface="Calibri" charset="0"/>
+                      </a:endParaRPr>
+                    </a:p>
+                  </a:txBody>
+                  <a:tcPr marL="101600" marR="101600" marT="50800" marB="50800" anchor="ctr">
+                    <a:lnL w="6350" cap="flat" cmpd="sng" algn="ctr">
+                      <a:solidFill>
+                        <a:srgbClr val="C9D2D8"/>
+                      </a:solidFill>
+                      <a:prstDash val="solid"/>
+                      <a:round/>
+                      <a:headEnd type="none" w="med" len="med"/>
+                      <a:tailEnd type="none" w="med" len="med"/>
+                    </a:lnL>
+                    <a:lnR w="6350" cap="flat" cmpd="sng" algn="ctr">
+                      <a:solidFill>
+                        <a:srgbClr val="C9D2D8"/>
+                      </a:solidFill>
+                      <a:prstDash val="solid"/>
+                      <a:round/>
+                      <a:headEnd type="none" w="med" len="med"/>
+                      <a:tailEnd type="none" w="med" len="med"/>
+                    </a:lnR>
+                    <a:lnT w="6350" cap="flat" cmpd="sng" algn="ctr">
+                      <a:solidFill>
+                        <a:srgbClr val="C9D2D8"/>
+                      </a:solidFill>
+                      <a:prstDash val="solid"/>
+                      <a:round/>
+                      <a:headEnd type="none" w="med" len="med"/>
+                      <a:tailEnd type="none" w="med" len="med"/>
+                    </a:lnT>
+                    <a:lnB w="6350" cap="flat" cmpd="sng" algn="ctr">
+                      <a:solidFill>
+                        <a:srgbClr val="C9D2D8"/>
+                      </a:solidFill>
+                      <a:prstDash val="solid"/>
+                      <a:round/>
+                      <a:headEnd type="none" w="med" len="med"/>
+                      <a:tailEnd type="none" w="med" len="med"/>
+                    </a:lnB>
+                    <a:solidFill>
+                      <a:srgbClr val="2E4A62"/>
+                    </a:solidFill>
+                  </a:tcPr>
+                </a:tc>
+              </a:tr>
+              <a:tr h="0">
+                <a:tc>
+                  <a:txBody>
+                    <a:bodyPr/>
+                    <a:lstStyle/>
+                    <a:p>
+                      <a:pPr algn="l" indent="0" marL="0">
+                        <a:buNone/>
+                      </a:pPr>
+                      <a:r>
+                        <a:rPr lang="en-US" sz="2000" b="1" dirty="0">
+                          <a:solidFill>
+                            <a:srgbClr val="1B2530"/>
+                          </a:solidFill>
+                          <a:latin typeface="Calibri" pitchFamily="34" charset="0"/>
+                          <a:ea typeface="Calibri" pitchFamily="34" charset="-122"/>
+                          <a:cs typeface="Calibri" pitchFamily="34" charset="-120"/>
+                        </a:rPr>
+                        <a:t>HP core of the ESP32-C6</a:t>
+                      </a:r>
+                      <a:endParaRPr lang="en-US" sz="2000" dirty="0">
+                        <a:latin typeface="Calibri" charset="0"/>
+                        <a:ea typeface="Calibri" charset="0"/>
+                        <a:cs typeface="Calibri" charset="0"/>
+                      </a:endParaRPr>
+                    </a:p>
+                  </a:txBody>
+                  <a:tcPr marL="101600" marR="101600" marT="50800" marB="50800" anchor="ctr">
+                    <a:lnL w="6350" cap="flat" cmpd="sng" algn="ctr">
+                      <a:solidFill>
+                        <a:srgbClr val="C9D2D8"/>
+                      </a:solidFill>
+                      <a:prstDash val="solid"/>
+                      <a:round/>
+                      <a:headEnd type="none" w="med" len="med"/>
+                      <a:tailEnd type="none" w="med" len="med"/>
+                    </a:lnL>
+                    <a:lnR w="6350" cap="flat" cmpd="sng" algn="ctr">
+                      <a:solidFill>
+                        <a:srgbClr val="C9D2D8"/>
+                      </a:solidFill>
+                      <a:prstDash val="solid"/>
+                      <a:round/>
+                      <a:headEnd type="none" w="med" len="med"/>
+                      <a:tailEnd type="none" w="med" len="med"/>
+                    </a:lnR>
+                    <a:lnT w="6350" cap="flat" cmpd="sng" algn="ctr">
+                      <a:solidFill>
+                        <a:srgbClr val="C9D2D8"/>
+                      </a:solidFill>
+                      <a:prstDash val="solid"/>
+                      <a:round/>
+                      <a:headEnd type="none" w="med" len="med"/>
+                      <a:tailEnd type="none" w="med" len="med"/>
+                    </a:lnT>
+                    <a:lnB w="6350" cap="flat" cmpd="sng" algn="ctr">
+                      <a:solidFill>
+                        <a:srgbClr val="C9D2D8"/>
+                      </a:solidFill>
+                      <a:prstDash val="solid"/>
+                      <a:round/>
+                      <a:headEnd type="none" w="med" len="med"/>
+                      <a:tailEnd type="none" w="med" len="med"/>
+                    </a:lnB>
+                    <a:solidFill>
+                      <a:srgbClr val="EEF2F4"/>
+                    </a:solidFill>
+                  </a:tcPr>
+                </a:tc>
+                <a:tc>
+                  <a:txBody>
+                    <a:bodyPr/>
+                    <a:lstStyle/>
+                    <a:p>
+                      <a:pPr algn="l" indent="0" marL="0">
+                        <a:buNone/>
+                      </a:pPr>
+                      <a:r>
+                        <a:rPr lang="en-US" sz="2000" dirty="0">
+                          <a:solidFill>
+                            <a:srgbClr val="1B2530"/>
+                          </a:solidFill>
+                          <a:latin typeface="Calibri" pitchFamily="34" charset="0"/>
+                          <a:ea typeface="Calibri" pitchFamily="34" charset="-122"/>
+                          <a:cs typeface="Calibri" pitchFamily="34" charset="-120"/>
+                        </a:rPr>
+                        <a:t>Espressif</a:t>
+                      </a:r>
+                      <a:endParaRPr lang="en-US" sz="2000" dirty="0">
+                        <a:latin typeface="Calibri" charset="0"/>
+                        <a:ea typeface="Calibri" charset="0"/>
+                        <a:cs typeface="Calibri" charset="0"/>
+                      </a:endParaRPr>
+                    </a:p>
+                  </a:txBody>
+                  <a:tcPr marL="101600" marR="101600" marT="50800" marB="50800" anchor="ctr">
+                    <a:lnL w="6350" cap="flat" cmpd="sng" algn="ctr">
+                      <a:solidFill>
+                        <a:srgbClr val="C9D2D8"/>
+                      </a:solidFill>
+                      <a:prstDash val="solid"/>
+                      <a:round/>
+                      <a:headEnd type="none" w="med" len="med"/>
+                      <a:tailEnd type="none" w="med" len="med"/>
+                    </a:lnL>
+                    <a:lnR w="6350" cap="flat" cmpd="sng" algn="ctr">
+                      <a:solidFill>
+                        <a:srgbClr val="C9D2D8"/>
+                      </a:solidFill>
+                      <a:prstDash val="solid"/>
+                      <a:round/>
+                      <a:headEnd type="none" w="med" len="med"/>
+                      <a:tailEnd type="none" w="med" len="med"/>
+                    </a:lnR>
+                    <a:lnT w="6350" cap="flat" cmpd="sng" algn="ctr">
+                      <a:solidFill>
+                        <a:srgbClr val="C9D2D8"/>
+                      </a:solidFill>
+                      <a:prstDash val="solid"/>
+                      <a:round/>
+                      <a:headEnd type="none" w="med" len="med"/>
+                      <a:tailEnd type="none" w="med" len="med"/>
+                    </a:lnT>
+                    <a:lnB w="6350" cap="flat" cmpd="sng" algn="ctr">
+                      <a:solidFill>
+                        <a:srgbClr val="C9D2D8"/>
+                      </a:solidFill>
+                      <a:prstDash val="solid"/>
+                      <a:round/>
+                      <a:headEnd type="none" w="med" len="med"/>
+                      <a:tailEnd type="none" w="med" len="med"/>
+                    </a:lnB>
+                    <a:solidFill>
+                      <a:srgbClr val="EEF2F4"/>
+                    </a:solidFill>
+                  </a:tcPr>
+                </a:tc>
+                <a:tc>
+                  <a:txBody>
+                    <a:bodyPr/>
+                    <a:lstStyle/>
+                    <a:p>
+                      <a:pPr algn="l" indent="0" marL="0">
+                        <a:buNone/>
+                      </a:pPr>
+                      <a:r>
+                        <a:rPr lang="en-US" sz="2000" dirty="0">
+                          <a:solidFill>
+                            <a:srgbClr val="1B2530"/>
+                          </a:solidFill>
+                          <a:latin typeface="Calibri" pitchFamily="34" charset="0"/>
+                          <a:ea typeface="Calibri" pitchFamily="34" charset="-122"/>
+                          <a:cs typeface="Calibri" pitchFamily="34" charset="-120"/>
+                        </a:rPr>
+                        <a:t>in order, four stages, one instruction per cycle: your kit</a:t>
+                      </a:r>
+                      <a:endParaRPr lang="en-US" sz="2000" dirty="0">
+                        <a:latin typeface="Calibri" charset="0"/>
+                        <a:ea typeface="Calibri" charset="0"/>
+                        <a:cs typeface="Calibri" charset="0"/>
+                      </a:endParaRPr>
+                    </a:p>
+                  </a:txBody>
+                  <a:tcPr marL="101600" marR="101600" marT="50800" marB="50800" anchor="ctr">
+                    <a:lnL w="6350" cap="flat" cmpd="sng" algn="ctr">
+                      <a:solidFill>
+                        <a:srgbClr val="C9D2D8"/>
+                      </a:solidFill>
+                      <a:prstDash val="solid"/>
+                      <a:round/>
+                      <a:headEnd type="none" w="med" len="med"/>
+                      <a:tailEnd type="none" w="med" len="med"/>
+                    </a:lnL>
+                    <a:lnR w="6350" cap="flat" cmpd="sng" algn="ctr">
+                      <a:solidFill>
+                        <a:srgbClr val="C9D2D8"/>
+                      </a:solidFill>
+                      <a:prstDash val="solid"/>
+                      <a:round/>
+                      <a:headEnd type="none" w="med" len="med"/>
+                      <a:tailEnd type="none" w="med" len="med"/>
+                    </a:lnR>
+                    <a:lnT w="6350" cap="flat" cmpd="sng" algn="ctr">
+                      <a:solidFill>
+                        <a:srgbClr val="C9D2D8"/>
+                      </a:solidFill>
+                      <a:prstDash val="solid"/>
+                      <a:round/>
+                      <a:headEnd type="none" w="med" len="med"/>
+                      <a:tailEnd type="none" w="med" len="med"/>
+                    </a:lnT>
+                    <a:lnB w="6350" cap="flat" cmpd="sng" algn="ctr">
+                      <a:solidFill>
+                        <a:srgbClr val="C9D2D8"/>
+                      </a:solidFill>
+                      <a:prstDash val="solid"/>
+                      <a:round/>
+                      <a:headEnd type="none" w="med" len="med"/>
+                      <a:tailEnd type="none" w="med" len="med"/>
+                    </a:lnB>
+                    <a:solidFill>
+                      <a:srgbClr val="EEF2F4"/>
+                    </a:solidFill>
+                  </a:tcPr>
+                </a:tc>
+              </a:tr>
+              <a:tr h="0">
+                <a:tc>
+                  <a:txBody>
+                    <a:bodyPr/>
+                    <a:lstStyle/>
+                    <a:p>
+                      <a:pPr algn="l" indent="0" marL="0">
+                        <a:buNone/>
+                      </a:pPr>
+                      <a:r>
+                        <a:rPr lang="en-US" sz="2000" b="1" dirty="0">
+                          <a:solidFill>
+                            <a:srgbClr val="1B2530"/>
+                          </a:solidFill>
+                          <a:latin typeface="Calibri" pitchFamily="34" charset="0"/>
+                          <a:ea typeface="Calibri" pitchFamily="34" charset="-122"/>
+                          <a:cs typeface="Calibri" pitchFamily="34" charset="-120"/>
+                        </a:rPr>
+                        <a:t>BOOM</a:t>
+                      </a:r>
+                      <a:endParaRPr lang="en-US" sz="2000" dirty="0">
+                        <a:latin typeface="Calibri" charset="0"/>
+                        <a:ea typeface="Calibri" charset="0"/>
+                        <a:cs typeface="Calibri" charset="0"/>
+                      </a:endParaRPr>
+                    </a:p>
+                  </a:txBody>
+                  <a:tcPr marL="101600" marR="101600" marT="50800" marB="50800" anchor="ctr">
+                    <a:lnL w="6350" cap="flat" cmpd="sng" algn="ctr">
+                      <a:solidFill>
+                        <a:srgbClr val="C9D2D8"/>
+                      </a:solidFill>
+                      <a:prstDash val="solid"/>
+                      <a:round/>
+                      <a:headEnd type="none" w="med" len="med"/>
+                      <a:tailEnd type="none" w="med" len="med"/>
+                    </a:lnL>
+                    <a:lnR w="6350" cap="flat" cmpd="sng" algn="ctr">
+                      <a:solidFill>
+                        <a:srgbClr val="C9D2D8"/>
+                      </a:solidFill>
+                      <a:prstDash val="solid"/>
+                      <a:round/>
+                      <a:headEnd type="none" w="med" len="med"/>
+                      <a:tailEnd type="none" w="med" len="med"/>
+                    </a:lnR>
+                    <a:lnT w="6350" cap="flat" cmpd="sng" algn="ctr">
+                      <a:solidFill>
+                        <a:srgbClr val="C9D2D8"/>
+                      </a:solidFill>
+                      <a:prstDash val="solid"/>
+                      <a:round/>
+                      <a:headEnd type="none" w="med" len="med"/>
+                      <a:tailEnd type="none" w="med" len="med"/>
+                    </a:lnT>
+                    <a:lnB w="6350" cap="flat" cmpd="sng" algn="ctr">
+                      <a:solidFill>
+                        <a:srgbClr val="C9D2D8"/>
+                      </a:solidFill>
+                      <a:prstDash val="solid"/>
+                      <a:round/>
+                      <a:headEnd type="none" w="med" len="med"/>
+                      <a:tailEnd type="none" w="med" len="med"/>
+                    </a:lnB>
+                    <a:solidFill>
+                      <a:srgbClr val="FFFFFF"/>
+                    </a:solidFill>
+                  </a:tcPr>
+                </a:tc>
+                <a:tc>
+                  <a:txBody>
+                    <a:bodyPr/>
+                    <a:lstStyle/>
+                    <a:p>
+                      <a:pPr algn="l" indent="0" marL="0">
+                        <a:buNone/>
+                      </a:pPr>
+                      <a:r>
+                        <a:rPr lang="en-US" sz="2000" dirty="0">
+                          <a:solidFill>
+                            <a:srgbClr val="1B2530"/>
+                          </a:solidFill>
+                          <a:latin typeface="Calibri" pitchFamily="34" charset="0"/>
+                          <a:ea typeface="Calibri" pitchFamily="34" charset="-122"/>
+                          <a:cs typeface="Calibri" pitchFamily="34" charset="-120"/>
+                        </a:rPr>
+                        <a:t>University of California, Berkeley</a:t>
+                      </a:r>
+                      <a:endParaRPr lang="en-US" sz="2000" dirty="0">
+                        <a:latin typeface="Calibri" charset="0"/>
+                        <a:ea typeface="Calibri" charset="0"/>
+                        <a:cs typeface="Calibri" charset="0"/>
+                      </a:endParaRPr>
+                    </a:p>
+                  </a:txBody>
+                  <a:tcPr marL="101600" marR="101600" marT="50800" marB="50800" anchor="ctr">
+                    <a:lnL w="6350" cap="flat" cmpd="sng" algn="ctr">
+                      <a:solidFill>
+                        <a:srgbClr val="C9D2D8"/>
+                      </a:solidFill>
+                      <a:prstDash val="solid"/>
+                      <a:round/>
+                      <a:headEnd type="none" w="med" len="med"/>
+                      <a:tailEnd type="none" w="med" len="med"/>
+                    </a:lnL>
+                    <a:lnR w="6350" cap="flat" cmpd="sng" algn="ctr">
+                      <a:solidFill>
+                        <a:srgbClr val="C9D2D8"/>
+                      </a:solidFill>
+                      <a:prstDash val="solid"/>
+                      <a:round/>
+                      <a:headEnd type="none" w="med" len="med"/>
+                      <a:tailEnd type="none" w="med" len="med"/>
+                    </a:lnR>
+                    <a:lnT w="6350" cap="flat" cmpd="sng" algn="ctr">
+                      <a:solidFill>
+                        <a:srgbClr val="C9D2D8"/>
+                      </a:solidFill>
+                      <a:prstDash val="solid"/>
+                      <a:round/>
+                      <a:headEnd type="none" w="med" len="med"/>
+                      <a:tailEnd type="none" w="med" len="med"/>
+                    </a:lnT>
+                    <a:lnB w="6350" cap="flat" cmpd="sng" algn="ctr">
+                      <a:solidFill>
+                        <a:srgbClr val="C9D2D8"/>
+                      </a:solidFill>
+                      <a:prstDash val="solid"/>
+                      <a:round/>
+                      <a:headEnd type="none" w="med" len="med"/>
+                      <a:tailEnd type="none" w="med" len="med"/>
+                    </a:lnB>
+                    <a:solidFill>
+                      <a:srgbClr val="FFFFFF"/>
+                    </a:solidFill>
+                  </a:tcPr>
+                </a:tc>
+                <a:tc>
+                  <a:txBody>
+                    <a:bodyPr/>
+                    <a:lstStyle/>
+                    <a:p>
+                      <a:pPr algn="l" indent="0" marL="0">
+                        <a:buNone/>
+                      </a:pPr>
+                      <a:r>
+                        <a:rPr lang="en-US" sz="2000" dirty="0">
+                          <a:solidFill>
+                            <a:srgbClr val="1B2530"/>
+                          </a:solidFill>
+                          <a:latin typeface="Calibri" pitchFamily="34" charset="0"/>
+                          <a:ea typeface="Calibri" pitchFamily="34" charset="-122"/>
+                          <a:cs typeface="Calibri" pitchFamily="34" charset="-120"/>
+                        </a:rPr>
+                        <a:t>out of order, open source, for research and teaching</a:t>
+                      </a:r>
+                      <a:endParaRPr lang="en-US" sz="2000" dirty="0">
+                        <a:latin typeface="Calibri" charset="0"/>
+                        <a:ea typeface="Calibri" charset="0"/>
+                        <a:cs typeface="Calibri" charset="0"/>
+                      </a:endParaRPr>
+                    </a:p>
+                  </a:txBody>
+                  <a:tcPr marL="101600" marR="101600" marT="50800" marB="50800" anchor="ctr">
+                    <a:lnL w="6350" cap="flat" cmpd="sng" algn="ctr">
+                      <a:solidFill>
+                        <a:srgbClr val="C9D2D8"/>
+                      </a:solidFill>
+                      <a:prstDash val="solid"/>
+                      <a:round/>
+                      <a:headEnd type="none" w="med" len="med"/>
+                      <a:tailEnd type="none" w="med" len="med"/>
+                    </a:lnL>
+                    <a:lnR w="6350" cap="flat" cmpd="sng" algn="ctr">
+                      <a:solidFill>
+                        <a:srgbClr val="C9D2D8"/>
+                      </a:solidFill>
+                      <a:prstDash val="solid"/>
+                      <a:round/>
+                      <a:headEnd type="none" w="med" len="med"/>
+                      <a:tailEnd type="none" w="med" len="med"/>
+                    </a:lnR>
+                    <a:lnT w="6350" cap="flat" cmpd="sng" algn="ctr">
+                      <a:solidFill>
+                        <a:srgbClr val="C9D2D8"/>
+                      </a:solidFill>
+                      <a:prstDash val="solid"/>
+                      <a:round/>
+                      <a:headEnd type="none" w="med" len="med"/>
+                      <a:tailEnd type="none" w="med" len="med"/>
+                    </a:lnT>
+                    <a:lnB w="6350" cap="flat" cmpd="sng" algn="ctr">
+                      <a:solidFill>
+                        <a:srgbClr val="C9D2D8"/>
+                      </a:solidFill>
+                      <a:prstDash val="solid"/>
+                      <a:round/>
+                      <a:headEnd type="none" w="med" len="med"/>
+                      <a:tailEnd type="none" w="med" len="med"/>
+                    </a:lnB>
+                    <a:solidFill>
+                      <a:srgbClr val="FFFFFF"/>
+                    </a:solidFill>
+                  </a:tcPr>
+                </a:tc>
+              </a:tr>
+              <a:tr h="0">
+                <a:tc>
+                  <a:txBody>
+                    <a:bodyPr/>
+                    <a:lstStyle/>
+                    <a:p>
+                      <a:pPr algn="l" indent="0" marL="0">
+                        <a:buNone/>
+                      </a:pPr>
+                      <a:r>
+                        <a:rPr lang="en-US" sz="2000" b="1" dirty="0">
+                          <a:solidFill>
+                            <a:srgbClr val="1B2530"/>
+                          </a:solidFill>
+                          <a:latin typeface="Calibri" pitchFamily="34" charset="0"/>
+                          <a:ea typeface="Calibri" pitchFamily="34" charset="-122"/>
+                          <a:cs typeface="Calibri" pitchFamily="34" charset="-120"/>
+                        </a:rPr>
+                        <a:t>XiangShan</a:t>
+                      </a:r>
+                      <a:endParaRPr lang="en-US" sz="2000" dirty="0">
+                        <a:latin typeface="Calibri" charset="0"/>
+                        <a:ea typeface="Calibri" charset="0"/>
+                        <a:cs typeface="Calibri" charset="0"/>
+                      </a:endParaRPr>
+                    </a:p>
+                  </a:txBody>
+                  <a:tcPr marL="101600" marR="101600" marT="50800" marB="50800" anchor="ctr">
+                    <a:lnL w="6350" cap="flat" cmpd="sng" algn="ctr">
+                      <a:solidFill>
+                        <a:srgbClr val="C9D2D8"/>
+                      </a:solidFill>
+                      <a:prstDash val="solid"/>
+                      <a:round/>
+                      <a:headEnd type="none" w="med" len="med"/>
+                      <a:tailEnd type="none" w="med" len="med"/>
+                    </a:lnL>
+                    <a:lnR w="6350" cap="flat" cmpd="sng" algn="ctr">
+                      <a:solidFill>
+                        <a:srgbClr val="C9D2D8"/>
+                      </a:solidFill>
+                      <a:prstDash val="solid"/>
+                      <a:round/>
+                      <a:headEnd type="none" w="med" len="med"/>
+                      <a:tailEnd type="none" w="med" len="med"/>
+                    </a:lnR>
+                    <a:lnT w="6350" cap="flat" cmpd="sng" algn="ctr">
+                      <a:solidFill>
+                        <a:srgbClr val="C9D2D8"/>
+                      </a:solidFill>
+                      <a:prstDash val="solid"/>
+                      <a:round/>
+                      <a:headEnd type="none" w="med" len="med"/>
+                      <a:tailEnd type="none" w="med" len="med"/>
+                    </a:lnT>
+                    <a:lnB w="6350" cap="flat" cmpd="sng" algn="ctr">
+                      <a:solidFill>
+                        <a:srgbClr val="C9D2D8"/>
+                      </a:solidFill>
+                      <a:prstDash val="solid"/>
+                      <a:round/>
+                      <a:headEnd type="none" w="med" len="med"/>
+                      <a:tailEnd type="none" w="med" len="med"/>
+                    </a:lnB>
+                    <a:solidFill>
+                      <a:srgbClr val="EEF2F4"/>
+                    </a:solidFill>
+                  </a:tcPr>
+                </a:tc>
+                <a:tc>
+                  <a:txBody>
+                    <a:bodyPr/>
+                    <a:lstStyle/>
+                    <a:p>
+                      <a:pPr algn="l" indent="0" marL="0">
+                        <a:buNone/>
+                      </a:pPr>
+                      <a:r>
+                        <a:rPr lang="en-US" sz="2000" dirty="0">
+                          <a:solidFill>
+                            <a:srgbClr val="1B2530"/>
+                          </a:solidFill>
+                          <a:latin typeface="Calibri" pitchFamily="34" charset="0"/>
+                          <a:ea typeface="Calibri" pitchFamily="34" charset="-122"/>
+                          <a:cs typeface="Calibri" pitchFamily="34" charset="-120"/>
+                        </a:rPr>
+                        <a:t>Chinese Academy of Sciences</a:t>
+                      </a:r>
+                      <a:endParaRPr lang="en-US" sz="2000" dirty="0">
+                        <a:latin typeface="Calibri" charset="0"/>
+                        <a:ea typeface="Calibri" charset="0"/>
+                        <a:cs typeface="Calibri" charset="0"/>
+                      </a:endParaRPr>
+                    </a:p>
+                  </a:txBody>
+                  <a:tcPr marL="101600" marR="101600" marT="50800" marB="50800" anchor="ctr">
+                    <a:lnL w="6350" cap="flat" cmpd="sng" algn="ctr">
+                      <a:solidFill>
+                        <a:srgbClr val="C9D2D8"/>
+                      </a:solidFill>
+                      <a:prstDash val="solid"/>
+                      <a:round/>
+                      <a:headEnd type="none" w="med" len="med"/>
+                      <a:tailEnd type="none" w="med" len="med"/>
+                    </a:lnL>
+                    <a:lnR w="6350" cap="flat" cmpd="sng" algn="ctr">
+                      <a:solidFill>
+                        <a:srgbClr val="C9D2D8"/>
+                      </a:solidFill>
+                      <a:prstDash val="solid"/>
+                      <a:round/>
+                      <a:headEnd type="none" w="med" len="med"/>
+                      <a:tailEnd type="none" w="med" len="med"/>
+                    </a:lnR>
+                    <a:lnT w="6350" cap="flat" cmpd="sng" algn="ctr">
+                      <a:solidFill>
+                        <a:srgbClr val="C9D2D8"/>
+                      </a:solidFill>
+                      <a:prstDash val="solid"/>
+                      <a:round/>
+                      <a:headEnd type="none" w="med" len="med"/>
+                      <a:tailEnd type="none" w="med" len="med"/>
+                    </a:lnT>
+                    <a:lnB w="6350" cap="flat" cmpd="sng" algn="ctr">
+                      <a:solidFill>
+                        <a:srgbClr val="C9D2D8"/>
+                      </a:solidFill>
+                      <a:prstDash val="solid"/>
+                      <a:round/>
+                      <a:headEnd type="none" w="med" len="med"/>
+                      <a:tailEnd type="none" w="med" len="med"/>
+                    </a:lnB>
+                    <a:solidFill>
+                      <a:srgbClr val="EEF2F4"/>
+                    </a:solidFill>
+                  </a:tcPr>
+                </a:tc>
+                <a:tc>
+                  <a:txBody>
+                    <a:bodyPr/>
+                    <a:lstStyle/>
+                    <a:p>
+                      <a:pPr algn="l" indent="0" marL="0">
+                        <a:buNone/>
+                      </a:pPr>
+                      <a:r>
+                        <a:rPr lang="en-US" sz="2000" dirty="0">
+                          <a:solidFill>
+                            <a:srgbClr val="1B2530"/>
+                          </a:solidFill>
+                          <a:latin typeface="Calibri" pitchFamily="34" charset="0"/>
+                          <a:ea typeface="Calibri" pitchFamily="34" charset="-122"/>
+                          <a:cs typeface="Calibri" pitchFamily="34" charset="-120"/>
+                        </a:rPr>
+                        <a:t>out of order, open source, high performance</a:t>
+                      </a:r>
+                      <a:endParaRPr lang="en-US" sz="2000" dirty="0">
+                        <a:latin typeface="Calibri" charset="0"/>
+                        <a:ea typeface="Calibri" charset="0"/>
+                        <a:cs typeface="Calibri" charset="0"/>
+                      </a:endParaRPr>
+                    </a:p>
+                  </a:txBody>
+                  <a:tcPr marL="101600" marR="101600" marT="50800" marB="50800" anchor="ctr">
+                    <a:lnL w="6350" cap="flat" cmpd="sng" algn="ctr">
+                      <a:solidFill>
+                        <a:srgbClr val="C9D2D8"/>
+                      </a:solidFill>
+                      <a:prstDash val="solid"/>
+                      <a:round/>
+                      <a:headEnd type="none" w="med" len="med"/>
+                      <a:tailEnd type="none" w="med" len="med"/>
+                    </a:lnL>
+                    <a:lnR w="6350" cap="flat" cmpd="sng" algn="ctr">
+                      <a:solidFill>
+                        <a:srgbClr val="C9D2D8"/>
+                      </a:solidFill>
+                      <a:prstDash val="solid"/>
+                      <a:round/>
+                      <a:headEnd type="none" w="med" len="med"/>
+                      <a:tailEnd type="none" w="med" len="med"/>
+                    </a:lnR>
+                    <a:lnT w="6350" cap="flat" cmpd="sng" algn="ctr">
+                      <a:solidFill>
+                        <a:srgbClr val="C9D2D8"/>
+                      </a:solidFill>
+                      <a:prstDash val="solid"/>
+                      <a:round/>
+                      <a:headEnd type="none" w="med" len="med"/>
+                      <a:tailEnd type="none" w="med" len="med"/>
+                    </a:lnT>
+                    <a:lnB w="6350" cap="flat" cmpd="sng" algn="ctr">
+                      <a:solidFill>
+                        <a:srgbClr val="C9D2D8"/>
+                      </a:solidFill>
+                      <a:prstDash val="solid"/>
+                      <a:round/>
+                      <a:headEnd type="none" w="med" len="med"/>
+                      <a:tailEnd type="none" w="med" len="med"/>
+                    </a:lnB>
+                    <a:solidFill>
+                      <a:srgbClr val="EEF2F4"/>
+                    </a:solidFill>
+                  </a:tcPr>
+                </a:tc>
+              </a:tr>
+              <a:tr h="0">
+                <a:tc>
+                  <a:txBody>
+                    <a:bodyPr/>
+                    <a:lstStyle/>
+                    <a:p>
+                      <a:pPr algn="l" indent="0" marL="0">
+                        <a:buNone/>
+                      </a:pPr>
+                      <a:r>
+                        <a:rPr lang="en-US" sz="2000" b="1" dirty="0">
+                          <a:solidFill>
+                            <a:srgbClr val="1B2530"/>
+                          </a:solidFill>
+                          <a:latin typeface="Calibri" pitchFamily="34" charset="0"/>
+                          <a:ea typeface="Calibri" pitchFamily="34" charset="-122"/>
+                          <a:cs typeface="Calibri" pitchFamily="34" charset="-120"/>
+                        </a:rPr>
+                        <a:t>XuanTie C910</a:t>
+                      </a:r>
+                      <a:endParaRPr lang="en-US" sz="2000" dirty="0">
+                        <a:latin typeface="Calibri" charset="0"/>
+                        <a:ea typeface="Calibri" charset="0"/>
+                        <a:cs typeface="Calibri" charset="0"/>
+                      </a:endParaRPr>
+                    </a:p>
+                  </a:txBody>
+                  <a:tcPr marL="101600" marR="101600" marT="50800" marB="50800" anchor="ctr">
+                    <a:lnL w="6350" cap="flat" cmpd="sng" algn="ctr">
+                      <a:solidFill>
+                        <a:srgbClr val="C9D2D8"/>
+                      </a:solidFill>
+                      <a:prstDash val="solid"/>
+                      <a:round/>
+                      <a:headEnd type="none" w="med" len="med"/>
+                      <a:tailEnd type="none" w="med" len="med"/>
+                    </a:lnL>
+                    <a:lnR w="6350" cap="flat" cmpd="sng" algn="ctr">
+                      <a:solidFill>
+                        <a:srgbClr val="C9D2D8"/>
+                      </a:solidFill>
+                      <a:prstDash val="solid"/>
+                      <a:round/>
+                      <a:headEnd type="none" w="med" len="med"/>
+                      <a:tailEnd type="none" w="med" len="med"/>
+                    </a:lnR>
+                    <a:lnT w="6350" cap="flat" cmpd="sng" algn="ctr">
+                      <a:solidFill>
+                        <a:srgbClr val="C9D2D8"/>
+                      </a:solidFill>
+                      <a:prstDash val="solid"/>
+                      <a:round/>
+                      <a:headEnd type="none" w="med" len="med"/>
+                      <a:tailEnd type="none" w="med" len="med"/>
+                    </a:lnT>
+                    <a:lnB w="6350" cap="flat" cmpd="sng" algn="ctr">
+                      <a:solidFill>
+                        <a:srgbClr val="C9D2D8"/>
+                      </a:solidFill>
+                      <a:prstDash val="solid"/>
+                      <a:round/>
+                      <a:headEnd type="none" w="med" len="med"/>
+                      <a:tailEnd type="none" w="med" len="med"/>
+                    </a:lnB>
+                    <a:solidFill>
+                      <a:srgbClr val="FFFFFF"/>
+                    </a:solidFill>
+                  </a:tcPr>
+                </a:tc>
+                <a:tc>
+                  <a:txBody>
+                    <a:bodyPr/>
+                    <a:lstStyle/>
+                    <a:p>
+                      <a:pPr algn="l" indent="0" marL="0">
+                        <a:buNone/>
+                      </a:pPr>
+                      <a:r>
+                        <a:rPr lang="en-US" sz="2000" dirty="0">
+                          <a:solidFill>
+                            <a:srgbClr val="1B2530"/>
+                          </a:solidFill>
+                          <a:latin typeface="Calibri" pitchFamily="34" charset="0"/>
+                          <a:ea typeface="Calibri" pitchFamily="34" charset="-122"/>
+                          <a:cs typeface="Calibri" pitchFamily="34" charset="-120"/>
+                        </a:rPr>
+                        <a:t>T-Head (Alibaba)</a:t>
+                      </a:r>
+                      <a:endParaRPr lang="en-US" sz="2000" dirty="0">
+                        <a:latin typeface="Calibri" charset="0"/>
+                        <a:ea typeface="Calibri" charset="0"/>
+                        <a:cs typeface="Calibri" charset="0"/>
+                      </a:endParaRPr>
+                    </a:p>
+                  </a:txBody>
+                  <a:tcPr marL="101600" marR="101600" marT="50800" marB="50800" anchor="ctr">
+                    <a:lnL w="6350" cap="flat" cmpd="sng" algn="ctr">
+                      <a:solidFill>
+                        <a:srgbClr val="C9D2D8"/>
+                      </a:solidFill>
+                      <a:prstDash val="solid"/>
+                      <a:round/>
+                      <a:headEnd type="none" w="med" len="med"/>
+                      <a:tailEnd type="none" w="med" len="med"/>
+                    </a:lnL>
+                    <a:lnR w="6350" cap="flat" cmpd="sng" algn="ctr">
+                      <a:solidFill>
+                        <a:srgbClr val="C9D2D8"/>
+                      </a:solidFill>
+                      <a:prstDash val="solid"/>
+                      <a:round/>
+                      <a:headEnd type="none" w="med" len="med"/>
+                      <a:tailEnd type="none" w="med" len="med"/>
+                    </a:lnR>
+                    <a:lnT w="6350" cap="flat" cmpd="sng" algn="ctr">
+                      <a:solidFill>
+                        <a:srgbClr val="C9D2D8"/>
+                      </a:solidFill>
+                      <a:prstDash val="solid"/>
+                      <a:round/>
+                      <a:headEnd type="none" w="med" len="med"/>
+                      <a:tailEnd type="none" w="med" len="med"/>
+                    </a:lnT>
+                    <a:lnB w="6350" cap="flat" cmpd="sng" algn="ctr">
+                      <a:solidFill>
+                        <a:srgbClr val="C9D2D8"/>
+                      </a:solidFill>
+                      <a:prstDash val="solid"/>
+                      <a:round/>
+                      <a:headEnd type="none" w="med" len="med"/>
+                      <a:tailEnd type="none" w="med" len="med"/>
+                    </a:lnB>
+                    <a:solidFill>
+                      <a:srgbClr val="FFFFFF"/>
+                    </a:solidFill>
+                  </a:tcPr>
+                </a:tc>
+                <a:tc>
+                  <a:txBody>
+                    <a:bodyPr/>
+                    <a:lstStyle/>
+                    <a:p>
+                      <a:pPr algn="l" indent="0" marL="0">
+                        <a:buNone/>
+                      </a:pPr>
+                      <a:r>
+                        <a:rPr lang="en-US" sz="2000" dirty="0">
+                          <a:solidFill>
+                            <a:srgbClr val="1B2530"/>
+                          </a:solidFill>
+                          <a:latin typeface="Calibri" pitchFamily="34" charset="0"/>
+                          <a:ea typeface="Calibri" pitchFamily="34" charset="-122"/>
+                          <a:cs typeface="Calibri" pitchFamily="34" charset="-120"/>
+                        </a:rPr>
+                        <a:t>out of order, three-wide; released as open source</a:t>
+                      </a:r>
+                      <a:endParaRPr lang="en-US" sz="2000" dirty="0">
+                        <a:latin typeface="Calibri" charset="0"/>
+                        <a:ea typeface="Calibri" charset="0"/>
+                        <a:cs typeface="Calibri" charset="0"/>
+                      </a:endParaRPr>
+                    </a:p>
+                  </a:txBody>
+                  <a:tcPr marL="101600" marR="101600" marT="50800" marB="50800" anchor="ctr">
+                    <a:lnL w="6350" cap="flat" cmpd="sng" algn="ctr">
+                      <a:solidFill>
+                        <a:srgbClr val="C9D2D8"/>
+                      </a:solidFill>
+                      <a:prstDash val="solid"/>
+                      <a:round/>
+                      <a:headEnd type="none" w="med" len="med"/>
+                      <a:tailEnd type="none" w="med" len="med"/>
+                    </a:lnL>
+                    <a:lnR w="6350" cap="flat" cmpd="sng" algn="ctr">
+                      <a:solidFill>
+                        <a:srgbClr val="C9D2D8"/>
+                      </a:solidFill>
+                      <a:prstDash val="solid"/>
+                      <a:round/>
+                      <a:headEnd type="none" w="med" len="med"/>
+                      <a:tailEnd type="none" w="med" len="med"/>
+                    </a:lnR>
+                    <a:lnT w="6350" cap="flat" cmpd="sng" algn="ctr">
+                      <a:solidFill>
+                        <a:srgbClr val="C9D2D8"/>
+                      </a:solidFill>
+                      <a:prstDash val="solid"/>
+                      <a:round/>
+                      <a:headEnd type="none" w="med" len="med"/>
+                      <a:tailEnd type="none" w="med" len="med"/>
+                    </a:lnT>
+                    <a:lnB w="6350" cap="flat" cmpd="sng" algn="ctr">
+                      <a:solidFill>
+                        <a:srgbClr val="C9D2D8"/>
+                      </a:solidFill>
+                      <a:prstDash val="solid"/>
+                      <a:round/>
+                      <a:headEnd type="none" w="med" len="med"/>
+                      <a:tailEnd type="none" w="med" len="med"/>
+                    </a:lnB>
+                    <a:solidFill>
+                      <a:srgbClr val="FFFFFF"/>
+                    </a:solidFill>
+                  </a:tcPr>
+                </a:tc>
+              </a:tr>
+              <a:tr h="0">
+                <a:tc>
+                  <a:txBody>
+                    <a:bodyPr/>
+                    <a:lstStyle/>
+                    <a:p>
+                      <a:pPr algn="l" indent="0" marL="0">
+                        <a:buNone/>
+                      </a:pPr>
+                      <a:r>
+                        <a:rPr lang="en-US" sz="2000" b="1" dirty="0">
+                          <a:solidFill>
+                            <a:srgbClr val="1B2530"/>
+                          </a:solidFill>
+                          <a:latin typeface="Calibri" pitchFamily="34" charset="0"/>
+                          <a:ea typeface="Calibri" pitchFamily="34" charset="-122"/>
+                          <a:cs typeface="Calibri" pitchFamily="34" charset="-120"/>
+                        </a:rPr>
+                        <a:t>Performance P550</a:t>
+                      </a:r>
+                      <a:endParaRPr lang="en-US" sz="2000" dirty="0">
+                        <a:latin typeface="Calibri" charset="0"/>
+                        <a:ea typeface="Calibri" charset="0"/>
+                        <a:cs typeface="Calibri" charset="0"/>
+                      </a:endParaRPr>
+                    </a:p>
+                  </a:txBody>
+                  <a:tcPr marL="101600" marR="101600" marT="50800" marB="50800" anchor="ctr">
+                    <a:lnL w="6350" cap="flat" cmpd="sng" algn="ctr">
+                      <a:solidFill>
+                        <a:srgbClr val="C9D2D8"/>
+                      </a:solidFill>
+                      <a:prstDash val="solid"/>
+                      <a:round/>
+                      <a:headEnd type="none" w="med" len="med"/>
+                      <a:tailEnd type="none" w="med" len="med"/>
+                    </a:lnL>
+                    <a:lnR w="6350" cap="flat" cmpd="sng" algn="ctr">
+                      <a:solidFill>
+                        <a:srgbClr val="C9D2D8"/>
+                      </a:solidFill>
+                      <a:prstDash val="solid"/>
+                      <a:round/>
+                      <a:headEnd type="none" w="med" len="med"/>
+                      <a:tailEnd type="none" w="med" len="med"/>
+                    </a:lnR>
+                    <a:lnT w="6350" cap="flat" cmpd="sng" algn="ctr">
+                      <a:solidFill>
+                        <a:srgbClr val="C9D2D8"/>
+                      </a:solidFill>
+                      <a:prstDash val="solid"/>
+                      <a:round/>
+                      <a:headEnd type="none" w="med" len="med"/>
+                      <a:tailEnd type="none" w="med" len="med"/>
+                    </a:lnT>
+                    <a:lnB w="6350" cap="flat" cmpd="sng" algn="ctr">
+                      <a:solidFill>
+                        <a:srgbClr val="C9D2D8"/>
+                      </a:solidFill>
+                      <a:prstDash val="solid"/>
+                      <a:round/>
+                      <a:headEnd type="none" w="med" len="med"/>
+                      <a:tailEnd type="none" w="med" len="med"/>
+                    </a:lnB>
+                    <a:solidFill>
+                      <a:srgbClr val="EEF2F4"/>
+                    </a:solidFill>
+                  </a:tcPr>
+                </a:tc>
+                <a:tc>
+                  <a:txBody>
+                    <a:bodyPr/>
+                    <a:lstStyle/>
+                    <a:p>
+                      <a:pPr algn="l" indent="0" marL="0">
+                        <a:buNone/>
+                      </a:pPr>
+                      <a:r>
+                        <a:rPr lang="en-US" sz="2000" dirty="0">
+                          <a:solidFill>
+                            <a:srgbClr val="1B2530"/>
+                          </a:solidFill>
+                          <a:latin typeface="Calibri" pitchFamily="34" charset="0"/>
+                          <a:ea typeface="Calibri" pitchFamily="34" charset="-122"/>
+                          <a:cs typeface="Calibri" pitchFamily="34" charset="-120"/>
+                        </a:rPr>
+                        <a:t>SiFive</a:t>
+                      </a:r>
+                      <a:endParaRPr lang="en-US" sz="2000" dirty="0">
+                        <a:latin typeface="Calibri" charset="0"/>
+                        <a:ea typeface="Calibri" charset="0"/>
+                        <a:cs typeface="Calibri" charset="0"/>
+                      </a:endParaRPr>
+                    </a:p>
+                  </a:txBody>
+                  <a:tcPr marL="101600" marR="101600" marT="50800" marB="50800" anchor="ctr">
+                    <a:lnL w="6350" cap="flat" cmpd="sng" algn="ctr">
+                      <a:solidFill>
+                        <a:srgbClr val="C9D2D8"/>
+                      </a:solidFill>
+                      <a:prstDash val="solid"/>
+                      <a:round/>
+                      <a:headEnd type="none" w="med" len="med"/>
+                      <a:tailEnd type="none" w="med" len="med"/>
+                    </a:lnL>
+                    <a:lnR w="6350" cap="flat" cmpd="sng" algn="ctr">
+                      <a:solidFill>
+                        <a:srgbClr val="C9D2D8"/>
+                      </a:solidFill>
+                      <a:prstDash val="solid"/>
+                      <a:round/>
+                      <a:headEnd type="none" w="med" len="med"/>
+                      <a:tailEnd type="none" w="med" len="med"/>
+                    </a:lnR>
+                    <a:lnT w="6350" cap="flat" cmpd="sng" algn="ctr">
+                      <a:solidFill>
+                        <a:srgbClr val="C9D2D8"/>
+                      </a:solidFill>
+                      <a:prstDash val="solid"/>
+                      <a:round/>
+                      <a:headEnd type="none" w="med" len="med"/>
+                      <a:tailEnd type="none" w="med" len="med"/>
+                    </a:lnT>
+                    <a:lnB w="6350" cap="flat" cmpd="sng" algn="ctr">
+                      <a:solidFill>
+                        <a:srgbClr val="C9D2D8"/>
+                      </a:solidFill>
+                      <a:prstDash val="solid"/>
+                      <a:round/>
+                      <a:headEnd type="none" w="med" len="med"/>
+                      <a:tailEnd type="none" w="med" len="med"/>
+                    </a:lnB>
+                    <a:solidFill>
+                      <a:srgbClr val="EEF2F4"/>
+                    </a:solidFill>
+                  </a:tcPr>
+                </a:tc>
+                <a:tc>
+                  <a:txBody>
+                    <a:bodyPr/>
+                    <a:lstStyle/>
+                    <a:p>
+                      <a:pPr algn="l" indent="0" marL="0">
+                        <a:buNone/>
+                      </a:pPr>
+                      <a:r>
+                        <a:rPr lang="en-US" sz="2000" dirty="0">
+                          <a:solidFill>
+                            <a:srgbClr val="1B2530"/>
+                          </a:solidFill>
+                          <a:latin typeface="Calibri" pitchFamily="34" charset="0"/>
+                          <a:ea typeface="Calibri" pitchFamily="34" charset="-122"/>
+                          <a:cs typeface="Calibri" pitchFamily="34" charset="-120"/>
+                        </a:rPr>
+                        <a:t>out of order, three-wide, thirteen stages; sold as a design</a:t>
+                      </a:r>
+                      <a:endParaRPr lang="en-US" sz="2000" dirty="0">
+                        <a:latin typeface="Calibri" charset="0"/>
+                        <a:ea typeface="Calibri" charset="0"/>
+                        <a:cs typeface="Calibri" charset="0"/>
+                      </a:endParaRPr>
+                    </a:p>
+                  </a:txBody>
+                  <a:tcPr marL="101600" marR="101600" marT="50800" marB="50800" anchor="ctr">
+                    <a:lnL w="6350" cap="flat" cmpd="sng" algn="ctr">
+                      <a:solidFill>
+                        <a:srgbClr val="C9D2D8"/>
+                      </a:solidFill>
+                      <a:prstDash val="solid"/>
+                      <a:round/>
+                      <a:headEnd type="none" w="med" len="med"/>
+                      <a:tailEnd type="none" w="med" len="med"/>
+                    </a:lnL>
+                    <a:lnR w="6350" cap="flat" cmpd="sng" algn="ctr">
+                      <a:solidFill>
+                        <a:srgbClr val="C9D2D8"/>
+                      </a:solidFill>
+                      <a:prstDash val="solid"/>
+                      <a:round/>
+                      <a:headEnd type="none" w="med" len="med"/>
+                      <a:tailEnd type="none" w="med" len="med"/>
+                    </a:lnR>
+                    <a:lnT w="6350" cap="flat" cmpd="sng" algn="ctr">
+                      <a:solidFill>
+                        <a:srgbClr val="C9D2D8"/>
+                      </a:solidFill>
+                      <a:prstDash val="solid"/>
+                      <a:round/>
+                      <a:headEnd type="none" w="med" len="med"/>
+                      <a:tailEnd type="none" w="med" len="med"/>
+                    </a:lnT>
+                    <a:lnB w="6350" cap="flat" cmpd="sng" algn="ctr">
+                      <a:solidFill>
+                        <a:srgbClr val="C9D2D8"/>
+                      </a:solidFill>
+                      <a:prstDash val="solid"/>
+                      <a:round/>
+                      <a:headEnd type="none" w="med" len="med"/>
+                      <a:tailEnd type="none" w="med" len="med"/>
+                    </a:lnB>
+                    <a:solidFill>
+                      <a:srgbClr val="EEF2F4"/>
+                    </a:solidFill>
+                  </a:tcPr>
+                </a:tc>
+              </a:tr>
+              <a:tr h="0">
+                <a:tc>
+                  <a:txBody>
+                    <a:bodyPr/>
+                    <a:lstStyle/>
+                    <a:p>
+                      <a:pPr algn="l" indent="0" marL="0">
+                        <a:buNone/>
+                      </a:pPr>
+                      <a:r>
+                        <a:rPr lang="en-US" sz="2000" b="1" dirty="0">
+                          <a:solidFill>
+                            <a:srgbClr val="1B2530"/>
+                          </a:solidFill>
+                          <a:latin typeface="Calibri" pitchFamily="34" charset="0"/>
+                          <a:ea typeface="Calibri" pitchFamily="34" charset="-122"/>
+                          <a:cs typeface="Calibri" pitchFamily="34" charset="-120"/>
+                        </a:rPr>
+                        <a:t>Veyron</a:t>
+                      </a:r>
+                      <a:endParaRPr lang="en-US" sz="2000" dirty="0">
+                        <a:latin typeface="Calibri" charset="0"/>
+                        <a:ea typeface="Calibri" charset="0"/>
+                        <a:cs typeface="Calibri" charset="0"/>
+                      </a:endParaRPr>
+                    </a:p>
+                  </a:txBody>
+                  <a:tcPr marL="101600" marR="101600" marT="50800" marB="50800" anchor="ctr">
+                    <a:lnL w="6350" cap="flat" cmpd="sng" algn="ctr">
+                      <a:solidFill>
+                        <a:srgbClr val="C9D2D8"/>
+                      </a:solidFill>
+                      <a:prstDash val="solid"/>
+                      <a:round/>
+                      <a:headEnd type="none" w="med" len="med"/>
+                      <a:tailEnd type="none" w="med" len="med"/>
+                    </a:lnL>
+                    <a:lnR w="6350" cap="flat" cmpd="sng" algn="ctr">
+                      <a:solidFill>
+                        <a:srgbClr val="C9D2D8"/>
+                      </a:solidFill>
+                      <a:prstDash val="solid"/>
+                      <a:round/>
+                      <a:headEnd type="none" w="med" len="med"/>
+                      <a:tailEnd type="none" w="med" len="med"/>
+                    </a:lnR>
+                    <a:lnT w="6350" cap="flat" cmpd="sng" algn="ctr">
+                      <a:solidFill>
+                        <a:srgbClr val="C9D2D8"/>
+                      </a:solidFill>
+                      <a:prstDash val="solid"/>
+                      <a:round/>
+                      <a:headEnd type="none" w="med" len="med"/>
+                      <a:tailEnd type="none" w="med" len="med"/>
+                    </a:lnT>
+                    <a:lnB w="6350" cap="flat" cmpd="sng" algn="ctr">
+                      <a:solidFill>
+                        <a:srgbClr val="C9D2D8"/>
+                      </a:solidFill>
+                      <a:prstDash val="solid"/>
+                      <a:round/>
+                      <a:headEnd type="none" w="med" len="med"/>
+                      <a:tailEnd type="none" w="med" len="med"/>
+                    </a:lnB>
+                    <a:solidFill>
+                      <a:srgbClr val="FFFFFF"/>
+                    </a:solidFill>
+                  </a:tcPr>
+                </a:tc>
+                <a:tc>
+                  <a:txBody>
+                    <a:bodyPr/>
+                    <a:lstStyle/>
+                    <a:p>
+                      <a:pPr algn="l" indent="0" marL="0">
+                        <a:buNone/>
+                      </a:pPr>
+                      <a:r>
+                        <a:rPr lang="en-US" sz="2000" dirty="0">
+                          <a:solidFill>
+                            <a:srgbClr val="1B2530"/>
+                          </a:solidFill>
+                          <a:latin typeface="Calibri" pitchFamily="34" charset="0"/>
+                          <a:ea typeface="Calibri" pitchFamily="34" charset="-122"/>
+                          <a:cs typeface="Calibri" pitchFamily="34" charset="-120"/>
+                        </a:rPr>
+                        <a:t>Ventana Micro Systems</a:t>
+                      </a:r>
+                      <a:endParaRPr lang="en-US" sz="2000" dirty="0">
+                        <a:latin typeface="Calibri" charset="0"/>
+                        <a:ea typeface="Calibri" charset="0"/>
+                        <a:cs typeface="Calibri" charset="0"/>
+                      </a:endParaRPr>
+                    </a:p>
+                  </a:txBody>
+                  <a:tcPr marL="101600" marR="101600" marT="50800" marB="50800" anchor="ctr">
+                    <a:lnL w="6350" cap="flat" cmpd="sng" algn="ctr">
+                      <a:solidFill>
+                        <a:srgbClr val="C9D2D8"/>
+                      </a:solidFill>
+                      <a:prstDash val="solid"/>
+                      <a:round/>
+                      <a:headEnd type="none" w="med" len="med"/>
+                      <a:tailEnd type="none" w="med" len="med"/>
+                    </a:lnL>
+                    <a:lnR w="6350" cap="flat" cmpd="sng" algn="ctr">
+                      <a:solidFill>
+                        <a:srgbClr val="C9D2D8"/>
+                      </a:solidFill>
+                      <a:prstDash val="solid"/>
+                      <a:round/>
+                      <a:headEnd type="none" w="med" len="med"/>
+                      <a:tailEnd type="none" w="med" len="med"/>
+                    </a:lnR>
+                    <a:lnT w="6350" cap="flat" cmpd="sng" algn="ctr">
+                      <a:solidFill>
+                        <a:srgbClr val="C9D2D8"/>
+                      </a:solidFill>
+                      <a:prstDash val="solid"/>
+                      <a:round/>
+                      <a:headEnd type="none" w="med" len="med"/>
+                      <a:tailEnd type="none" w="med" len="med"/>
+                    </a:lnT>
+                    <a:lnB w="6350" cap="flat" cmpd="sng" algn="ctr">
+                      <a:solidFill>
+                        <a:srgbClr val="C9D2D8"/>
+                      </a:solidFill>
+                      <a:prstDash val="solid"/>
+                      <a:round/>
+                      <a:headEnd type="none" w="med" len="med"/>
+                      <a:tailEnd type="none" w="med" len="med"/>
+                    </a:lnB>
+                    <a:solidFill>
+                      <a:srgbClr val="FFFFFF"/>
+                    </a:solidFill>
+                  </a:tcPr>
+                </a:tc>
+                <a:tc>
+                  <a:txBody>
+                    <a:bodyPr/>
+                    <a:lstStyle/>
+                    <a:p>
+                      <a:pPr algn="l" indent="0" marL="0">
+                        <a:buNone/>
+                      </a:pPr>
+                      <a:r>
+                        <a:rPr lang="en-US" sz="2000" dirty="0">
+                          <a:solidFill>
+                            <a:srgbClr val="1B2530"/>
+                          </a:solidFill>
+                          <a:latin typeface="Calibri" pitchFamily="34" charset="0"/>
+                          <a:ea typeface="Calibri" pitchFamily="34" charset="-122"/>
+                          <a:cs typeface="Calibri" pitchFamily="34" charset="-120"/>
+                        </a:rPr>
+                        <a:t>out of order, for data centres</a:t>
+                      </a:r>
+                      <a:endParaRPr lang="en-US" sz="2000" dirty="0">
+                        <a:latin typeface="Calibri" charset="0"/>
+                        <a:ea typeface="Calibri" charset="0"/>
+                        <a:cs typeface="Calibri" charset="0"/>
+                      </a:endParaRPr>
+                    </a:p>
+                  </a:txBody>
+                  <a:tcPr marL="101600" marR="101600" marT="50800" marB="50800" anchor="ctr">
+                    <a:lnL w="6350" cap="flat" cmpd="sng" algn="ctr">
+                      <a:solidFill>
+                        <a:srgbClr val="C9D2D8"/>
+                      </a:solidFill>
+                      <a:prstDash val="solid"/>
+                      <a:round/>
+                      <a:headEnd type="none" w="med" len="med"/>
+                      <a:tailEnd type="none" w="med" len="med"/>
+                    </a:lnL>
+                    <a:lnR w="6350" cap="flat" cmpd="sng" algn="ctr">
+                      <a:solidFill>
+                        <a:srgbClr val="C9D2D8"/>
+                      </a:solidFill>
+                      <a:prstDash val="solid"/>
+                      <a:round/>
+                      <a:headEnd type="none" w="med" len="med"/>
+                      <a:tailEnd type="none" w="med" len="med"/>
+                    </a:lnR>
+                    <a:lnT w="6350" cap="flat" cmpd="sng" algn="ctr">
+                      <a:solidFill>
+                        <a:srgbClr val="C9D2D8"/>
+                      </a:solidFill>
+                      <a:prstDash val="solid"/>
+                      <a:round/>
+                      <a:headEnd type="none" w="med" len="med"/>
+                      <a:tailEnd type="none" w="med" len="med"/>
+                    </a:lnT>
+                    <a:lnB w="6350" cap="flat" cmpd="sng" algn="ctr">
+                      <a:solidFill>
+                        <a:srgbClr val="C9D2D8"/>
+                      </a:solidFill>
+                      <a:prstDash val="solid"/>
+                      <a:round/>
+                      <a:headEnd type="none" w="med" len="med"/>
+                      <a:tailEnd type="none" w="med" len="med"/>
+                    </a:lnB>
+                    <a:solidFill>
+                      <a:srgbClr val="FFFFFF"/>
+                    </a:solidFill>
+                  </a:tcPr>
+                </a:tc>
+              </a:tr>
+            </a:tbl>
+          </a:graphicData>
+        </a:graphic>
+      </p:graphicFrame>
       <p:sp>
         <p:nvSpPr>
           <p:cNvPr id="25" name="Slide Number Placeholder 0"/>
@@ -20616,7 +20453,7 @@
                 <a:ea typeface="Cambria" pitchFamily="34" charset="-122"/>
                 <a:cs typeface="Cambria" pitchFamily="34" charset="-120"/>
               </a:rPr>
-              <a:t>What is a supercomputer?</a:t>
+              <a:t>One architecture, many microarchitectures</a:t>
             </a:r>
             <a:endParaRPr lang="en-US" sz="3200" dirty="0"/>
           </a:p>
@@ -20630,7 +20467,112 @@
         </p:nvSpPr>
         <p:spPr>
           <a:xfrm>
-            <a:off x="548640" y="1515999"/>
+            <a:off x="548640" y="1417320"/>
+            <a:ext cx="11094415" cy="1937004"/>
+          </a:xfrm>
+          <a:prstGeom prst="roundRect">
+            <a:avLst>
+              <a:gd name="adj" fmla="val 3777"/>
+            </a:avLst>
+          </a:prstGeom>
+          <a:solidFill>
+            <a:srgbClr val="F6E7D2"/>
+          </a:solidFill>
+          <a:ln w="12700">
+            <a:solidFill>
+              <a:srgbClr val="F6E7D2"/>
+            </a:solidFill>
+            <a:prstDash val="solid"/>
+          </a:ln>
+        </p:spPr>
+      </p:sp>
+      <p:sp>
+        <p:nvSpPr>
+          <p:cNvPr id="4" name="Text 2"/>
+          <p:cNvSpPr txBox="1"/>
+          <p:nvPr/>
+        </p:nvSpPr>
+        <p:spPr>
+          <a:xfrm>
+            <a:off x="914400" y="1600200"/>
+            <a:ext cx="10362895" cy="411480"/>
+          </a:xfrm>
+          <a:prstGeom prst="rect">
+            <a:avLst/>
+          </a:prstGeom>
+          <a:noFill/>
+          <a:ln/>
+        </p:spPr>
+        <p:txBody>
+          <a:bodyPr wrap="square" lIns="0" tIns="0" rIns="0" bIns="0" rtlCol="0" anchor="ctr"/>
+          <a:lstStyle/>
+          <a:p>
+            <a:pPr indent="0" marL="0">
+              <a:buNone/>
+            </a:pPr>
+            <a:r>
+              <a:rPr lang="en-US" sz="1600" b="1" dirty="0">
+                <a:solidFill>
+                  <a:srgbClr val="C7791B"/>
+                </a:solidFill>
+                <a:latin typeface="Calibri" pitchFamily="34" charset="0"/>
+                <a:ea typeface="Calibri" pitchFamily="34" charset="-122"/>
+                <a:cs typeface="Calibri" pitchFamily="34" charset="-120"/>
+              </a:rPr>
+              <a:t>Architecture and microarchitecture</a:t>
+            </a:r>
+            <a:endParaRPr lang="en-US" sz="1600" dirty="0"/>
+          </a:p>
+        </p:txBody>
+      </p:sp>
+      <p:sp>
+        <p:nvSpPr>
+          <p:cNvPr id="5" name="Text 3"/>
+          <p:cNvSpPr txBox="1"/>
+          <p:nvPr/>
+        </p:nvSpPr>
+        <p:spPr>
+          <a:xfrm>
+            <a:off x="914400" y="2057400"/>
+            <a:ext cx="10362895" cy="1114044"/>
+          </a:xfrm>
+          <a:prstGeom prst="rect">
+            <a:avLst/>
+          </a:prstGeom>
+          <a:noFill/>
+          <a:ln/>
+        </p:spPr>
+        <p:txBody>
+          <a:bodyPr wrap="square" lIns="0" tIns="0" rIns="0" bIns="0" rtlCol="0" anchor="ctr"/>
+          <a:lstStyle/>
+          <a:p>
+            <a:pPr indent="0" marL="0">
+              <a:buNone/>
+            </a:pPr>
+            <a:r>
+              <a:rPr lang="en-US" sz="2300" i="1" dirty="0">
+                <a:solidFill>
+                  <a:srgbClr val="1B2530"/>
+                </a:solidFill>
+                <a:latin typeface="Cambria" pitchFamily="34" charset="0"/>
+                <a:ea typeface="Cambria" pitchFamily="34" charset="-122"/>
+                <a:cs typeface="Cambria" pitchFamily="34" charset="-120"/>
+              </a:rPr>
+              <a:t>The architecture is the contract: instructions, registers, what each instruction does. The microarchitecture is one way to honour it: stages, width, predictors, caches.</a:t>
+            </a:r>
+            <a:endParaRPr lang="en-US" sz="2300" dirty="0"/>
+          </a:p>
+        </p:txBody>
+      </p:sp>
+      <p:sp>
+        <p:nvSpPr>
+          <p:cNvPr id="6" name="Shape 4"/>
+          <p:cNvSpPr/>
+          <p:nvPr/>
+        </p:nvSpPr>
+        <p:spPr>
+          <a:xfrm>
+            <a:off x="548640" y="3796284"/>
             <a:ext cx="146304" cy="146304"/>
           </a:xfrm>
           <a:prstGeom prst="rect">
@@ -20649,14 +20591,14 @@
       </p:sp>
       <p:sp>
         <p:nvSpPr>
-          <p:cNvPr id="4" name="Text 2"/>
+          <p:cNvPr id="7" name="Text 5"/>
           <p:cNvSpPr txBox="1"/>
           <p:nvPr/>
         </p:nvSpPr>
         <p:spPr>
           <a:xfrm>
-            <a:off x="932688" y="1417320"/>
-            <a:ext cx="6565392" cy="650748"/>
+            <a:off x="932688" y="3674364"/>
+            <a:ext cx="10710367" cy="743712"/>
           </a:xfrm>
           <a:prstGeom prst="rect">
             <a:avLst/>
@@ -20675,7 +20617,7 @@
               <a:buNone/>
             </a:pPr>
             <a:r>
-              <a:rPr lang="en-US" sz="2100" dirty="0">
+              <a:rPr lang="en-US" sz="2400" dirty="0">
                 <a:solidFill>
                   <a:srgbClr val="1B2530"/>
                 </a:solidFill>
@@ -20683,21 +20625,21 @@
                 <a:ea typeface="Calibri" pitchFamily="34" charset="-122"/>
                 <a:cs typeface="Calibri" pitchFamily="34" charset="-120"/>
               </a:rPr>
-              <a:t>Not one enormous processor: thousands of ordinary computers, the nodes, working on the same problem</a:t>
+              <a:t>The add you wrote for a 160 MHz microcontroller is the add of a server core</a:t>
             </a:r>
-            <a:endParaRPr lang="en-US" sz="2100" dirty="0"/>
-          </a:p>
-        </p:txBody>
-      </p:sp>
-      <p:sp>
-        <p:nvSpPr>
-          <p:cNvPr id="5" name="Shape 3"/>
+            <a:endParaRPr lang="en-US" sz="2400" dirty="0"/>
+          </a:p>
+        </p:txBody>
+      </p:sp>
+      <p:sp>
+        <p:nvSpPr>
+          <p:cNvPr id="8" name="Shape 6"/>
           <p:cNvSpPr/>
           <p:nvPr/>
         </p:nvSpPr>
         <p:spPr>
           <a:xfrm>
-            <a:off x="548640" y="2305431"/>
+            <a:off x="548640" y="4859274"/>
             <a:ext cx="146304" cy="146304"/>
           </a:xfrm>
           <a:prstGeom prst="rect">
@@ -20716,14 +20658,14 @@
       </p:sp>
       <p:sp>
         <p:nvSpPr>
-          <p:cNvPr id="6" name="Text 4"/>
+          <p:cNvPr id="9" name="Text 7"/>
           <p:cNvSpPr txBox="1"/>
           <p:nvPr/>
         </p:nvSpPr>
         <p:spPr>
           <a:xfrm>
-            <a:off x="932688" y="2206752"/>
-            <a:ext cx="6565392" cy="1271778"/>
+            <a:off x="932688" y="4737354"/>
+            <a:ext cx="10710367" cy="743712"/>
           </a:xfrm>
           <a:prstGeom prst="rect">
             <a:avLst/>
@@ -20742,7 +20684,7 @@
               <a:buNone/>
             </a:pPr>
             <a:r>
-              <a:rPr lang="en-US" sz="2100" dirty="0">
+              <a:rPr lang="en-US" sz="2400" dirty="0">
                 <a:solidFill>
                   <a:srgbClr val="1B2530"/>
                 </a:solidFill>
@@ -20750,81 +20692,21 @@
                 <a:ea typeface="Calibri" pitchFamily="34" charset="-122"/>
                 <a:cs typeface="Calibri" pitchFamily="34" charset="-120"/>
               </a:rPr>
-              <a:t>Each node has</a:t>
+              <a:t>Verm1 would run unchanged on any of the cores of the previous slide, given a screen</a:t>
             </a:r>
-            <a:endParaRPr lang="en-US" sz="2100" dirty="0"/>
-          </a:p>
-          <a:p>
-            <a:pPr indent="0" marL="0">
-              <a:spcAft>
-                <a:spcPts val="200"/>
-              </a:spcAft>
-              <a:buNone/>
-            </a:pPr>
-            <a:r>
-              <a:rPr lang="en-US" sz="1800" dirty="0">
-                <a:solidFill>
-                  <a:srgbClr val="5B6B78"/>
-                </a:solidFill>
-                <a:latin typeface="Calibri" pitchFamily="34" charset="0"/>
-                <a:ea typeface="Calibri" pitchFamily="34" charset="-122"/>
-                <a:cs typeface="Calibri" pitchFamily="34" charset="-120"/>
-              </a:rPr>
-              <a:t>– one or two processors with tens of cores</a:t>
-            </a:r>
-            <a:endParaRPr lang="en-US" sz="2100" dirty="0"/>
-          </a:p>
-          <a:p>
-            <a:pPr indent="0" marL="0">
-              <a:spcAft>
-                <a:spcPts val="200"/>
-              </a:spcAft>
-              <a:buNone/>
-            </a:pPr>
-            <a:r>
-              <a:rPr lang="en-US" sz="1800" dirty="0">
-                <a:solidFill>
-                  <a:srgbClr val="5B6B78"/>
-                </a:solidFill>
-                <a:latin typeface="Calibri" pitchFamily="34" charset="0"/>
-                <a:ea typeface="Calibri" pitchFamily="34" charset="-122"/>
-                <a:cs typeface="Calibri" pitchFamily="34" charset="-120"/>
-              </a:rPr>
-              <a:t>– often several GPUs</a:t>
-            </a:r>
-            <a:endParaRPr lang="en-US" sz="2100" dirty="0"/>
-          </a:p>
-          <a:p>
-            <a:pPr indent="0" marL="0">
-              <a:spcAft>
-                <a:spcPts val="200"/>
-              </a:spcAft>
-              <a:buNone/>
-            </a:pPr>
-            <a:r>
-              <a:rPr lang="en-US" sz="1800" dirty="0">
-                <a:solidFill>
-                  <a:srgbClr val="5B6B78"/>
-                </a:solidFill>
-                <a:latin typeface="Calibri" pitchFamily="34" charset="0"/>
-                <a:ea typeface="Calibri" pitchFamily="34" charset="-122"/>
-                <a:cs typeface="Calibri" pitchFamily="34" charset="-120"/>
-              </a:rPr>
-              <a:t>– a great deal of memory</a:t>
-            </a:r>
-            <a:endParaRPr lang="en-US" sz="2100" dirty="0"/>
-          </a:p>
-        </p:txBody>
-      </p:sp>
-      <p:sp>
-        <p:nvSpPr>
-          <p:cNvPr id="7" name="Shape 5"/>
+            <a:endParaRPr lang="en-US" sz="2400" dirty="0"/>
+          </a:p>
+        </p:txBody>
+      </p:sp>
+      <p:sp>
+        <p:nvSpPr>
+          <p:cNvPr id="10" name="Shape 8"/>
           <p:cNvSpPr/>
           <p:nvPr/>
         </p:nvSpPr>
         <p:spPr>
           <a:xfrm>
-            <a:off x="548640" y="3715893"/>
+            <a:off x="548640" y="5922264"/>
             <a:ext cx="146304" cy="146304"/>
           </a:xfrm>
           <a:prstGeom prst="rect">
@@ -20843,14 +20725,14 @@
       </p:sp>
       <p:sp>
         <p:nvSpPr>
-          <p:cNvPr id="8" name="Text 6"/>
+          <p:cNvPr id="11" name="Text 9"/>
           <p:cNvSpPr txBox="1"/>
           <p:nvPr/>
         </p:nvSpPr>
         <p:spPr>
           <a:xfrm>
-            <a:off x="932688" y="3617214"/>
-            <a:ext cx="6565392" cy="650748"/>
+            <a:off x="932688" y="5800344"/>
+            <a:ext cx="10710367" cy="371856"/>
           </a:xfrm>
           <a:prstGeom prst="rect">
             <a:avLst/>
@@ -20869,7 +20751,7 @@
               <a:buNone/>
             </a:pPr>
             <a:r>
-              <a:rPr lang="en-US" sz="2100" dirty="0">
+              <a:rPr lang="en-US" sz="2400" dirty="0">
                 <a:solidFill>
                   <a:srgbClr val="1B2530"/>
                 </a:solidFill>
@@ -20877,206 +20759,9 @@
                 <a:ea typeface="Calibri" pitchFamily="34" charset="-122"/>
                 <a:cs typeface="Calibri" pitchFamily="34" charset="-120"/>
               </a:rPr>
-              <a:t>A very fast network joins the nodes, and a parallel file system serves them all</a:t>
+              <a:t>This is why an instruction set learned once is knowledge that lasts</a:t>
             </a:r>
-            <a:endParaRPr lang="en-US" sz="2100" dirty="0"/>
-          </a:p>
-        </p:txBody>
-      </p:sp>
-      <p:sp>
-        <p:nvSpPr>
-          <p:cNvPr id="9" name="Shape 7"/>
-          <p:cNvSpPr/>
-          <p:nvPr/>
-        </p:nvSpPr>
-        <p:spPr>
-          <a:xfrm>
-            <a:off x="548640" y="4505325"/>
-            <a:ext cx="146304" cy="146304"/>
-          </a:xfrm>
-          <a:prstGeom prst="rect">
-            <a:avLst/>
-          </a:prstGeom>
-          <a:solidFill>
-            <a:srgbClr val="C7791B"/>
-          </a:solidFill>
-          <a:ln w="12700">
-            <a:solidFill>
-              <a:srgbClr val="C7791B"/>
-            </a:solidFill>
-            <a:prstDash val="solid"/>
-          </a:ln>
-        </p:spPr>
-      </p:sp>
-      <p:sp>
-        <p:nvSpPr>
-          <p:cNvPr id="10" name="Text 8"/>
-          <p:cNvSpPr txBox="1"/>
-          <p:nvPr/>
-        </p:nvSpPr>
-        <p:spPr>
-          <a:xfrm>
-            <a:off x="932688" y="4406646"/>
-            <a:ext cx="6565392" cy="976122"/>
-          </a:xfrm>
-          <a:prstGeom prst="rect">
-            <a:avLst/>
-          </a:prstGeom>
-          <a:noFill/>
-          <a:ln/>
-        </p:spPr>
-        <p:txBody>
-          <a:bodyPr wrap="square" lIns="0" tIns="0" rIns="0" bIns="0" rtlCol="0" anchor="t"/>
-          <a:lstStyle/>
-          <a:p>
-            <a:pPr indent="0" marL="0">
-              <a:spcAft>
-                <a:spcPts val="200"/>
-              </a:spcAft>
-              <a:buNone/>
-            </a:pPr>
-            <a:r>
-              <a:rPr lang="en-US" sz="2100" dirty="0">
-                <a:solidFill>
-                  <a:srgbClr val="1B2530"/>
-                </a:solidFill>
-                <a:latin typeface="Calibri" pitchFamily="34" charset="0"/>
-                <a:ea typeface="Calibri" pitchFamily="34" charset="-122"/>
-                <a:cs typeface="Calibri" pitchFamily="34" charset="-120"/>
-              </a:rPr>
-              <a:t>Speed is measured in floating-point operations per second, FLOPS, on a standard problem: a huge system of linear equations</a:t>
-            </a:r>
-            <a:endParaRPr lang="en-US" sz="2100" dirty="0"/>
-          </a:p>
-        </p:txBody>
-      </p:sp>
-      <p:sp>
-        <p:nvSpPr>
-          <p:cNvPr id="11" name="Shape 9"/>
-          <p:cNvSpPr/>
-          <p:nvPr/>
-        </p:nvSpPr>
-        <p:spPr>
-          <a:xfrm>
-            <a:off x="548640" y="5620131"/>
-            <a:ext cx="146304" cy="146304"/>
-          </a:xfrm>
-          <a:prstGeom prst="rect">
-            <a:avLst/>
-          </a:prstGeom>
-          <a:solidFill>
-            <a:srgbClr val="0E7C86"/>
-          </a:solidFill>
-          <a:ln w="12700">
-            <a:solidFill>
-              <a:srgbClr val="0E7C86"/>
-            </a:solidFill>
-            <a:prstDash val="solid"/>
-          </a:ln>
-        </p:spPr>
-      </p:sp>
-      <p:sp>
-        <p:nvSpPr>
-          <p:cNvPr id="12" name="Text 10"/>
-          <p:cNvSpPr txBox="1"/>
-          <p:nvPr/>
-        </p:nvSpPr>
-        <p:spPr>
-          <a:xfrm>
-            <a:off x="932688" y="5521452"/>
-            <a:ext cx="6565392" cy="650748"/>
-          </a:xfrm>
-          <a:prstGeom prst="rect">
-            <a:avLst/>
-          </a:prstGeom>
-          <a:noFill/>
-          <a:ln/>
-        </p:spPr>
-        <p:txBody>
-          <a:bodyPr wrap="square" lIns="0" tIns="0" rIns="0" bIns="0" rtlCol="0" anchor="t"/>
-          <a:lstStyle/>
-          <a:p>
-            <a:pPr indent="0" marL="0">
-              <a:spcAft>
-                <a:spcPts val="200"/>
-              </a:spcAft>
-              <a:buNone/>
-            </a:pPr>
-            <a:r>
-              <a:rPr lang="en-US" sz="2100" dirty="0">
-                <a:solidFill>
-                  <a:srgbClr val="1B2530"/>
-                </a:solidFill>
-                <a:latin typeface="Calibri" pitchFamily="34" charset="0"/>
-                <a:ea typeface="Calibri" pitchFamily="34" charset="-122"/>
-                <a:cs typeface="Calibri" pitchFamily="34" charset="-120"/>
-              </a:rPr>
-              <a:t>The TOP500 list has ranked the fastest machines twice a year since 1993</a:t>
-            </a:r>
-            <a:endParaRPr lang="en-US" sz="2100" dirty="0"/>
-          </a:p>
-        </p:txBody>
-      </p:sp>
-      <p:pic>
-        <p:nvPicPr>
-          <p:cNvPr id="13" name="Image 0" descr="/Users/raffaelemontella/devel/riscv-prg32/computer-architecture-with-prg32/tools/assets/cluster_1.jpg">    </p:cNvPr>
-          <p:cNvPicPr>
-            <a:picLocks noChangeAspect="1"/>
-          </p:cNvPicPr>
-          <p:nvPr/>
-        </p:nvPicPr>
-        <p:blipFill>
-          <a:blip r:embed="rId1"/>
-          <a:stretch>
-            <a:fillRect/>
-          </a:stretch>
-        </p:blipFill>
-        <p:spPr>
-          <a:xfrm>
-            <a:off x="7863840" y="2148954"/>
-            <a:ext cx="3779215" cy="2834411"/>
-          </a:xfrm>
-          <a:prstGeom prst="rect">
-            <a:avLst/>
-          </a:prstGeom>
-        </p:spPr>
-      </p:pic>
-      <p:sp>
-        <p:nvSpPr>
-          <p:cNvPr id="14" name="Text 11"/>
-          <p:cNvSpPr txBox="1"/>
-          <p:nvPr/>
-        </p:nvSpPr>
-        <p:spPr>
-          <a:xfrm>
-            <a:off x="7863840" y="5788152"/>
-            <a:ext cx="3779215" cy="384048"/>
-          </a:xfrm>
-          <a:prstGeom prst="rect">
-            <a:avLst/>
-          </a:prstGeom>
-          <a:noFill/>
-          <a:ln/>
-        </p:spPr>
-        <p:txBody>
-          <a:bodyPr wrap="square" lIns="0" tIns="0" rIns="0" bIns="0" rtlCol="0" anchor="ctr"/>
-          <a:lstStyle/>
-          <a:p>
-            <a:pPr algn="ctr" indent="0" marL="0">
-              <a:buNone/>
-            </a:pPr>
-            <a:r>
-              <a:rPr lang="en-US" sz="1200" i="1" dirty="0">
-                <a:solidFill>
-                  <a:srgbClr val="5B6B78"/>
-                </a:solidFill>
-                <a:latin typeface="Calibri" pitchFamily="34" charset="0"/>
-                <a:ea typeface="Calibri" pitchFamily="34" charset="-122"/>
-                <a:cs typeface="Calibri" pitchFamily="34" charset="-120"/>
-              </a:rPr>
-              <a:t>A small cluster: nodes, GPUs, a fast network</a:t>
-            </a:r>
-            <a:endParaRPr lang="en-US" sz="1200" dirty="0"/>
+            <a:endParaRPr lang="en-US" sz="2400" dirty="0"/>
           </a:p>
         </p:txBody>
       </p:sp>

--- a/en/slides/24-Computer_Architecture-Superscalar_HPC_GPU_FPGA.pptx
+++ b/en/slides/24-Computer_Architecture-Superscalar_HPC_GPU_FPGA.pptx
@@ -126,19 +126,19 @@
   <p:extLst>
     <p:ext uri="{521415D9-36F7-43E2-AB2F-B90AF26B5E84}">
       <p14:sectionLst xmlns:p14="http://schemas.microsoft.com/office/powerpoint/2010/main">
-        <p14:section name="Opening" id="{1712e581-04fb-ea4c-a9f0-7b11fe67a0ee}">
+        <p14:section name="Opening" id="{009d5754-939c-c868-4332-ce7d9e656d99}">
           <p14:sldIdLst>
             <p14:sldId id="256"/>
             <p14:sldId id="257"/>
           </p14:sldIdLst>
         </p14:section>
-        <p14:section name="Warm-up on the machine" id="{5c062e6a-87f7-208a-240f-d12f7f1b3754}">
+        <p14:section name="Warm-up on the machine" id="{5f13c3f1-536a-5f9d-3675-237b922ff9b9}">
           <p14:sldIdLst>
             <p14:sldId id="258"/>
             <p14:sldId id="259"/>
           </p14:sldIdLst>
         </p14:section>
-        <p14:section name="Superscalar processors" id="{599ac376-3845-49d7-fa37-8659b22b8c80}">
+        <p14:section name="Superscalar processors" id="{404f55f2-0554-6859-e6e0-6d19a81138d9}">
           <p14:sldIdLst>
             <p14:sldId id="260"/>
             <p14:sldId id="261"/>
@@ -147,7 +147,7 @@
             <p14:sldId id="264"/>
           </p14:sldIdLst>
         </p14:section>
-        <p14:section name="High-performance computing" id="{ad18e737-1754-82f8-ae4b-b24fa1bdf7a3}">
+        <p14:section name="High-performance computing" id="{1313a267-cbee-7b02-f7ae-9c367d821d65}">
           <p14:sldIdLst>
             <p14:sldId id="265"/>
             <p14:sldId id="266"/>
@@ -155,18 +155,18 @@
             <p14:sldId id="268"/>
           </p14:sldIdLst>
         </p14:section>
-        <p14:section name="GPU accelerators" id="{8460b113-561d-eec8-ab4b-8d9a4fbe4ac0}">
+        <p14:section name="GPU accelerators" id="{75042a6a-a8ac-6021-fa33-6337705ad5ac}">
           <p14:sldIdLst>
             <p14:sldId id="269"/>
           </p14:sldIdLst>
         </p14:section>
-        <p14:section name="FPGA accelerators" id="{d0a7cb64-cda5-1203-0e7c-17cb6d2ec55c}">
+        <p14:section name="FPGA accelerators" id="{cc5f9a91-668f-4928-a8fb-a2a871a13f1a}">
           <p14:sldIdLst>
             <p14:sldId id="270"/>
             <p14:sldId id="271"/>
           </p14:sldIdLst>
         </p14:section>
-        <p14:section name="Back to the machine" id="{4177d8d2-8b09-109e-87ea-be5781deb2da}">
+        <p14:section name="Back to the machine" id="{1d50a378-3560-e5ba-ee89-81f74fec7ba6}">
           <p14:sldIdLst>
             <p14:sldId id="272"/>
             <p14:sldId id="273"/>
@@ -579,6 +579,8 @@
             <a:r>
               <a:rPr lang="en-US" dirty="0"/>
               <a:t>The last lecture looks beyond the kit. Everything you have learned was learned on a small processor that executes one instruction at a time. The machines that forecast the weather or train a neural network execute the same kind of instructions, in very large numbers at once. The lecture takes one small loop of Verm1 and follows it onto four kinds of machine. Cray's question about oxen and chickens will come back: it has no single answer. This lecture is an outlook, and is not part of the midterm test.
+Learning status: UNDERSTAND NOW, by the end of this lecture you explain it, trace it and apply it on your own; USE NOW, you follow and use the recipe today; how it works inside is explained later, or is not part of the course; UNDERSTAND LATER, recognise the name and what it is for; a later lecture explains it. A slide without a badge is context: a story, an example, a question, an exercise.
+Learning status of this lecture. UNDERSTAND NOW: the performance equation; superscalar processors; vector instructions; HPC and Amdahl's law; GPU and FPGA accelerators. USE NOW: the complete program, the PRG32 tools (used, not studied, in this course). UNDERSTAND LATER: nothing. A slide without a badge is context: a story, an example, a question, an exercise.
 For the lecturer: Closing lecture and outlook, new in 2026/27: it has no Italian source. It starts from one loop of Verm1 and follows it onto four kinds of machine. It prepares the visit to the supercomputing systems of the Department. Not part of the midterm test. The RISC-V vector listings are tested on QEMU (tools/tests/vector_qemu.S); the CUDA and Verilog fragments are standard textbook forms that were not compiled for these slides. Figures for supercomputers are rounded and date from the TOP500 lists of 2022 to 2025: check the current list before class.</a:t>
             </a:r>
             <a:endParaRPr lang="en-US" dirty="0"/>
@@ -668,6 +670,7 @@
             <a:r>
               <a:rPr lang="en-US" dirty="0"/>
               <a:t>A supercomputer is not one enormous processor: it is thousands of ordinary computers, the nodes, working on the same problem. Each node has one or two processors with tens of cores, often several GPUs, and much memory. A very fast network joins the nodes, and a parallel file system serves them all. Speed is measured in floating-point operations per second on a standard problem, and the TOP500 list has ranked the fastest machines since 1993. The picture shows racks of nodes of the Research Computing Facilities of the University.
+UNDERSTAND NOW: HPC and Amdahl's law.
 For the lecturer: The benchmark is HPL, High-Performance Linpack.</a:t>
             </a:r>
             <a:endParaRPr lang="en-US" dirty="0"/>
@@ -757,6 +760,7 @@
             <a:r>
               <a:rPr lang="en-US" dirty="0"/>
               <a:t>Amdahl's law says how much parallelism can give. If a fraction p of the work can be done in parallel and the rest cannot, with n processors the speed-up is 1 divided by the serial part plus the parallel part divided by n. The serial part does not shrink however many processors are added. With p equal to 0.9 the speed-up can never exceed 10. The practical lesson: before buying processors, measure p.
+UNDERSTAND NOW: HPC and Amdahl's law.
 For the lecturer: Gene Amdahl, 1967. The same law holds for any improvement that applies to only a part of the work: a faster GPU does not help the part that runs on the CPU.</a:t>
             </a:r>
             <a:endParaRPr lang="en-US" dirty="0"/>
@@ -846,6 +850,7 @@
             <a:r>
               <a:rPr lang="en-US" dirty="0"/>
               <a:t>Two ways to share the work. With shared memory, several cores of the same node see the same memory, and the program runs as threads that read and write the same variables; it is easy to start, and the danger is two threads writing the same variable. With distributed memory each node has its own memory, and the program runs as processes that exchange messages, with the MPI standard; it scales to a million cores, at the programmer's expense. Real applications use both.
+UNDERSTAND NOW: HPC and Amdahl's law.
 For the lecturer: Real applications use both: MPI between the nodes, threads and GPUs inside each node. The weather and marine models of the Department work this way.</a:t>
             </a:r>
             <a:endParaRPr lang="en-US" dirty="0"/>
@@ -935,6 +940,7 @@
             <a:r>
               <a:rPr lang="en-US" dirty="0"/>
               <a:t>The limit is energy. An exascale machine draws about twenty megawatts, the consumption of a small town, and the electricity of its lifetime costs as much as the machine. So the figure that matters is operations per watt, which has its own ranking, the Green500. Specialised hardware leads it, because it does more with each joule. The same reason, at the other end of the scale, puts a small RISC-V core in your kit.
+UNDERSTAND NOW: HPC and Amdahl's law.
 For the lecturer: Frontier reached its exaflop at about 21 megawatts. Energy efficiency is the thread that ties a microcontroller to a supercomputer.</a:t>
             </a:r>
             <a:endParaRPr lang="en-US" dirty="0"/>
@@ -1024,6 +1030,7 @@
             <a:r>
               <a:rPr lang="en-US" dirty="0"/>
               <a:t>Two ways of spending the same transistors. A CPU has a few large cores, each out of order, with predictors and big caches: it is built to finish one task as soon as possible, and is at ease with branches and irregular data. A GPU has thousands of small simple cores that execute the same code on different data: it is built to finish a great many tasks per second, and is at ease with regular arrays. Oxen and chickens: the answer depends on the field.
+UNDERSTAND NOW: GPU and FPGA accelerators.
 For the lecturer: Lecture 20 told the story from the video card to GPGPU. Cray's oxen and chickens: the answer depends on the field. The GPU is not faster at any single thing; it does more things at once.</a:t>
             </a:r>
             <a:endParaRPr lang="en-US" dirty="0"/>
@@ -1113,6 +1120,7 @@
             <a:r>
               <a:rPr lang="en-US" dirty="0"/>
               <a:t>An FPGA, field-programmable gate array, is a chip that becomes the circuit you describe. Inside there is a sea of small blocks: look-up tables, each able to be any function of a few inputs; a flip-flop beside each table; and wires with switches that can connect any block to any other. A configuration file, the bitstream, sets every table and every switch. Load another bitstream and the same chip is a different circuit. It does not execute a program: it is a circuit.
+UNDERSTAND NOW: GPU and FPGA accelerators.
 For the lecturer: The Xilinx XC2064, 1985. An FPGA does not execute a program: it becomes a circuit. Nothing is fetched or decoded; all the gates work at the same time.
 Pictures: Mojo v3 FPGA Development Board (9303578174).jpg, SparkFun Electronics, CC BY 2.0, Wikimedia Commons.</a:t>
             </a:r>
@@ -1203,6 +1211,7 @@
             <a:r>
               <a:rPr lang="en-US" dirty="0"/>
               <a:t>Four ways to compute, compared. Read the table by rows. A CPU is a few complex cores, programmed in any language, good at everything in moderation. A GPU is thousands of simple cores for regular data in bulk. An FPGA is a circuit you configure, for streams and low latency. An ASIC is a circuit made for one job. From left to right the work done per joule grows, and so does the effort required. Generality is paid in energy, efficiency in effort.
+UNDERSTAND NOW: GPU and FPGA accelerators.
 For the lecturer: Generality is paid in energy; efficiency is paid in effort. A modern system on a chip has all four: your phone holds CPU cores, a GPU, and fixed circuits for video and radio.</a:t>
             </a:r>
             <a:endParaRPr lang="en-US" dirty="0"/>
@@ -1650,6 +1659,7 @@
             <a:r>
               <a:rPr lang="en-US" dirty="0"/>
               <a:t>Four conclusions. One equation with three factors: every fast machine attacks one of them, or multiplies the processors. Superscalar out-of-order cores respect the contract of the instruction set and execute many instructions at once. Vectors, GPUs and clusters exploit data that can be processed independently, and Amdahl's law says how far that goes. FPGAs turn a description into a circuit. The course ends here: from a bit to a supercomputer, with a single instruction set.
+Learning status, recap. UNDERSTAND NOW: the performance equation; superscalar processors; vector instructions; HPC and Amdahl's law; GPU and FPGA accelerators. USE NOW: the complete program, the PRG32 tools (used, not studied, in this course). UNDERSTAND LATER: nothing. A slide without a badge is context: a story, an example, a question, an exercise.
 For the lecturer: The course ends here: from a bit to a supercomputer, with one instruction set. Next: the visit to the Department's computing systems, and the presentation of the students' games.</a:t>
             </a:r>
             <a:endParaRPr lang="en-US" dirty="0"/>
@@ -1739,6 +1749,7 @@
             <a:r>
               <a:rPr lang="en-US" dirty="0"/>
               <a:t>The time a program takes is the product of three numbers: the instructions executed, the clock cycles each needs on average, and the duration of a cycle. Each factor can be attacked. Fewer instructions: better algorithms, richer instructions, vectors. Fewer cycles per instruction: pipelines and superscalar execution. A shorter cycle: faster transistors. And when one processor is not enough, more processors. Keep this equation in view: every machine of the lecture is a different answer to it.
+UNDERSTAND NOW: the performance equation.
 For the lecturer: The performance equation of Patterson and Hennessy. For the loop of the warm-up (code deck) on the kit: 3 840 instructions, about 1 cycle each, 6.25 nanoseconds per cycle.</a:t>
             </a:r>
             <a:endParaRPr lang="en-US" dirty="0"/>
@@ -1828,6 +1839,7 @@
             <a:r>
               <a:rPr lang="en-US" dirty="0"/>
               <a:t>Why not simply raise the clock frequency? For thirty years each generation of transistors was smaller and faster without being hotter per unit of area. Around 2005 this stopped: a faster clock now means more heat than a chip can shed. Frequencies have stayed at a few gigahertz, and the additional transistors have been spent otherwise: wider processors, more cores, vector units, accelerators. Performance now comes from parallelism, from doing many things at once.
+UNDERSTAND NOW: the performance equation.
 For the lecturer: Moore's law (more transistors) went on; Dennard scaling (constant power density) ended. The 160 MHz of the kit is slow by choice: it costs milliwatts.</a:t>
             </a:r>
             <a:endParaRPr lang="en-US" dirty="0"/>
@@ -1917,6 +1929,7 @@
             <a:r>
               <a:rPr lang="en-US" dirty="0"/>
               <a:t>Four kinds of processor, in order of ambition. The multi-cycle processor completes one instruction before starting the next. The pipelined one has several instructions in flight, each in a different stage, and completes at most one per cycle: this is your kit. The superscalar in-order processor has two or more pipelines side by side. The superscalar out-of-order processor starts each instruction as soon as its operands are ready, and reaches four, six, eight instructions per cycle: it is in your laptop and in your phone.
+UNDERSTAND NOW: superscalar processors.
 For the lecturer: Lecture 19 introduced the pipeline and named superscalar processors in one line: this section opens that line. Width is the number of instructions the processor can start in one cycle.</a:t>
             </a:r>
             <a:endParaRPr lang="en-US" dirty="0"/>
@@ -2006,6 +2019,7 @@
             <a:r>
               <a:rPr lang="en-US" dirty="0"/>
               <a:t>Out-of-order execution, in four stages. Instructions are fetched and decoded in order, several per cycle, into a window of tens or hundreds. Each result is given a fresh physical register: renaming. Each instruction executes as soon as its operands exist, wherever it is in the program. Finally the results are committed in program order, so that, seen from outside, nothing ever overtook. The model you learned, one instruction after another, is preserved exactly: only the timing changes.
+UNDERSTAND NOW: superscalar processors.
 For the lecturer: The algorithm is Tomasulo's, designed for the floating-point unit of the IBM System/360 Model 91 in 1967; the reorder buffer that commits in order came in the 1980s. The programmer's model, the one you learned, is preserved exactly: this is the contract of the instruction set.</a:t>
             </a:r>
             <a:endParaRPr lang="en-US" dirty="0"/>
@@ -2095,6 +2109,7 @@
             <a:r>
               <a:rPr lang="en-US" dirty="0"/>
               <a:t>A wide processor meets a branch every few instructions and cannot wait to know its outcome. So it predicts: it guesses the direction from the history of that branch and continues along the guess. If the guess was right, nothing is lost; if it was wrong, the speculative work is thrown away. The loop of the warm-up jumps back 959 times and falls through once: a predictor learns it at once. Modern predictors are right far more than nine times out of ten.
+UNDERSTAND NOW: superscalar processors.
 For the lecturer: Speculative execution has a dark side: in 2018 the Spectre and Meltdown attacks showed that work thrown away can still leave traces in the cache that reveal secrets. Performance tricks are also security questions.</a:t>
             </a:r>
             <a:endParaRPr lang="en-US" dirty="0"/>
@@ -2184,6 +2199,7 @@
             <a:r>
               <a:rPr lang="en-US" dirty="0"/>
               <a:t>RISC-V processors of this kind exist. The first row is the core of your kit: in order, one instruction per cycle. The others are out-of-order cores: BOOM from Berkeley and XiangShan from the Chinese Academy of Sciences, both open source; the C910, the P550, Veyron, from companies. Because the instruction set is open, anyone may build such a core, and some are published as source code that you could read.
+UNDERSTAND NOW: superscalar processors.
 For the lecturer: BOOM is the Berkeley Out-of-Order Machine. Because the instruction set is open, anyone may build such a core, and several are published as source code that a student can read: this has no precedent among commercial architectures. The list ages quickly: update it.</a:t>
             </a:r>
             <a:endParaRPr lang="en-US" dirty="0"/>
@@ -2273,6 +2289,7 @@
             <a:r>
               <a:rPr lang="en-US" dirty="0"/>
               <a:t>A distinction that organises the whole course. The architecture is the contract: the instructions, the registers, what each instruction does. The microarchitecture is one way of honouring the contract: stages, width, predictors, caches. The add you wrote for a microcontroller is the same add on a server core. Verm1 would run unchanged on any core of the previous slide. This is why an instruction set, once learned, is knowledge that lasts.
+UNDERSTAND NOW: superscalar processors.
 For the lecturer: The distinction that organises the whole course: Lectures 02 to 22 taught the architecture; the kit is one small microarchitecture.</a:t>
             </a:r>
             <a:endParaRPr lang="en-US" dirty="0"/>
@@ -3410,6 +3427,420 @@
       </p:pic>
       <p:sp>
         <p:nvSpPr>
+          <p:cNvPr id="15" name="Shape 12"/>
+          <p:cNvSpPr/>
+          <p:nvPr/>
+        </p:nvSpPr>
+        <p:spPr>
+          <a:xfrm>
+            <a:off x="9690303" y="91440"/>
+            <a:ext cx="1952752" cy="274320"/>
+          </a:xfrm>
+          <a:prstGeom prst="rect">
+            <a:avLst/>
+          </a:prstGeom>
+          <a:solidFill>
+            <a:srgbClr val="F3E8FF"/>
+          </a:solidFill>
+          <a:ln w="12700">
+            <a:solidFill>
+              <a:srgbClr val="7E22CE"/>
+            </a:solidFill>
+            <a:prstDash val="dash"/>
+          </a:ln>
+        </p:spPr>
+      </p:sp>
+      <p:sp>
+        <p:nvSpPr>
+          <p:cNvPr id="16" name="Shape 13"/>
+          <p:cNvSpPr/>
+          <p:nvPr/>
+        </p:nvSpPr>
+        <p:spPr>
+          <a:xfrm>
+            <a:off x="9717735" y="128016"/>
+            <a:ext cx="45720" cy="45720"/>
+          </a:xfrm>
+          <a:prstGeom prst="rect">
+            <a:avLst/>
+          </a:prstGeom>
+          <a:solidFill>
+            <a:srgbClr val="7E22CE"/>
+          </a:solidFill>
+          <a:ln w="12700">
+            <a:solidFill>
+              <a:srgbClr val="7E22CE"/>
+            </a:solidFill>
+            <a:prstDash val="solid"/>
+          </a:ln>
+        </p:spPr>
+      </p:sp>
+      <p:sp>
+        <p:nvSpPr>
+          <p:cNvPr id="17" name="Shape 14"/>
+          <p:cNvSpPr/>
+          <p:nvPr/>
+        </p:nvSpPr>
+        <p:spPr>
+          <a:xfrm>
+            <a:off x="9717735" y="205740"/>
+            <a:ext cx="45720" cy="45720"/>
+          </a:xfrm>
+          <a:prstGeom prst="rect">
+            <a:avLst/>
+          </a:prstGeom>
+          <a:solidFill>
+            <a:srgbClr val="7E22CE"/>
+          </a:solidFill>
+          <a:ln w="12700">
+            <a:solidFill>
+              <a:srgbClr val="7E22CE"/>
+            </a:solidFill>
+            <a:prstDash val="solid"/>
+          </a:ln>
+        </p:spPr>
+      </p:sp>
+      <p:sp>
+        <p:nvSpPr>
+          <p:cNvPr id="18" name="Shape 15"/>
+          <p:cNvSpPr/>
+          <p:nvPr/>
+        </p:nvSpPr>
+        <p:spPr>
+          <a:xfrm>
+            <a:off x="9717735" y="283464"/>
+            <a:ext cx="45720" cy="45720"/>
+          </a:xfrm>
+          <a:prstGeom prst="rect">
+            <a:avLst/>
+          </a:prstGeom>
+          <a:solidFill>
+            <a:srgbClr val="7E22CE"/>
+          </a:solidFill>
+          <a:ln w="12700">
+            <a:solidFill>
+              <a:srgbClr val="7E22CE"/>
+            </a:solidFill>
+            <a:prstDash val="solid"/>
+          </a:ln>
+        </p:spPr>
+      </p:sp>
+      <p:pic>
+        <p:nvPicPr>
+          <p:cNvPr id="19" name="Image 1" descr="preencoded.png">    </p:cNvPr>
+          <p:cNvPicPr>
+            <a:picLocks noChangeAspect="1"/>
+          </p:cNvPicPr>
+          <p:nvPr/>
+        </p:nvPicPr>
+        <p:blipFill>
+          <a:blip r:embed="rId2"/>
+          <a:stretch>
+            <a:fillRect/>
+          </a:stretch>
+        </p:blipFill>
+        <p:spPr>
+          <a:xfrm>
+            <a:off x="9818319" y="128016"/>
+            <a:ext cx="201168" cy="201168"/>
+          </a:xfrm>
+          <a:prstGeom prst="rect">
+            <a:avLst/>
+          </a:prstGeom>
+        </p:spPr>
+      </p:pic>
+      <p:sp>
+        <p:nvSpPr>
+          <p:cNvPr id="20" name="Text 16"/>
+          <p:cNvSpPr txBox="1"/>
+          <p:nvPr/>
+        </p:nvSpPr>
+        <p:spPr>
+          <a:xfrm>
+            <a:off x="10074351" y="91440"/>
+            <a:ext cx="1532128" cy="274320"/>
+          </a:xfrm>
+          <a:prstGeom prst="rect">
+            <a:avLst/>
+          </a:prstGeom>
+          <a:noFill/>
+          <a:ln/>
+        </p:spPr>
+        <p:txBody>
+          <a:bodyPr wrap="square" lIns="0" tIns="0" rIns="0" bIns="0" rtlCol="0" anchor="ctr"/>
+          <a:lstStyle/>
+          <a:p>
+            <a:pPr indent="0" marL="0">
+              <a:buNone/>
+            </a:pPr>
+            <a:r>
+              <a:rPr lang="en-US" sz="1100" b="1" dirty="0">
+                <a:solidFill>
+                  <a:srgbClr val="6B21A8"/>
+                </a:solidFill>
+                <a:latin typeface="Calibri" pitchFamily="34" charset="0"/>
+                <a:ea typeface="Calibri" pitchFamily="34" charset="-122"/>
+                <a:cs typeface="Calibri" pitchFamily="34" charset="-120"/>
+              </a:rPr>
+              <a:t>UNDERSTAND LATER</a:t>
+            </a:r>
+            <a:endParaRPr lang="en-US" sz="1100" dirty="0"/>
+          </a:p>
+        </p:txBody>
+      </p:sp>
+      <p:sp>
+        <p:nvSpPr>
+          <p:cNvPr id="21" name="Shape 17"/>
+          <p:cNvSpPr/>
+          <p:nvPr/>
+        </p:nvSpPr>
+        <p:spPr>
+          <a:xfrm>
+            <a:off x="8407349" y="91440"/>
+            <a:ext cx="1173226" cy="274320"/>
+          </a:xfrm>
+          <a:prstGeom prst="rect">
+            <a:avLst/>
+          </a:prstGeom>
+          <a:solidFill>
+            <a:srgbClr val="FEF3C7"/>
+          </a:solidFill>
+          <a:ln w="12700">
+            <a:solidFill>
+              <a:srgbClr val="B45309"/>
+            </a:solidFill>
+            <a:prstDash val="solid"/>
+          </a:ln>
+        </p:spPr>
+      </p:sp>
+      <p:sp>
+        <p:nvSpPr>
+          <p:cNvPr id="22" name="Shape 18"/>
+          <p:cNvSpPr/>
+          <p:nvPr/>
+        </p:nvSpPr>
+        <p:spPr>
+          <a:xfrm>
+            <a:off x="8407349" y="91440"/>
+            <a:ext cx="27432" cy="274320"/>
+          </a:xfrm>
+          <a:prstGeom prst="rect">
+            <a:avLst/>
+          </a:prstGeom>
+          <a:solidFill>
+            <a:srgbClr val="B45309"/>
+          </a:solidFill>
+          <a:ln w="12700">
+            <a:solidFill>
+              <a:srgbClr val="B45309"/>
+            </a:solidFill>
+            <a:prstDash val="solid"/>
+          </a:ln>
+        </p:spPr>
+      </p:sp>
+      <p:sp>
+        <p:nvSpPr>
+          <p:cNvPr id="23" name="Shape 19"/>
+          <p:cNvSpPr/>
+          <p:nvPr/>
+        </p:nvSpPr>
+        <p:spPr>
+          <a:xfrm>
+            <a:off x="8462213" y="91440"/>
+            <a:ext cx="27432" cy="274320"/>
+          </a:xfrm>
+          <a:prstGeom prst="rect">
+            <a:avLst/>
+          </a:prstGeom>
+          <a:solidFill>
+            <a:srgbClr val="B45309"/>
+          </a:solidFill>
+          <a:ln w="12700">
+            <a:solidFill>
+              <a:srgbClr val="B45309"/>
+            </a:solidFill>
+            <a:prstDash val="solid"/>
+          </a:ln>
+        </p:spPr>
+      </p:sp>
+      <p:pic>
+        <p:nvPicPr>
+          <p:cNvPr id="24" name="Image 2" descr="preencoded.png">    </p:cNvPr>
+          <p:cNvPicPr>
+            <a:picLocks noChangeAspect="1"/>
+          </p:cNvPicPr>
+          <p:nvPr/>
+        </p:nvPicPr>
+        <p:blipFill>
+          <a:blip r:embed="rId3"/>
+          <a:stretch>
+            <a:fillRect/>
+          </a:stretch>
+        </p:blipFill>
+        <p:spPr>
+          <a:xfrm>
+            <a:off x="8535365" y="128016"/>
+            <a:ext cx="201168" cy="201168"/>
+          </a:xfrm>
+          <a:prstGeom prst="rect">
+            <a:avLst/>
+          </a:prstGeom>
+        </p:spPr>
+      </p:pic>
+      <p:sp>
+        <p:nvSpPr>
+          <p:cNvPr id="25" name="Text 20"/>
+          <p:cNvSpPr txBox="1"/>
+          <p:nvPr/>
+        </p:nvSpPr>
+        <p:spPr>
+          <a:xfrm>
+            <a:off x="8791397" y="91440"/>
+            <a:ext cx="752602" cy="274320"/>
+          </a:xfrm>
+          <a:prstGeom prst="rect">
+            <a:avLst/>
+          </a:prstGeom>
+          <a:noFill/>
+          <a:ln/>
+        </p:spPr>
+        <p:txBody>
+          <a:bodyPr wrap="square" lIns="0" tIns="0" rIns="0" bIns="0" rtlCol="0" anchor="ctr"/>
+          <a:lstStyle/>
+          <a:p>
+            <a:pPr indent="0" marL="0">
+              <a:buNone/>
+            </a:pPr>
+            <a:r>
+              <a:rPr lang="en-US" sz="1100" b="1" dirty="0">
+                <a:solidFill>
+                  <a:srgbClr val="92400E"/>
+                </a:solidFill>
+                <a:latin typeface="Calibri" pitchFamily="34" charset="0"/>
+                <a:ea typeface="Calibri" pitchFamily="34" charset="-122"/>
+                <a:cs typeface="Calibri" pitchFamily="34" charset="-120"/>
+              </a:rPr>
+              <a:t>USE NOW</a:t>
+            </a:r>
+            <a:endParaRPr lang="en-US" sz="1100" dirty="0"/>
+          </a:p>
+        </p:txBody>
+      </p:sp>
+      <p:sp>
+        <p:nvSpPr>
+          <p:cNvPr id="26" name="Shape 21"/>
+          <p:cNvSpPr/>
+          <p:nvPr/>
+        </p:nvSpPr>
+        <p:spPr>
+          <a:xfrm>
+            <a:off x="6518097" y="91440"/>
+            <a:ext cx="1779524" cy="274320"/>
+          </a:xfrm>
+          <a:prstGeom prst="rect">
+            <a:avLst/>
+          </a:prstGeom>
+          <a:solidFill>
+            <a:srgbClr val="E0F2FE"/>
+          </a:solidFill>
+          <a:ln w="12700">
+            <a:solidFill>
+              <a:srgbClr val="0369A1"/>
+            </a:solidFill>
+            <a:prstDash val="solid"/>
+          </a:ln>
+        </p:spPr>
+      </p:sp>
+      <p:sp>
+        <p:nvSpPr>
+          <p:cNvPr id="27" name="Shape 22"/>
+          <p:cNvSpPr/>
+          <p:nvPr/>
+        </p:nvSpPr>
+        <p:spPr>
+          <a:xfrm>
+            <a:off x="6518097" y="91440"/>
+            <a:ext cx="73152" cy="274320"/>
+          </a:xfrm>
+          <a:prstGeom prst="rect">
+            <a:avLst/>
+          </a:prstGeom>
+          <a:solidFill>
+            <a:srgbClr val="0369A1"/>
+          </a:solidFill>
+          <a:ln w="12700">
+            <a:solidFill>
+              <a:srgbClr val="0369A1"/>
+            </a:solidFill>
+            <a:prstDash val="solid"/>
+          </a:ln>
+        </p:spPr>
+      </p:sp>
+      <p:pic>
+        <p:nvPicPr>
+          <p:cNvPr id="28" name="Image 3" descr="preencoded.png">    </p:cNvPr>
+          <p:cNvPicPr>
+            <a:picLocks noChangeAspect="1"/>
+          </p:cNvPicPr>
+          <p:nvPr/>
+        </p:nvPicPr>
+        <p:blipFill>
+          <a:blip r:embed="rId4"/>
+          <a:stretch>
+            <a:fillRect/>
+          </a:stretch>
+        </p:blipFill>
+        <p:spPr>
+          <a:xfrm>
+            <a:off x="6646113" y="128016"/>
+            <a:ext cx="201168" cy="201168"/>
+          </a:xfrm>
+          <a:prstGeom prst="rect">
+            <a:avLst/>
+          </a:prstGeom>
+        </p:spPr>
+      </p:pic>
+      <p:sp>
+        <p:nvSpPr>
+          <p:cNvPr id="29" name="Text 23"/>
+          <p:cNvSpPr txBox="1"/>
+          <p:nvPr/>
+        </p:nvSpPr>
+        <p:spPr>
+          <a:xfrm>
+            <a:off x="6902145" y="91440"/>
+            <a:ext cx="1358900" cy="274320"/>
+          </a:xfrm>
+          <a:prstGeom prst="rect">
+            <a:avLst/>
+          </a:prstGeom>
+          <a:noFill/>
+          <a:ln/>
+        </p:spPr>
+        <p:txBody>
+          <a:bodyPr wrap="square" lIns="0" tIns="0" rIns="0" bIns="0" rtlCol="0" anchor="ctr"/>
+          <a:lstStyle/>
+          <a:p>
+            <a:pPr indent="0" marL="0">
+              <a:buNone/>
+            </a:pPr>
+            <a:r>
+              <a:rPr lang="en-US" sz="1100" b="1" dirty="0">
+                <a:solidFill>
+                  <a:srgbClr val="075985"/>
+                </a:solidFill>
+                <a:latin typeface="Calibri" pitchFamily="34" charset="0"/>
+                <a:ea typeface="Calibri" pitchFamily="34" charset="-122"/>
+                <a:cs typeface="Calibri" pitchFamily="34" charset="-120"/>
+              </a:rPr>
+              <a:t>UNDERSTAND NOW</a:t>
+            </a:r>
+            <a:endParaRPr lang="en-US" sz="1100" dirty="0"/>
+          </a:p>
+        </p:txBody>
+      </p:sp>
+      <p:sp>
+        <p:nvSpPr>
           <p:cNvPr id="25" name="Slide Number Placeholder 0"/>
           <p:cNvSpPr>
             <a:spLocks noGrp="1"/>
@@ -3982,6 +4413,133 @@
       </p:sp>
       <p:sp>
         <p:nvSpPr>
+          <p:cNvPr id="15" name="Shape 12"/>
+          <p:cNvSpPr/>
+          <p:nvPr/>
+        </p:nvSpPr>
+        <p:spPr>
+          <a:xfrm>
+            <a:off x="8353374" y="91440"/>
+            <a:ext cx="3289681" cy="274320"/>
+          </a:xfrm>
+          <a:prstGeom prst="rect">
+            <a:avLst/>
+          </a:prstGeom>
+          <a:solidFill>
+            <a:srgbClr val="E0F2FE"/>
+          </a:solidFill>
+          <a:ln w="12700">
+            <a:solidFill>
+              <a:srgbClr val="0369A1"/>
+            </a:solidFill>
+            <a:prstDash val="solid"/>
+          </a:ln>
+        </p:spPr>
+      </p:sp>
+      <p:sp>
+        <p:nvSpPr>
+          <p:cNvPr id="16" name="Shape 13"/>
+          <p:cNvSpPr/>
+          <p:nvPr/>
+        </p:nvSpPr>
+        <p:spPr>
+          <a:xfrm>
+            <a:off x="8353374" y="91440"/>
+            <a:ext cx="73152" cy="274320"/>
+          </a:xfrm>
+          <a:prstGeom prst="rect">
+            <a:avLst/>
+          </a:prstGeom>
+          <a:solidFill>
+            <a:srgbClr val="0369A1"/>
+          </a:solidFill>
+          <a:ln w="12700">
+            <a:solidFill>
+              <a:srgbClr val="0369A1"/>
+            </a:solidFill>
+            <a:prstDash val="solid"/>
+          </a:ln>
+        </p:spPr>
+      </p:sp>
+      <p:pic>
+        <p:nvPicPr>
+          <p:cNvPr id="17" name="Image 1" descr="preencoded.png">    </p:cNvPr>
+          <p:cNvPicPr>
+            <a:picLocks noChangeAspect="1"/>
+          </p:cNvPicPr>
+          <p:nvPr/>
+        </p:nvPicPr>
+        <p:blipFill>
+          <a:blip r:embed="rId2"/>
+          <a:stretch>
+            <a:fillRect/>
+          </a:stretch>
+        </p:blipFill>
+        <p:spPr>
+          <a:xfrm>
+            <a:off x="8481390" y="128016"/>
+            <a:ext cx="201168" cy="201168"/>
+          </a:xfrm>
+          <a:prstGeom prst="rect">
+            <a:avLst/>
+          </a:prstGeom>
+        </p:spPr>
+      </p:pic>
+      <p:sp>
+        <p:nvSpPr>
+          <p:cNvPr id="18" name="Text 14"/>
+          <p:cNvSpPr txBox="1"/>
+          <p:nvPr/>
+        </p:nvSpPr>
+        <p:spPr>
+          <a:xfrm>
+            <a:off x="8737422" y="91440"/>
+            <a:ext cx="2869057" cy="274320"/>
+          </a:xfrm>
+          <a:prstGeom prst="rect">
+            <a:avLst/>
+          </a:prstGeom>
+          <a:noFill/>
+          <a:ln/>
+        </p:spPr>
+        <p:txBody>
+          <a:bodyPr wrap="square" lIns="0" tIns="0" rIns="0" bIns="0" rtlCol="0" anchor="ctr"/>
+          <a:lstStyle/>
+          <a:p>
+            <a:pPr indent="0" marL="0">
+              <a:buNone/>
+            </a:pPr>
+            <a:r>
+              <a:rPr lang="en-US" sz="1100" b="1" dirty="0">
+                <a:solidFill>
+                  <a:srgbClr val="075985"/>
+                </a:solidFill>
+                <a:latin typeface="Calibri" pitchFamily="34" charset="0"/>
+                <a:ea typeface="Calibri" pitchFamily="34" charset="-122"/>
+                <a:cs typeface="Calibri" pitchFamily="34" charset="-120"/>
+              </a:rPr>
+              <a:t>UNDERSTAND NOW</a:t>
+            </a:r>
+            <a:pPr indent="0" marL="0">
+              <a:buNone/>
+            </a:pPr>
+            <a:r>
+              <a:rPr lang="en-US" sz="1100" dirty="0">
+                <a:solidFill>
+                  <a:srgbClr val="075985"/>
+                </a:solidFill>
+                <a:latin typeface="Calibri" pitchFamily="34" charset="0"/>
+                <a:ea typeface="Calibri" pitchFamily="34" charset="-122"/>
+                <a:cs typeface="Calibri" pitchFamily="34" charset="-120"/>
+              </a:rPr>
+              <a:t> · HPC and Amdahl's law</a:t>
+            </a:r>
+            <a:endParaRPr lang="en-US" sz="1100" dirty="0"/>
+          </a:p>
+        </p:txBody>
+      </p:sp>
+      <p:sp>
+        <p:nvSpPr>
           <p:cNvPr id="25" name="Slide Number Placeholder 0"/>
           <p:cNvSpPr>
             <a:spLocks noGrp="1"/>
@@ -4402,6 +4960,133 @@
       </p:sp>
       <p:sp>
         <p:nvSpPr>
+          <p:cNvPr id="12" name="Shape 10"/>
+          <p:cNvSpPr/>
+          <p:nvPr/>
+        </p:nvSpPr>
+        <p:spPr>
+          <a:xfrm>
+            <a:off x="8353374" y="91440"/>
+            <a:ext cx="3289681" cy="274320"/>
+          </a:xfrm>
+          <a:prstGeom prst="rect">
+            <a:avLst/>
+          </a:prstGeom>
+          <a:solidFill>
+            <a:srgbClr val="E0F2FE"/>
+          </a:solidFill>
+          <a:ln w="12700">
+            <a:solidFill>
+              <a:srgbClr val="0369A1"/>
+            </a:solidFill>
+            <a:prstDash val="solid"/>
+          </a:ln>
+        </p:spPr>
+      </p:sp>
+      <p:sp>
+        <p:nvSpPr>
+          <p:cNvPr id="13" name="Shape 11"/>
+          <p:cNvSpPr/>
+          <p:nvPr/>
+        </p:nvSpPr>
+        <p:spPr>
+          <a:xfrm>
+            <a:off x="8353374" y="91440"/>
+            <a:ext cx="73152" cy="274320"/>
+          </a:xfrm>
+          <a:prstGeom prst="rect">
+            <a:avLst/>
+          </a:prstGeom>
+          <a:solidFill>
+            <a:srgbClr val="0369A1"/>
+          </a:solidFill>
+          <a:ln w="12700">
+            <a:solidFill>
+              <a:srgbClr val="0369A1"/>
+            </a:solidFill>
+            <a:prstDash val="solid"/>
+          </a:ln>
+        </p:spPr>
+      </p:sp>
+      <p:pic>
+        <p:nvPicPr>
+          <p:cNvPr id="14" name="Image 0" descr="preencoded.png">    </p:cNvPr>
+          <p:cNvPicPr>
+            <a:picLocks noChangeAspect="1"/>
+          </p:cNvPicPr>
+          <p:nvPr/>
+        </p:nvPicPr>
+        <p:blipFill>
+          <a:blip r:embed="rId1"/>
+          <a:stretch>
+            <a:fillRect/>
+          </a:stretch>
+        </p:blipFill>
+        <p:spPr>
+          <a:xfrm>
+            <a:off x="8481390" y="128016"/>
+            <a:ext cx="201168" cy="201168"/>
+          </a:xfrm>
+          <a:prstGeom prst="rect">
+            <a:avLst/>
+          </a:prstGeom>
+        </p:spPr>
+      </p:pic>
+      <p:sp>
+        <p:nvSpPr>
+          <p:cNvPr id="15" name="Text 12"/>
+          <p:cNvSpPr txBox="1"/>
+          <p:nvPr/>
+        </p:nvSpPr>
+        <p:spPr>
+          <a:xfrm>
+            <a:off x="8737422" y="91440"/>
+            <a:ext cx="2869057" cy="274320"/>
+          </a:xfrm>
+          <a:prstGeom prst="rect">
+            <a:avLst/>
+          </a:prstGeom>
+          <a:noFill/>
+          <a:ln/>
+        </p:spPr>
+        <p:txBody>
+          <a:bodyPr wrap="square" lIns="0" tIns="0" rIns="0" bIns="0" rtlCol="0" anchor="ctr"/>
+          <a:lstStyle/>
+          <a:p>
+            <a:pPr indent="0" marL="0">
+              <a:buNone/>
+            </a:pPr>
+            <a:r>
+              <a:rPr lang="en-US" sz="1100" b="1" dirty="0">
+                <a:solidFill>
+                  <a:srgbClr val="075985"/>
+                </a:solidFill>
+                <a:latin typeface="Calibri" pitchFamily="34" charset="0"/>
+                <a:ea typeface="Calibri" pitchFamily="34" charset="-122"/>
+                <a:cs typeface="Calibri" pitchFamily="34" charset="-120"/>
+              </a:rPr>
+              <a:t>UNDERSTAND NOW</a:t>
+            </a:r>
+            <a:pPr indent="0" marL="0">
+              <a:buNone/>
+            </a:pPr>
+            <a:r>
+              <a:rPr lang="en-US" sz="1100" dirty="0">
+                <a:solidFill>
+                  <a:srgbClr val="075985"/>
+                </a:solidFill>
+                <a:latin typeface="Calibri" pitchFamily="34" charset="0"/>
+                <a:ea typeface="Calibri" pitchFamily="34" charset="-122"/>
+                <a:cs typeface="Calibri" pitchFamily="34" charset="-120"/>
+              </a:rPr>
+              <a:t> · HPC and Amdahl's law</a:t>
+            </a:r>
+            <a:endParaRPr lang="en-US" sz="1100" dirty="0"/>
+          </a:p>
+        </p:txBody>
+      </p:sp>
+      <p:sp>
+        <p:nvSpPr>
           <p:cNvPr id="25" name="Slide Number Placeholder 0"/>
           <p:cNvSpPr>
             <a:spLocks noGrp="1"/>
@@ -4876,6 +5561,133 @@
       </p:sp>
       <p:sp>
         <p:nvSpPr>
+          <p:cNvPr id="9" name="Shape 7"/>
+          <p:cNvSpPr/>
+          <p:nvPr/>
+        </p:nvSpPr>
+        <p:spPr>
+          <a:xfrm>
+            <a:off x="8353374" y="91440"/>
+            <a:ext cx="3289681" cy="274320"/>
+          </a:xfrm>
+          <a:prstGeom prst="rect">
+            <a:avLst/>
+          </a:prstGeom>
+          <a:solidFill>
+            <a:srgbClr val="E0F2FE"/>
+          </a:solidFill>
+          <a:ln w="12700">
+            <a:solidFill>
+              <a:srgbClr val="0369A1"/>
+            </a:solidFill>
+            <a:prstDash val="solid"/>
+          </a:ln>
+        </p:spPr>
+      </p:sp>
+      <p:sp>
+        <p:nvSpPr>
+          <p:cNvPr id="10" name="Shape 8"/>
+          <p:cNvSpPr/>
+          <p:nvPr/>
+        </p:nvSpPr>
+        <p:spPr>
+          <a:xfrm>
+            <a:off x="8353374" y="91440"/>
+            <a:ext cx="73152" cy="274320"/>
+          </a:xfrm>
+          <a:prstGeom prst="rect">
+            <a:avLst/>
+          </a:prstGeom>
+          <a:solidFill>
+            <a:srgbClr val="0369A1"/>
+          </a:solidFill>
+          <a:ln w="12700">
+            <a:solidFill>
+              <a:srgbClr val="0369A1"/>
+            </a:solidFill>
+            <a:prstDash val="solid"/>
+          </a:ln>
+        </p:spPr>
+      </p:sp>
+      <p:pic>
+        <p:nvPicPr>
+          <p:cNvPr id="11" name="Image 0" descr="preencoded.png">    </p:cNvPr>
+          <p:cNvPicPr>
+            <a:picLocks noChangeAspect="1"/>
+          </p:cNvPicPr>
+          <p:nvPr/>
+        </p:nvPicPr>
+        <p:blipFill>
+          <a:blip r:embed="rId1"/>
+          <a:stretch>
+            <a:fillRect/>
+          </a:stretch>
+        </p:blipFill>
+        <p:spPr>
+          <a:xfrm>
+            <a:off x="8481390" y="128016"/>
+            <a:ext cx="201168" cy="201168"/>
+          </a:xfrm>
+          <a:prstGeom prst="rect">
+            <a:avLst/>
+          </a:prstGeom>
+        </p:spPr>
+      </p:pic>
+      <p:sp>
+        <p:nvSpPr>
+          <p:cNvPr id="12" name="Text 9"/>
+          <p:cNvSpPr txBox="1"/>
+          <p:nvPr/>
+        </p:nvSpPr>
+        <p:spPr>
+          <a:xfrm>
+            <a:off x="8737422" y="91440"/>
+            <a:ext cx="2869057" cy="274320"/>
+          </a:xfrm>
+          <a:prstGeom prst="rect">
+            <a:avLst/>
+          </a:prstGeom>
+          <a:noFill/>
+          <a:ln/>
+        </p:spPr>
+        <p:txBody>
+          <a:bodyPr wrap="square" lIns="0" tIns="0" rIns="0" bIns="0" rtlCol="0" anchor="ctr"/>
+          <a:lstStyle/>
+          <a:p>
+            <a:pPr indent="0" marL="0">
+              <a:buNone/>
+            </a:pPr>
+            <a:r>
+              <a:rPr lang="en-US" sz="1100" b="1" dirty="0">
+                <a:solidFill>
+                  <a:srgbClr val="075985"/>
+                </a:solidFill>
+                <a:latin typeface="Calibri" pitchFamily="34" charset="0"/>
+                <a:ea typeface="Calibri" pitchFamily="34" charset="-122"/>
+                <a:cs typeface="Calibri" pitchFamily="34" charset="-120"/>
+              </a:rPr>
+              <a:t>UNDERSTAND NOW</a:t>
+            </a:r>
+            <a:pPr indent="0" marL="0">
+              <a:buNone/>
+            </a:pPr>
+            <a:r>
+              <a:rPr lang="en-US" sz="1100" dirty="0">
+                <a:solidFill>
+                  <a:srgbClr val="075985"/>
+                </a:solidFill>
+                <a:latin typeface="Calibri" pitchFamily="34" charset="0"/>
+                <a:ea typeface="Calibri" pitchFamily="34" charset="-122"/>
+                <a:cs typeface="Calibri" pitchFamily="34" charset="-120"/>
+              </a:rPr>
+              <a:t> · HPC and Amdahl's law</a:t>
+            </a:r>
+            <a:endParaRPr lang="en-US" sz="1100" dirty="0"/>
+          </a:p>
+        </p:txBody>
+      </p:sp>
+      <p:sp>
+        <p:nvSpPr>
           <p:cNvPr id="25" name="Slide Number Placeholder 0"/>
           <p:cNvSpPr>
             <a:spLocks noGrp="1"/>
@@ -5430,6 +6242,133 @@
       </p:sp>
       <p:sp>
         <p:nvSpPr>
+          <p:cNvPr id="16" name="Shape 14"/>
+          <p:cNvSpPr/>
+          <p:nvPr/>
+        </p:nvSpPr>
+        <p:spPr>
+          <a:xfrm>
+            <a:off x="8353374" y="91440"/>
+            <a:ext cx="3289681" cy="274320"/>
+          </a:xfrm>
+          <a:prstGeom prst="rect">
+            <a:avLst/>
+          </a:prstGeom>
+          <a:solidFill>
+            <a:srgbClr val="E0F2FE"/>
+          </a:solidFill>
+          <a:ln w="12700">
+            <a:solidFill>
+              <a:srgbClr val="0369A1"/>
+            </a:solidFill>
+            <a:prstDash val="solid"/>
+          </a:ln>
+        </p:spPr>
+      </p:sp>
+      <p:sp>
+        <p:nvSpPr>
+          <p:cNvPr id="17" name="Shape 15"/>
+          <p:cNvSpPr/>
+          <p:nvPr/>
+        </p:nvSpPr>
+        <p:spPr>
+          <a:xfrm>
+            <a:off x="8353374" y="91440"/>
+            <a:ext cx="73152" cy="274320"/>
+          </a:xfrm>
+          <a:prstGeom prst="rect">
+            <a:avLst/>
+          </a:prstGeom>
+          <a:solidFill>
+            <a:srgbClr val="0369A1"/>
+          </a:solidFill>
+          <a:ln w="12700">
+            <a:solidFill>
+              <a:srgbClr val="0369A1"/>
+            </a:solidFill>
+            <a:prstDash val="solid"/>
+          </a:ln>
+        </p:spPr>
+      </p:sp>
+      <p:pic>
+        <p:nvPicPr>
+          <p:cNvPr id="18" name="Image 0" descr="preencoded.png">    </p:cNvPr>
+          <p:cNvPicPr>
+            <a:picLocks noChangeAspect="1"/>
+          </p:cNvPicPr>
+          <p:nvPr/>
+        </p:nvPicPr>
+        <p:blipFill>
+          <a:blip r:embed="rId1"/>
+          <a:stretch>
+            <a:fillRect/>
+          </a:stretch>
+        </p:blipFill>
+        <p:spPr>
+          <a:xfrm>
+            <a:off x="8481390" y="128016"/>
+            <a:ext cx="201168" cy="201168"/>
+          </a:xfrm>
+          <a:prstGeom prst="rect">
+            <a:avLst/>
+          </a:prstGeom>
+        </p:spPr>
+      </p:pic>
+      <p:sp>
+        <p:nvSpPr>
+          <p:cNvPr id="19" name="Text 16"/>
+          <p:cNvSpPr txBox="1"/>
+          <p:nvPr/>
+        </p:nvSpPr>
+        <p:spPr>
+          <a:xfrm>
+            <a:off x="8737422" y="91440"/>
+            <a:ext cx="2869057" cy="274320"/>
+          </a:xfrm>
+          <a:prstGeom prst="rect">
+            <a:avLst/>
+          </a:prstGeom>
+          <a:noFill/>
+          <a:ln/>
+        </p:spPr>
+        <p:txBody>
+          <a:bodyPr wrap="square" lIns="0" tIns="0" rIns="0" bIns="0" rtlCol="0" anchor="ctr"/>
+          <a:lstStyle/>
+          <a:p>
+            <a:pPr indent="0" marL="0">
+              <a:buNone/>
+            </a:pPr>
+            <a:r>
+              <a:rPr lang="en-US" sz="1100" b="1" dirty="0">
+                <a:solidFill>
+                  <a:srgbClr val="075985"/>
+                </a:solidFill>
+                <a:latin typeface="Calibri" pitchFamily="34" charset="0"/>
+                <a:ea typeface="Calibri" pitchFamily="34" charset="-122"/>
+                <a:cs typeface="Calibri" pitchFamily="34" charset="-120"/>
+              </a:rPr>
+              <a:t>UNDERSTAND NOW</a:t>
+            </a:r>
+            <a:pPr indent="0" marL="0">
+              <a:buNone/>
+            </a:pPr>
+            <a:r>
+              <a:rPr lang="en-US" sz="1100" dirty="0">
+                <a:solidFill>
+                  <a:srgbClr val="075985"/>
+                </a:solidFill>
+                <a:latin typeface="Calibri" pitchFamily="34" charset="0"/>
+                <a:ea typeface="Calibri" pitchFamily="34" charset="-122"/>
+                <a:cs typeface="Calibri" pitchFamily="34" charset="-120"/>
+              </a:rPr>
+              <a:t> · HPC and Amdahl's law</a:t>
+            </a:r>
+            <a:endParaRPr lang="en-US" sz="1100" dirty="0"/>
+          </a:p>
+        </p:txBody>
+      </p:sp>
+      <p:sp>
+        <p:nvSpPr>
           <p:cNvPr id="25" name="Slide Number Placeholder 0"/>
           <p:cNvSpPr>
             <a:spLocks noGrp="1"/>
@@ -5904,6 +6843,133 @@
       </p:sp>
       <p:sp>
         <p:nvSpPr>
+          <p:cNvPr id="9" name="Shape 7"/>
+          <p:cNvSpPr/>
+          <p:nvPr/>
+        </p:nvSpPr>
+        <p:spPr>
+          <a:xfrm>
+            <a:off x="8025079" y="91440"/>
+            <a:ext cx="3617976" cy="274320"/>
+          </a:xfrm>
+          <a:prstGeom prst="rect">
+            <a:avLst/>
+          </a:prstGeom>
+          <a:solidFill>
+            <a:srgbClr val="E0F2FE"/>
+          </a:solidFill>
+          <a:ln w="12700">
+            <a:solidFill>
+              <a:srgbClr val="0369A1"/>
+            </a:solidFill>
+            <a:prstDash val="solid"/>
+          </a:ln>
+        </p:spPr>
+      </p:sp>
+      <p:sp>
+        <p:nvSpPr>
+          <p:cNvPr id="10" name="Shape 8"/>
+          <p:cNvSpPr/>
+          <p:nvPr/>
+        </p:nvSpPr>
+        <p:spPr>
+          <a:xfrm>
+            <a:off x="8025079" y="91440"/>
+            <a:ext cx="73152" cy="274320"/>
+          </a:xfrm>
+          <a:prstGeom prst="rect">
+            <a:avLst/>
+          </a:prstGeom>
+          <a:solidFill>
+            <a:srgbClr val="0369A1"/>
+          </a:solidFill>
+          <a:ln w="12700">
+            <a:solidFill>
+              <a:srgbClr val="0369A1"/>
+            </a:solidFill>
+            <a:prstDash val="solid"/>
+          </a:ln>
+        </p:spPr>
+      </p:sp>
+      <p:pic>
+        <p:nvPicPr>
+          <p:cNvPr id="11" name="Image 0" descr="preencoded.png">    </p:cNvPr>
+          <p:cNvPicPr>
+            <a:picLocks noChangeAspect="1"/>
+          </p:cNvPicPr>
+          <p:nvPr/>
+        </p:nvPicPr>
+        <p:blipFill>
+          <a:blip r:embed="rId1"/>
+          <a:stretch>
+            <a:fillRect/>
+          </a:stretch>
+        </p:blipFill>
+        <p:spPr>
+          <a:xfrm>
+            <a:off x="8153095" y="128016"/>
+            <a:ext cx="201168" cy="201168"/>
+          </a:xfrm>
+          <a:prstGeom prst="rect">
+            <a:avLst/>
+          </a:prstGeom>
+        </p:spPr>
+      </p:pic>
+      <p:sp>
+        <p:nvSpPr>
+          <p:cNvPr id="12" name="Text 9"/>
+          <p:cNvSpPr txBox="1"/>
+          <p:nvPr/>
+        </p:nvSpPr>
+        <p:spPr>
+          <a:xfrm>
+            <a:off x="8409127" y="91440"/>
+            <a:ext cx="3197352" cy="274320"/>
+          </a:xfrm>
+          <a:prstGeom prst="rect">
+            <a:avLst/>
+          </a:prstGeom>
+          <a:noFill/>
+          <a:ln/>
+        </p:spPr>
+        <p:txBody>
+          <a:bodyPr wrap="square" lIns="0" tIns="0" rIns="0" bIns="0" rtlCol="0" anchor="ctr"/>
+          <a:lstStyle/>
+          <a:p>
+            <a:pPr indent="0" marL="0">
+              <a:buNone/>
+            </a:pPr>
+            <a:r>
+              <a:rPr lang="en-US" sz="1100" b="1" dirty="0">
+                <a:solidFill>
+                  <a:srgbClr val="075985"/>
+                </a:solidFill>
+                <a:latin typeface="Calibri" pitchFamily="34" charset="0"/>
+                <a:ea typeface="Calibri" pitchFamily="34" charset="-122"/>
+                <a:cs typeface="Calibri" pitchFamily="34" charset="-120"/>
+              </a:rPr>
+              <a:t>UNDERSTAND NOW</a:t>
+            </a:r>
+            <a:pPr indent="0" marL="0">
+              <a:buNone/>
+            </a:pPr>
+            <a:r>
+              <a:rPr lang="en-US" sz="1100" dirty="0">
+                <a:solidFill>
+                  <a:srgbClr val="075985"/>
+                </a:solidFill>
+                <a:latin typeface="Calibri" pitchFamily="34" charset="0"/>
+                <a:ea typeface="Calibri" pitchFamily="34" charset="-122"/>
+                <a:cs typeface="Calibri" pitchFamily="34" charset="-120"/>
+              </a:rPr>
+              <a:t> · GPU and FPGA accelerators</a:t>
+            </a:r>
+            <a:endParaRPr lang="en-US" sz="1100" dirty="0"/>
+          </a:p>
+        </p:txBody>
+      </p:sp>
+      <p:sp>
+        <p:nvSpPr>
           <p:cNvPr id="25" name="Slide Number Placeholder 0"/>
           <p:cNvSpPr>
             <a:spLocks noGrp="1"/>
@@ -6471,6 +7537,133 @@
               <a:t>An FPGA development board: the large chip is the FPGA</a:t>
             </a:r>
             <a:endParaRPr lang="en-US" sz="1200" dirty="0"/>
+          </a:p>
+        </p:txBody>
+      </p:sp>
+      <p:sp>
+        <p:nvSpPr>
+          <p:cNvPr id="15" name="Shape 12"/>
+          <p:cNvSpPr/>
+          <p:nvPr/>
+        </p:nvSpPr>
+        <p:spPr>
+          <a:xfrm>
+            <a:off x="8025079" y="91440"/>
+            <a:ext cx="3617976" cy="274320"/>
+          </a:xfrm>
+          <a:prstGeom prst="rect">
+            <a:avLst/>
+          </a:prstGeom>
+          <a:solidFill>
+            <a:srgbClr val="E0F2FE"/>
+          </a:solidFill>
+          <a:ln w="12700">
+            <a:solidFill>
+              <a:srgbClr val="0369A1"/>
+            </a:solidFill>
+            <a:prstDash val="solid"/>
+          </a:ln>
+        </p:spPr>
+      </p:sp>
+      <p:sp>
+        <p:nvSpPr>
+          <p:cNvPr id="16" name="Shape 13"/>
+          <p:cNvSpPr/>
+          <p:nvPr/>
+        </p:nvSpPr>
+        <p:spPr>
+          <a:xfrm>
+            <a:off x="8025079" y="91440"/>
+            <a:ext cx="73152" cy="274320"/>
+          </a:xfrm>
+          <a:prstGeom prst="rect">
+            <a:avLst/>
+          </a:prstGeom>
+          <a:solidFill>
+            <a:srgbClr val="0369A1"/>
+          </a:solidFill>
+          <a:ln w="12700">
+            <a:solidFill>
+              <a:srgbClr val="0369A1"/>
+            </a:solidFill>
+            <a:prstDash val="solid"/>
+          </a:ln>
+        </p:spPr>
+      </p:sp>
+      <p:pic>
+        <p:nvPicPr>
+          <p:cNvPr id="17" name="Image 1" descr="preencoded.png">    </p:cNvPr>
+          <p:cNvPicPr>
+            <a:picLocks noChangeAspect="1"/>
+          </p:cNvPicPr>
+          <p:nvPr/>
+        </p:nvPicPr>
+        <p:blipFill>
+          <a:blip r:embed="rId2"/>
+          <a:stretch>
+            <a:fillRect/>
+          </a:stretch>
+        </p:blipFill>
+        <p:spPr>
+          <a:xfrm>
+            <a:off x="8153095" y="128016"/>
+            <a:ext cx="201168" cy="201168"/>
+          </a:xfrm>
+          <a:prstGeom prst="rect">
+            <a:avLst/>
+          </a:prstGeom>
+        </p:spPr>
+      </p:pic>
+      <p:sp>
+        <p:nvSpPr>
+          <p:cNvPr id="18" name="Text 14"/>
+          <p:cNvSpPr txBox="1"/>
+          <p:nvPr/>
+        </p:nvSpPr>
+        <p:spPr>
+          <a:xfrm>
+            <a:off x="8409127" y="91440"/>
+            <a:ext cx="3197352" cy="274320"/>
+          </a:xfrm>
+          <a:prstGeom prst="rect">
+            <a:avLst/>
+          </a:prstGeom>
+          <a:noFill/>
+          <a:ln/>
+        </p:spPr>
+        <p:txBody>
+          <a:bodyPr wrap="square" lIns="0" tIns="0" rIns="0" bIns="0" rtlCol="0" anchor="ctr"/>
+          <a:lstStyle/>
+          <a:p>
+            <a:pPr indent="0" marL="0">
+              <a:buNone/>
+            </a:pPr>
+            <a:r>
+              <a:rPr lang="en-US" sz="1100" b="1" dirty="0">
+                <a:solidFill>
+                  <a:srgbClr val="075985"/>
+                </a:solidFill>
+                <a:latin typeface="Calibri" pitchFamily="34" charset="0"/>
+                <a:ea typeface="Calibri" pitchFamily="34" charset="-122"/>
+                <a:cs typeface="Calibri" pitchFamily="34" charset="-120"/>
+              </a:rPr>
+              <a:t>UNDERSTAND NOW</a:t>
+            </a:r>
+            <a:pPr indent="0" marL="0">
+              <a:buNone/>
+            </a:pPr>
+            <a:r>
+              <a:rPr lang="en-US" sz="1100" dirty="0">
+                <a:solidFill>
+                  <a:srgbClr val="075985"/>
+                </a:solidFill>
+                <a:latin typeface="Calibri" pitchFamily="34" charset="0"/>
+                <a:ea typeface="Calibri" pitchFamily="34" charset="-122"/>
+                <a:cs typeface="Calibri" pitchFamily="34" charset="-120"/>
+              </a:rPr>
+              <a:t> · GPU and FPGA accelerators</a:t>
+            </a:r>
+            <a:endParaRPr lang="en-US" sz="1100" dirty="0"/>
           </a:p>
         </p:txBody>
       </p:sp>
@@ -9004,6 +10197,133 @@
           </a:graphicData>
         </a:graphic>
       </p:graphicFrame>
+      <p:sp>
+        <p:nvSpPr>
+          <p:cNvPr id="4" name="Shape 1"/>
+          <p:cNvSpPr/>
+          <p:nvPr/>
+        </p:nvSpPr>
+        <p:spPr>
+          <a:xfrm>
+            <a:off x="8025079" y="91440"/>
+            <a:ext cx="3617976" cy="274320"/>
+          </a:xfrm>
+          <a:prstGeom prst="rect">
+            <a:avLst/>
+          </a:prstGeom>
+          <a:solidFill>
+            <a:srgbClr val="E0F2FE"/>
+          </a:solidFill>
+          <a:ln w="12700">
+            <a:solidFill>
+              <a:srgbClr val="0369A1"/>
+            </a:solidFill>
+            <a:prstDash val="solid"/>
+          </a:ln>
+        </p:spPr>
+      </p:sp>
+      <p:sp>
+        <p:nvSpPr>
+          <p:cNvPr id="5" name="Shape 2"/>
+          <p:cNvSpPr/>
+          <p:nvPr/>
+        </p:nvSpPr>
+        <p:spPr>
+          <a:xfrm>
+            <a:off x="8025079" y="91440"/>
+            <a:ext cx="73152" cy="274320"/>
+          </a:xfrm>
+          <a:prstGeom prst="rect">
+            <a:avLst/>
+          </a:prstGeom>
+          <a:solidFill>
+            <a:srgbClr val="0369A1"/>
+          </a:solidFill>
+          <a:ln w="12700">
+            <a:solidFill>
+              <a:srgbClr val="0369A1"/>
+            </a:solidFill>
+            <a:prstDash val="solid"/>
+          </a:ln>
+        </p:spPr>
+      </p:sp>
+      <p:pic>
+        <p:nvPicPr>
+          <p:cNvPr id="6" name="Image 0" descr="preencoded.png">    </p:cNvPr>
+          <p:cNvPicPr>
+            <a:picLocks noChangeAspect="1"/>
+          </p:cNvPicPr>
+          <p:nvPr/>
+        </p:nvPicPr>
+        <p:blipFill>
+          <a:blip r:embed="rId1"/>
+          <a:stretch>
+            <a:fillRect/>
+          </a:stretch>
+        </p:blipFill>
+        <p:spPr>
+          <a:xfrm>
+            <a:off x="8153095" y="128016"/>
+            <a:ext cx="201168" cy="201168"/>
+          </a:xfrm>
+          <a:prstGeom prst="rect">
+            <a:avLst/>
+          </a:prstGeom>
+        </p:spPr>
+      </p:pic>
+      <p:sp>
+        <p:nvSpPr>
+          <p:cNvPr id="7" name="Text 3"/>
+          <p:cNvSpPr txBox="1"/>
+          <p:nvPr/>
+        </p:nvSpPr>
+        <p:spPr>
+          <a:xfrm>
+            <a:off x="8409127" y="91440"/>
+            <a:ext cx="3197352" cy="274320"/>
+          </a:xfrm>
+          <a:prstGeom prst="rect">
+            <a:avLst/>
+          </a:prstGeom>
+          <a:noFill/>
+          <a:ln/>
+        </p:spPr>
+        <p:txBody>
+          <a:bodyPr wrap="square" lIns="0" tIns="0" rIns="0" bIns="0" rtlCol="0" anchor="ctr"/>
+          <a:lstStyle/>
+          <a:p>
+            <a:pPr indent="0" marL="0">
+              <a:buNone/>
+            </a:pPr>
+            <a:r>
+              <a:rPr lang="en-US" sz="1100" b="1" dirty="0">
+                <a:solidFill>
+                  <a:srgbClr val="075985"/>
+                </a:solidFill>
+                <a:latin typeface="Calibri" pitchFamily="34" charset="0"/>
+                <a:ea typeface="Calibri" pitchFamily="34" charset="-122"/>
+                <a:cs typeface="Calibri" pitchFamily="34" charset="-120"/>
+              </a:rPr>
+              <a:t>UNDERSTAND NOW</a:t>
+            </a:r>
+            <a:pPr indent="0" marL="0">
+              <a:buNone/>
+            </a:pPr>
+            <a:r>
+              <a:rPr lang="en-US" sz="1100" dirty="0">
+                <a:solidFill>
+                  <a:srgbClr val="075985"/>
+                </a:solidFill>
+                <a:latin typeface="Calibri" pitchFamily="34" charset="0"/>
+                <a:ea typeface="Calibri" pitchFamily="34" charset="-122"/>
+                <a:cs typeface="Calibri" pitchFamily="34" charset="-120"/>
+              </a:rPr>
+              <a:t> · GPU and FPGA accelerators</a:t>
+            </a:r>
+            <a:endParaRPr lang="en-US" sz="1100" dirty="0"/>
+          </a:p>
+        </p:txBody>
+      </p:sp>
       <p:sp>
         <p:nvSpPr>
           <p:cNvPr id="25" name="Slide Number Placeholder 0"/>
@@ -15339,6 +16659,133 @@
       </p:sp>
       <p:sp>
         <p:nvSpPr>
+          <p:cNvPr id="14" name="Shape 12"/>
+          <p:cNvSpPr/>
+          <p:nvPr/>
+        </p:nvSpPr>
+        <p:spPr>
+          <a:xfrm>
+            <a:off x="8090738" y="91440"/>
+            <a:ext cx="3552317" cy="274320"/>
+          </a:xfrm>
+          <a:prstGeom prst="rect">
+            <a:avLst/>
+          </a:prstGeom>
+          <a:solidFill>
+            <a:srgbClr val="E0F2FE"/>
+          </a:solidFill>
+          <a:ln w="12700">
+            <a:solidFill>
+              <a:srgbClr val="0369A1"/>
+            </a:solidFill>
+            <a:prstDash val="solid"/>
+          </a:ln>
+        </p:spPr>
+      </p:sp>
+      <p:sp>
+        <p:nvSpPr>
+          <p:cNvPr id="15" name="Shape 13"/>
+          <p:cNvSpPr/>
+          <p:nvPr/>
+        </p:nvSpPr>
+        <p:spPr>
+          <a:xfrm>
+            <a:off x="8090738" y="91440"/>
+            <a:ext cx="73152" cy="274320"/>
+          </a:xfrm>
+          <a:prstGeom prst="rect">
+            <a:avLst/>
+          </a:prstGeom>
+          <a:solidFill>
+            <a:srgbClr val="0369A1"/>
+          </a:solidFill>
+          <a:ln w="12700">
+            <a:solidFill>
+              <a:srgbClr val="0369A1"/>
+            </a:solidFill>
+            <a:prstDash val="solid"/>
+          </a:ln>
+        </p:spPr>
+      </p:sp>
+      <p:pic>
+        <p:nvPicPr>
+          <p:cNvPr id="16" name="Image 0" descr="preencoded.png">    </p:cNvPr>
+          <p:cNvPicPr>
+            <a:picLocks noChangeAspect="1"/>
+          </p:cNvPicPr>
+          <p:nvPr/>
+        </p:nvPicPr>
+        <p:blipFill>
+          <a:blip r:embed="rId1"/>
+          <a:stretch>
+            <a:fillRect/>
+          </a:stretch>
+        </p:blipFill>
+        <p:spPr>
+          <a:xfrm>
+            <a:off x="8218754" y="128016"/>
+            <a:ext cx="201168" cy="201168"/>
+          </a:xfrm>
+          <a:prstGeom prst="rect">
+            <a:avLst/>
+          </a:prstGeom>
+        </p:spPr>
+      </p:pic>
+      <p:sp>
+        <p:nvSpPr>
+          <p:cNvPr id="17" name="Text 14"/>
+          <p:cNvSpPr txBox="1"/>
+          <p:nvPr/>
+        </p:nvSpPr>
+        <p:spPr>
+          <a:xfrm>
+            <a:off x="8474786" y="91440"/>
+            <a:ext cx="3131693" cy="274320"/>
+          </a:xfrm>
+          <a:prstGeom prst="rect">
+            <a:avLst/>
+          </a:prstGeom>
+          <a:noFill/>
+          <a:ln/>
+        </p:spPr>
+        <p:txBody>
+          <a:bodyPr wrap="square" lIns="0" tIns="0" rIns="0" bIns="0" rtlCol="0" anchor="ctr"/>
+          <a:lstStyle/>
+          <a:p>
+            <a:pPr indent="0" marL="0">
+              <a:buNone/>
+            </a:pPr>
+            <a:r>
+              <a:rPr lang="en-US" sz="1100" b="1" dirty="0">
+                <a:solidFill>
+                  <a:srgbClr val="075985"/>
+                </a:solidFill>
+                <a:latin typeface="Calibri" pitchFamily="34" charset="0"/>
+                <a:ea typeface="Calibri" pitchFamily="34" charset="-122"/>
+                <a:cs typeface="Calibri" pitchFamily="34" charset="-120"/>
+              </a:rPr>
+              <a:t>UNDERSTAND NOW</a:t>
+            </a:r>
+            <a:pPr indent="0" marL="0">
+              <a:buNone/>
+            </a:pPr>
+            <a:r>
+              <a:rPr lang="en-US" sz="1100" dirty="0">
+                <a:solidFill>
+                  <a:srgbClr val="075985"/>
+                </a:solidFill>
+                <a:latin typeface="Calibri" pitchFamily="34" charset="0"/>
+                <a:ea typeface="Calibri" pitchFamily="34" charset="-122"/>
+                <a:cs typeface="Calibri" pitchFamily="34" charset="-120"/>
+              </a:rPr>
+              <a:t> · the performance equation</a:t>
+            </a:r>
+            <a:endParaRPr lang="en-US" sz="1100" dirty="0"/>
+          </a:p>
+        </p:txBody>
+      </p:sp>
+      <p:sp>
+        <p:nvSpPr>
           <p:cNvPr id="25" name="Slide Number Placeholder 0"/>
           <p:cNvSpPr>
             <a:spLocks noGrp="1"/>
@@ -15888,6 +17335,133 @@
               <a:t>the end of the free lunch: clocks stop at a few gigahertz, cores multiply</a:t>
             </a:r>
             <a:endParaRPr lang="en-US" sz="1900" dirty="0"/>
+          </a:p>
+        </p:txBody>
+      </p:sp>
+      <p:sp>
+        <p:nvSpPr>
+          <p:cNvPr id="16" name="Shape 14"/>
+          <p:cNvSpPr/>
+          <p:nvPr/>
+        </p:nvSpPr>
+        <p:spPr>
+          <a:xfrm>
+            <a:off x="8090738" y="91440"/>
+            <a:ext cx="3552317" cy="274320"/>
+          </a:xfrm>
+          <a:prstGeom prst="rect">
+            <a:avLst/>
+          </a:prstGeom>
+          <a:solidFill>
+            <a:srgbClr val="E0F2FE"/>
+          </a:solidFill>
+          <a:ln w="12700">
+            <a:solidFill>
+              <a:srgbClr val="0369A1"/>
+            </a:solidFill>
+            <a:prstDash val="solid"/>
+          </a:ln>
+        </p:spPr>
+      </p:sp>
+      <p:sp>
+        <p:nvSpPr>
+          <p:cNvPr id="17" name="Shape 15"/>
+          <p:cNvSpPr/>
+          <p:nvPr/>
+        </p:nvSpPr>
+        <p:spPr>
+          <a:xfrm>
+            <a:off x="8090738" y="91440"/>
+            <a:ext cx="73152" cy="274320"/>
+          </a:xfrm>
+          <a:prstGeom prst="rect">
+            <a:avLst/>
+          </a:prstGeom>
+          <a:solidFill>
+            <a:srgbClr val="0369A1"/>
+          </a:solidFill>
+          <a:ln w="12700">
+            <a:solidFill>
+              <a:srgbClr val="0369A1"/>
+            </a:solidFill>
+            <a:prstDash val="solid"/>
+          </a:ln>
+        </p:spPr>
+      </p:sp>
+      <p:pic>
+        <p:nvPicPr>
+          <p:cNvPr id="18" name="Image 0" descr="preencoded.png">    </p:cNvPr>
+          <p:cNvPicPr>
+            <a:picLocks noChangeAspect="1"/>
+          </p:cNvPicPr>
+          <p:nvPr/>
+        </p:nvPicPr>
+        <p:blipFill>
+          <a:blip r:embed="rId1"/>
+          <a:stretch>
+            <a:fillRect/>
+          </a:stretch>
+        </p:blipFill>
+        <p:spPr>
+          <a:xfrm>
+            <a:off x="8218754" y="128016"/>
+            <a:ext cx="201168" cy="201168"/>
+          </a:xfrm>
+          <a:prstGeom prst="rect">
+            <a:avLst/>
+          </a:prstGeom>
+        </p:spPr>
+      </p:pic>
+      <p:sp>
+        <p:nvSpPr>
+          <p:cNvPr id="19" name="Text 16"/>
+          <p:cNvSpPr txBox="1"/>
+          <p:nvPr/>
+        </p:nvSpPr>
+        <p:spPr>
+          <a:xfrm>
+            <a:off x="8474786" y="91440"/>
+            <a:ext cx="3131693" cy="274320"/>
+          </a:xfrm>
+          <a:prstGeom prst="rect">
+            <a:avLst/>
+          </a:prstGeom>
+          <a:noFill/>
+          <a:ln/>
+        </p:spPr>
+        <p:txBody>
+          <a:bodyPr wrap="square" lIns="0" tIns="0" rIns="0" bIns="0" rtlCol="0" anchor="ctr"/>
+          <a:lstStyle/>
+          <a:p>
+            <a:pPr indent="0" marL="0">
+              <a:buNone/>
+            </a:pPr>
+            <a:r>
+              <a:rPr lang="en-US" sz="1100" b="1" dirty="0">
+                <a:solidFill>
+                  <a:srgbClr val="075985"/>
+                </a:solidFill>
+                <a:latin typeface="Calibri" pitchFamily="34" charset="0"/>
+                <a:ea typeface="Calibri" pitchFamily="34" charset="-122"/>
+                <a:cs typeface="Calibri" pitchFamily="34" charset="-120"/>
+              </a:rPr>
+              <a:t>UNDERSTAND NOW</a:t>
+            </a:r>
+            <a:pPr indent="0" marL="0">
+              <a:buNone/>
+            </a:pPr>
+            <a:r>
+              <a:rPr lang="en-US" sz="1100" dirty="0">
+                <a:solidFill>
+                  <a:srgbClr val="075985"/>
+                </a:solidFill>
+                <a:latin typeface="Calibri" pitchFamily="34" charset="0"/>
+                <a:ea typeface="Calibri" pitchFamily="34" charset="-122"/>
+                <a:cs typeface="Calibri" pitchFamily="34" charset="-120"/>
+              </a:rPr>
+              <a:t> · the performance equation</a:t>
+            </a:r>
+            <a:endParaRPr lang="en-US" sz="1100" dirty="0"/>
           </a:p>
         </p:txBody>
       </p:sp>
@@ -17409,6 +18983,133 @@
       </p:graphicFrame>
       <p:sp>
         <p:nvSpPr>
+          <p:cNvPr id="4" name="Shape 1"/>
+          <p:cNvSpPr/>
+          <p:nvPr/>
+        </p:nvSpPr>
+        <p:spPr>
+          <a:xfrm>
+            <a:off x="8222056" y="91440"/>
+            <a:ext cx="3420999" cy="274320"/>
+          </a:xfrm>
+          <a:prstGeom prst="rect">
+            <a:avLst/>
+          </a:prstGeom>
+          <a:solidFill>
+            <a:srgbClr val="E0F2FE"/>
+          </a:solidFill>
+          <a:ln w="12700">
+            <a:solidFill>
+              <a:srgbClr val="0369A1"/>
+            </a:solidFill>
+            <a:prstDash val="solid"/>
+          </a:ln>
+        </p:spPr>
+      </p:sp>
+      <p:sp>
+        <p:nvSpPr>
+          <p:cNvPr id="5" name="Shape 2"/>
+          <p:cNvSpPr/>
+          <p:nvPr/>
+        </p:nvSpPr>
+        <p:spPr>
+          <a:xfrm>
+            <a:off x="8222056" y="91440"/>
+            <a:ext cx="73152" cy="274320"/>
+          </a:xfrm>
+          <a:prstGeom prst="rect">
+            <a:avLst/>
+          </a:prstGeom>
+          <a:solidFill>
+            <a:srgbClr val="0369A1"/>
+          </a:solidFill>
+          <a:ln w="12700">
+            <a:solidFill>
+              <a:srgbClr val="0369A1"/>
+            </a:solidFill>
+            <a:prstDash val="solid"/>
+          </a:ln>
+        </p:spPr>
+      </p:sp>
+      <p:pic>
+        <p:nvPicPr>
+          <p:cNvPr id="6" name="Image 0" descr="preencoded.png">    </p:cNvPr>
+          <p:cNvPicPr>
+            <a:picLocks noChangeAspect="1"/>
+          </p:cNvPicPr>
+          <p:nvPr/>
+        </p:nvPicPr>
+        <p:blipFill>
+          <a:blip r:embed="rId1"/>
+          <a:stretch>
+            <a:fillRect/>
+          </a:stretch>
+        </p:blipFill>
+        <p:spPr>
+          <a:xfrm>
+            <a:off x="8350072" y="128016"/>
+            <a:ext cx="201168" cy="201168"/>
+          </a:xfrm>
+          <a:prstGeom prst="rect">
+            <a:avLst/>
+          </a:prstGeom>
+        </p:spPr>
+      </p:pic>
+      <p:sp>
+        <p:nvSpPr>
+          <p:cNvPr id="7" name="Text 3"/>
+          <p:cNvSpPr txBox="1"/>
+          <p:nvPr/>
+        </p:nvSpPr>
+        <p:spPr>
+          <a:xfrm>
+            <a:off x="8606104" y="91440"/>
+            <a:ext cx="3000375" cy="274320"/>
+          </a:xfrm>
+          <a:prstGeom prst="rect">
+            <a:avLst/>
+          </a:prstGeom>
+          <a:noFill/>
+          <a:ln/>
+        </p:spPr>
+        <p:txBody>
+          <a:bodyPr wrap="square" lIns="0" tIns="0" rIns="0" bIns="0" rtlCol="0" anchor="ctr"/>
+          <a:lstStyle/>
+          <a:p>
+            <a:pPr indent="0" marL="0">
+              <a:buNone/>
+            </a:pPr>
+            <a:r>
+              <a:rPr lang="en-US" sz="1100" b="1" dirty="0">
+                <a:solidFill>
+                  <a:srgbClr val="075985"/>
+                </a:solidFill>
+                <a:latin typeface="Calibri" pitchFamily="34" charset="0"/>
+                <a:ea typeface="Calibri" pitchFamily="34" charset="-122"/>
+                <a:cs typeface="Calibri" pitchFamily="34" charset="-120"/>
+              </a:rPr>
+              <a:t>UNDERSTAND NOW</a:t>
+            </a:r>
+            <a:pPr indent="0" marL="0">
+              <a:buNone/>
+            </a:pPr>
+            <a:r>
+              <a:rPr lang="en-US" sz="1100" dirty="0">
+                <a:solidFill>
+                  <a:srgbClr val="075985"/>
+                </a:solidFill>
+                <a:latin typeface="Calibri" pitchFamily="34" charset="0"/>
+                <a:ea typeface="Calibri" pitchFamily="34" charset="-122"/>
+                <a:cs typeface="Calibri" pitchFamily="34" charset="-120"/>
+              </a:rPr>
+              <a:t> · superscalar processors</a:t>
+            </a:r>
+            <a:endParaRPr lang="en-US" sz="1100" dirty="0"/>
+          </a:p>
+        </p:txBody>
+      </p:sp>
+      <p:sp>
+        <p:nvSpPr>
           <p:cNvPr id="25" name="Slide Number Placeholder 0"/>
           <p:cNvSpPr>
             <a:spLocks noGrp="1"/>
@@ -18206,6 +19907,133 @@
       </p:sp>
       <p:sp>
         <p:nvSpPr>
+          <p:cNvPr id="22" name="Shape 20"/>
+          <p:cNvSpPr/>
+          <p:nvPr/>
+        </p:nvSpPr>
+        <p:spPr>
+          <a:xfrm>
+            <a:off x="8222056" y="91440"/>
+            <a:ext cx="3420999" cy="274320"/>
+          </a:xfrm>
+          <a:prstGeom prst="rect">
+            <a:avLst/>
+          </a:prstGeom>
+          <a:solidFill>
+            <a:srgbClr val="E0F2FE"/>
+          </a:solidFill>
+          <a:ln w="12700">
+            <a:solidFill>
+              <a:srgbClr val="0369A1"/>
+            </a:solidFill>
+            <a:prstDash val="solid"/>
+          </a:ln>
+        </p:spPr>
+      </p:sp>
+      <p:sp>
+        <p:nvSpPr>
+          <p:cNvPr id="23" name="Shape 21"/>
+          <p:cNvSpPr/>
+          <p:nvPr/>
+        </p:nvSpPr>
+        <p:spPr>
+          <a:xfrm>
+            <a:off x="8222056" y="91440"/>
+            <a:ext cx="73152" cy="274320"/>
+          </a:xfrm>
+          <a:prstGeom prst="rect">
+            <a:avLst/>
+          </a:prstGeom>
+          <a:solidFill>
+            <a:srgbClr val="0369A1"/>
+          </a:solidFill>
+          <a:ln w="12700">
+            <a:solidFill>
+              <a:srgbClr val="0369A1"/>
+            </a:solidFill>
+            <a:prstDash val="solid"/>
+          </a:ln>
+        </p:spPr>
+      </p:sp>
+      <p:pic>
+        <p:nvPicPr>
+          <p:cNvPr id="24" name="Image 0" descr="preencoded.png">    </p:cNvPr>
+          <p:cNvPicPr>
+            <a:picLocks noChangeAspect="1"/>
+          </p:cNvPicPr>
+          <p:nvPr/>
+        </p:nvPicPr>
+        <p:blipFill>
+          <a:blip r:embed="rId1"/>
+          <a:stretch>
+            <a:fillRect/>
+          </a:stretch>
+        </p:blipFill>
+        <p:spPr>
+          <a:xfrm>
+            <a:off x="8350072" y="128016"/>
+            <a:ext cx="201168" cy="201168"/>
+          </a:xfrm>
+          <a:prstGeom prst="rect">
+            <a:avLst/>
+          </a:prstGeom>
+        </p:spPr>
+      </p:pic>
+      <p:sp>
+        <p:nvSpPr>
+          <p:cNvPr id="25" name="Text 22"/>
+          <p:cNvSpPr txBox="1"/>
+          <p:nvPr/>
+        </p:nvSpPr>
+        <p:spPr>
+          <a:xfrm>
+            <a:off x="8606104" y="91440"/>
+            <a:ext cx="3000375" cy="274320"/>
+          </a:xfrm>
+          <a:prstGeom prst="rect">
+            <a:avLst/>
+          </a:prstGeom>
+          <a:noFill/>
+          <a:ln/>
+        </p:spPr>
+        <p:txBody>
+          <a:bodyPr wrap="square" lIns="0" tIns="0" rIns="0" bIns="0" rtlCol="0" anchor="ctr"/>
+          <a:lstStyle/>
+          <a:p>
+            <a:pPr indent="0" marL="0">
+              <a:buNone/>
+            </a:pPr>
+            <a:r>
+              <a:rPr lang="en-US" sz="1100" b="1" dirty="0">
+                <a:solidFill>
+                  <a:srgbClr val="075985"/>
+                </a:solidFill>
+                <a:latin typeface="Calibri" pitchFamily="34" charset="0"/>
+                <a:ea typeface="Calibri" pitchFamily="34" charset="-122"/>
+                <a:cs typeface="Calibri" pitchFamily="34" charset="-120"/>
+              </a:rPr>
+              <a:t>UNDERSTAND NOW</a:t>
+            </a:r>
+            <a:pPr indent="0" marL="0">
+              <a:buNone/>
+            </a:pPr>
+            <a:r>
+              <a:rPr lang="en-US" sz="1100" dirty="0">
+                <a:solidFill>
+                  <a:srgbClr val="075985"/>
+                </a:solidFill>
+                <a:latin typeface="Calibri" pitchFamily="34" charset="0"/>
+                <a:ea typeface="Calibri" pitchFamily="34" charset="-122"/>
+                <a:cs typeface="Calibri" pitchFamily="34" charset="-120"/>
+              </a:rPr>
+              <a:t> · superscalar processors</a:t>
+            </a:r>
+            <a:endParaRPr lang="en-US" sz="1100" dirty="0"/>
+          </a:p>
+        </p:txBody>
+      </p:sp>
+      <p:sp>
+        <p:nvSpPr>
           <p:cNvPr id="25" name="Slide Number Placeholder 0"/>
           <p:cNvSpPr>
             <a:spLocks noGrp="1"/>
@@ -18755,6 +20583,133 @@
               <a:t>bnez t1, 1b is taken 959 times and not taken once: a predictor learns it in the first turns</a:t>
             </a:r>
             <a:endParaRPr lang="en-US" sz="1900" dirty="0"/>
+          </a:p>
+        </p:txBody>
+      </p:sp>
+      <p:sp>
+        <p:nvSpPr>
+          <p:cNvPr id="16" name="Shape 14"/>
+          <p:cNvSpPr/>
+          <p:nvPr/>
+        </p:nvSpPr>
+        <p:spPr>
+          <a:xfrm>
+            <a:off x="8222056" y="91440"/>
+            <a:ext cx="3420999" cy="274320"/>
+          </a:xfrm>
+          <a:prstGeom prst="rect">
+            <a:avLst/>
+          </a:prstGeom>
+          <a:solidFill>
+            <a:srgbClr val="E0F2FE"/>
+          </a:solidFill>
+          <a:ln w="12700">
+            <a:solidFill>
+              <a:srgbClr val="0369A1"/>
+            </a:solidFill>
+            <a:prstDash val="solid"/>
+          </a:ln>
+        </p:spPr>
+      </p:sp>
+      <p:sp>
+        <p:nvSpPr>
+          <p:cNvPr id="17" name="Shape 15"/>
+          <p:cNvSpPr/>
+          <p:nvPr/>
+        </p:nvSpPr>
+        <p:spPr>
+          <a:xfrm>
+            <a:off x="8222056" y="91440"/>
+            <a:ext cx="73152" cy="274320"/>
+          </a:xfrm>
+          <a:prstGeom prst="rect">
+            <a:avLst/>
+          </a:prstGeom>
+          <a:solidFill>
+            <a:srgbClr val="0369A1"/>
+          </a:solidFill>
+          <a:ln w="12700">
+            <a:solidFill>
+              <a:srgbClr val="0369A1"/>
+            </a:solidFill>
+            <a:prstDash val="solid"/>
+          </a:ln>
+        </p:spPr>
+      </p:sp>
+      <p:pic>
+        <p:nvPicPr>
+          <p:cNvPr id="18" name="Image 0" descr="preencoded.png">    </p:cNvPr>
+          <p:cNvPicPr>
+            <a:picLocks noChangeAspect="1"/>
+          </p:cNvPicPr>
+          <p:nvPr/>
+        </p:nvPicPr>
+        <p:blipFill>
+          <a:blip r:embed="rId1"/>
+          <a:stretch>
+            <a:fillRect/>
+          </a:stretch>
+        </p:blipFill>
+        <p:spPr>
+          <a:xfrm>
+            <a:off x="8350072" y="128016"/>
+            <a:ext cx="201168" cy="201168"/>
+          </a:xfrm>
+          <a:prstGeom prst="rect">
+            <a:avLst/>
+          </a:prstGeom>
+        </p:spPr>
+      </p:pic>
+      <p:sp>
+        <p:nvSpPr>
+          <p:cNvPr id="19" name="Text 16"/>
+          <p:cNvSpPr txBox="1"/>
+          <p:nvPr/>
+        </p:nvSpPr>
+        <p:spPr>
+          <a:xfrm>
+            <a:off x="8606104" y="91440"/>
+            <a:ext cx="3000375" cy="274320"/>
+          </a:xfrm>
+          <a:prstGeom prst="rect">
+            <a:avLst/>
+          </a:prstGeom>
+          <a:noFill/>
+          <a:ln/>
+        </p:spPr>
+        <p:txBody>
+          <a:bodyPr wrap="square" lIns="0" tIns="0" rIns="0" bIns="0" rtlCol="0" anchor="ctr"/>
+          <a:lstStyle/>
+          <a:p>
+            <a:pPr indent="0" marL="0">
+              <a:buNone/>
+            </a:pPr>
+            <a:r>
+              <a:rPr lang="en-US" sz="1100" b="1" dirty="0">
+                <a:solidFill>
+                  <a:srgbClr val="075985"/>
+                </a:solidFill>
+                <a:latin typeface="Calibri" pitchFamily="34" charset="0"/>
+                <a:ea typeface="Calibri" pitchFamily="34" charset="-122"/>
+                <a:cs typeface="Calibri" pitchFamily="34" charset="-120"/>
+              </a:rPr>
+              <a:t>UNDERSTAND NOW</a:t>
+            </a:r>
+            <a:pPr indent="0" marL="0">
+              <a:buNone/>
+            </a:pPr>
+            <a:r>
+              <a:rPr lang="en-US" sz="1100" dirty="0">
+                <a:solidFill>
+                  <a:srgbClr val="075985"/>
+                </a:solidFill>
+                <a:latin typeface="Calibri" pitchFamily="34" charset="0"/>
+                <a:ea typeface="Calibri" pitchFamily="34" charset="-122"/>
+                <a:cs typeface="Calibri" pitchFamily="34" charset="-120"/>
+              </a:rPr>
+              <a:t> · superscalar processors</a:t>
+            </a:r>
+            <a:endParaRPr lang="en-US" sz="1100" dirty="0"/>
           </a:p>
         </p:txBody>
       </p:sp>
@@ -20347,6 +22302,133 @@
       </p:graphicFrame>
       <p:sp>
         <p:nvSpPr>
+          <p:cNvPr id="4" name="Shape 1"/>
+          <p:cNvSpPr/>
+          <p:nvPr/>
+        </p:nvSpPr>
+        <p:spPr>
+          <a:xfrm>
+            <a:off x="8222056" y="91440"/>
+            <a:ext cx="3420999" cy="274320"/>
+          </a:xfrm>
+          <a:prstGeom prst="rect">
+            <a:avLst/>
+          </a:prstGeom>
+          <a:solidFill>
+            <a:srgbClr val="E0F2FE"/>
+          </a:solidFill>
+          <a:ln w="12700">
+            <a:solidFill>
+              <a:srgbClr val="0369A1"/>
+            </a:solidFill>
+            <a:prstDash val="solid"/>
+          </a:ln>
+        </p:spPr>
+      </p:sp>
+      <p:sp>
+        <p:nvSpPr>
+          <p:cNvPr id="5" name="Shape 2"/>
+          <p:cNvSpPr/>
+          <p:nvPr/>
+        </p:nvSpPr>
+        <p:spPr>
+          <a:xfrm>
+            <a:off x="8222056" y="91440"/>
+            <a:ext cx="73152" cy="274320"/>
+          </a:xfrm>
+          <a:prstGeom prst="rect">
+            <a:avLst/>
+          </a:prstGeom>
+          <a:solidFill>
+            <a:srgbClr val="0369A1"/>
+          </a:solidFill>
+          <a:ln w="12700">
+            <a:solidFill>
+              <a:srgbClr val="0369A1"/>
+            </a:solidFill>
+            <a:prstDash val="solid"/>
+          </a:ln>
+        </p:spPr>
+      </p:sp>
+      <p:pic>
+        <p:nvPicPr>
+          <p:cNvPr id="6" name="Image 0" descr="preencoded.png">    </p:cNvPr>
+          <p:cNvPicPr>
+            <a:picLocks noChangeAspect="1"/>
+          </p:cNvPicPr>
+          <p:nvPr/>
+        </p:nvPicPr>
+        <p:blipFill>
+          <a:blip r:embed="rId1"/>
+          <a:stretch>
+            <a:fillRect/>
+          </a:stretch>
+        </p:blipFill>
+        <p:spPr>
+          <a:xfrm>
+            <a:off x="8350072" y="128016"/>
+            <a:ext cx="201168" cy="201168"/>
+          </a:xfrm>
+          <a:prstGeom prst="rect">
+            <a:avLst/>
+          </a:prstGeom>
+        </p:spPr>
+      </p:pic>
+      <p:sp>
+        <p:nvSpPr>
+          <p:cNvPr id="7" name="Text 3"/>
+          <p:cNvSpPr txBox="1"/>
+          <p:nvPr/>
+        </p:nvSpPr>
+        <p:spPr>
+          <a:xfrm>
+            <a:off x="8606104" y="91440"/>
+            <a:ext cx="3000375" cy="274320"/>
+          </a:xfrm>
+          <a:prstGeom prst="rect">
+            <a:avLst/>
+          </a:prstGeom>
+          <a:noFill/>
+          <a:ln/>
+        </p:spPr>
+        <p:txBody>
+          <a:bodyPr wrap="square" lIns="0" tIns="0" rIns="0" bIns="0" rtlCol="0" anchor="ctr"/>
+          <a:lstStyle/>
+          <a:p>
+            <a:pPr indent="0" marL="0">
+              <a:buNone/>
+            </a:pPr>
+            <a:r>
+              <a:rPr lang="en-US" sz="1100" b="1" dirty="0">
+                <a:solidFill>
+                  <a:srgbClr val="075985"/>
+                </a:solidFill>
+                <a:latin typeface="Calibri" pitchFamily="34" charset="0"/>
+                <a:ea typeface="Calibri" pitchFamily="34" charset="-122"/>
+                <a:cs typeface="Calibri" pitchFamily="34" charset="-120"/>
+              </a:rPr>
+              <a:t>UNDERSTAND NOW</a:t>
+            </a:r>
+            <a:pPr indent="0" marL="0">
+              <a:buNone/>
+            </a:pPr>
+            <a:r>
+              <a:rPr lang="en-US" sz="1100" dirty="0">
+                <a:solidFill>
+                  <a:srgbClr val="075985"/>
+                </a:solidFill>
+                <a:latin typeface="Calibri" pitchFamily="34" charset="0"/>
+                <a:ea typeface="Calibri" pitchFamily="34" charset="-122"/>
+                <a:cs typeface="Calibri" pitchFamily="34" charset="-120"/>
+              </a:rPr>
+              <a:t> · superscalar processors</a:t>
+            </a:r>
+            <a:endParaRPr lang="en-US" sz="1100" dirty="0"/>
+          </a:p>
+        </p:txBody>
+      </p:sp>
+      <p:sp>
+        <p:nvSpPr>
           <p:cNvPr id="25" name="Slide Number Placeholder 0"/>
           <p:cNvSpPr>
             <a:spLocks noGrp="1"/>
@@ -20762,6 +22844,133 @@
               <a:t>This is why an instruction set learned once is knowledge that lasts</a:t>
             </a:r>
             <a:endParaRPr lang="en-US" sz="2400" dirty="0"/>
+          </a:p>
+        </p:txBody>
+      </p:sp>
+      <p:sp>
+        <p:nvSpPr>
+          <p:cNvPr id="12" name="Shape 10"/>
+          <p:cNvSpPr/>
+          <p:nvPr/>
+        </p:nvSpPr>
+        <p:spPr>
+          <a:xfrm>
+            <a:off x="8222056" y="91440"/>
+            <a:ext cx="3420999" cy="274320"/>
+          </a:xfrm>
+          <a:prstGeom prst="rect">
+            <a:avLst/>
+          </a:prstGeom>
+          <a:solidFill>
+            <a:srgbClr val="E0F2FE"/>
+          </a:solidFill>
+          <a:ln w="12700">
+            <a:solidFill>
+              <a:srgbClr val="0369A1"/>
+            </a:solidFill>
+            <a:prstDash val="solid"/>
+          </a:ln>
+        </p:spPr>
+      </p:sp>
+      <p:sp>
+        <p:nvSpPr>
+          <p:cNvPr id="13" name="Shape 11"/>
+          <p:cNvSpPr/>
+          <p:nvPr/>
+        </p:nvSpPr>
+        <p:spPr>
+          <a:xfrm>
+            <a:off x="8222056" y="91440"/>
+            <a:ext cx="73152" cy="274320"/>
+          </a:xfrm>
+          <a:prstGeom prst="rect">
+            <a:avLst/>
+          </a:prstGeom>
+          <a:solidFill>
+            <a:srgbClr val="0369A1"/>
+          </a:solidFill>
+          <a:ln w="12700">
+            <a:solidFill>
+              <a:srgbClr val="0369A1"/>
+            </a:solidFill>
+            <a:prstDash val="solid"/>
+          </a:ln>
+        </p:spPr>
+      </p:sp>
+      <p:pic>
+        <p:nvPicPr>
+          <p:cNvPr id="14" name="Image 0" descr="preencoded.png">    </p:cNvPr>
+          <p:cNvPicPr>
+            <a:picLocks noChangeAspect="1"/>
+          </p:cNvPicPr>
+          <p:nvPr/>
+        </p:nvPicPr>
+        <p:blipFill>
+          <a:blip r:embed="rId1"/>
+          <a:stretch>
+            <a:fillRect/>
+          </a:stretch>
+        </p:blipFill>
+        <p:spPr>
+          <a:xfrm>
+            <a:off x="8350072" y="128016"/>
+            <a:ext cx="201168" cy="201168"/>
+          </a:xfrm>
+          <a:prstGeom prst="rect">
+            <a:avLst/>
+          </a:prstGeom>
+        </p:spPr>
+      </p:pic>
+      <p:sp>
+        <p:nvSpPr>
+          <p:cNvPr id="15" name="Text 12"/>
+          <p:cNvSpPr txBox="1"/>
+          <p:nvPr/>
+        </p:nvSpPr>
+        <p:spPr>
+          <a:xfrm>
+            <a:off x="8606104" y="91440"/>
+            <a:ext cx="3000375" cy="274320"/>
+          </a:xfrm>
+          <a:prstGeom prst="rect">
+            <a:avLst/>
+          </a:prstGeom>
+          <a:noFill/>
+          <a:ln/>
+        </p:spPr>
+        <p:txBody>
+          <a:bodyPr wrap="square" lIns="0" tIns="0" rIns="0" bIns="0" rtlCol="0" anchor="ctr"/>
+          <a:lstStyle/>
+          <a:p>
+            <a:pPr indent="0" marL="0">
+              <a:buNone/>
+            </a:pPr>
+            <a:r>
+              <a:rPr lang="en-US" sz="1100" b="1" dirty="0">
+                <a:solidFill>
+                  <a:srgbClr val="075985"/>
+                </a:solidFill>
+                <a:latin typeface="Calibri" pitchFamily="34" charset="0"/>
+                <a:ea typeface="Calibri" pitchFamily="34" charset="-122"/>
+                <a:cs typeface="Calibri" pitchFamily="34" charset="-120"/>
+              </a:rPr>
+              <a:t>UNDERSTAND NOW</a:t>
+            </a:r>
+            <a:pPr indent="0" marL="0">
+              <a:buNone/>
+            </a:pPr>
+            <a:r>
+              <a:rPr lang="en-US" sz="1100" dirty="0">
+                <a:solidFill>
+                  <a:srgbClr val="075985"/>
+                </a:solidFill>
+                <a:latin typeface="Calibri" pitchFamily="34" charset="0"/>
+                <a:ea typeface="Calibri" pitchFamily="34" charset="-122"/>
+                <a:cs typeface="Calibri" pitchFamily="34" charset="-120"/>
+              </a:rPr>
+              <a:t> · superscalar processors</a:t>
+            </a:r>
+            <a:endParaRPr lang="en-US" sz="1100" dirty="0"/>
           </a:p>
         </p:txBody>
       </p:sp>

--- a/en/slides/24-Computer_Architecture-Superscalar_HPC_GPU_FPGA.pptx
+++ b/en/slides/24-Computer_Architecture-Superscalar_HPC_GPU_FPGA.pptx
@@ -126,19 +126,19 @@
   <p:extLst>
     <p:ext uri="{521415D9-36F7-43E2-AB2F-B90AF26B5E84}">
       <p14:sectionLst xmlns:p14="http://schemas.microsoft.com/office/powerpoint/2010/main">
-        <p14:section name="Opening" id="{009d5754-939c-c868-4332-ce7d9e656d99}">
+        <p14:section name="Opening" id="{ea42593b-8adc-7b0f-a84e-0dd754f8c687}">
           <p14:sldIdLst>
             <p14:sldId id="256"/>
             <p14:sldId id="257"/>
           </p14:sldIdLst>
         </p14:section>
-        <p14:section name="Warm-up on the machine" id="{5f13c3f1-536a-5f9d-3675-237b922ff9b9}">
+        <p14:section name="Warm-up on the machine" id="{d24b2a55-55a1-c24e-a10f-9371651b1e6a}">
           <p14:sldIdLst>
             <p14:sldId id="258"/>
             <p14:sldId id="259"/>
           </p14:sldIdLst>
         </p14:section>
-        <p14:section name="Superscalar processors" id="{404f55f2-0554-6859-e6e0-6d19a81138d9}">
+        <p14:section name="Superscalar processors" id="{127869e6-338a-0913-9cb0-1fe3e902e3cb}">
           <p14:sldIdLst>
             <p14:sldId id="260"/>
             <p14:sldId id="261"/>
@@ -147,7 +147,7 @@
             <p14:sldId id="264"/>
           </p14:sldIdLst>
         </p14:section>
-        <p14:section name="High-performance computing" id="{1313a267-cbee-7b02-f7ae-9c367d821d65}">
+        <p14:section name="High-performance computing" id="{4cc92534-4bbc-713c-1245-780820cb0812}">
           <p14:sldIdLst>
             <p14:sldId id="265"/>
             <p14:sldId id="266"/>
@@ -155,18 +155,18 @@
             <p14:sldId id="268"/>
           </p14:sldIdLst>
         </p14:section>
-        <p14:section name="GPU accelerators" id="{75042a6a-a8ac-6021-fa33-6337705ad5ac}">
+        <p14:section name="GPU accelerators" id="{5753ed7a-b02a-eae8-4e22-d04d0e53caf3}">
           <p14:sldIdLst>
             <p14:sldId id="269"/>
           </p14:sldIdLst>
         </p14:section>
-        <p14:section name="FPGA accelerators" id="{cc5f9a91-668f-4928-a8fb-a2a871a13f1a}">
+        <p14:section name="FPGA accelerators" id="{4bd416ab-e8a7-7d15-1725-bd331e3d47f9}">
           <p14:sldIdLst>
             <p14:sldId id="270"/>
             <p14:sldId id="271"/>
           </p14:sldIdLst>
         </p14:section>
-        <p14:section name="Back to the machine" id="{1d50a378-3560-e5ba-ee89-81f74fec7ba6}">
+        <p14:section name="Back to the machine" id="{586fc684-35a9-1a86-9d61-8421cfac537a}">
           <p14:sldIdLst>
             <p14:sldId id="272"/>
             <p14:sldId id="273"/>

--- a/en/slides/24-Computer_Architecture-Superscalar_HPC_GPU_FPGA.pptx
+++ b/en/slides/24-Computer_Architecture-Superscalar_HPC_GPU_FPGA.pptx
@@ -126,19 +126,19 @@
   <p:extLst>
     <p:ext uri="{521415D9-36F7-43E2-AB2F-B90AF26B5E84}">
       <p14:sectionLst xmlns:p14="http://schemas.microsoft.com/office/powerpoint/2010/main">
-        <p14:section name="Opening" id="{ea42593b-8adc-7b0f-a84e-0dd754f8c687}">
+        <p14:section name="Opening" id="{22d8ca24-2930-1937-5835-d4afa3e86e9f}">
           <p14:sldIdLst>
             <p14:sldId id="256"/>
             <p14:sldId id="257"/>
           </p14:sldIdLst>
         </p14:section>
-        <p14:section name="Warm-up on the machine" id="{d24b2a55-55a1-c24e-a10f-9371651b1e6a}">
+        <p14:section name="Warm-up on the machine" id="{09c2e155-6349-6596-367f-12987ed1d99f}">
           <p14:sldIdLst>
             <p14:sldId id="258"/>
             <p14:sldId id="259"/>
           </p14:sldIdLst>
         </p14:section>
-        <p14:section name="Superscalar processors" id="{127869e6-338a-0913-9cb0-1fe3e902e3cb}">
+        <p14:section name="Superscalar processors" id="{7c5847db-abcc-ed38-8817-c199268519be}">
           <p14:sldIdLst>
             <p14:sldId id="260"/>
             <p14:sldId id="261"/>
@@ -147,7 +147,7 @@
             <p14:sldId id="264"/>
           </p14:sldIdLst>
         </p14:section>
-        <p14:section name="High-performance computing" id="{4cc92534-4bbc-713c-1245-780820cb0812}">
+        <p14:section name="High-performance computing" id="{04b89d49-e670-4cd9-9ed8-f86fa9eb9d36}">
           <p14:sldIdLst>
             <p14:sldId id="265"/>
             <p14:sldId id="266"/>
@@ -155,18 +155,18 @@
             <p14:sldId id="268"/>
           </p14:sldIdLst>
         </p14:section>
-        <p14:section name="GPU accelerators" id="{5753ed7a-b02a-eae8-4e22-d04d0e53caf3}">
+        <p14:section name="GPU accelerators" id="{e048133d-256e-0382-bcab-8a5a32e251ab}">
           <p14:sldIdLst>
             <p14:sldId id="269"/>
           </p14:sldIdLst>
         </p14:section>
-        <p14:section name="FPGA accelerators" id="{4bd416ab-e8a7-7d15-1725-bd331e3d47f9}">
+        <p14:section name="FPGA accelerators" id="{ac3994f5-b21f-2163-ab10-9adf98b7bf4e}">
           <p14:sldIdLst>
             <p14:sldId id="270"/>
             <p14:sldId id="271"/>
           </p14:sldIdLst>
         </p14:section>
-        <p14:section name="Back to the machine" id="{586fc684-35a9-1a86-9d61-8421cfac537a}">
+        <p14:section name="Back to the machine" id="{fb05ca97-f86f-0127-32cf-ca59e332e450}">
           <p14:sldIdLst>
             <p14:sldId id="272"/>
             <p14:sldId id="273"/>
@@ -578,7 +578,7 @@
           <a:p>
             <a:r>
               <a:rPr lang="en-US" dirty="0"/>
-              <a:t>The last lecture looks beyond the kit. Everything you have learned was learned on a small processor that executes one instruction at a time. The machines that forecast the weather or train a neural network execute the same kind of instructions, in very large numbers at once. The lecture takes one small loop of Verm1 and follows it onto four kinds of machine. Cray's question about oxen and chickens will come back: it has no single answer. This lecture is an outlook, and is not part of the midterm test.
+              <a:t>The final lecture looks beyond the kit. Everything learned so far was learned on a small processor that executes one instruction at a time. The machines that forecast the weather or train a neural network execute instructions of the same kind, in vast numbers at once. The lecture takes one small loop of Verm1 and follows it onto four classes of machine, so that the whole landscape of high-performance computing is seen through a single, familiar example. Seymour Cray's question about oxen and chickens will recur, and it has no single answer. This lecture is an outlook and is not part of the midterm test.
 Learning status: UNDERSTAND NOW, by the end of this lecture you explain it, trace it and apply it on your own; USE NOW, you follow and use the recipe today; how it works inside is explained later, or is not part of the course; UNDERSTAND LATER, recognise the name and what it is for; a later lecture explains it. A slide without a badge is context: a story, an example, a question, an exercise.
 Learning status of this lecture. UNDERSTAND NOW: the performance equation; superscalar processors; vector instructions; HPC and Amdahl's law; GPU and FPGA accelerators. USE NOW: the complete program, the PRG32 tools (used, not studied, in this course). UNDERSTAND LATER: nothing. A slide without a badge is context: a story, an example, a question, an exercise.
 For the lecturer: Closing lecture and outlook, new in 2026/27: it has no Italian source. It starts from one loop of Verm1 and follows it onto four kinds of machine. It prepares the visit to the supercomputing systems of the Department. Not part of the midterm test. The RISC-V vector listings are tested on QEMU (tools/tests/vector_qemu.S); the CUDA and Verilog fragments are standard textbook forms that were not compiled for these slides. Figures for supercomputers are rounded and date from the TOP500 lists of 2022 to 2025: check the current list before class.</a:t>
@@ -669,7 +669,7 @@
           <a:p>
             <a:r>
               <a:rPr lang="en-US" dirty="0"/>
-              <a:t>A supercomputer is not one enormous processor: it is thousands of ordinary computers, the nodes, working on the same problem. Each node has one or two processors with tens of cores, often several GPUs, and much memory. A very fast network joins the nodes, and a parallel file system serves them all. Speed is measured in floating-point operations per second on a standard problem, and the TOP500 list has ranked the fastest machines since 1993. The picture shows racks of nodes of the Research Computing Facilities of the University.
+              <a:t>A supercomputer is not one enormous processor but thousands of ordinary computers, the nodes, working on the same problem. Each node has one or two processors with tens of cores, often several GPUs, and abundant memory. A very fast network connects the nodes, and a parallel file system serves them all. Performance is measured in floating-point operations per second on a standard benchmark, and the TOP500 list has ranked the fastest machines since 1993. The picture shows racks of nodes of the University's Research Computing Facilities, met in Lecture 03.
 UNDERSTAND NOW: HPC and Amdahl's law.
 For the lecturer: The benchmark is HPL, High-Performance Linpack.</a:t>
             </a:r>
@@ -759,7 +759,7 @@
           <a:p>
             <a:r>
               <a:rPr lang="en-US" dirty="0"/>
-              <a:t>Amdahl's law says how much parallelism can give. If a fraction p of the work can be done in parallel and the rest cannot, with n processors the speed-up is 1 divided by the serial part plus the parallel part divided by n. The serial part does not shrink however many processors are added. With p equal to 0.9 the speed-up can never exceed 10. The practical lesson: before buying processors, measure p.
+              <a:t>Amdahl's law states how much parallelism can deliver. If a fraction p of the work can be parallelised and the remainder cannot, the speed-up with n processors is 1 / ((1 - p) + p / n). The serial part does not shrink however many processors are added, so the speed-up is bounded by 1 / (1 - p): with p = 0.9 it can never exceed 10. The practical lesson is to measure p before acquiring processors, and to recognise that reducing the serial fraction is often worth more than adding hardware.
 UNDERSTAND NOW: HPC and Amdahl's law.
 For the lecturer: Gene Amdahl, 1967. The same law holds for any improvement that applies to only a part of the work: a faster GPU does not help the part that runs on the CPU.</a:t>
             </a:r>
@@ -849,7 +849,7 @@
           <a:p>
             <a:r>
               <a:rPr lang="en-US" dirty="0"/>
-              <a:t>Two ways to share the work. With shared memory, several cores of the same node see the same memory, and the program runs as threads that read and write the same variables; it is easy to start, and the danger is two threads writing the same variable. With distributed memory each node has its own memory, and the program runs as processes that exchange messages, with the MPI standard; it scales to a million cores, at the programmer's expense. Real applications use both.
+              <a:t>Two models for sharing work. With shared memory, several cores of the same node see the same memory, and the program runs as threads that read and write common variables; it is easy to begin with, and its characteristic hazard is two threads writing the same variable. With distributed memory each node has its own memory, and the program runs as processes that exchange messages, under the MPI standard; it scales to a million cores, at the cost of greater effort from the programmer. Real applications combine both.
 UNDERSTAND NOW: HPC and Amdahl's law.
 For the lecturer: Real applications use both: MPI between the nodes, threads and GPUs inside each node. The weather and marine models of the Department work this way.</a:t>
             </a:r>
@@ -939,7 +939,7 @@
           <a:p>
             <a:r>
               <a:rPr lang="en-US" dirty="0"/>
-              <a:t>The limit is energy. An exascale machine draws about twenty megawatts, the consumption of a small town, and the electricity of its lifetime costs as much as the machine. So the figure that matters is operations per watt, which has its own ranking, the Green500. Specialised hardware leads it, because it does more with each joule. The same reason, at the other end of the scale, puts a small RISC-V core in your kit.
+              <a:t>The binding constraint is energy. An exascale machine draws about twenty megawatts, the consumption of a small town, and the electricity used over its lifetime costs as much as the machine itself. The figure that matters is therefore operations per watt, which has its own ranking, the Green500. Specialised hardware leads it, because it accomplishes more with each joule. The same reasoning, at the opposite end of the scale, places a small RISC-V core in the kit.
 UNDERSTAND NOW: HPC and Amdahl's law.
 For the lecturer: Frontier reached its exaflop at about 21 megawatts. Energy efficiency is the thread that ties a microcontroller to a supercomputer.</a:t>
             </a:r>
@@ -1029,7 +1029,7 @@
           <a:p>
             <a:r>
               <a:rPr lang="en-US" dirty="0"/>
-              <a:t>Two ways of spending the same transistors. A CPU has a few large cores, each out of order, with predictors and big caches: it is built to finish one task as soon as possible, and is at ease with branches and irregular data. A GPU has thousands of small simple cores that execute the same code on different data: it is built to finish a great many tasks per second, and is at ease with regular arrays. Oxen and chickens: the answer depends on the field.
+              <a:t>Two ways of spending the same transistors. A CPU has a few large cores, each out of order, with predictors and large caches; it is designed to complete a single task as quickly as possible, and handles branches and irregular data well. A GPU has thousands of small, simple cores executing the same code on different data; it is designed to complete a very large number of tasks per second, and excels on regular arrays. Oxen and chickens: which is preferable depends on the field to be ploughed.
 UNDERSTAND NOW: GPU and FPGA accelerators.
 For the lecturer: Lecture 20 told the story from the video card to GPGPU. Cray's oxen and chickens: the answer depends on the field. The GPU is not faster at any single thing; it does more things at once.</a:t>
             </a:r>
@@ -1119,7 +1119,7 @@
           <a:p>
             <a:r>
               <a:rPr lang="en-US" dirty="0"/>
-              <a:t>An FPGA, field-programmable gate array, is a chip that becomes the circuit you describe. Inside there is a sea of small blocks: look-up tables, each able to be any function of a few inputs; a flip-flop beside each table; and wires with switches that can connect any block to any other. A configuration file, the bitstream, sets every table and every switch. Load another bitstream and the same chip is a different circuit. It does not execute a program: it is a circuit.
+              <a:t>An FPGA, a field-programmable gate array, is a chip that becomes the circuit one describes. Internally it is a sea of small blocks: look-up tables, each able to implement any function of a few inputs, which is to say a truth table held in memory; a flip-flop beside each table; and wires with switches able to connect any block to any other. A configuration file, the bitstream, sets every table and switch. Loading another bitstream turns the same chip into a different circuit. It does not execute a program: it is a circuit, which unites the combinational and sequential machines of the course in one reconfigurable device.
 UNDERSTAND NOW: GPU and FPGA accelerators.
 For the lecturer: The Xilinx XC2064, 1985. An FPGA does not execute a program: it becomes a circuit. Nothing is fetched or decoded; all the gates work at the same time.
 Pictures: Mojo v3 FPGA Development Board (9303578174).jpg, SparkFun Electronics, CC BY 2.0, Wikimedia Commons.</a:t>
@@ -1210,7 +1210,7 @@
           <a:p>
             <a:r>
               <a:rPr lang="en-US" dirty="0"/>
-              <a:t>Four ways to compute, compared. Read the table by rows. A CPU is a few complex cores, programmed in any language, good at everything in moderation. A GPU is thousands of simple cores for regular data in bulk. An FPGA is a circuit you configure, for streams and low latency. An ASIC is a circuit made for one job. From left to right the work done per joule grows, and so does the effort required. Generality is paid in energy, efficiency in effort.
+              <a:t>Four ways to compute, compared row by row. A CPU consists of a few complex cores, programmable in any language, competent at everything in moderation. A GPU consists of thousands of simple cores for regular data in bulk. An FPGA is a configurable circuit, suited to data streams and low latency. An ASIC is a circuit made for a single task. From left to right the work done per joule increases, and so does the design effort required. Generality is paid for in energy, efficiency in effort; this is the central trade-off of contemporary computer architecture.
 UNDERSTAND NOW: GPU and FPGA accelerators.
 For the lecturer: Generality is paid in energy; efficiency is paid in effort. A modern system on a chip has all four: your phone holds CPU cores, a GPU, and fixed circuits for video and radio.</a:t>
             </a:r>
@@ -1300,8 +1300,8 @@
           <a:p>
             <a:r>
               <a:rPr lang="en-US" dirty="0"/>
-              <a:t>Use the last column of the table of Amdahl's law: with unlimited processors only the serial part remains.
-Think of the example with the two halves that both used t0: what prevented them from running together, and what did renaming change?
+              <a:t>For the first question the last column of the table of Amdahl's law applies: with unlimited processors only the serial fraction remains.
+For the second, one recalls the example with two halves that both used t0: what prevented them from executing together, and what renaming changed.
 For the lecturer: 1. Answer: B. With n unlimited, S = 1 / (1 - p) = 1 / 0.2 = 5.
 2. Answer: C. Two unrelated values that share a name get different physical registers and can be computed at the same time.</a:t>
             </a:r>
@@ -1391,8 +1391,8 @@
           <a:p>
             <a:r>
               <a:rPr lang="en-US" dirty="0"/>
-              <a:t>How many bytes are 256 bits? Divide the 960 bytes by that number.
-Write the four stored bits as a truth table with inputs a and b, and recognise the function.
+              <a:t>For the first question: 256 bits are 32 bytes, and the 960 bytes are divided by that number.
+For the second, the four stored bits are written as a truth table with inputs a and b, and the function recognised.
 For the lecturer: 1. Answer: B. 256 bits are 32 bytes per turn: 960 / 32 = 30. The code does not change.
 2. Answer: B. The output is 1 whenever at least one input is 1: OR.</a:t>
             </a:r>
@@ -1482,7 +1482,7 @@
           <a:p>
             <a:r>
               <a:rPr lang="en-US" dirty="0"/>
-              <a:t>Fourteen terms of this lecture. Out-of-order execution is esecuzione fuori ordine; register renaming is ridenominazione dei registri; branch prediction is predizione dei salti. Shared memory and message passing are the two models of parallel programming. Several words, kernel, bitstream, soft core, are used in Italian as they are.</a:t>
+              <a:t>Fourteen terms of this lecture. Out-of-order execution is esecuzione fuori ordine; register renaming is ridenominazione dei registri; branch prediction is predizione dei salti. Shared memory and message passing are the two models of parallel programming. Several terms, kernel, bitstream, soft core, are used in Italian unchanged.</a:t>
             </a:r>
             <a:endParaRPr lang="en-US" dirty="0"/>
           </a:p>
@@ -1570,7 +1570,7 @@
           <a:p>
             <a:r>
               <a:rPr lang="en-US" dirty="0"/>
-              <a:t>Five objectives. Write the performance equation and say which of its factors each technique attacks. Explain how a superscalar, out-of-order processor executes several instructions per cycle. Read a loop written with the RISC-V vector extension. Describe a supercomputer, compute a speed-up with Amdahl's law and say why energy is the limit. And say what a GPU and an FPGA are good at, and what each costs the programmer.</a:t>
+              <a:t>Five learning outcomes. Stating the performance equation and identifying which of its factors each technique addresses. Explaining how a superscalar, out-of-order processor executes several instructions per cycle. Reading a loop written with the RISC-V vector extension. Describing a supercomputer, computing a speed-up with Amdahl's law, and explaining why energy is the binding constraint. And stating what a GPU and an FPGA are suited for, and what each demands of the programmer.</a:t>
             </a:r>
             <a:endParaRPr lang="en-US" dirty="0"/>
           </a:p>
@@ -1658,7 +1658,7 @@
           <a:p>
             <a:r>
               <a:rPr lang="en-US" dirty="0"/>
-              <a:t>Four conclusions. One equation with three factors: every fast machine attacks one of them, or multiplies the processors. Superscalar out-of-order cores respect the contract of the instruction set and execute many instructions at once. Vectors, GPUs and clusters exploit data that can be processed independently, and Amdahl's law says how far that goes. FPGAs turn a description into a circuit. The course ends here: from a bit to a supercomputer, with a single instruction set.
+              <a:t>Four conclusions. A single equation with three factors: every fast machine reduces one of them, or multiplies the processors. Out-of-order superscalar cores honour the contract of the instruction set while executing many instructions at once. Vectors, GPUs and clusters exploit data that can be processed independently, and Amdahl's law bounds how far that goes. FPGAs turn a description into a circuit. The course ends here: from a single bit to a supercomputer, with one instruction set throughout.
 Learning status, recap. UNDERSTAND NOW: the performance equation; superscalar processors; vector instructions; HPC and Amdahl's law; GPU and FPGA accelerators. USE NOW: the complete program, the PRG32 tools (used, not studied, in this course). UNDERSTAND LATER: nothing. A slide without a badge is context: a story, an example, a question, an exercise.
 For the lecturer: The course ends here: from a bit to a supercomputer, with one instruction set. Next: the visit to the Department's computing systems, and the presentation of the students' games.</a:t>
             </a:r>
@@ -1748,7 +1748,7 @@
           <a:p>
             <a:r>
               <a:rPr lang="en-US" dirty="0"/>
-              <a:t>The time a program takes is the product of three numbers: the instructions executed, the clock cycles each needs on average, and the duration of a cycle. Each factor can be attacked. Fewer instructions: better algorithms, richer instructions, vectors. Fewer cycles per instruction: pipelines and superscalar execution. A shorter cycle: faster transistors. And when one processor is not enough, more processors. Keep this equation in view: every machine of the lecture is a different answer to it.
+              <a:t>The execution time of a program is the product of three quantities: the number of instructions executed, the average number of clock cycles each requires, and the duration of a cycle. Each factor can be reduced. Fewer instructions: better algorithms, richer instructions, vectors. Fewer cycles per instruction: pipelining and superscalar execution. A shorter cycle: faster transistors. And when one processor no longer suffices, more processors. This equation organises the lecture: every machine presented is a different answer to it.
 UNDERSTAND NOW: the performance equation.
 For the lecturer: The performance equation of Patterson and Hennessy. For the loop of the warm-up (code deck) on the kit: 3 840 instructions, about 1 cycle each, 6.25 nanoseconds per cycle.</a:t>
             </a:r>
@@ -1838,7 +1838,7 @@
           <a:p>
             <a:r>
               <a:rPr lang="en-US" dirty="0"/>
-              <a:t>Why not simply raise the clock frequency? For thirty years each generation of transistors was smaller and faster without being hotter per unit of area. Around 2005 this stopped: a faster clock now means more heat than a chip can shed. Frequencies have stayed at a few gigahertz, and the additional transistors have been spent otherwise: wider processors, more cores, vector units, accelerators. Performance now comes from parallelism, from doing many things at once.
+              <a:t>Why not simply raise the clock frequency? For three decades each generation of transistors was smaller and faster without dissipating more heat per unit area. Around 2005 this scaling ended: a faster clock now produces more heat than a chip can shed. Frequencies have remained at a few gigahertz, and the additional transistors have been spent differently: wider processors, more cores, vector units and accelerators. Performance now comes from parallelism, from doing many things at once, which is why the remainder of the lecture is about parallel machines.
 UNDERSTAND NOW: the performance equation.
 For the lecturer: Moore's law (more transistors) went on; Dennard scaling (constant power density) ended. The 160 MHz of the kit is slow by choice: it costs milliwatts.</a:t>
             </a:r>
@@ -1928,7 +1928,7 @@
           <a:p>
             <a:r>
               <a:rPr lang="en-US" dirty="0"/>
-              <a:t>Four kinds of processor, in order of ambition. The multi-cycle processor completes one instruction before starting the next. The pipelined one has several instructions in flight, each in a different stage, and completes at most one per cycle: this is your kit. The superscalar in-order processor has two or more pipelines side by side. The superscalar out-of-order processor starts each instruction as soon as its operands are ready, and reaches four, six, eight instructions per cycle: it is in your laptop and in your phone.
+              <a:t>Four kinds of processor, in order of ambition. The multi-cycle processor completes one instruction before starting the next. The pipelined processor has several instructions in flight, each in a different stage, and completes at most one per cycle; this is the kit. The in-order superscalar processor has two or more pipelines side by side. The out-of-order superscalar processor starts each instruction as soon as its operands are ready and sustains four, six or eight instructions per cycle; it is the processor of laptops and phones.
 UNDERSTAND NOW: superscalar processors.
 For the lecturer: Lecture 19 introduced the pipeline and named superscalar processors in one line: this section opens that line. Width is the number of instructions the processor can start in one cycle.</a:t>
             </a:r>
@@ -2018,7 +2018,7 @@
           <a:p>
             <a:r>
               <a:rPr lang="en-US" dirty="0"/>
-              <a:t>Out-of-order execution, in four stages. Instructions are fetched and decoded in order, several per cycle, into a window of tens or hundreds. Each result is given a fresh physical register: renaming. Each instruction executes as soon as its operands exist, wherever it is in the program. Finally the results are committed in program order, so that, seen from outside, nothing ever overtook. The model you learned, one instruction after another, is preserved exactly: only the timing changes.
+              <a:t>Out-of-order execution in four stages. Instructions are fetched and decoded in program order, several per cycle, into a window of tens or hundreds. Each result is assigned a fresh physical register: renaming, which removes false dependences between unrelated uses of the same register name. Each instruction executes as soon as its operands are available, wherever it lies in the program. Finally results are committed in program order, so that from outside nothing appears to have overtaken anything. The sequential model of execution learned in the course is preserved exactly; only the timing differs.
 UNDERSTAND NOW: superscalar processors.
 For the lecturer: The algorithm is Tomasulo's, designed for the floating-point unit of the IBM System/360 Model 91 in 1967; the reorder buffer that commits in order came in the 1980s. The programmer's model, the one you learned, is preserved exactly: this is the contract of the instruction set.</a:t>
             </a:r>
@@ -2108,7 +2108,7 @@
           <a:p>
             <a:r>
               <a:rPr lang="en-US" dirty="0"/>
-              <a:t>A wide processor meets a branch every few instructions and cannot wait to know its outcome. So it predicts: it guesses the direction from the history of that branch and continues along the guess. If the guess was right, nothing is lost; if it was wrong, the speculative work is thrown away. The loop of the warm-up jumps back 959 times and falls through once: a predictor learns it at once. Modern predictors are right far more than nine times out of ten.
+              <a:t>A wide processor encounters a branch every few instructions and cannot wait to learn its outcome. It therefore predicts: it infers the likely direction from the history of that branch and continues speculatively along the prediction. If the prediction was correct nothing is lost; if not, the speculative work is discarded. The loop of the warm-up jumps backwards 959 times and falls through once, a pattern any predictor learns immediately. Modern predictors are correct far more than nine times in ten, and their accuracy is a principal determinant of performance.
 UNDERSTAND NOW: superscalar processors.
 For the lecturer: Speculative execution has a dark side: in 2018 the Spectre and Meltdown attacks showed that work thrown away can still leave traces in the cache that reveal secrets. Performance tricks are also security questions.</a:t>
             </a:r>
@@ -2198,7 +2198,7 @@
           <a:p>
             <a:r>
               <a:rPr lang="en-US" dirty="0"/>
-              <a:t>RISC-V processors of this kind exist. The first row is the core of your kit: in order, one instruction per cycle. The others are out-of-order cores: BOOM from Berkeley and XiangShan from the Chinese Academy of Sciences, both open source; the C910, the P550, Veyron, from companies. Because the instruction set is open, anyone may build such a core, and some are published as source code that you could read.
+              <a:t>RISC-V processors of this class exist. The first row is the core of the kit: in order, one instruction per cycle. The others are out-of-order cores: BOOM from Berkeley and XiangShan from the Chinese Academy of Sciences, both open source; and the C910, the P550 and Veyron, from industry. Because the instruction set is open, anyone may build such a core, and some are published as source code that a student could read.
 UNDERSTAND NOW: superscalar processors.
 For the lecturer: BOOM is the Berkeley Out-of-Order Machine. Because the instruction set is open, anyone may build such a core, and several are published as source code that a student can read: this has no precedent among commercial architectures. The list ages quickly: update it.</a:t>
             </a:r>
@@ -2288,7 +2288,7 @@
           <a:p>
             <a:r>
               <a:rPr lang="en-US" dirty="0"/>
-              <a:t>A distinction that organises the whole course. The architecture is the contract: the instructions, the registers, what each instruction does. The microarchitecture is one way of honouring the contract: stages, width, predictors, caches. The add you wrote for a microcontroller is the same add on a server core. Verm1 would run unchanged on any core of the previous slide. This is why an instruction set, once learned, is knowledge that lasts.
+              <a:t>A distinction that organises the whole course. The architecture is the contract: the instructions, the registers, and the effect of each instruction. The microarchitecture is one particular way of honouring that contract: pipeline stages, width, predictors, caches. The add written for a microcontroller is the same add on a server core, and Verm1 would run unchanged on any core of the previous slide. This separation is why an instruction set, once learned, is durable knowledge, and why the course could teach architecture on a small machine without loss of generality.
 UNDERSTAND NOW: superscalar processors.
 For the lecturer: The distinction that organises the whole course: Lectures 02 to 22 taught the architecture; the kit is one small microarchitecture.</a:t>
             </a:r>
@@ -3368,7 +3368,7 @@
                 <a:ea typeface="Calibri" pitchFamily="34" charset="-122"/>
                 <a:cs typeface="Calibri" pitchFamily="34" charset="-120"/>
               </a:rPr>
-              <a:t>24-Computer_Architecture-Superscalar_HPC_GPU_FPGA-Code.pptx</a:t>
+              <a:t>24-Computer_Architecture-Superscalar_HPC_GPU_FPGA-Lab.pptx</a:t>
             </a:r>
             <a:endParaRPr lang="en-US" sz="1300" dirty="0"/>
           </a:p>

--- a/en/slides/24-Computer_Architecture-Superscalar_HPC_GPU_FPGA.pptx
+++ b/en/slides/24-Computer_Architecture-Superscalar_HPC_GPU_FPGA.pptx
@@ -126,19 +126,19 @@
   <p:extLst>
     <p:ext uri="{521415D9-36F7-43E2-AB2F-B90AF26B5E84}">
       <p14:sectionLst xmlns:p14="http://schemas.microsoft.com/office/powerpoint/2010/main">
-        <p14:section name="Opening" id="{22d8ca24-2930-1937-5835-d4afa3e86e9f}">
+        <p14:section name="Opening" id="{1b6ec841-e832-1114-16d9-35cfa0950643}">
           <p14:sldIdLst>
             <p14:sldId id="256"/>
             <p14:sldId id="257"/>
           </p14:sldIdLst>
         </p14:section>
-        <p14:section name="Warm-up on the machine" id="{09c2e155-6349-6596-367f-12987ed1d99f}">
+        <p14:section name="Warm-up on the machine" id="{1eaaec84-0557-0334-1654-f79aa877b73e}">
           <p14:sldIdLst>
             <p14:sldId id="258"/>
             <p14:sldId id="259"/>
           </p14:sldIdLst>
         </p14:section>
-        <p14:section name="Superscalar processors" id="{7c5847db-abcc-ed38-8817-c199268519be}">
+        <p14:section name="Superscalar processors" id="{0087bbdc-6dd0-302d-419b-7eda4bd7eed2}">
           <p14:sldIdLst>
             <p14:sldId id="260"/>
             <p14:sldId id="261"/>
@@ -147,7 +147,7 @@
             <p14:sldId id="264"/>
           </p14:sldIdLst>
         </p14:section>
-        <p14:section name="High-performance computing" id="{04b89d49-e670-4cd9-9ed8-f86fa9eb9d36}">
+        <p14:section name="High-performance computing" id="{ac5ab923-8c1b-58c5-19ce-45d5c686db19}">
           <p14:sldIdLst>
             <p14:sldId id="265"/>
             <p14:sldId id="266"/>
@@ -155,18 +155,18 @@
             <p14:sldId id="268"/>
           </p14:sldIdLst>
         </p14:section>
-        <p14:section name="GPU accelerators" id="{e048133d-256e-0382-bcab-8a5a32e251ab}">
+        <p14:section name="GPU accelerators" id="{a0a5d0eb-70ca-9525-ab27-5a724151c7ec}">
           <p14:sldIdLst>
             <p14:sldId id="269"/>
           </p14:sldIdLst>
         </p14:section>
-        <p14:section name="FPGA accelerators" id="{ac3994f5-b21f-2163-ab10-9adf98b7bf4e}">
+        <p14:section name="FPGA accelerators" id="{d43e9461-aff1-ddf1-ae63-d37d724b344b}">
           <p14:sldIdLst>
             <p14:sldId id="270"/>
             <p14:sldId id="271"/>
           </p14:sldIdLst>
         </p14:section>
-        <p14:section name="Back to the machine" id="{fb05ca97-f86f-0127-32cf-ca59e332e450}">
+        <p14:section name="Back to the machine" id="{6ac30f82-7d85-eb8b-0594-1786fd2cdff1}">
           <p14:sldIdLst>
             <p14:sldId id="272"/>
             <p14:sldId id="273"/>

--- a/en/slides/24-Computer_Architecture-Superscalar_HPC_GPU_FPGA.pptx
+++ b/en/slides/24-Computer_Architecture-Superscalar_HPC_GPU_FPGA.pptx
@@ -126,19 +126,19 @@
   <p:extLst>
     <p:ext uri="{521415D9-36F7-43E2-AB2F-B90AF26B5E84}">
       <p14:sectionLst xmlns:p14="http://schemas.microsoft.com/office/powerpoint/2010/main">
-        <p14:section name="Opening" id="{1b6ec841-e832-1114-16d9-35cfa0950643}">
+        <p14:section name="Opening" id="{2de00601-12c4-089f-91a1-63e12791a14d}">
           <p14:sldIdLst>
             <p14:sldId id="256"/>
             <p14:sldId id="257"/>
           </p14:sldIdLst>
         </p14:section>
-        <p14:section name="Warm-up on the machine" id="{1eaaec84-0557-0334-1654-f79aa877b73e}">
+        <p14:section name="Warm-up on the machine" id="{ac6b4e8f-27f8-c04f-3ee5-b1d911eca46d}">
           <p14:sldIdLst>
             <p14:sldId id="258"/>
             <p14:sldId id="259"/>
           </p14:sldIdLst>
         </p14:section>
-        <p14:section name="Superscalar processors" id="{0087bbdc-6dd0-302d-419b-7eda4bd7eed2}">
+        <p14:section name="Superscalar processors" id="{2cad46d3-36e5-91ef-bb2f-8e7f606ce234}">
           <p14:sldIdLst>
             <p14:sldId id="260"/>
             <p14:sldId id="261"/>
@@ -147,7 +147,7 @@
             <p14:sldId id="264"/>
           </p14:sldIdLst>
         </p14:section>
-        <p14:section name="High-performance computing" id="{ac5ab923-8c1b-58c5-19ce-45d5c686db19}">
+        <p14:section name="High-performance computing" id="{d2a25613-75ad-f6df-a98a-84480d134f54}">
           <p14:sldIdLst>
             <p14:sldId id="265"/>
             <p14:sldId id="266"/>
@@ -155,18 +155,18 @@
             <p14:sldId id="268"/>
           </p14:sldIdLst>
         </p14:section>
-        <p14:section name="GPU accelerators" id="{a0a5d0eb-70ca-9525-ab27-5a724151c7ec}">
+        <p14:section name="GPU accelerators" id="{2ec45db1-15d3-4efe-701f-77996b23811f}">
           <p14:sldIdLst>
             <p14:sldId id="269"/>
           </p14:sldIdLst>
         </p14:section>
-        <p14:section name="FPGA accelerators" id="{d43e9461-aff1-ddf1-ae63-d37d724b344b}">
+        <p14:section name="FPGA accelerators" id="{960049bc-7182-c8df-3352-1631f8691630}">
           <p14:sldIdLst>
             <p14:sldId id="270"/>
             <p14:sldId id="271"/>
           </p14:sldIdLst>
         </p14:section>
-        <p14:section name="Back to the machine" id="{6ac30f82-7d85-eb8b-0594-1786fd2cdff1}">
+        <p14:section name="Back to the machine" id="{a44d17b7-9369-93d8-8234-d859f727b417}">
           <p14:sldIdLst>
             <p14:sldId id="272"/>
             <p14:sldId id="273"/>
@@ -581,6 +581,7 @@
               <a:t>The final lecture looks beyond the kit. Everything learned so far was learned on a small processor that executes one instruction at a time. The machines that forecast the weather or train a neural network execute instructions of the same kind, in vast numbers at once. The lecture takes one small loop of Verm1 and follows it onto four classes of machine, so that the whole landscape of high-performance computing is seen through a single, familiar example. Seymour Cray's question about oxen and chickens will recur, and it has no single answer. This lecture is an outlook and is not part of the midterm test.
 Learning status: UNDERSTAND NOW, by the end of this lecture you explain it, trace it and apply it on your own; USE NOW, you follow and use the recipe today; how it works inside is explained later, or is not part of the course; UNDERSTAND LATER, recognise the name and what it is for; a later lecture explains it. A slide without a badge is context: a story, an example, a question, an exercise.
 Learning status of this lecture. UNDERSTAND NOW: the performance equation; superscalar processors; vector instructions; HPC and Amdahl's law; GPU and FPGA accelerators. USE NOW: the complete program, the PRG32 tools (used, not studied, in this course). UNDERSTAND LATER: nothing. A slide without a badge is context: a story, an example, a question, an exercise.
+Roadmap. Today's outcomes: (1) use the performance equation to say where time goes; (2) explain superscalar execution, vectors, GPUs and FPGAs as answers to it; (3) bound a parallel speed-up with Amdahl's law. Builds on: only what Lecture 01 set up. This is the last lecture of the course.
 For the lecturer: Closing lecture and outlook, new in 2026/27: it has no Italian source. It starts from one loop of Verm1 and follows it onto four kinds of machine. It prepares the visit to the supercomputing systems of the Department. Not part of the midterm test. The RISC-V vector listings are tested on QEMU (tools/tests/vector_qemu.S); the CUDA and Verilog fragments are standard textbook forms that were not compiled for these slides. Figures for supercomputers are rounded and date from the TOP500 lists of 2022 to 2025: check the current list before class.</a:t>
             </a:r>
             <a:endParaRPr lang="en-US" dirty="0"/>
@@ -1659,7 +1660,7 @@
             <a:r>
               <a:rPr lang="en-US" dirty="0"/>
               <a:t>Four conclusions. A single equation with three factors: every fast machine reduces one of them, or multiplies the processors. Out-of-order superscalar cores honour the contract of the instruction set while executing many instructions at once. Vectors, GPUs and clusters exploit data that can be processed independently, and Amdahl's law bounds how far that goes. FPGAs turn a description into a circuit. The course ends here: from a single bit to a supercomputer, with one instruction set throughout.
-Learning status, recap. UNDERSTAND NOW: the performance equation; superscalar processors; vector instructions; HPC and Amdahl's law; GPU and FPGA accelerators. USE NOW: the complete program, the PRG32 tools (used, not studied, in this course). UNDERSTAND LATER: nothing. A slide without a badge is context: a story, an example, a question, an exercise.
+Learning status, recap. UNDERSTAND NOW: the performance equation; superscalar processors; vector instructions; HPC and Amdahl's law; GPU and FPGA accelerators. USE NOW: the complete program, the PRG32 tools (used, not studied, in this course). UNDERSTAND LATER: nothing. A slide without a badge is context: a story, an example, a question, an exercise. Closing thread: The loop that empties Verm1's map can be made faster in five ways, and each is a machine of its own. The question an engineer asks is not which machine is fastest, but which is sufficient. Exit ticket (two to four minutes, alone, on paper): 1. The loop that empties Verm1's map executes 3,840 instructions at about one cycle each on a 160 MHz clock. How long does it take? Name one way to reduce each of the three factors. 2. A program is 80% parallel. With as many processors as you like, what is the largest speed-up, and why?
 For the lecturer: The course ends here: from a bit to a supercomputer, with one instruction set. Next: the visit to the Department's computing systems, and the presentation of the students' games.</a:t>
             </a:r>
             <a:endParaRPr lang="en-US" dirty="0"/>
